--- a/report_presentation.pptx
+++ b/report_presentation.pptx
@@ -142,7 +142,7 @@
           <p:cNvPr id="2" name="タイトル 1">
             <a:extLst>
               <a:ext uri="{FF2B5EF4-FFF2-40B4-BE49-F238E27FC236}">
-                <a16:creationId xmlns:a16="http://schemas.microsoft.com/office/drawing/2014/main" id="{85A4A825-5094-1CF7-B798-810A27D72E51}"/>
+                <a16:creationId xmlns:a16="http://schemas.microsoft.com/office/drawing/2014/main" id="{FF00BF9D-90CD-411F-662E-930E71C61BB8}"/>
               </a:ext>
             </a:extLst>
           </p:cNvPr>
@@ -179,7 +179,7 @@
           <p:cNvPr id="3" name="字幕 2">
             <a:extLst>
               <a:ext uri="{FF2B5EF4-FFF2-40B4-BE49-F238E27FC236}">
-                <a16:creationId xmlns:a16="http://schemas.microsoft.com/office/drawing/2014/main" id="{DE7D4109-B5B4-7B57-A339-5FE54CE3A067}"/>
+                <a16:creationId xmlns:a16="http://schemas.microsoft.com/office/drawing/2014/main" id="{3DD817FE-57FF-7686-161F-B4F55BD78029}"/>
               </a:ext>
             </a:extLst>
           </p:cNvPr>
@@ -249,7 +249,7 @@
           <p:cNvPr id="4" name="日付プレースホルダー 3">
             <a:extLst>
               <a:ext uri="{FF2B5EF4-FFF2-40B4-BE49-F238E27FC236}">
-                <a16:creationId xmlns:a16="http://schemas.microsoft.com/office/drawing/2014/main" id="{A21A1028-F428-6B82-E221-59F9F3180FA9}"/>
+                <a16:creationId xmlns:a16="http://schemas.microsoft.com/office/drawing/2014/main" id="{ECBEDB33-7A23-3938-1C7E-22B3479FA124}"/>
               </a:ext>
             </a:extLst>
           </p:cNvPr>
@@ -265,7 +265,7 @@
           <a:bodyPr/>
           <a:lstStyle/>
           <a:p>
-            <a:fld id="{F13A7070-1D1D-4E4F-B0B4-17F1831FFA8B}" type="datetimeFigureOut">
+            <a:fld id="{FA778BE5-25F8-4BBB-88C5-ADCEB715F80C}" type="datetimeFigureOut">
               <a:rPr kumimoji="1" lang="ja-JP" altLang="en-US" smtClean="0"/>
               <a:t>2026/10/21</a:t>
             </a:fld>
@@ -278,7 +278,7 @@
           <p:cNvPr id="5" name="フッター プレースホルダー 4">
             <a:extLst>
               <a:ext uri="{FF2B5EF4-FFF2-40B4-BE49-F238E27FC236}">
-                <a16:creationId xmlns:a16="http://schemas.microsoft.com/office/drawing/2014/main" id="{4B6FF549-AD9F-02F8-6DE1-74646C750BB2}"/>
+                <a16:creationId xmlns:a16="http://schemas.microsoft.com/office/drawing/2014/main" id="{A1503667-F153-4324-4526-30F710F47806}"/>
               </a:ext>
             </a:extLst>
           </p:cNvPr>
@@ -303,7 +303,7 @@
           <p:cNvPr id="6" name="スライド番号プレースホルダー 5">
             <a:extLst>
               <a:ext uri="{FF2B5EF4-FFF2-40B4-BE49-F238E27FC236}">
-                <a16:creationId xmlns:a16="http://schemas.microsoft.com/office/drawing/2014/main" id="{59FD419D-0065-BEFE-64FA-80B0F435498A}"/>
+                <a16:creationId xmlns:a16="http://schemas.microsoft.com/office/drawing/2014/main" id="{D1272DC1-0A72-D362-9D60-4418AE85D0B5}"/>
               </a:ext>
             </a:extLst>
           </p:cNvPr>
@@ -319,7 +319,7 @@
           <a:bodyPr/>
           <a:lstStyle/>
           <a:p>
-            <a:fld id="{B2DDDA0A-366C-41CC-8A8A-FF605DAC67A4}" type="slidenum">
+            <a:fld id="{694E7352-E469-4B35-A130-D1001D24845F}" type="slidenum">
               <a:rPr kumimoji="1" lang="ja-JP" altLang="en-US" smtClean="0"/>
               <a:t>‹#›</a:t>
             </a:fld>
@@ -330,7 +330,7 @@
     </p:spTree>
     <p:extLst>
       <p:ext uri="{BB962C8B-B14F-4D97-AF65-F5344CB8AC3E}">
-        <p14:creationId xmlns:p14="http://schemas.microsoft.com/office/powerpoint/2010/main" val="2170114353"/>
+        <p14:creationId xmlns:p14="http://schemas.microsoft.com/office/powerpoint/2010/main" val="2768895478"/>
       </p:ext>
     </p:extLst>
   </p:cSld>
@@ -362,7 +362,7 @@
           <p:cNvPr id="2" name="タイトル 1">
             <a:extLst>
               <a:ext uri="{FF2B5EF4-FFF2-40B4-BE49-F238E27FC236}">
-                <a16:creationId xmlns:a16="http://schemas.microsoft.com/office/drawing/2014/main" id="{5099FFA3-86F1-7204-82B2-3642E5DACDC7}"/>
+                <a16:creationId xmlns:a16="http://schemas.microsoft.com/office/drawing/2014/main" id="{45546EF2-E379-055C-2928-30240E06401E}"/>
               </a:ext>
             </a:extLst>
           </p:cNvPr>
@@ -390,7 +390,7 @@
           <p:cNvPr id="3" name="縦書きテキスト プレースホルダー 2">
             <a:extLst>
               <a:ext uri="{FF2B5EF4-FFF2-40B4-BE49-F238E27FC236}">
-                <a16:creationId xmlns:a16="http://schemas.microsoft.com/office/drawing/2014/main" id="{BD328EE5-CD66-A198-715C-A7CA8C24D98C}"/>
+                <a16:creationId xmlns:a16="http://schemas.microsoft.com/office/drawing/2014/main" id="{ECE294D1-8721-EDAA-464F-2059195E167A}"/>
               </a:ext>
             </a:extLst>
           </p:cNvPr>
@@ -479,7 +479,7 @@
           <p:cNvPr id="4" name="日付プレースホルダー 3">
             <a:extLst>
               <a:ext uri="{FF2B5EF4-FFF2-40B4-BE49-F238E27FC236}">
-                <a16:creationId xmlns:a16="http://schemas.microsoft.com/office/drawing/2014/main" id="{5116D272-9A4B-AB65-0CF5-6CE2C46786CE}"/>
+                <a16:creationId xmlns:a16="http://schemas.microsoft.com/office/drawing/2014/main" id="{EF0795F6-1DC0-566D-AB28-9FFA32AEF336}"/>
               </a:ext>
             </a:extLst>
           </p:cNvPr>
@@ -495,7 +495,7 @@
           <a:bodyPr/>
           <a:lstStyle/>
           <a:p>
-            <a:fld id="{F13A7070-1D1D-4E4F-B0B4-17F1831FFA8B}" type="datetimeFigureOut">
+            <a:fld id="{FA778BE5-25F8-4BBB-88C5-ADCEB715F80C}" type="datetimeFigureOut">
               <a:rPr kumimoji="1" lang="ja-JP" altLang="en-US" smtClean="0"/>
               <a:t>2026/10/21</a:t>
             </a:fld>
@@ -508,7 +508,7 @@
           <p:cNvPr id="5" name="フッター プレースホルダー 4">
             <a:extLst>
               <a:ext uri="{FF2B5EF4-FFF2-40B4-BE49-F238E27FC236}">
-                <a16:creationId xmlns:a16="http://schemas.microsoft.com/office/drawing/2014/main" id="{DE8CE465-804D-B9FE-293D-4CEAF0127D09}"/>
+                <a16:creationId xmlns:a16="http://schemas.microsoft.com/office/drawing/2014/main" id="{3C210BB4-48A8-601B-E2B8-EFA3E617E414}"/>
               </a:ext>
             </a:extLst>
           </p:cNvPr>
@@ -533,7 +533,7 @@
           <p:cNvPr id="6" name="スライド番号プレースホルダー 5">
             <a:extLst>
               <a:ext uri="{FF2B5EF4-FFF2-40B4-BE49-F238E27FC236}">
-                <a16:creationId xmlns:a16="http://schemas.microsoft.com/office/drawing/2014/main" id="{BF73C7FF-BC94-7F48-81C5-E403E963B409}"/>
+                <a16:creationId xmlns:a16="http://schemas.microsoft.com/office/drawing/2014/main" id="{5D2B2A09-E2B6-8B6A-FD12-ABABDC58E858}"/>
               </a:ext>
             </a:extLst>
           </p:cNvPr>
@@ -549,7 +549,7 @@
           <a:bodyPr/>
           <a:lstStyle/>
           <a:p>
-            <a:fld id="{B2DDDA0A-366C-41CC-8A8A-FF605DAC67A4}" type="slidenum">
+            <a:fld id="{694E7352-E469-4B35-A130-D1001D24845F}" type="slidenum">
               <a:rPr kumimoji="1" lang="ja-JP" altLang="en-US" smtClean="0"/>
               <a:t>‹#›</a:t>
             </a:fld>
@@ -560,7 +560,7 @@
     </p:spTree>
     <p:extLst>
       <p:ext uri="{BB962C8B-B14F-4D97-AF65-F5344CB8AC3E}">
-        <p14:creationId xmlns:p14="http://schemas.microsoft.com/office/powerpoint/2010/main" val="3084165084"/>
+        <p14:creationId xmlns:p14="http://schemas.microsoft.com/office/powerpoint/2010/main" val="1207147191"/>
       </p:ext>
     </p:extLst>
   </p:cSld>
@@ -592,7 +592,7 @@
           <p:cNvPr id="2" name="縦書きタイトル 1">
             <a:extLst>
               <a:ext uri="{FF2B5EF4-FFF2-40B4-BE49-F238E27FC236}">
-                <a16:creationId xmlns:a16="http://schemas.microsoft.com/office/drawing/2014/main" id="{31BBB20F-3367-0814-5196-E585027DBA3D}"/>
+                <a16:creationId xmlns:a16="http://schemas.microsoft.com/office/drawing/2014/main" id="{8A9B1588-9CA6-BFAD-34B9-49E8BE355E9D}"/>
               </a:ext>
             </a:extLst>
           </p:cNvPr>
@@ -625,7 +625,7 @@
           <p:cNvPr id="3" name="縦書きテキスト プレースホルダー 2">
             <a:extLst>
               <a:ext uri="{FF2B5EF4-FFF2-40B4-BE49-F238E27FC236}">
-                <a16:creationId xmlns:a16="http://schemas.microsoft.com/office/drawing/2014/main" id="{12A9013F-95AB-92D5-BF60-950C777B71D4}"/>
+                <a16:creationId xmlns:a16="http://schemas.microsoft.com/office/drawing/2014/main" id="{24523D9D-D2C3-25FB-3571-6B4DCEB208CA}"/>
               </a:ext>
             </a:extLst>
           </p:cNvPr>
@@ -719,7 +719,7 @@
           <p:cNvPr id="4" name="日付プレースホルダー 3">
             <a:extLst>
               <a:ext uri="{FF2B5EF4-FFF2-40B4-BE49-F238E27FC236}">
-                <a16:creationId xmlns:a16="http://schemas.microsoft.com/office/drawing/2014/main" id="{E0ED786A-2C0A-7FCD-18CA-0B981B473DC6}"/>
+                <a16:creationId xmlns:a16="http://schemas.microsoft.com/office/drawing/2014/main" id="{905731CF-39E9-64A1-91B3-90A8B0F2D0BF}"/>
               </a:ext>
             </a:extLst>
           </p:cNvPr>
@@ -735,7 +735,7 @@
           <a:bodyPr/>
           <a:lstStyle/>
           <a:p>
-            <a:fld id="{F13A7070-1D1D-4E4F-B0B4-17F1831FFA8B}" type="datetimeFigureOut">
+            <a:fld id="{FA778BE5-25F8-4BBB-88C5-ADCEB715F80C}" type="datetimeFigureOut">
               <a:rPr kumimoji="1" lang="ja-JP" altLang="en-US" smtClean="0"/>
               <a:t>2026/10/21</a:t>
             </a:fld>
@@ -748,7 +748,7 @@
           <p:cNvPr id="5" name="フッター プレースホルダー 4">
             <a:extLst>
               <a:ext uri="{FF2B5EF4-FFF2-40B4-BE49-F238E27FC236}">
-                <a16:creationId xmlns:a16="http://schemas.microsoft.com/office/drawing/2014/main" id="{2437017A-FF80-D643-7692-DE8445C4D2D7}"/>
+                <a16:creationId xmlns:a16="http://schemas.microsoft.com/office/drawing/2014/main" id="{28D5EDF8-F1A9-8DA0-86B4-1A2C2A47D637}"/>
               </a:ext>
             </a:extLst>
           </p:cNvPr>
@@ -773,7 +773,7 @@
           <p:cNvPr id="6" name="スライド番号プレースホルダー 5">
             <a:extLst>
               <a:ext uri="{FF2B5EF4-FFF2-40B4-BE49-F238E27FC236}">
-                <a16:creationId xmlns:a16="http://schemas.microsoft.com/office/drawing/2014/main" id="{945FC902-0EAF-4DD8-D7B1-012A73378D86}"/>
+                <a16:creationId xmlns:a16="http://schemas.microsoft.com/office/drawing/2014/main" id="{E8E1184C-754E-7492-A4B4-E1C274E17777}"/>
               </a:ext>
             </a:extLst>
           </p:cNvPr>
@@ -789,7 +789,7 @@
           <a:bodyPr/>
           <a:lstStyle/>
           <a:p>
-            <a:fld id="{B2DDDA0A-366C-41CC-8A8A-FF605DAC67A4}" type="slidenum">
+            <a:fld id="{694E7352-E469-4B35-A130-D1001D24845F}" type="slidenum">
               <a:rPr kumimoji="1" lang="ja-JP" altLang="en-US" smtClean="0"/>
               <a:t>‹#›</a:t>
             </a:fld>
@@ -800,7 +800,7 @@
     </p:spTree>
     <p:extLst>
       <p:ext uri="{BB962C8B-B14F-4D97-AF65-F5344CB8AC3E}">
-        <p14:creationId xmlns:p14="http://schemas.microsoft.com/office/powerpoint/2010/main" val="388178826"/>
+        <p14:creationId xmlns:p14="http://schemas.microsoft.com/office/powerpoint/2010/main" val="3066875643"/>
       </p:ext>
     </p:extLst>
   </p:cSld>
@@ -832,7 +832,7 @@
           <p:cNvPr id="2" name="タイトル 1">
             <a:extLst>
               <a:ext uri="{FF2B5EF4-FFF2-40B4-BE49-F238E27FC236}">
-                <a16:creationId xmlns:a16="http://schemas.microsoft.com/office/drawing/2014/main" id="{21F23DA5-9A67-4821-6BF5-6759ED6347C5}"/>
+                <a16:creationId xmlns:a16="http://schemas.microsoft.com/office/drawing/2014/main" id="{23DFD70E-6637-D0E4-3015-89C262AC7AC8}"/>
               </a:ext>
             </a:extLst>
           </p:cNvPr>
@@ -860,7 +860,7 @@
           <p:cNvPr id="3" name="コンテンツ プレースホルダー 2">
             <a:extLst>
               <a:ext uri="{FF2B5EF4-FFF2-40B4-BE49-F238E27FC236}">
-                <a16:creationId xmlns:a16="http://schemas.microsoft.com/office/drawing/2014/main" id="{86D9CAC8-E3FB-7D28-27F4-58DBFDB25C4F}"/>
+                <a16:creationId xmlns:a16="http://schemas.microsoft.com/office/drawing/2014/main" id="{05EF7DCD-E930-6D0E-FC77-EF998CBE5F38}"/>
               </a:ext>
             </a:extLst>
           </p:cNvPr>
@@ -949,7 +949,7 @@
           <p:cNvPr id="4" name="日付プレースホルダー 3">
             <a:extLst>
               <a:ext uri="{FF2B5EF4-FFF2-40B4-BE49-F238E27FC236}">
-                <a16:creationId xmlns:a16="http://schemas.microsoft.com/office/drawing/2014/main" id="{6768BA3D-22DE-BFA4-5C31-1245FD7DDBD5}"/>
+                <a16:creationId xmlns:a16="http://schemas.microsoft.com/office/drawing/2014/main" id="{29D08938-C8FE-9F7B-B2BA-F2BD96D833F0}"/>
               </a:ext>
             </a:extLst>
           </p:cNvPr>
@@ -965,7 +965,7 @@
           <a:bodyPr/>
           <a:lstStyle/>
           <a:p>
-            <a:fld id="{F13A7070-1D1D-4E4F-B0B4-17F1831FFA8B}" type="datetimeFigureOut">
+            <a:fld id="{FA778BE5-25F8-4BBB-88C5-ADCEB715F80C}" type="datetimeFigureOut">
               <a:rPr kumimoji="1" lang="ja-JP" altLang="en-US" smtClean="0"/>
               <a:t>2026/10/21</a:t>
             </a:fld>
@@ -978,7 +978,7 @@
           <p:cNvPr id="5" name="フッター プレースホルダー 4">
             <a:extLst>
               <a:ext uri="{FF2B5EF4-FFF2-40B4-BE49-F238E27FC236}">
-                <a16:creationId xmlns:a16="http://schemas.microsoft.com/office/drawing/2014/main" id="{925B7236-F04B-27D9-2E41-06A6443DEE7D}"/>
+                <a16:creationId xmlns:a16="http://schemas.microsoft.com/office/drawing/2014/main" id="{9E631B99-658B-ADA0-EC64-ECC38D87F9E0}"/>
               </a:ext>
             </a:extLst>
           </p:cNvPr>
@@ -1003,7 +1003,7 @@
           <p:cNvPr id="6" name="スライド番号プレースホルダー 5">
             <a:extLst>
               <a:ext uri="{FF2B5EF4-FFF2-40B4-BE49-F238E27FC236}">
-                <a16:creationId xmlns:a16="http://schemas.microsoft.com/office/drawing/2014/main" id="{F8D6C471-F81D-1023-1020-7C627031C5E4}"/>
+                <a16:creationId xmlns:a16="http://schemas.microsoft.com/office/drawing/2014/main" id="{60AD5172-3195-4B76-2081-ED7D9D885AB0}"/>
               </a:ext>
             </a:extLst>
           </p:cNvPr>
@@ -1019,7 +1019,7 @@
           <a:bodyPr/>
           <a:lstStyle/>
           <a:p>
-            <a:fld id="{B2DDDA0A-366C-41CC-8A8A-FF605DAC67A4}" type="slidenum">
+            <a:fld id="{694E7352-E469-4B35-A130-D1001D24845F}" type="slidenum">
               <a:rPr kumimoji="1" lang="ja-JP" altLang="en-US" smtClean="0"/>
               <a:t>‹#›</a:t>
             </a:fld>
@@ -1030,7 +1030,7 @@
     </p:spTree>
     <p:extLst>
       <p:ext uri="{BB962C8B-B14F-4D97-AF65-F5344CB8AC3E}">
-        <p14:creationId xmlns:p14="http://schemas.microsoft.com/office/powerpoint/2010/main" val="1998147547"/>
+        <p14:creationId xmlns:p14="http://schemas.microsoft.com/office/powerpoint/2010/main" val="4111855882"/>
       </p:ext>
     </p:extLst>
   </p:cSld>
@@ -1062,7 +1062,7 @@
           <p:cNvPr id="2" name="タイトル 1">
             <a:extLst>
               <a:ext uri="{FF2B5EF4-FFF2-40B4-BE49-F238E27FC236}">
-                <a16:creationId xmlns:a16="http://schemas.microsoft.com/office/drawing/2014/main" id="{09E05914-BCB0-E0A9-5067-716E787A18B2}"/>
+                <a16:creationId xmlns:a16="http://schemas.microsoft.com/office/drawing/2014/main" id="{5C124354-4BD8-04B2-6697-AF34BB9C8F8B}"/>
               </a:ext>
             </a:extLst>
           </p:cNvPr>
@@ -1099,7 +1099,7 @@
           <p:cNvPr id="3" name="テキスト プレースホルダー 2">
             <a:extLst>
               <a:ext uri="{FF2B5EF4-FFF2-40B4-BE49-F238E27FC236}">
-                <a16:creationId xmlns:a16="http://schemas.microsoft.com/office/drawing/2014/main" id="{8792057B-8816-E3FC-30D9-B2E67E005853}"/>
+                <a16:creationId xmlns:a16="http://schemas.microsoft.com/office/drawing/2014/main" id="{0204AFA7-4427-735C-E68E-AF55DB06D7DD}"/>
               </a:ext>
             </a:extLst>
           </p:cNvPr>
@@ -1224,7 +1224,7 @@
           <p:cNvPr id="4" name="日付プレースホルダー 3">
             <a:extLst>
               <a:ext uri="{FF2B5EF4-FFF2-40B4-BE49-F238E27FC236}">
-                <a16:creationId xmlns:a16="http://schemas.microsoft.com/office/drawing/2014/main" id="{6CF31A11-EF40-E335-648E-37A17D14728B}"/>
+                <a16:creationId xmlns:a16="http://schemas.microsoft.com/office/drawing/2014/main" id="{25FA6DC6-92D5-641F-8803-397E8B3C0BD1}"/>
               </a:ext>
             </a:extLst>
           </p:cNvPr>
@@ -1240,7 +1240,7 @@
           <a:bodyPr/>
           <a:lstStyle/>
           <a:p>
-            <a:fld id="{F13A7070-1D1D-4E4F-B0B4-17F1831FFA8B}" type="datetimeFigureOut">
+            <a:fld id="{FA778BE5-25F8-4BBB-88C5-ADCEB715F80C}" type="datetimeFigureOut">
               <a:rPr kumimoji="1" lang="ja-JP" altLang="en-US" smtClean="0"/>
               <a:t>2026/10/21</a:t>
             </a:fld>
@@ -1253,7 +1253,7 @@
           <p:cNvPr id="5" name="フッター プレースホルダー 4">
             <a:extLst>
               <a:ext uri="{FF2B5EF4-FFF2-40B4-BE49-F238E27FC236}">
-                <a16:creationId xmlns:a16="http://schemas.microsoft.com/office/drawing/2014/main" id="{D6860CAF-0CFF-A2C8-ED78-3B953BE232BC}"/>
+                <a16:creationId xmlns:a16="http://schemas.microsoft.com/office/drawing/2014/main" id="{1BB5648A-A845-C01A-F9FF-CA5AFEF90E10}"/>
               </a:ext>
             </a:extLst>
           </p:cNvPr>
@@ -1278,7 +1278,7 @@
           <p:cNvPr id="6" name="スライド番号プレースホルダー 5">
             <a:extLst>
               <a:ext uri="{FF2B5EF4-FFF2-40B4-BE49-F238E27FC236}">
-                <a16:creationId xmlns:a16="http://schemas.microsoft.com/office/drawing/2014/main" id="{03489E2C-5F70-2748-704E-07653102F125}"/>
+                <a16:creationId xmlns:a16="http://schemas.microsoft.com/office/drawing/2014/main" id="{23863169-5B1E-372E-0F4E-3C43EC8AE9E2}"/>
               </a:ext>
             </a:extLst>
           </p:cNvPr>
@@ -1294,7 +1294,7 @@
           <a:bodyPr/>
           <a:lstStyle/>
           <a:p>
-            <a:fld id="{B2DDDA0A-366C-41CC-8A8A-FF605DAC67A4}" type="slidenum">
+            <a:fld id="{694E7352-E469-4B35-A130-D1001D24845F}" type="slidenum">
               <a:rPr kumimoji="1" lang="ja-JP" altLang="en-US" smtClean="0"/>
               <a:t>‹#›</a:t>
             </a:fld>
@@ -1305,7 +1305,7 @@
     </p:spTree>
     <p:extLst>
       <p:ext uri="{BB962C8B-B14F-4D97-AF65-F5344CB8AC3E}">
-        <p14:creationId xmlns:p14="http://schemas.microsoft.com/office/powerpoint/2010/main" val="3965160771"/>
+        <p14:creationId xmlns:p14="http://schemas.microsoft.com/office/powerpoint/2010/main" val="3485700399"/>
       </p:ext>
     </p:extLst>
   </p:cSld>
@@ -1337,7 +1337,7 @@
           <p:cNvPr id="2" name="タイトル 1">
             <a:extLst>
               <a:ext uri="{FF2B5EF4-FFF2-40B4-BE49-F238E27FC236}">
-                <a16:creationId xmlns:a16="http://schemas.microsoft.com/office/drawing/2014/main" id="{6DA33DE0-4F79-3725-EA0A-B9D7D2179CBF}"/>
+                <a16:creationId xmlns:a16="http://schemas.microsoft.com/office/drawing/2014/main" id="{6D22FE8F-A9C6-ED3F-2AC0-AF6D00032FEC}"/>
               </a:ext>
             </a:extLst>
           </p:cNvPr>
@@ -1365,7 +1365,7 @@
           <p:cNvPr id="3" name="コンテンツ プレースホルダー 2">
             <a:extLst>
               <a:ext uri="{FF2B5EF4-FFF2-40B4-BE49-F238E27FC236}">
-                <a16:creationId xmlns:a16="http://schemas.microsoft.com/office/drawing/2014/main" id="{50956F75-7D47-F449-EB75-FDD97542AA4E}"/>
+                <a16:creationId xmlns:a16="http://schemas.microsoft.com/office/drawing/2014/main" id="{A2C661FA-F8E5-FC1F-4F17-185C8D749C0C}"/>
               </a:ext>
             </a:extLst>
           </p:cNvPr>
@@ -1459,7 +1459,7 @@
           <p:cNvPr id="4" name="コンテンツ プレースホルダー 3">
             <a:extLst>
               <a:ext uri="{FF2B5EF4-FFF2-40B4-BE49-F238E27FC236}">
-                <a16:creationId xmlns:a16="http://schemas.microsoft.com/office/drawing/2014/main" id="{16A7BC02-3FD1-110B-1586-C18B42222EF5}"/>
+                <a16:creationId xmlns:a16="http://schemas.microsoft.com/office/drawing/2014/main" id="{9E44713A-431F-2F66-036F-68E9A7CBEB48}"/>
               </a:ext>
             </a:extLst>
           </p:cNvPr>
@@ -1553,7 +1553,7 @@
           <p:cNvPr id="5" name="日付プレースホルダー 4">
             <a:extLst>
               <a:ext uri="{FF2B5EF4-FFF2-40B4-BE49-F238E27FC236}">
-                <a16:creationId xmlns:a16="http://schemas.microsoft.com/office/drawing/2014/main" id="{A1365FD6-A500-9DCE-8E28-064E8FB4D50D}"/>
+                <a16:creationId xmlns:a16="http://schemas.microsoft.com/office/drawing/2014/main" id="{96E74652-D415-37A7-660A-F823C9974488}"/>
               </a:ext>
             </a:extLst>
           </p:cNvPr>
@@ -1569,7 +1569,7 @@
           <a:bodyPr/>
           <a:lstStyle/>
           <a:p>
-            <a:fld id="{F13A7070-1D1D-4E4F-B0B4-17F1831FFA8B}" type="datetimeFigureOut">
+            <a:fld id="{FA778BE5-25F8-4BBB-88C5-ADCEB715F80C}" type="datetimeFigureOut">
               <a:rPr kumimoji="1" lang="ja-JP" altLang="en-US" smtClean="0"/>
               <a:t>2026/10/21</a:t>
             </a:fld>
@@ -1582,7 +1582,7 @@
           <p:cNvPr id="6" name="フッター プレースホルダー 5">
             <a:extLst>
               <a:ext uri="{FF2B5EF4-FFF2-40B4-BE49-F238E27FC236}">
-                <a16:creationId xmlns:a16="http://schemas.microsoft.com/office/drawing/2014/main" id="{20F78691-4B46-8D48-2CC2-27DF09D39030}"/>
+                <a16:creationId xmlns:a16="http://schemas.microsoft.com/office/drawing/2014/main" id="{902AD219-8121-CF20-EA7A-1B1799BD702F}"/>
               </a:ext>
             </a:extLst>
           </p:cNvPr>
@@ -1607,7 +1607,7 @@
           <p:cNvPr id="7" name="スライド番号プレースホルダー 6">
             <a:extLst>
               <a:ext uri="{FF2B5EF4-FFF2-40B4-BE49-F238E27FC236}">
-                <a16:creationId xmlns:a16="http://schemas.microsoft.com/office/drawing/2014/main" id="{AA335130-A6D4-31E5-E536-2A80C378CDE0}"/>
+                <a16:creationId xmlns:a16="http://schemas.microsoft.com/office/drawing/2014/main" id="{0A1C25D8-CAA4-1F4B-4144-834DC46DDEEE}"/>
               </a:ext>
             </a:extLst>
           </p:cNvPr>
@@ -1623,7 +1623,7 @@
           <a:bodyPr/>
           <a:lstStyle/>
           <a:p>
-            <a:fld id="{B2DDDA0A-366C-41CC-8A8A-FF605DAC67A4}" type="slidenum">
+            <a:fld id="{694E7352-E469-4B35-A130-D1001D24845F}" type="slidenum">
               <a:rPr kumimoji="1" lang="ja-JP" altLang="en-US" smtClean="0"/>
               <a:t>‹#›</a:t>
             </a:fld>
@@ -1634,7 +1634,7 @@
     </p:spTree>
     <p:extLst>
       <p:ext uri="{BB962C8B-B14F-4D97-AF65-F5344CB8AC3E}">
-        <p14:creationId xmlns:p14="http://schemas.microsoft.com/office/powerpoint/2010/main" val="1176845958"/>
+        <p14:creationId xmlns:p14="http://schemas.microsoft.com/office/powerpoint/2010/main" val="1943754436"/>
       </p:ext>
     </p:extLst>
   </p:cSld>
@@ -1666,7 +1666,7 @@
           <p:cNvPr id="2" name="タイトル 1">
             <a:extLst>
               <a:ext uri="{FF2B5EF4-FFF2-40B4-BE49-F238E27FC236}">
-                <a16:creationId xmlns:a16="http://schemas.microsoft.com/office/drawing/2014/main" id="{0070875B-EF1A-D222-9786-11F83E3BFDA8}"/>
+                <a16:creationId xmlns:a16="http://schemas.microsoft.com/office/drawing/2014/main" id="{1A769A40-000C-34F4-60AD-6395B66E4868}"/>
               </a:ext>
             </a:extLst>
           </p:cNvPr>
@@ -1699,7 +1699,7 @@
           <p:cNvPr id="3" name="テキスト プレースホルダー 2">
             <a:extLst>
               <a:ext uri="{FF2B5EF4-FFF2-40B4-BE49-F238E27FC236}">
-                <a16:creationId xmlns:a16="http://schemas.microsoft.com/office/drawing/2014/main" id="{349110D8-B84E-14F1-BF7E-A1713D635C8A}"/>
+                <a16:creationId xmlns:a16="http://schemas.microsoft.com/office/drawing/2014/main" id="{0811D96A-2686-FD4E-1FE0-070FC3925286}"/>
               </a:ext>
             </a:extLst>
           </p:cNvPr>
@@ -1770,7 +1770,7 @@
           <p:cNvPr id="4" name="コンテンツ プレースホルダー 3">
             <a:extLst>
               <a:ext uri="{FF2B5EF4-FFF2-40B4-BE49-F238E27FC236}">
-                <a16:creationId xmlns:a16="http://schemas.microsoft.com/office/drawing/2014/main" id="{FCB1FF0F-F13D-B20F-BB1F-F5ACD2D81CC9}"/>
+                <a16:creationId xmlns:a16="http://schemas.microsoft.com/office/drawing/2014/main" id="{0144855A-C4D1-317C-2675-AF691001D465}"/>
               </a:ext>
             </a:extLst>
           </p:cNvPr>
@@ -1864,7 +1864,7 @@
           <p:cNvPr id="5" name="テキスト プレースホルダー 4">
             <a:extLst>
               <a:ext uri="{FF2B5EF4-FFF2-40B4-BE49-F238E27FC236}">
-                <a16:creationId xmlns:a16="http://schemas.microsoft.com/office/drawing/2014/main" id="{98DF3AD9-F90D-41AC-246C-269B1FF0D45C}"/>
+                <a16:creationId xmlns:a16="http://schemas.microsoft.com/office/drawing/2014/main" id="{F9754079-18D1-2B7A-8191-7E52DD90D456}"/>
               </a:ext>
             </a:extLst>
           </p:cNvPr>
@@ -1935,7 +1935,7 @@
           <p:cNvPr id="6" name="コンテンツ プレースホルダー 5">
             <a:extLst>
               <a:ext uri="{FF2B5EF4-FFF2-40B4-BE49-F238E27FC236}">
-                <a16:creationId xmlns:a16="http://schemas.microsoft.com/office/drawing/2014/main" id="{F4DF7543-D33F-A571-E443-E9FE7E0E7AEC}"/>
+                <a16:creationId xmlns:a16="http://schemas.microsoft.com/office/drawing/2014/main" id="{A1B94386-0418-BEE4-7BA2-C8E00FF2FC35}"/>
               </a:ext>
             </a:extLst>
           </p:cNvPr>
@@ -2029,7 +2029,7 @@
           <p:cNvPr id="7" name="日付プレースホルダー 6">
             <a:extLst>
               <a:ext uri="{FF2B5EF4-FFF2-40B4-BE49-F238E27FC236}">
-                <a16:creationId xmlns:a16="http://schemas.microsoft.com/office/drawing/2014/main" id="{4680AA82-F502-8699-45E6-432CA85C9F6D}"/>
+                <a16:creationId xmlns:a16="http://schemas.microsoft.com/office/drawing/2014/main" id="{BC87948A-67FF-B6F0-EC34-1343D812387E}"/>
               </a:ext>
             </a:extLst>
           </p:cNvPr>
@@ -2045,7 +2045,7 @@
           <a:bodyPr/>
           <a:lstStyle/>
           <a:p>
-            <a:fld id="{F13A7070-1D1D-4E4F-B0B4-17F1831FFA8B}" type="datetimeFigureOut">
+            <a:fld id="{FA778BE5-25F8-4BBB-88C5-ADCEB715F80C}" type="datetimeFigureOut">
               <a:rPr kumimoji="1" lang="ja-JP" altLang="en-US" smtClean="0"/>
               <a:t>2026/10/21</a:t>
             </a:fld>
@@ -2058,7 +2058,7 @@
           <p:cNvPr id="8" name="フッター プレースホルダー 7">
             <a:extLst>
               <a:ext uri="{FF2B5EF4-FFF2-40B4-BE49-F238E27FC236}">
-                <a16:creationId xmlns:a16="http://schemas.microsoft.com/office/drawing/2014/main" id="{283BDFF4-A487-0164-8DB4-E43E8AE39CD0}"/>
+                <a16:creationId xmlns:a16="http://schemas.microsoft.com/office/drawing/2014/main" id="{F40CF327-3DD9-264E-F81C-7B55C47C34A2}"/>
               </a:ext>
             </a:extLst>
           </p:cNvPr>
@@ -2083,7 +2083,7 @@
           <p:cNvPr id="9" name="スライド番号プレースホルダー 8">
             <a:extLst>
               <a:ext uri="{FF2B5EF4-FFF2-40B4-BE49-F238E27FC236}">
-                <a16:creationId xmlns:a16="http://schemas.microsoft.com/office/drawing/2014/main" id="{2E551DBA-BA4F-728C-FF4E-B67961AEE7DA}"/>
+                <a16:creationId xmlns:a16="http://schemas.microsoft.com/office/drawing/2014/main" id="{161F61AB-8768-EECB-F60B-B2C48B603B66}"/>
               </a:ext>
             </a:extLst>
           </p:cNvPr>
@@ -2099,7 +2099,7 @@
           <a:bodyPr/>
           <a:lstStyle/>
           <a:p>
-            <a:fld id="{B2DDDA0A-366C-41CC-8A8A-FF605DAC67A4}" type="slidenum">
+            <a:fld id="{694E7352-E469-4B35-A130-D1001D24845F}" type="slidenum">
               <a:rPr kumimoji="1" lang="ja-JP" altLang="en-US" smtClean="0"/>
               <a:t>‹#›</a:t>
             </a:fld>
@@ -2110,7 +2110,7 @@
     </p:spTree>
     <p:extLst>
       <p:ext uri="{BB962C8B-B14F-4D97-AF65-F5344CB8AC3E}">
-        <p14:creationId xmlns:p14="http://schemas.microsoft.com/office/powerpoint/2010/main" val="1221748789"/>
+        <p14:creationId xmlns:p14="http://schemas.microsoft.com/office/powerpoint/2010/main" val="931229579"/>
       </p:ext>
     </p:extLst>
   </p:cSld>
@@ -2142,7 +2142,7 @@
           <p:cNvPr id="2" name="タイトル 1">
             <a:extLst>
               <a:ext uri="{FF2B5EF4-FFF2-40B4-BE49-F238E27FC236}">
-                <a16:creationId xmlns:a16="http://schemas.microsoft.com/office/drawing/2014/main" id="{FCD8FB27-237C-DECC-2EE3-33CD840EC21B}"/>
+                <a16:creationId xmlns:a16="http://schemas.microsoft.com/office/drawing/2014/main" id="{F3A31EE5-98F4-0723-7D8B-3026DAFE3DCA}"/>
               </a:ext>
             </a:extLst>
           </p:cNvPr>
@@ -2170,7 +2170,7 @@
           <p:cNvPr id="3" name="日付プレースホルダー 2">
             <a:extLst>
               <a:ext uri="{FF2B5EF4-FFF2-40B4-BE49-F238E27FC236}">
-                <a16:creationId xmlns:a16="http://schemas.microsoft.com/office/drawing/2014/main" id="{4E73AD97-A350-2188-D634-4202CAEBE89E}"/>
+                <a16:creationId xmlns:a16="http://schemas.microsoft.com/office/drawing/2014/main" id="{4581E04E-2AE3-0FF9-AC12-A5AB59176E50}"/>
               </a:ext>
             </a:extLst>
           </p:cNvPr>
@@ -2186,7 +2186,7 @@
           <a:bodyPr/>
           <a:lstStyle/>
           <a:p>
-            <a:fld id="{F13A7070-1D1D-4E4F-B0B4-17F1831FFA8B}" type="datetimeFigureOut">
+            <a:fld id="{FA778BE5-25F8-4BBB-88C5-ADCEB715F80C}" type="datetimeFigureOut">
               <a:rPr kumimoji="1" lang="ja-JP" altLang="en-US" smtClean="0"/>
               <a:t>2026/10/21</a:t>
             </a:fld>
@@ -2199,7 +2199,7 @@
           <p:cNvPr id="4" name="フッター プレースホルダー 3">
             <a:extLst>
               <a:ext uri="{FF2B5EF4-FFF2-40B4-BE49-F238E27FC236}">
-                <a16:creationId xmlns:a16="http://schemas.microsoft.com/office/drawing/2014/main" id="{EE08B0D3-9FED-DBE5-11E0-DF63821FE443}"/>
+                <a16:creationId xmlns:a16="http://schemas.microsoft.com/office/drawing/2014/main" id="{A2C52FCD-EA2D-7FCB-EA83-A5070B3FC224}"/>
               </a:ext>
             </a:extLst>
           </p:cNvPr>
@@ -2224,7 +2224,7 @@
           <p:cNvPr id="5" name="スライド番号プレースホルダー 4">
             <a:extLst>
               <a:ext uri="{FF2B5EF4-FFF2-40B4-BE49-F238E27FC236}">
-                <a16:creationId xmlns:a16="http://schemas.microsoft.com/office/drawing/2014/main" id="{E2A20853-12F7-0DC7-FC94-D26B21E5745E}"/>
+                <a16:creationId xmlns:a16="http://schemas.microsoft.com/office/drawing/2014/main" id="{DF1664F5-E0CC-ED5A-BDC1-519DB7D3142A}"/>
               </a:ext>
             </a:extLst>
           </p:cNvPr>
@@ -2240,7 +2240,7 @@
           <a:bodyPr/>
           <a:lstStyle/>
           <a:p>
-            <a:fld id="{B2DDDA0A-366C-41CC-8A8A-FF605DAC67A4}" type="slidenum">
+            <a:fld id="{694E7352-E469-4B35-A130-D1001D24845F}" type="slidenum">
               <a:rPr kumimoji="1" lang="ja-JP" altLang="en-US" smtClean="0"/>
               <a:t>‹#›</a:t>
             </a:fld>
@@ -2251,7 +2251,7 @@
     </p:spTree>
     <p:extLst>
       <p:ext uri="{BB962C8B-B14F-4D97-AF65-F5344CB8AC3E}">
-        <p14:creationId xmlns:p14="http://schemas.microsoft.com/office/powerpoint/2010/main" val="2368252364"/>
+        <p14:creationId xmlns:p14="http://schemas.microsoft.com/office/powerpoint/2010/main" val="4186239979"/>
       </p:ext>
     </p:extLst>
   </p:cSld>
@@ -2283,7 +2283,7 @@
           <p:cNvPr id="2" name="日付プレースホルダー 1">
             <a:extLst>
               <a:ext uri="{FF2B5EF4-FFF2-40B4-BE49-F238E27FC236}">
-                <a16:creationId xmlns:a16="http://schemas.microsoft.com/office/drawing/2014/main" id="{8DE95B4C-1341-C722-E828-886335BDC5AA}"/>
+                <a16:creationId xmlns:a16="http://schemas.microsoft.com/office/drawing/2014/main" id="{2054F85C-296F-5037-2837-B874A7EBFC62}"/>
               </a:ext>
             </a:extLst>
           </p:cNvPr>
@@ -2299,7 +2299,7 @@
           <a:bodyPr/>
           <a:lstStyle/>
           <a:p>
-            <a:fld id="{F13A7070-1D1D-4E4F-B0B4-17F1831FFA8B}" type="datetimeFigureOut">
+            <a:fld id="{FA778BE5-25F8-4BBB-88C5-ADCEB715F80C}" type="datetimeFigureOut">
               <a:rPr kumimoji="1" lang="ja-JP" altLang="en-US" smtClean="0"/>
               <a:t>2026/10/21</a:t>
             </a:fld>
@@ -2312,7 +2312,7 @@
           <p:cNvPr id="3" name="フッター プレースホルダー 2">
             <a:extLst>
               <a:ext uri="{FF2B5EF4-FFF2-40B4-BE49-F238E27FC236}">
-                <a16:creationId xmlns:a16="http://schemas.microsoft.com/office/drawing/2014/main" id="{DF3A2A2E-803B-27BF-1B4C-280CBE960093}"/>
+                <a16:creationId xmlns:a16="http://schemas.microsoft.com/office/drawing/2014/main" id="{ECE88ABE-861C-CB27-1BB7-DA914C7CEA10}"/>
               </a:ext>
             </a:extLst>
           </p:cNvPr>
@@ -2337,7 +2337,7 @@
           <p:cNvPr id="4" name="スライド番号プレースホルダー 3">
             <a:extLst>
               <a:ext uri="{FF2B5EF4-FFF2-40B4-BE49-F238E27FC236}">
-                <a16:creationId xmlns:a16="http://schemas.microsoft.com/office/drawing/2014/main" id="{CA2564E6-1A95-A907-EC49-933295578EEA}"/>
+                <a16:creationId xmlns:a16="http://schemas.microsoft.com/office/drawing/2014/main" id="{38914DC7-7052-6DDA-C72C-B3A15D2D2D74}"/>
               </a:ext>
             </a:extLst>
           </p:cNvPr>
@@ -2353,7 +2353,7 @@
           <a:bodyPr/>
           <a:lstStyle/>
           <a:p>
-            <a:fld id="{B2DDDA0A-366C-41CC-8A8A-FF605DAC67A4}" type="slidenum">
+            <a:fld id="{694E7352-E469-4B35-A130-D1001D24845F}" type="slidenum">
               <a:rPr kumimoji="1" lang="ja-JP" altLang="en-US" smtClean="0"/>
               <a:t>‹#›</a:t>
             </a:fld>
@@ -2364,7 +2364,7 @@
     </p:spTree>
     <p:extLst>
       <p:ext uri="{BB962C8B-B14F-4D97-AF65-F5344CB8AC3E}">
-        <p14:creationId xmlns:p14="http://schemas.microsoft.com/office/powerpoint/2010/main" val="1540913693"/>
+        <p14:creationId xmlns:p14="http://schemas.microsoft.com/office/powerpoint/2010/main" val="1219621769"/>
       </p:ext>
     </p:extLst>
   </p:cSld>
@@ -2396,7 +2396,7 @@
           <p:cNvPr id="2" name="タイトル 1">
             <a:extLst>
               <a:ext uri="{FF2B5EF4-FFF2-40B4-BE49-F238E27FC236}">
-                <a16:creationId xmlns:a16="http://schemas.microsoft.com/office/drawing/2014/main" id="{DD6407E9-A390-373F-E5D0-116BF31158B5}"/>
+                <a16:creationId xmlns:a16="http://schemas.microsoft.com/office/drawing/2014/main" id="{D174FE1A-EEA2-CF8D-8F80-2CE436AF488E}"/>
               </a:ext>
             </a:extLst>
           </p:cNvPr>
@@ -2433,7 +2433,7 @@
           <p:cNvPr id="3" name="コンテンツ プレースホルダー 2">
             <a:extLst>
               <a:ext uri="{FF2B5EF4-FFF2-40B4-BE49-F238E27FC236}">
-                <a16:creationId xmlns:a16="http://schemas.microsoft.com/office/drawing/2014/main" id="{52E0B6B3-9107-A027-D732-8BE20445D780}"/>
+                <a16:creationId xmlns:a16="http://schemas.microsoft.com/office/drawing/2014/main" id="{EA3CCC86-3D97-90CF-30F8-2A6B7AA30F4C}"/>
               </a:ext>
             </a:extLst>
           </p:cNvPr>
@@ -2555,7 +2555,7 @@
           <p:cNvPr id="4" name="テキスト プレースホルダー 3">
             <a:extLst>
               <a:ext uri="{FF2B5EF4-FFF2-40B4-BE49-F238E27FC236}">
-                <a16:creationId xmlns:a16="http://schemas.microsoft.com/office/drawing/2014/main" id="{37CF3538-44CF-F446-4585-4CEEB1E36555}"/>
+                <a16:creationId xmlns:a16="http://schemas.microsoft.com/office/drawing/2014/main" id="{33694EEF-1CD2-0A3B-1423-C59515EA8477}"/>
               </a:ext>
             </a:extLst>
           </p:cNvPr>
@@ -2626,7 +2626,7 @@
           <p:cNvPr id="5" name="日付プレースホルダー 4">
             <a:extLst>
               <a:ext uri="{FF2B5EF4-FFF2-40B4-BE49-F238E27FC236}">
-                <a16:creationId xmlns:a16="http://schemas.microsoft.com/office/drawing/2014/main" id="{967F394A-E44A-3388-9FD6-7502824B7D8A}"/>
+                <a16:creationId xmlns:a16="http://schemas.microsoft.com/office/drawing/2014/main" id="{C5DB9C49-D66C-3115-4144-9528081CC9FA}"/>
               </a:ext>
             </a:extLst>
           </p:cNvPr>
@@ -2642,7 +2642,7 @@
           <a:bodyPr/>
           <a:lstStyle/>
           <a:p>
-            <a:fld id="{F13A7070-1D1D-4E4F-B0B4-17F1831FFA8B}" type="datetimeFigureOut">
+            <a:fld id="{FA778BE5-25F8-4BBB-88C5-ADCEB715F80C}" type="datetimeFigureOut">
               <a:rPr kumimoji="1" lang="ja-JP" altLang="en-US" smtClean="0"/>
               <a:t>2026/10/21</a:t>
             </a:fld>
@@ -2655,7 +2655,7 @@
           <p:cNvPr id="6" name="フッター プレースホルダー 5">
             <a:extLst>
               <a:ext uri="{FF2B5EF4-FFF2-40B4-BE49-F238E27FC236}">
-                <a16:creationId xmlns:a16="http://schemas.microsoft.com/office/drawing/2014/main" id="{9F790DFF-1818-20CF-7543-CDE044F0B189}"/>
+                <a16:creationId xmlns:a16="http://schemas.microsoft.com/office/drawing/2014/main" id="{84C2B0A2-3E9E-6469-C153-2E4FC01C939D}"/>
               </a:ext>
             </a:extLst>
           </p:cNvPr>
@@ -2680,7 +2680,7 @@
           <p:cNvPr id="7" name="スライド番号プレースホルダー 6">
             <a:extLst>
               <a:ext uri="{FF2B5EF4-FFF2-40B4-BE49-F238E27FC236}">
-                <a16:creationId xmlns:a16="http://schemas.microsoft.com/office/drawing/2014/main" id="{36EF93E7-7F08-9CAA-57C4-C1B8CB1A09A6}"/>
+                <a16:creationId xmlns:a16="http://schemas.microsoft.com/office/drawing/2014/main" id="{4DD07D94-14B8-86CA-AA36-31F32AADC37D}"/>
               </a:ext>
             </a:extLst>
           </p:cNvPr>
@@ -2696,7 +2696,7 @@
           <a:bodyPr/>
           <a:lstStyle/>
           <a:p>
-            <a:fld id="{B2DDDA0A-366C-41CC-8A8A-FF605DAC67A4}" type="slidenum">
+            <a:fld id="{694E7352-E469-4B35-A130-D1001D24845F}" type="slidenum">
               <a:rPr kumimoji="1" lang="ja-JP" altLang="en-US" smtClean="0"/>
               <a:t>‹#›</a:t>
             </a:fld>
@@ -2707,7 +2707,7 @@
     </p:spTree>
     <p:extLst>
       <p:ext uri="{BB962C8B-B14F-4D97-AF65-F5344CB8AC3E}">
-        <p14:creationId xmlns:p14="http://schemas.microsoft.com/office/powerpoint/2010/main" val="1105513273"/>
+        <p14:creationId xmlns:p14="http://schemas.microsoft.com/office/powerpoint/2010/main" val="3634062737"/>
       </p:ext>
     </p:extLst>
   </p:cSld>
@@ -2739,7 +2739,7 @@
           <p:cNvPr id="2" name="タイトル 1">
             <a:extLst>
               <a:ext uri="{FF2B5EF4-FFF2-40B4-BE49-F238E27FC236}">
-                <a16:creationId xmlns:a16="http://schemas.microsoft.com/office/drawing/2014/main" id="{B2D90084-6877-5899-3920-B36B3F9E0002}"/>
+                <a16:creationId xmlns:a16="http://schemas.microsoft.com/office/drawing/2014/main" id="{2ED94059-AA6E-AC39-1421-67B4EAD1A9E2}"/>
               </a:ext>
             </a:extLst>
           </p:cNvPr>
@@ -2776,7 +2776,7 @@
           <p:cNvPr id="3" name="図プレースホルダー 2">
             <a:extLst>
               <a:ext uri="{FF2B5EF4-FFF2-40B4-BE49-F238E27FC236}">
-                <a16:creationId xmlns:a16="http://schemas.microsoft.com/office/drawing/2014/main" id="{983174DD-D6BE-FF62-1A98-6612A014E9B2}"/>
+                <a16:creationId xmlns:a16="http://schemas.microsoft.com/office/drawing/2014/main" id="{095771E0-634A-B7AD-35C7-830541B468B0}"/>
               </a:ext>
             </a:extLst>
           </p:cNvPr>
@@ -2843,7 +2843,7 @@
           <p:cNvPr id="4" name="テキスト プレースホルダー 3">
             <a:extLst>
               <a:ext uri="{FF2B5EF4-FFF2-40B4-BE49-F238E27FC236}">
-                <a16:creationId xmlns:a16="http://schemas.microsoft.com/office/drawing/2014/main" id="{7FAC7A38-30D3-2568-A5BD-4DCE7499636B}"/>
+                <a16:creationId xmlns:a16="http://schemas.microsoft.com/office/drawing/2014/main" id="{53ED716C-915E-D4C5-B7AE-2C1C9B35D0B2}"/>
               </a:ext>
             </a:extLst>
           </p:cNvPr>
@@ -2914,7 +2914,7 @@
           <p:cNvPr id="5" name="日付プレースホルダー 4">
             <a:extLst>
               <a:ext uri="{FF2B5EF4-FFF2-40B4-BE49-F238E27FC236}">
-                <a16:creationId xmlns:a16="http://schemas.microsoft.com/office/drawing/2014/main" id="{09A7F364-0D8E-FB23-CD4A-BAFAF4CE0068}"/>
+                <a16:creationId xmlns:a16="http://schemas.microsoft.com/office/drawing/2014/main" id="{245E6340-7B87-FF52-BE62-A9D34871BA2C}"/>
               </a:ext>
             </a:extLst>
           </p:cNvPr>
@@ -2930,7 +2930,7 @@
           <a:bodyPr/>
           <a:lstStyle/>
           <a:p>
-            <a:fld id="{F13A7070-1D1D-4E4F-B0B4-17F1831FFA8B}" type="datetimeFigureOut">
+            <a:fld id="{FA778BE5-25F8-4BBB-88C5-ADCEB715F80C}" type="datetimeFigureOut">
               <a:rPr kumimoji="1" lang="ja-JP" altLang="en-US" smtClean="0"/>
               <a:t>2026/10/21</a:t>
             </a:fld>
@@ -2943,7 +2943,7 @@
           <p:cNvPr id="6" name="フッター プレースホルダー 5">
             <a:extLst>
               <a:ext uri="{FF2B5EF4-FFF2-40B4-BE49-F238E27FC236}">
-                <a16:creationId xmlns:a16="http://schemas.microsoft.com/office/drawing/2014/main" id="{64D88297-1D11-5B8E-19B3-130489408B6D}"/>
+                <a16:creationId xmlns:a16="http://schemas.microsoft.com/office/drawing/2014/main" id="{06A41E14-67D3-9DA4-E9AE-24EE266EB355}"/>
               </a:ext>
             </a:extLst>
           </p:cNvPr>
@@ -2968,7 +2968,7 @@
           <p:cNvPr id="7" name="スライド番号プレースホルダー 6">
             <a:extLst>
               <a:ext uri="{FF2B5EF4-FFF2-40B4-BE49-F238E27FC236}">
-                <a16:creationId xmlns:a16="http://schemas.microsoft.com/office/drawing/2014/main" id="{88CD4112-4268-6E3A-104A-7598030C7820}"/>
+                <a16:creationId xmlns:a16="http://schemas.microsoft.com/office/drawing/2014/main" id="{1E0D5F47-985E-14B6-CCD0-90EE6C3D6B4A}"/>
               </a:ext>
             </a:extLst>
           </p:cNvPr>
@@ -2984,7 +2984,7 @@
           <a:bodyPr/>
           <a:lstStyle/>
           <a:p>
-            <a:fld id="{B2DDDA0A-366C-41CC-8A8A-FF605DAC67A4}" type="slidenum">
+            <a:fld id="{694E7352-E469-4B35-A130-D1001D24845F}" type="slidenum">
               <a:rPr kumimoji="1" lang="ja-JP" altLang="en-US" smtClean="0"/>
               <a:t>‹#›</a:t>
             </a:fld>
@@ -2995,7 +2995,7 @@
     </p:spTree>
     <p:extLst>
       <p:ext uri="{BB962C8B-B14F-4D97-AF65-F5344CB8AC3E}">
-        <p14:creationId xmlns:p14="http://schemas.microsoft.com/office/powerpoint/2010/main" val="2238716711"/>
+        <p14:creationId xmlns:p14="http://schemas.microsoft.com/office/powerpoint/2010/main" val="1888161790"/>
       </p:ext>
     </p:extLst>
   </p:cSld>
@@ -3032,7 +3032,7 @@
           <p:cNvPr id="2" name="タイトル プレースホルダー 1">
             <a:extLst>
               <a:ext uri="{FF2B5EF4-FFF2-40B4-BE49-F238E27FC236}">
-                <a16:creationId xmlns:a16="http://schemas.microsoft.com/office/drawing/2014/main" id="{EC363651-11F2-758B-9CA1-A25F277F38CD}"/>
+                <a16:creationId xmlns:a16="http://schemas.microsoft.com/office/drawing/2014/main" id="{1582A04D-F452-DFFA-0C8D-0E57E7B3D556}"/>
               </a:ext>
             </a:extLst>
           </p:cNvPr>
@@ -3070,7 +3070,7 @@
           <p:cNvPr id="3" name="テキスト プレースホルダー 2">
             <a:extLst>
               <a:ext uri="{FF2B5EF4-FFF2-40B4-BE49-F238E27FC236}">
-                <a16:creationId xmlns:a16="http://schemas.microsoft.com/office/drawing/2014/main" id="{CEC97230-3CD4-889B-F23B-A8BB06057520}"/>
+                <a16:creationId xmlns:a16="http://schemas.microsoft.com/office/drawing/2014/main" id="{1E131067-8693-311C-A867-3241F097019C}"/>
               </a:ext>
             </a:extLst>
           </p:cNvPr>
@@ -3169,7 +3169,7 @@
           <p:cNvPr id="4" name="日付プレースホルダー 3">
             <a:extLst>
               <a:ext uri="{FF2B5EF4-FFF2-40B4-BE49-F238E27FC236}">
-                <a16:creationId xmlns:a16="http://schemas.microsoft.com/office/drawing/2014/main" id="{35088AF3-8B1C-AC0E-5248-A628C8CD7360}"/>
+                <a16:creationId xmlns:a16="http://schemas.microsoft.com/office/drawing/2014/main" id="{008C6A7C-BA10-DBEF-1B31-B2CB5734BBC3}"/>
               </a:ext>
             </a:extLst>
           </p:cNvPr>
@@ -3203,7 +3203,7 @@
             </a:lvl1pPr>
           </a:lstStyle>
           <a:p>
-            <a:fld id="{F13A7070-1D1D-4E4F-B0B4-17F1831FFA8B}" type="datetimeFigureOut">
+            <a:fld id="{FA778BE5-25F8-4BBB-88C5-ADCEB715F80C}" type="datetimeFigureOut">
               <a:rPr kumimoji="1" lang="ja-JP" altLang="en-US" smtClean="0"/>
               <a:t>2026/10/21</a:t>
             </a:fld>
@@ -3216,7 +3216,7 @@
           <p:cNvPr id="5" name="フッター プレースホルダー 4">
             <a:extLst>
               <a:ext uri="{FF2B5EF4-FFF2-40B4-BE49-F238E27FC236}">
-                <a16:creationId xmlns:a16="http://schemas.microsoft.com/office/drawing/2014/main" id="{6BCA0917-F055-49B9-E006-56A79E9CEB62}"/>
+                <a16:creationId xmlns:a16="http://schemas.microsoft.com/office/drawing/2014/main" id="{F93C9634-9246-353A-9762-250BA3BB3688}"/>
               </a:ext>
             </a:extLst>
           </p:cNvPr>
@@ -3259,7 +3259,7 @@
           <p:cNvPr id="6" name="スライド番号プレースホルダー 5">
             <a:extLst>
               <a:ext uri="{FF2B5EF4-FFF2-40B4-BE49-F238E27FC236}">
-                <a16:creationId xmlns:a16="http://schemas.microsoft.com/office/drawing/2014/main" id="{FA30BA78-91A7-12DA-9B22-9950D4931AF8}"/>
+                <a16:creationId xmlns:a16="http://schemas.microsoft.com/office/drawing/2014/main" id="{B5E11973-9DC2-796A-C3BD-DBA2C7D80A34}"/>
               </a:ext>
             </a:extLst>
           </p:cNvPr>
@@ -3293,7 +3293,7 @@
             </a:lvl1pPr>
           </a:lstStyle>
           <a:p>
-            <a:fld id="{B2DDDA0A-366C-41CC-8A8A-FF605DAC67A4}" type="slidenum">
+            <a:fld id="{694E7352-E469-4B35-A130-D1001D24845F}" type="slidenum">
               <a:rPr kumimoji="1" lang="ja-JP" altLang="en-US" smtClean="0"/>
               <a:t>‹#›</a:t>
             </a:fld>
@@ -3304,7 +3304,7 @@
     </p:spTree>
     <p:extLst>
       <p:ext uri="{BB962C8B-B14F-4D97-AF65-F5344CB8AC3E}">
-        <p14:creationId xmlns:p14="http://schemas.microsoft.com/office/powerpoint/2010/main" val="4136668866"/>
+        <p14:creationId xmlns:p14="http://schemas.microsoft.com/office/powerpoint/2010/main" val="2998925686"/>
       </p:ext>
     </p:extLst>
   </p:cSld>
@@ -3627,7 +3627,7 @@
           <p:cNvPr id="2" name="正方形/長方形 1">
             <a:extLst>
               <a:ext uri="{FF2B5EF4-FFF2-40B4-BE49-F238E27FC236}">
-                <a16:creationId xmlns:a16="http://schemas.microsoft.com/office/drawing/2014/main" id="{662542E8-1FCA-1FCE-36AE-40D7DB5BCCF1}"/>
+                <a16:creationId xmlns:a16="http://schemas.microsoft.com/office/drawing/2014/main" id="{200CC7F8-7EB5-7328-DA4D-FD75C0D19D0E}"/>
               </a:ext>
             </a:extLst>
           </p:cNvPr>
@@ -3695,7 +3695,7 @@
           <p:cNvPr id="3" name="正方形/長方形 2">
             <a:extLst>
               <a:ext uri="{FF2B5EF4-FFF2-40B4-BE49-F238E27FC236}">
-                <a16:creationId xmlns:a16="http://schemas.microsoft.com/office/drawing/2014/main" id="{E0CC39B4-C120-4C32-B9E3-1DF1F4A676C8}"/>
+                <a16:creationId xmlns:a16="http://schemas.microsoft.com/office/drawing/2014/main" id="{4F0C5027-BCC9-9DCD-4C78-0C1E4CE0556D}"/>
               </a:ext>
             </a:extLst>
           </p:cNvPr>
@@ -3763,7 +3763,7 @@
           <p:cNvPr id="4" name="正方形/長方形 3">
             <a:extLst>
               <a:ext uri="{FF2B5EF4-FFF2-40B4-BE49-F238E27FC236}">
-                <a16:creationId xmlns:a16="http://schemas.microsoft.com/office/drawing/2014/main" id="{B1FC2F38-7545-D284-9704-0498DDCE063C}"/>
+                <a16:creationId xmlns:a16="http://schemas.microsoft.com/office/drawing/2014/main" id="{0A9F85D9-3668-6560-BB44-84D7AB681473}"/>
               </a:ext>
             </a:extLst>
           </p:cNvPr>
@@ -3831,7 +3831,7 @@
           <p:cNvPr id="5" name="四角形: 角を丸くする 4">
             <a:extLst>
               <a:ext uri="{FF2B5EF4-FFF2-40B4-BE49-F238E27FC236}">
-                <a16:creationId xmlns:a16="http://schemas.microsoft.com/office/drawing/2014/main" id="{2F8DF5F0-E16F-EF8A-3445-3634A4EC4AF4}"/>
+                <a16:creationId xmlns:a16="http://schemas.microsoft.com/office/drawing/2014/main" id="{A1C12699-84D0-E26B-0D78-E2EC3A6D9B2C}"/>
               </a:ext>
             </a:extLst>
           </p:cNvPr>
@@ -3901,7 +3901,7 @@
           <p:cNvPr id="6" name="正方形/長方形 5">
             <a:extLst>
               <a:ext uri="{FF2B5EF4-FFF2-40B4-BE49-F238E27FC236}">
-                <a16:creationId xmlns:a16="http://schemas.microsoft.com/office/drawing/2014/main" id="{43DCD651-59BA-BD42-AD86-8CFDB2829B03}"/>
+                <a16:creationId xmlns:a16="http://schemas.microsoft.com/office/drawing/2014/main" id="{BB394AEB-FE61-DB8B-F61F-363E52BACE9C}"/>
               </a:ext>
             </a:extLst>
           </p:cNvPr>
@@ -3969,7 +3969,7 @@
           <p:cNvPr id="7" name="正方形/長方形 6">
             <a:extLst>
               <a:ext uri="{FF2B5EF4-FFF2-40B4-BE49-F238E27FC236}">
-                <a16:creationId xmlns:a16="http://schemas.microsoft.com/office/drawing/2014/main" id="{CF66DB80-A573-1EDF-ADDA-B9E58228A965}"/>
+                <a16:creationId xmlns:a16="http://schemas.microsoft.com/office/drawing/2014/main" id="{EBBD20BE-E553-FE5E-23BA-07F65A2A2FEF}"/>
               </a:ext>
             </a:extLst>
           </p:cNvPr>
@@ -4037,7 +4037,7 @@
           <p:cNvPr id="8" name="テキスト ボックス 7">
             <a:extLst>
               <a:ext uri="{FF2B5EF4-FFF2-40B4-BE49-F238E27FC236}">
-                <a16:creationId xmlns:a16="http://schemas.microsoft.com/office/drawing/2014/main" id="{071A2F9B-3A08-8007-FD1F-36289D282BB2}"/>
+                <a16:creationId xmlns:a16="http://schemas.microsoft.com/office/drawing/2014/main" id="{6D714ECE-5ED7-C2FB-A109-FEDDAFA76586}"/>
               </a:ext>
             </a:extLst>
           </p:cNvPr>
@@ -4158,7 +4158,7 @@
           <p:cNvPr id="9" name="テキスト ボックス 8">
             <a:extLst>
               <a:ext uri="{FF2B5EF4-FFF2-40B4-BE49-F238E27FC236}">
-                <a16:creationId xmlns:a16="http://schemas.microsoft.com/office/drawing/2014/main" id="{098470EE-16E4-FB5F-F4DE-4C20EA89B886}"/>
+                <a16:creationId xmlns:a16="http://schemas.microsoft.com/office/drawing/2014/main" id="{5FC2B1F8-9446-7C6B-58C3-08FE20623F48}"/>
               </a:ext>
             </a:extLst>
           </p:cNvPr>
@@ -4199,7 +4199,7 @@
           <p:cNvPr id="10" name="テキスト ボックス 9">
             <a:extLst>
               <a:ext uri="{FF2B5EF4-FFF2-40B4-BE49-F238E27FC236}">
-                <a16:creationId xmlns:a16="http://schemas.microsoft.com/office/drawing/2014/main" id="{0ADDC263-5787-B77C-5935-0B93D46DC3BA}"/>
+                <a16:creationId xmlns:a16="http://schemas.microsoft.com/office/drawing/2014/main" id="{E59B9350-52ED-01AD-081F-23B82C7C7779}"/>
               </a:ext>
             </a:extLst>
           </p:cNvPr>
@@ -4280,7 +4280,7 @@
           <p:cNvPr id="11" name="正方形/長方形 10">
             <a:extLst>
               <a:ext uri="{FF2B5EF4-FFF2-40B4-BE49-F238E27FC236}">
-                <a16:creationId xmlns:a16="http://schemas.microsoft.com/office/drawing/2014/main" id="{7804FF54-341B-FCB4-288B-B965094135CF}"/>
+                <a16:creationId xmlns:a16="http://schemas.microsoft.com/office/drawing/2014/main" id="{E2A709B8-4ABC-23E6-C807-ADE56049E438}"/>
               </a:ext>
             </a:extLst>
           </p:cNvPr>
@@ -4334,7 +4334,7 @@
           <p:cNvPr id="12" name="正方形/長方形 11">
             <a:extLst>
               <a:ext uri="{FF2B5EF4-FFF2-40B4-BE49-F238E27FC236}">
-                <a16:creationId xmlns:a16="http://schemas.microsoft.com/office/drawing/2014/main" id="{5ABFB611-ABDB-909D-AB35-5B10C48E4E6E}"/>
+                <a16:creationId xmlns:a16="http://schemas.microsoft.com/office/drawing/2014/main" id="{84F20872-D7CE-AAAE-2D13-C78D7C714CD6}"/>
               </a:ext>
             </a:extLst>
           </p:cNvPr>
@@ -4402,7 +4402,7 @@
           <p:cNvPr id="13" name="テキスト ボックス 12">
             <a:extLst>
               <a:ext uri="{FF2B5EF4-FFF2-40B4-BE49-F238E27FC236}">
-                <a16:creationId xmlns:a16="http://schemas.microsoft.com/office/drawing/2014/main" id="{F9A479D8-405D-ACD6-9838-E5FDB603FF44}"/>
+                <a16:creationId xmlns:a16="http://schemas.microsoft.com/office/drawing/2014/main" id="{1B89C0B7-68CB-F52C-35C3-8D4244CB1D30}"/>
               </a:ext>
             </a:extLst>
           </p:cNvPr>
@@ -4714,7 +4714,7 @@
           <p:cNvPr id="14" name="テキスト ボックス 13">
             <a:extLst>
               <a:ext uri="{FF2B5EF4-FFF2-40B4-BE49-F238E27FC236}">
-                <a16:creationId xmlns:a16="http://schemas.microsoft.com/office/drawing/2014/main" id="{361C87E5-4F51-358D-F32C-FD4C7533DF75}"/>
+                <a16:creationId xmlns:a16="http://schemas.microsoft.com/office/drawing/2014/main" id="{EC4679B3-6D35-D527-572A-656009A9A5B9}"/>
               </a:ext>
             </a:extLst>
           </p:cNvPr>
@@ -4775,7 +4775,7 @@
           <p:cNvPr id="15" name="正方形/長方形 14">
             <a:extLst>
               <a:ext uri="{FF2B5EF4-FFF2-40B4-BE49-F238E27FC236}">
-                <a16:creationId xmlns:a16="http://schemas.microsoft.com/office/drawing/2014/main" id="{BC6B4451-A06D-EC27-78A2-58D326A0D170}"/>
+                <a16:creationId xmlns:a16="http://schemas.microsoft.com/office/drawing/2014/main" id="{3F759A40-EA0D-E1D3-73DF-BBADA16E9430}"/>
               </a:ext>
             </a:extLst>
           </p:cNvPr>
@@ -4829,7 +4829,7 @@
           <p:cNvPr id="16" name="正方形/長方形 15">
             <a:extLst>
               <a:ext uri="{FF2B5EF4-FFF2-40B4-BE49-F238E27FC236}">
-                <a16:creationId xmlns:a16="http://schemas.microsoft.com/office/drawing/2014/main" id="{AC32507F-8253-FA5F-B565-CBFFD6311FEB}"/>
+                <a16:creationId xmlns:a16="http://schemas.microsoft.com/office/drawing/2014/main" id="{50CA76A9-02E6-A409-D18A-9CC1C1FB49A8}"/>
               </a:ext>
             </a:extLst>
           </p:cNvPr>
@@ -4897,7 +4897,7 @@
           <p:cNvPr id="17" name="テキスト ボックス 16">
             <a:extLst>
               <a:ext uri="{FF2B5EF4-FFF2-40B4-BE49-F238E27FC236}">
-                <a16:creationId xmlns:a16="http://schemas.microsoft.com/office/drawing/2014/main" id="{05850640-36DD-C380-48E9-FF57E1128547}"/>
+                <a16:creationId xmlns:a16="http://schemas.microsoft.com/office/drawing/2014/main" id="{44E9D1A9-65F7-73D2-57B3-C8291D87B258}"/>
               </a:ext>
             </a:extLst>
           </p:cNvPr>
@@ -4948,7 +4948,7 @@
           <p:cNvPr id="18" name="正方形/長方形 17">
             <a:extLst>
               <a:ext uri="{FF2B5EF4-FFF2-40B4-BE49-F238E27FC236}">
-                <a16:creationId xmlns:a16="http://schemas.microsoft.com/office/drawing/2014/main" id="{7FD30D96-ED2E-955C-3279-ABD99292E4F8}"/>
+                <a16:creationId xmlns:a16="http://schemas.microsoft.com/office/drawing/2014/main" id="{B8462171-DABC-B781-6116-F353670C3F77}"/>
               </a:ext>
             </a:extLst>
           </p:cNvPr>
@@ -5016,7 +5016,7 @@
           <p:cNvPr id="19" name="テキスト ボックス 18">
             <a:extLst>
               <a:ext uri="{FF2B5EF4-FFF2-40B4-BE49-F238E27FC236}">
-                <a16:creationId xmlns:a16="http://schemas.microsoft.com/office/drawing/2014/main" id="{69442A23-4D6B-FDE6-FEF8-0CE37E6BB3F3}"/>
+                <a16:creationId xmlns:a16="http://schemas.microsoft.com/office/drawing/2014/main" id="{7B28B28F-EEFB-6E23-9425-06A0B415A84E}"/>
               </a:ext>
             </a:extLst>
           </p:cNvPr>
@@ -5077,7 +5077,7 @@
           <p:cNvPr id="20" name="正方形/長方形 19">
             <a:extLst>
               <a:ext uri="{FF2B5EF4-FFF2-40B4-BE49-F238E27FC236}">
-                <a16:creationId xmlns:a16="http://schemas.microsoft.com/office/drawing/2014/main" id="{756D738F-52DF-A83C-F863-5F1292FC9244}"/>
+                <a16:creationId xmlns:a16="http://schemas.microsoft.com/office/drawing/2014/main" id="{A893675B-ABC2-9FC1-5537-56D5894BCE52}"/>
               </a:ext>
             </a:extLst>
           </p:cNvPr>
@@ -5131,7 +5131,7 @@
           <p:cNvPr id="21" name="正方形/長方形 20">
             <a:extLst>
               <a:ext uri="{FF2B5EF4-FFF2-40B4-BE49-F238E27FC236}">
-                <a16:creationId xmlns:a16="http://schemas.microsoft.com/office/drawing/2014/main" id="{0FCB1955-DAEF-AEAD-C66A-5A6404CB6CF3}"/>
+                <a16:creationId xmlns:a16="http://schemas.microsoft.com/office/drawing/2014/main" id="{25FFFBD0-6024-F87F-60FF-0C1CDB0E5E48}"/>
               </a:ext>
             </a:extLst>
           </p:cNvPr>
@@ -5199,7 +5199,7 @@
           <p:cNvPr id="22" name="テキスト ボックス 21">
             <a:extLst>
               <a:ext uri="{FF2B5EF4-FFF2-40B4-BE49-F238E27FC236}">
-                <a16:creationId xmlns:a16="http://schemas.microsoft.com/office/drawing/2014/main" id="{CD9CA09C-AC93-80AA-6281-C514FF9DE8F4}"/>
+                <a16:creationId xmlns:a16="http://schemas.microsoft.com/office/drawing/2014/main" id="{82F3A8E2-3510-5BEF-ABAA-ADAC4CA680A0}"/>
               </a:ext>
             </a:extLst>
           </p:cNvPr>
@@ -5250,7 +5250,7 @@
           <p:cNvPr id="23" name="正方形/長方形 22">
             <a:extLst>
               <a:ext uri="{FF2B5EF4-FFF2-40B4-BE49-F238E27FC236}">
-                <a16:creationId xmlns:a16="http://schemas.microsoft.com/office/drawing/2014/main" id="{F09771F4-C232-091A-6A0A-8B03A3A943D1}"/>
+                <a16:creationId xmlns:a16="http://schemas.microsoft.com/office/drawing/2014/main" id="{30BA4CB9-CD12-42C3-4C1D-B732073879F5}"/>
               </a:ext>
             </a:extLst>
           </p:cNvPr>
@@ -5318,7 +5318,7 @@
           <p:cNvPr id="24" name="テキスト ボックス 23">
             <a:extLst>
               <a:ext uri="{FF2B5EF4-FFF2-40B4-BE49-F238E27FC236}">
-                <a16:creationId xmlns:a16="http://schemas.microsoft.com/office/drawing/2014/main" id="{C5388588-063F-5B39-A3D3-F6CA7AF05183}"/>
+                <a16:creationId xmlns:a16="http://schemas.microsoft.com/office/drawing/2014/main" id="{9912C672-6FED-DD43-4B29-5D1A89A70BEC}"/>
               </a:ext>
             </a:extLst>
           </p:cNvPr>
@@ -5359,7 +5359,7 @@
           <p:cNvPr id="25" name="正方形/長方形 24">
             <a:extLst>
               <a:ext uri="{FF2B5EF4-FFF2-40B4-BE49-F238E27FC236}">
-                <a16:creationId xmlns:a16="http://schemas.microsoft.com/office/drawing/2014/main" id="{8E9F5272-2A48-268D-F58F-51315F10EE48}"/>
+                <a16:creationId xmlns:a16="http://schemas.microsoft.com/office/drawing/2014/main" id="{E397CB2C-21A0-8706-08A9-99F5FBD717C0}"/>
               </a:ext>
             </a:extLst>
           </p:cNvPr>
@@ -5413,7 +5413,7 @@
           <p:cNvPr id="26" name="正方形/長方形 25">
             <a:extLst>
               <a:ext uri="{FF2B5EF4-FFF2-40B4-BE49-F238E27FC236}">
-                <a16:creationId xmlns:a16="http://schemas.microsoft.com/office/drawing/2014/main" id="{3704A9DC-A03E-3B33-9B2C-22C866495341}"/>
+                <a16:creationId xmlns:a16="http://schemas.microsoft.com/office/drawing/2014/main" id="{79D4F908-9A5F-3364-A90F-CB3242A45B62}"/>
               </a:ext>
             </a:extLst>
           </p:cNvPr>
@@ -5481,7 +5481,7 @@
           <p:cNvPr id="27" name="テキスト ボックス 26">
             <a:extLst>
               <a:ext uri="{FF2B5EF4-FFF2-40B4-BE49-F238E27FC236}">
-                <a16:creationId xmlns:a16="http://schemas.microsoft.com/office/drawing/2014/main" id="{5DFE765B-BF22-3284-01BB-035AD1BAEB8C}"/>
+                <a16:creationId xmlns:a16="http://schemas.microsoft.com/office/drawing/2014/main" id="{47CB8D97-459D-4C31-2AC3-637531848F7D}"/>
               </a:ext>
             </a:extLst>
           </p:cNvPr>
@@ -5539,7 +5539,7 @@
           <p:cNvPr id="28" name="正方形/長方形 27">
             <a:extLst>
               <a:ext uri="{FF2B5EF4-FFF2-40B4-BE49-F238E27FC236}">
-                <a16:creationId xmlns:a16="http://schemas.microsoft.com/office/drawing/2014/main" id="{8E5382CD-6FC7-A478-0259-367D7E18B375}"/>
+                <a16:creationId xmlns:a16="http://schemas.microsoft.com/office/drawing/2014/main" id="{4B4E2379-1B40-00AB-46BB-C70E57F9DEE4}"/>
               </a:ext>
             </a:extLst>
           </p:cNvPr>
@@ -5607,7 +5607,7 @@
           <p:cNvPr id="29" name="テキスト ボックス 28">
             <a:extLst>
               <a:ext uri="{FF2B5EF4-FFF2-40B4-BE49-F238E27FC236}">
-                <a16:creationId xmlns:a16="http://schemas.microsoft.com/office/drawing/2014/main" id="{C0D4D5AA-F475-6ECB-8A28-ADF7222AA076}"/>
+                <a16:creationId xmlns:a16="http://schemas.microsoft.com/office/drawing/2014/main" id="{8EB6DAF1-A311-D6FB-6D61-E06D44158BAC}"/>
               </a:ext>
             </a:extLst>
           </p:cNvPr>
@@ -5656,7 +5656,7 @@
     </p:spTree>
     <p:extLst>
       <p:ext uri="{BB962C8B-B14F-4D97-AF65-F5344CB8AC3E}">
-        <p14:creationId xmlns:p14="http://schemas.microsoft.com/office/powerpoint/2010/main" val="3107452537"/>
+        <p14:creationId xmlns:p14="http://schemas.microsoft.com/office/powerpoint/2010/main" val="1804302006"/>
       </p:ext>
     </p:extLst>
   </p:cSld>
@@ -5688,7 +5688,7 @@
           <p:cNvPr id="2" name="正方形/長方形 1">
             <a:extLst>
               <a:ext uri="{FF2B5EF4-FFF2-40B4-BE49-F238E27FC236}">
-                <a16:creationId xmlns:a16="http://schemas.microsoft.com/office/drawing/2014/main" id="{3A8D2C47-BC23-6C4D-9D11-C05DC002984F}"/>
+                <a16:creationId xmlns:a16="http://schemas.microsoft.com/office/drawing/2014/main" id="{7361A178-0931-2290-8E79-E4F5BD03B12A}"/>
               </a:ext>
             </a:extLst>
           </p:cNvPr>
@@ -5756,7 +5756,7 @@
           <p:cNvPr id="3" name="正方形/長方形 2">
             <a:extLst>
               <a:ext uri="{FF2B5EF4-FFF2-40B4-BE49-F238E27FC236}">
-                <a16:creationId xmlns:a16="http://schemas.microsoft.com/office/drawing/2014/main" id="{93FA00C0-EF84-B36B-14D1-4D3702EE443E}"/>
+                <a16:creationId xmlns:a16="http://schemas.microsoft.com/office/drawing/2014/main" id="{4AF6AEE7-5C47-DEC3-2983-AA23CE425F99}"/>
               </a:ext>
             </a:extLst>
           </p:cNvPr>
@@ -5824,7 +5824,7 @@
           <p:cNvPr id="4" name="正方形/長方形 3">
             <a:extLst>
               <a:ext uri="{FF2B5EF4-FFF2-40B4-BE49-F238E27FC236}">
-                <a16:creationId xmlns:a16="http://schemas.microsoft.com/office/drawing/2014/main" id="{418466B5-D408-1BFA-4CC3-43C708A42E67}"/>
+                <a16:creationId xmlns:a16="http://schemas.microsoft.com/office/drawing/2014/main" id="{324FD8BE-2A86-C064-DE3F-1978CFF8BC5B}"/>
               </a:ext>
             </a:extLst>
           </p:cNvPr>
@@ -5892,7 +5892,7 @@
           <p:cNvPr id="5" name="テキスト ボックス 4">
             <a:extLst>
               <a:ext uri="{FF2B5EF4-FFF2-40B4-BE49-F238E27FC236}">
-                <a16:creationId xmlns:a16="http://schemas.microsoft.com/office/drawing/2014/main" id="{CDF6ACB8-E434-9FDD-A9E1-A1AE3ACB3B75}"/>
+                <a16:creationId xmlns:a16="http://schemas.microsoft.com/office/drawing/2014/main" id="{CD495201-0AD4-A2E0-1F5D-7A5CFA2424E1}"/>
               </a:ext>
             </a:extLst>
           </p:cNvPr>
@@ -5954,7 +5954,7 @@
           <p:cNvPr id="6" name="テキスト ボックス 5">
             <a:extLst>
               <a:ext uri="{FF2B5EF4-FFF2-40B4-BE49-F238E27FC236}">
-                <a16:creationId xmlns:a16="http://schemas.microsoft.com/office/drawing/2014/main" id="{9F77EA4D-BFFD-0A0D-46A4-ADD7F546AC6A}"/>
+                <a16:creationId xmlns:a16="http://schemas.microsoft.com/office/drawing/2014/main" id="{E8C03E53-F89B-4387-D265-D6A87ABCFF32}"/>
               </a:ext>
             </a:extLst>
           </p:cNvPr>
@@ -5963,8 +5963,8 @@
         </p:nvSpPr>
         <p:spPr>
           <a:xfrm>
-            <a:off x="2336800" y="139700"/>
-            <a:ext cx="8382000" cy="410369"/>
+            <a:off x="2311400" y="165100"/>
+            <a:ext cx="8585200" cy="379591"/>
           </a:xfrm>
           <a:prstGeom prst="rect">
             <a:avLst/>
@@ -5978,7 +5978,7 @@
           <a:lstStyle/>
           <a:p>
             <a:r>
-              <a:rPr kumimoji="1" lang="en-US" altLang="ja-JP" sz="2000" b="1">
+              <a:rPr kumimoji="1" lang="en-US" altLang="ja-JP" b="1">
                 <a:solidFill>
                   <a:srgbClr val="FFFFFF"/>
                 </a:solidFill>
@@ -5988,7 +5988,7 @@
               <a:t>1</a:t>
             </a:r>
             <a:r>
-              <a:rPr kumimoji="1" lang="ja-JP" altLang="en-US" sz="2000" b="1">
+              <a:rPr kumimoji="1" lang="ja-JP" altLang="en-US" b="1">
                 <a:solidFill>
                   <a:srgbClr val="FFFFFF"/>
                 </a:solidFill>
@@ -5998,7 +5998,7 @@
               <a:t>日目（</a:t>
             </a:r>
             <a:r>
-              <a:rPr kumimoji="1" lang="en-US" altLang="ja-JP" sz="2000" b="1">
+              <a:rPr kumimoji="1" lang="en-US" altLang="ja-JP" b="1">
                 <a:solidFill>
                   <a:srgbClr val="FFFFFF"/>
                 </a:solidFill>
@@ -6008,7 +6008,7 @@
               <a:t>106</a:t>
             </a:r>
             <a:r>
-              <a:rPr kumimoji="1" lang="ja-JP" altLang="en-US" sz="2000" b="1">
+              <a:rPr kumimoji="1" lang="ja-JP" altLang="en-US" b="1">
                 <a:solidFill>
                   <a:srgbClr val="FFFFFF"/>
                 </a:solidFill>
@@ -6018,7 +6018,7 @@
               <a:t>名）と </a:t>
             </a:r>
             <a:r>
-              <a:rPr kumimoji="1" lang="en-US" altLang="ja-JP" sz="2000" b="1">
+              <a:rPr kumimoji="1" lang="en-US" altLang="ja-JP" b="1">
                 <a:solidFill>
                   <a:srgbClr val="FFFFFF"/>
                 </a:solidFill>
@@ -6028,7 +6028,7 @@
               <a:t>2</a:t>
             </a:r>
             <a:r>
-              <a:rPr kumimoji="1" lang="ja-JP" altLang="en-US" sz="2000" b="1">
+              <a:rPr kumimoji="1" lang="ja-JP" altLang="en-US" b="1">
                 <a:solidFill>
                   <a:srgbClr val="FFFFFF"/>
                 </a:solidFill>
@@ -6038,7 +6038,7 @@
               <a:t>日目（</a:t>
             </a:r>
             <a:r>
-              <a:rPr kumimoji="1" lang="en-US" altLang="ja-JP" sz="2000" b="1">
+              <a:rPr kumimoji="1" lang="en-US" altLang="ja-JP" b="1">
                 <a:solidFill>
                   <a:srgbClr val="FFFFFF"/>
                 </a:solidFill>
@@ -6048,7 +6048,7 @@
               <a:t>130</a:t>
             </a:r>
             <a:r>
-              <a:rPr kumimoji="1" lang="ja-JP" altLang="en-US" sz="2000" b="1">
+              <a:rPr kumimoji="1" lang="ja-JP" altLang="en-US" b="1">
                 <a:solidFill>
                   <a:srgbClr val="FFFFFF"/>
                 </a:solidFill>
@@ -6065,7 +6065,7 @@
           <p:cNvPr id="7" name="テキスト ボックス 6">
             <a:extLst>
               <a:ext uri="{FF2B5EF4-FFF2-40B4-BE49-F238E27FC236}">
-                <a16:creationId xmlns:a16="http://schemas.microsoft.com/office/drawing/2014/main" id="{26D25390-3EDD-CE31-32FB-EE15CC4E82BA}"/>
+                <a16:creationId xmlns:a16="http://schemas.microsoft.com/office/drawing/2014/main" id="{63487733-9335-3767-9C8F-80CBA596A8C6}"/>
               </a:ext>
             </a:extLst>
           </p:cNvPr>
@@ -6074,8 +6074,8 @@
         </p:nvSpPr>
         <p:spPr>
           <a:xfrm>
-            <a:off x="10668000" y="203200"/>
-            <a:ext cx="1219200" cy="302647"/>
+            <a:off x="10896600" y="203200"/>
+            <a:ext cx="990600" cy="302647"/>
           </a:xfrm>
           <a:prstGeom prst="rect">
             <a:avLst/>
@@ -6114,7 +6114,7 @@
           <p:cNvPr id="8" name="正方形/長方形 7">
             <a:extLst>
               <a:ext uri="{FF2B5EF4-FFF2-40B4-BE49-F238E27FC236}">
-                <a16:creationId xmlns:a16="http://schemas.microsoft.com/office/drawing/2014/main" id="{5C1F1CFB-46FE-B2E3-D9D4-E6A2A6A85F0D}"/>
+                <a16:creationId xmlns:a16="http://schemas.microsoft.com/office/drawing/2014/main" id="{A8D82EBD-6B9B-E0B7-EA6D-ACF26227993A}"/>
               </a:ext>
             </a:extLst>
           </p:cNvPr>
@@ -6168,7 +6168,7 @@
           <p:cNvPr id="9" name="正方形/長方形 8">
             <a:extLst>
               <a:ext uri="{FF2B5EF4-FFF2-40B4-BE49-F238E27FC236}">
-                <a16:creationId xmlns:a16="http://schemas.microsoft.com/office/drawing/2014/main" id="{683E0368-88F1-6586-100F-C4ED2D7AE015}"/>
+                <a16:creationId xmlns:a16="http://schemas.microsoft.com/office/drawing/2014/main" id="{A86D6ADE-2E35-2115-6BDE-3C26D48FED9E}"/>
               </a:ext>
             </a:extLst>
           </p:cNvPr>
@@ -6236,7 +6236,7 @@
           <p:cNvPr id="10" name="テキスト ボックス 9">
             <a:extLst>
               <a:ext uri="{FF2B5EF4-FFF2-40B4-BE49-F238E27FC236}">
-                <a16:creationId xmlns:a16="http://schemas.microsoft.com/office/drawing/2014/main" id="{2AC9AC19-C5D9-D4F1-B6A9-D94CD4EE6E00}"/>
+                <a16:creationId xmlns:a16="http://schemas.microsoft.com/office/drawing/2014/main" id="{13E7379F-0B8B-2D72-EC7B-28774F161D12}"/>
               </a:ext>
             </a:extLst>
           </p:cNvPr>
@@ -6387,7 +6387,7 @@
           <p:cNvPr id="11" name="正方形/長方形 10">
             <a:extLst>
               <a:ext uri="{FF2B5EF4-FFF2-40B4-BE49-F238E27FC236}">
-                <a16:creationId xmlns:a16="http://schemas.microsoft.com/office/drawing/2014/main" id="{7F0BA8E9-598C-B634-0789-8F641649D3A6}"/>
+                <a16:creationId xmlns:a16="http://schemas.microsoft.com/office/drawing/2014/main" id="{F64F8F4C-5089-E000-F514-13AF2104476B}"/>
               </a:ext>
             </a:extLst>
           </p:cNvPr>
@@ -6441,7 +6441,7 @@
           <p:cNvPr id="12" name="正方形/長方形 11">
             <a:extLst>
               <a:ext uri="{FF2B5EF4-FFF2-40B4-BE49-F238E27FC236}">
-                <a16:creationId xmlns:a16="http://schemas.microsoft.com/office/drawing/2014/main" id="{90FD5A45-B123-8774-9C9D-4EA00EC71475}"/>
+                <a16:creationId xmlns:a16="http://schemas.microsoft.com/office/drawing/2014/main" id="{8D4AB298-C891-F8A4-43DD-0BF5A9B112ED}"/>
               </a:ext>
             </a:extLst>
           </p:cNvPr>
@@ -6509,7 +6509,7 @@
           <p:cNvPr id="13" name="テキスト ボックス 12">
             <a:extLst>
               <a:ext uri="{FF2B5EF4-FFF2-40B4-BE49-F238E27FC236}">
-                <a16:creationId xmlns:a16="http://schemas.microsoft.com/office/drawing/2014/main" id="{8F010A10-E31B-496F-EA86-8D2D3D0A68CA}"/>
+                <a16:creationId xmlns:a16="http://schemas.microsoft.com/office/drawing/2014/main" id="{E3023541-4802-E8F2-E122-495286030095}"/>
               </a:ext>
             </a:extLst>
           </p:cNvPr>
@@ -6590,7 +6590,7 @@
           <p:cNvPr id="14" name="正方形/長方形 13">
             <a:extLst>
               <a:ext uri="{FF2B5EF4-FFF2-40B4-BE49-F238E27FC236}">
-                <a16:creationId xmlns:a16="http://schemas.microsoft.com/office/drawing/2014/main" id="{3AB73A11-8091-7549-EB0B-DD29F67195C4}"/>
+                <a16:creationId xmlns:a16="http://schemas.microsoft.com/office/drawing/2014/main" id="{F3449D59-3D46-DC83-22CF-661D6F3F6B0C}"/>
               </a:ext>
             </a:extLst>
           </p:cNvPr>
@@ -6658,7 +6658,7 @@
           <p:cNvPr id="15" name="表 14">
             <a:extLst>
               <a:ext uri="{FF2B5EF4-FFF2-40B4-BE49-F238E27FC236}">
-                <a16:creationId xmlns:a16="http://schemas.microsoft.com/office/drawing/2014/main" id="{063A8346-7B75-A17B-195D-99F45EB7ADD0}"/>
+                <a16:creationId xmlns:a16="http://schemas.microsoft.com/office/drawing/2014/main" id="{763DED26-8BA4-B54B-A4CC-5FFD4A5C3A20}"/>
               </a:ext>
             </a:extLst>
           </p:cNvPr>
@@ -6668,7 +6668,7 @@
           <p:nvPr>
             <p:extLst>
               <p:ext uri="{D42A27DB-BD31-4B8C-83A1-F6EECF244321}">
-                <p14:modId xmlns:p14="http://schemas.microsoft.com/office/powerpoint/2010/main" val="1708627568"/>
+                <p14:modId xmlns:p14="http://schemas.microsoft.com/office/powerpoint/2010/main" val="2736145645"/>
               </p:ext>
             </p:extLst>
           </p:nvPr>
@@ -6687,28 +6687,28 @@
                 <a:gridCol w="1930400">
                   <a:extLst>
                     <a:ext uri="{9D8B030D-6E8A-4147-A177-3AD203B41FA5}">
-                      <a16:colId xmlns:a16="http://schemas.microsoft.com/office/drawing/2014/main" val="4258852475"/>
+                      <a16:colId xmlns:a16="http://schemas.microsoft.com/office/drawing/2014/main" val="2422654544"/>
                     </a:ext>
                   </a:extLst>
                 </a:gridCol>
                 <a:gridCol w="1346200">
                   <a:extLst>
                     <a:ext uri="{9D8B030D-6E8A-4147-A177-3AD203B41FA5}">
-                      <a16:colId xmlns:a16="http://schemas.microsoft.com/office/drawing/2014/main" val="1233657165"/>
+                      <a16:colId xmlns:a16="http://schemas.microsoft.com/office/drawing/2014/main" val="2786321596"/>
                     </a:ext>
                   </a:extLst>
                 </a:gridCol>
                 <a:gridCol w="1422400">
                   <a:extLst>
                     <a:ext uri="{9D8B030D-6E8A-4147-A177-3AD203B41FA5}">
-                      <a16:colId xmlns:a16="http://schemas.microsoft.com/office/drawing/2014/main" val="1271258341"/>
+                      <a16:colId xmlns:a16="http://schemas.microsoft.com/office/drawing/2014/main" val="2780967039"/>
                     </a:ext>
                   </a:extLst>
                 </a:gridCol>
                 <a:gridCol w="1422400">
                   <a:extLst>
                     <a:ext uri="{9D8B030D-6E8A-4147-A177-3AD203B41FA5}">
-                      <a16:colId xmlns:a16="http://schemas.microsoft.com/office/drawing/2014/main" val="2416042521"/>
+                      <a16:colId xmlns:a16="http://schemas.microsoft.com/office/drawing/2014/main" val="3239255248"/>
                     </a:ext>
                   </a:extLst>
                 </a:gridCol>
@@ -6939,7 +6939,7 @@
                 </a:tc>
                 <a:extLst>
                   <a:ext uri="{0D108BD9-81ED-4DB2-BD59-A6C34878D82A}">
-                    <a16:rowId xmlns:a16="http://schemas.microsoft.com/office/drawing/2014/main" val="459353846"/>
+                    <a16:rowId xmlns:a16="http://schemas.microsoft.com/office/drawing/2014/main" val="1161592971"/>
                   </a:ext>
                 </a:extLst>
               </a:tr>
@@ -7136,7 +7136,7 @@
                 </a:tc>
                 <a:extLst>
                   <a:ext uri="{0D108BD9-81ED-4DB2-BD59-A6C34878D82A}">
-                    <a16:rowId xmlns:a16="http://schemas.microsoft.com/office/drawing/2014/main" val="2675523668"/>
+                    <a16:rowId xmlns:a16="http://schemas.microsoft.com/office/drawing/2014/main" val="3453183375"/>
                   </a:ext>
                 </a:extLst>
               </a:tr>
@@ -7329,7 +7329,7 @@
                 </a:tc>
                 <a:extLst>
                   <a:ext uri="{0D108BD9-81ED-4DB2-BD59-A6C34878D82A}">
-                    <a16:rowId xmlns:a16="http://schemas.microsoft.com/office/drawing/2014/main" val="1667457593"/>
+                    <a16:rowId xmlns:a16="http://schemas.microsoft.com/office/drawing/2014/main" val="3972928146"/>
                   </a:ext>
                 </a:extLst>
               </a:tr>
@@ -7526,7 +7526,7 @@
                 </a:tc>
                 <a:extLst>
                   <a:ext uri="{0D108BD9-81ED-4DB2-BD59-A6C34878D82A}">
-                    <a16:rowId xmlns:a16="http://schemas.microsoft.com/office/drawing/2014/main" val="2668380595"/>
+                    <a16:rowId xmlns:a16="http://schemas.microsoft.com/office/drawing/2014/main" val="3613387755"/>
                   </a:ext>
                 </a:extLst>
               </a:tr>
@@ -7716,7 +7716,7 @@
                 </a:tc>
                 <a:extLst>
                   <a:ext uri="{0D108BD9-81ED-4DB2-BD59-A6C34878D82A}">
-                    <a16:rowId xmlns:a16="http://schemas.microsoft.com/office/drawing/2014/main" val="164431915"/>
+                    <a16:rowId xmlns:a16="http://schemas.microsoft.com/office/drawing/2014/main" val="318944392"/>
                   </a:ext>
                 </a:extLst>
               </a:tr>
@@ -7913,7 +7913,7 @@
                 </a:tc>
                 <a:extLst>
                   <a:ext uri="{0D108BD9-81ED-4DB2-BD59-A6C34878D82A}">
-                    <a16:rowId xmlns:a16="http://schemas.microsoft.com/office/drawing/2014/main" val="2009206330"/>
+                    <a16:rowId xmlns:a16="http://schemas.microsoft.com/office/drawing/2014/main" val="1769609199"/>
                   </a:ext>
                 </a:extLst>
               </a:tr>
@@ -8100,7 +8100,7 @@
                 </a:tc>
                 <a:extLst>
                   <a:ext uri="{0D108BD9-81ED-4DB2-BD59-A6C34878D82A}">
-                    <a16:rowId xmlns:a16="http://schemas.microsoft.com/office/drawing/2014/main" val="1163428923"/>
+                    <a16:rowId xmlns:a16="http://schemas.microsoft.com/office/drawing/2014/main" val="2032899132"/>
                   </a:ext>
                 </a:extLst>
               </a:tr>
@@ -8280,7 +8280,7 @@
                 </a:tc>
                 <a:extLst>
                   <a:ext uri="{0D108BD9-81ED-4DB2-BD59-A6C34878D82A}">
-                    <a16:rowId xmlns:a16="http://schemas.microsoft.com/office/drawing/2014/main" val="3373645206"/>
+                    <a16:rowId xmlns:a16="http://schemas.microsoft.com/office/drawing/2014/main" val="1358985876"/>
                   </a:ext>
                 </a:extLst>
               </a:tr>
@@ -8293,7 +8293,7 @@
           <p:cNvPr id="16" name="正方形/長方形 15">
             <a:extLst>
               <a:ext uri="{FF2B5EF4-FFF2-40B4-BE49-F238E27FC236}">
-                <a16:creationId xmlns:a16="http://schemas.microsoft.com/office/drawing/2014/main" id="{5F823B5A-6DA0-798B-B6CA-EDCCEBE50D12}"/>
+                <a16:creationId xmlns:a16="http://schemas.microsoft.com/office/drawing/2014/main" id="{EED4568C-66F8-895A-843B-6362F34136E0}"/>
               </a:ext>
             </a:extLst>
           </p:cNvPr>
@@ -8347,7 +8347,7 @@
           <p:cNvPr id="17" name="正方形/長方形 16">
             <a:extLst>
               <a:ext uri="{FF2B5EF4-FFF2-40B4-BE49-F238E27FC236}">
-                <a16:creationId xmlns:a16="http://schemas.microsoft.com/office/drawing/2014/main" id="{DE5DBB52-CBF9-FBE0-0533-DC980AEBF513}"/>
+                <a16:creationId xmlns:a16="http://schemas.microsoft.com/office/drawing/2014/main" id="{F4B0439B-B32B-BB9F-7087-50F2D11D2C8A}"/>
               </a:ext>
             </a:extLst>
           </p:cNvPr>
@@ -8415,7 +8415,7 @@
           <p:cNvPr id="18" name="テキスト ボックス 17">
             <a:extLst>
               <a:ext uri="{FF2B5EF4-FFF2-40B4-BE49-F238E27FC236}">
-                <a16:creationId xmlns:a16="http://schemas.microsoft.com/office/drawing/2014/main" id="{B5DD6267-7C26-F128-62F9-D590572CEE15}"/>
+                <a16:creationId xmlns:a16="http://schemas.microsoft.com/office/drawing/2014/main" id="{BEE6209D-67D0-D088-8342-9868EFF95FE7}"/>
               </a:ext>
             </a:extLst>
           </p:cNvPr>
@@ -8456,7 +8456,7 @@
           <p:cNvPr id="19" name="正方形/長方形 18">
             <a:extLst>
               <a:ext uri="{FF2B5EF4-FFF2-40B4-BE49-F238E27FC236}">
-                <a16:creationId xmlns:a16="http://schemas.microsoft.com/office/drawing/2014/main" id="{6E03963E-0E17-02C2-2F76-040A8E3D21E3}"/>
+                <a16:creationId xmlns:a16="http://schemas.microsoft.com/office/drawing/2014/main" id="{098C265D-42C5-2FC7-F6B1-09AEA6F7D0B1}"/>
               </a:ext>
             </a:extLst>
           </p:cNvPr>
@@ -8524,7 +8524,7 @@
           <p:cNvPr id="20" name="テキスト ボックス 19">
             <a:extLst>
               <a:ext uri="{FF2B5EF4-FFF2-40B4-BE49-F238E27FC236}">
-                <a16:creationId xmlns:a16="http://schemas.microsoft.com/office/drawing/2014/main" id="{A4A4F495-6A7A-6F6A-8315-DD62A62584B3}"/>
+                <a16:creationId xmlns:a16="http://schemas.microsoft.com/office/drawing/2014/main" id="{1A3BF4A1-9D53-67E6-0952-741BD55B9EB7}"/>
               </a:ext>
             </a:extLst>
           </p:cNvPr>
@@ -9280,7 +9280,7 @@
     </p:spTree>
     <p:extLst>
       <p:ext uri="{BB962C8B-B14F-4D97-AF65-F5344CB8AC3E}">
-        <p14:creationId xmlns:p14="http://schemas.microsoft.com/office/powerpoint/2010/main" val="1998410493"/>
+        <p14:creationId xmlns:p14="http://schemas.microsoft.com/office/powerpoint/2010/main" val="1575599087"/>
       </p:ext>
     </p:extLst>
   </p:cSld>
@@ -9312,7 +9312,7 @@
           <p:cNvPr id="2" name="正方形/長方形 1">
             <a:extLst>
               <a:ext uri="{FF2B5EF4-FFF2-40B4-BE49-F238E27FC236}">
-                <a16:creationId xmlns:a16="http://schemas.microsoft.com/office/drawing/2014/main" id="{C6F20212-E304-B291-02BF-467E57F50D46}"/>
+                <a16:creationId xmlns:a16="http://schemas.microsoft.com/office/drawing/2014/main" id="{5E6A5E74-A0EB-DD85-3884-320D87ECDEB5}"/>
               </a:ext>
             </a:extLst>
           </p:cNvPr>
@@ -9380,7 +9380,7 @@
           <p:cNvPr id="3" name="正方形/長方形 2">
             <a:extLst>
               <a:ext uri="{FF2B5EF4-FFF2-40B4-BE49-F238E27FC236}">
-                <a16:creationId xmlns:a16="http://schemas.microsoft.com/office/drawing/2014/main" id="{464AB3B6-943D-BB32-892A-2B7CD4084953}"/>
+                <a16:creationId xmlns:a16="http://schemas.microsoft.com/office/drawing/2014/main" id="{5A78E688-556A-F659-CAD5-BEF7C21F413D}"/>
               </a:ext>
             </a:extLst>
           </p:cNvPr>
@@ -9448,7 +9448,7 @@
           <p:cNvPr id="4" name="正方形/長方形 3">
             <a:extLst>
               <a:ext uri="{FF2B5EF4-FFF2-40B4-BE49-F238E27FC236}">
-                <a16:creationId xmlns:a16="http://schemas.microsoft.com/office/drawing/2014/main" id="{13B09757-9D50-8AD7-2297-620C51EFF702}"/>
+                <a16:creationId xmlns:a16="http://schemas.microsoft.com/office/drawing/2014/main" id="{04C4ECD5-6775-1998-514C-5AD62AEE4B8E}"/>
               </a:ext>
             </a:extLst>
           </p:cNvPr>
@@ -9516,7 +9516,7 @@
           <p:cNvPr id="5" name="テキスト ボックス 4">
             <a:extLst>
               <a:ext uri="{FF2B5EF4-FFF2-40B4-BE49-F238E27FC236}">
-                <a16:creationId xmlns:a16="http://schemas.microsoft.com/office/drawing/2014/main" id="{9D548869-B264-4BE2-0821-6F681C0872B5}"/>
+                <a16:creationId xmlns:a16="http://schemas.microsoft.com/office/drawing/2014/main" id="{79E65BB0-2C3D-91A8-8D36-3305EF850F50}"/>
               </a:ext>
             </a:extLst>
           </p:cNvPr>
@@ -9578,7 +9578,7 @@
           <p:cNvPr id="6" name="テキスト ボックス 5">
             <a:extLst>
               <a:ext uri="{FF2B5EF4-FFF2-40B4-BE49-F238E27FC236}">
-                <a16:creationId xmlns:a16="http://schemas.microsoft.com/office/drawing/2014/main" id="{B26C7B76-7949-80F4-ABFB-D36B22A4464E}"/>
+                <a16:creationId xmlns:a16="http://schemas.microsoft.com/office/drawing/2014/main" id="{922857E3-5306-8D8F-EE4B-8FFD4D62C5F3}"/>
               </a:ext>
             </a:extLst>
           </p:cNvPr>
@@ -9587,8 +9587,8 @@
         </p:nvSpPr>
         <p:spPr>
           <a:xfrm>
-            <a:off x="2336800" y="139700"/>
-            <a:ext cx="8382000" cy="410369"/>
+            <a:off x="2311400" y="165100"/>
+            <a:ext cx="8585200" cy="379591"/>
           </a:xfrm>
           <a:prstGeom prst="rect">
             <a:avLst/>
@@ -9602,7 +9602,7 @@
           <a:lstStyle/>
           <a:p>
             <a:r>
-              <a:rPr kumimoji="1" lang="ja-JP" altLang="en-US" sz="2000" b="1">
+              <a:rPr kumimoji="1" lang="ja-JP" altLang="en-US" b="1">
                 <a:solidFill>
                   <a:srgbClr val="FFFFFF"/>
                 </a:solidFill>
@@ -9619,7 +9619,7 @@
           <p:cNvPr id="7" name="テキスト ボックス 6">
             <a:extLst>
               <a:ext uri="{FF2B5EF4-FFF2-40B4-BE49-F238E27FC236}">
-                <a16:creationId xmlns:a16="http://schemas.microsoft.com/office/drawing/2014/main" id="{EBF03520-833C-F873-E012-6842F21B3CC5}"/>
+                <a16:creationId xmlns:a16="http://schemas.microsoft.com/office/drawing/2014/main" id="{05BDB17D-2D25-29C0-E460-2EC5E84CD289}"/>
               </a:ext>
             </a:extLst>
           </p:cNvPr>
@@ -9628,8 +9628,8 @@
         </p:nvSpPr>
         <p:spPr>
           <a:xfrm>
-            <a:off x="10668000" y="203200"/>
-            <a:ext cx="1219200" cy="302647"/>
+            <a:off x="10896600" y="203200"/>
+            <a:ext cx="990600" cy="302647"/>
           </a:xfrm>
           <a:prstGeom prst="rect">
             <a:avLst/>
@@ -9668,7 +9668,7 @@
           <p:cNvPr id="8" name="正方形/長方形 7">
             <a:extLst>
               <a:ext uri="{FF2B5EF4-FFF2-40B4-BE49-F238E27FC236}">
-                <a16:creationId xmlns:a16="http://schemas.microsoft.com/office/drawing/2014/main" id="{ECC2F073-F41A-1373-6289-0CA928398B3F}"/>
+                <a16:creationId xmlns:a16="http://schemas.microsoft.com/office/drawing/2014/main" id="{1A136D01-DB33-A22C-66E5-41C1852A1560}"/>
               </a:ext>
             </a:extLst>
           </p:cNvPr>
@@ -9722,7 +9722,7 @@
           <p:cNvPr id="9" name="正方形/長方形 8">
             <a:extLst>
               <a:ext uri="{FF2B5EF4-FFF2-40B4-BE49-F238E27FC236}">
-                <a16:creationId xmlns:a16="http://schemas.microsoft.com/office/drawing/2014/main" id="{A576302A-15BC-F281-5DE7-B571F2A13DF5}"/>
+                <a16:creationId xmlns:a16="http://schemas.microsoft.com/office/drawing/2014/main" id="{A7B223DF-20D4-7CBE-F86E-F29199BB9146}"/>
               </a:ext>
             </a:extLst>
           </p:cNvPr>
@@ -9790,7 +9790,7 @@
           <p:cNvPr id="10" name="テキスト ボックス 9">
             <a:extLst>
               <a:ext uri="{FF2B5EF4-FFF2-40B4-BE49-F238E27FC236}">
-                <a16:creationId xmlns:a16="http://schemas.microsoft.com/office/drawing/2014/main" id="{E9512C32-725E-9289-F43C-F3AAB84F3174}"/>
+                <a16:creationId xmlns:a16="http://schemas.microsoft.com/office/drawing/2014/main" id="{17CF8AFC-AC8A-9307-7EF9-C5828DC2F005}"/>
               </a:ext>
             </a:extLst>
           </p:cNvPr>
@@ -9891,7 +9891,7 @@
           <p:cNvPr id="11" name="正方形/長方形 10">
             <a:extLst>
               <a:ext uri="{FF2B5EF4-FFF2-40B4-BE49-F238E27FC236}">
-                <a16:creationId xmlns:a16="http://schemas.microsoft.com/office/drawing/2014/main" id="{90D639BC-5EAA-A47E-3A72-F1BEFA3B4BF3}"/>
+                <a16:creationId xmlns:a16="http://schemas.microsoft.com/office/drawing/2014/main" id="{9CEDA20D-71C9-B6EB-20E2-902755B6F4B7}"/>
               </a:ext>
             </a:extLst>
           </p:cNvPr>
@@ -9945,7 +9945,7 @@
           <p:cNvPr id="12" name="正方形/長方形 11">
             <a:extLst>
               <a:ext uri="{FF2B5EF4-FFF2-40B4-BE49-F238E27FC236}">
-                <a16:creationId xmlns:a16="http://schemas.microsoft.com/office/drawing/2014/main" id="{7182377A-2020-1D16-FB86-1968BAB98514}"/>
+                <a16:creationId xmlns:a16="http://schemas.microsoft.com/office/drawing/2014/main" id="{378236B7-B3AB-014F-D96A-ED78558703DF}"/>
               </a:ext>
             </a:extLst>
           </p:cNvPr>
@@ -10013,7 +10013,7 @@
           <p:cNvPr id="13" name="テキスト ボックス 12">
             <a:extLst>
               <a:ext uri="{FF2B5EF4-FFF2-40B4-BE49-F238E27FC236}">
-                <a16:creationId xmlns:a16="http://schemas.microsoft.com/office/drawing/2014/main" id="{ACDEA222-12A4-091D-0EEA-C55A7411CB2D}"/>
+                <a16:creationId xmlns:a16="http://schemas.microsoft.com/office/drawing/2014/main" id="{B19336BF-31F5-DB1F-0989-18CA21E73957}"/>
               </a:ext>
             </a:extLst>
           </p:cNvPr>
@@ -10074,7 +10074,7 @@
           <p:cNvPr id="14" name="正方形/長方形 13">
             <a:extLst>
               <a:ext uri="{FF2B5EF4-FFF2-40B4-BE49-F238E27FC236}">
-                <a16:creationId xmlns:a16="http://schemas.microsoft.com/office/drawing/2014/main" id="{7360CE4F-8513-CC16-34F6-0FEDEC65CB6C}"/>
+                <a16:creationId xmlns:a16="http://schemas.microsoft.com/office/drawing/2014/main" id="{6705A364-AACA-EDE9-857F-CF54F819E335}"/>
               </a:ext>
             </a:extLst>
           </p:cNvPr>
@@ -10142,7 +10142,7 @@
           <p:cNvPr id="15" name="テキスト ボックス 14">
             <a:extLst>
               <a:ext uri="{FF2B5EF4-FFF2-40B4-BE49-F238E27FC236}">
-                <a16:creationId xmlns:a16="http://schemas.microsoft.com/office/drawing/2014/main" id="{62379A2D-946A-645C-970F-7594C067652C}"/>
+                <a16:creationId xmlns:a16="http://schemas.microsoft.com/office/drawing/2014/main" id="{65A315C7-22BA-DFDD-8853-D2D63A672C9D}"/>
               </a:ext>
             </a:extLst>
           </p:cNvPr>
@@ -10243,7 +10243,7 @@
           <p:cNvPr id="16" name="テキスト ボックス 15">
             <a:extLst>
               <a:ext uri="{FF2B5EF4-FFF2-40B4-BE49-F238E27FC236}">
-                <a16:creationId xmlns:a16="http://schemas.microsoft.com/office/drawing/2014/main" id="{6B0BE08E-FF6D-1A2F-9979-02E33E49FB1D}"/>
+                <a16:creationId xmlns:a16="http://schemas.microsoft.com/office/drawing/2014/main" id="{37EBD963-697C-B29C-1954-A79B920582E3}"/>
               </a:ext>
             </a:extLst>
           </p:cNvPr>
@@ -10321,7 +10321,7 @@
           <p:cNvPr id="17" name="正方形/長方形 16">
             <a:extLst>
               <a:ext uri="{FF2B5EF4-FFF2-40B4-BE49-F238E27FC236}">
-                <a16:creationId xmlns:a16="http://schemas.microsoft.com/office/drawing/2014/main" id="{8B4B4220-3688-ACC2-CDA6-596E85F01C6D}"/>
+                <a16:creationId xmlns:a16="http://schemas.microsoft.com/office/drawing/2014/main" id="{E8FFD74D-31A4-1BD5-712A-65B345F4E759}"/>
               </a:ext>
             </a:extLst>
           </p:cNvPr>
@@ -10389,7 +10389,7 @@
           <p:cNvPr id="18" name="正方形/長方形 17">
             <a:extLst>
               <a:ext uri="{FF2B5EF4-FFF2-40B4-BE49-F238E27FC236}">
-                <a16:creationId xmlns:a16="http://schemas.microsoft.com/office/drawing/2014/main" id="{E7E2F759-B760-939A-017E-AF10BCA5D848}"/>
+                <a16:creationId xmlns:a16="http://schemas.microsoft.com/office/drawing/2014/main" id="{7FFEAC6F-D9F5-2F48-0DD0-AD03301CF27B}"/>
               </a:ext>
             </a:extLst>
           </p:cNvPr>
@@ -10457,7 +10457,7 @@
           <p:cNvPr id="19" name="テキスト ボックス 18">
             <a:extLst>
               <a:ext uri="{FF2B5EF4-FFF2-40B4-BE49-F238E27FC236}">
-                <a16:creationId xmlns:a16="http://schemas.microsoft.com/office/drawing/2014/main" id="{D2024696-BF0E-9D36-ABD0-C1B96BF996BC}"/>
+                <a16:creationId xmlns:a16="http://schemas.microsoft.com/office/drawing/2014/main" id="{AB9D99EC-C441-5AB7-460E-D07B072BA160}"/>
               </a:ext>
             </a:extLst>
           </p:cNvPr>
@@ -10525,7 +10525,7 @@
           <p:cNvPr id="20" name="テキスト ボックス 19">
             <a:extLst>
               <a:ext uri="{FF2B5EF4-FFF2-40B4-BE49-F238E27FC236}">
-                <a16:creationId xmlns:a16="http://schemas.microsoft.com/office/drawing/2014/main" id="{886D22C6-D0AA-7D07-C148-D1ED633B08F8}"/>
+                <a16:creationId xmlns:a16="http://schemas.microsoft.com/office/drawing/2014/main" id="{1AEA424C-CE8D-DB07-6DE9-F1B2F39253F5}"/>
               </a:ext>
             </a:extLst>
           </p:cNvPr>
@@ -10566,7 +10566,7 @@
           <p:cNvPr id="21" name="正方形/長方形 20">
             <a:extLst>
               <a:ext uri="{FF2B5EF4-FFF2-40B4-BE49-F238E27FC236}">
-                <a16:creationId xmlns:a16="http://schemas.microsoft.com/office/drawing/2014/main" id="{5DDEB554-82FE-67EB-2C92-78A5889E131D}"/>
+                <a16:creationId xmlns:a16="http://schemas.microsoft.com/office/drawing/2014/main" id="{CBA3A809-9190-5AE1-3940-1F60E27CF8B9}"/>
               </a:ext>
             </a:extLst>
           </p:cNvPr>
@@ -10634,7 +10634,7 @@
           <p:cNvPr id="22" name="正方形/長方形 21">
             <a:extLst>
               <a:ext uri="{FF2B5EF4-FFF2-40B4-BE49-F238E27FC236}">
-                <a16:creationId xmlns:a16="http://schemas.microsoft.com/office/drawing/2014/main" id="{740ED2C0-16E1-3C01-4A45-AE375A107ADD}"/>
+                <a16:creationId xmlns:a16="http://schemas.microsoft.com/office/drawing/2014/main" id="{3CDB45EC-8F63-8543-4535-D168507661C0}"/>
               </a:ext>
             </a:extLst>
           </p:cNvPr>
@@ -10702,7 +10702,7 @@
           <p:cNvPr id="23" name="テキスト ボックス 22">
             <a:extLst>
               <a:ext uri="{FF2B5EF4-FFF2-40B4-BE49-F238E27FC236}">
-                <a16:creationId xmlns:a16="http://schemas.microsoft.com/office/drawing/2014/main" id="{B55DD759-2F46-6483-6328-8E4A1A702C25}"/>
+                <a16:creationId xmlns:a16="http://schemas.microsoft.com/office/drawing/2014/main" id="{8E603A46-1DA5-0BBC-BC2D-E9B91AC5FCBA}"/>
               </a:ext>
             </a:extLst>
           </p:cNvPr>
@@ -10770,7 +10770,7 @@
           <p:cNvPr id="24" name="テキスト ボックス 23">
             <a:extLst>
               <a:ext uri="{FF2B5EF4-FFF2-40B4-BE49-F238E27FC236}">
-                <a16:creationId xmlns:a16="http://schemas.microsoft.com/office/drawing/2014/main" id="{392F1D25-48BA-16B1-85FD-BF8F79DE511E}"/>
+                <a16:creationId xmlns:a16="http://schemas.microsoft.com/office/drawing/2014/main" id="{EAD348DC-6AB8-92E5-FB54-1AE51C19D28D}"/>
               </a:ext>
             </a:extLst>
           </p:cNvPr>
@@ -10811,7 +10811,7 @@
           <p:cNvPr id="25" name="正方形/長方形 24">
             <a:extLst>
               <a:ext uri="{FF2B5EF4-FFF2-40B4-BE49-F238E27FC236}">
-                <a16:creationId xmlns:a16="http://schemas.microsoft.com/office/drawing/2014/main" id="{A455D5A3-6FB5-EEB2-2455-3121087C7BCA}"/>
+                <a16:creationId xmlns:a16="http://schemas.microsoft.com/office/drawing/2014/main" id="{1160B66B-5F04-4C6F-6DA0-197F77FAD72C}"/>
               </a:ext>
             </a:extLst>
           </p:cNvPr>
@@ -10879,7 +10879,7 @@
           <p:cNvPr id="26" name="正方形/長方形 25">
             <a:extLst>
               <a:ext uri="{FF2B5EF4-FFF2-40B4-BE49-F238E27FC236}">
-                <a16:creationId xmlns:a16="http://schemas.microsoft.com/office/drawing/2014/main" id="{F0DA3AE8-2B1B-BC48-EF94-057CD9D68189}"/>
+                <a16:creationId xmlns:a16="http://schemas.microsoft.com/office/drawing/2014/main" id="{A350B985-648E-8206-A930-6998DE807A14}"/>
               </a:ext>
             </a:extLst>
           </p:cNvPr>
@@ -10947,7 +10947,7 @@
           <p:cNvPr id="27" name="テキスト ボックス 26">
             <a:extLst>
               <a:ext uri="{FF2B5EF4-FFF2-40B4-BE49-F238E27FC236}">
-                <a16:creationId xmlns:a16="http://schemas.microsoft.com/office/drawing/2014/main" id="{8B0230A1-6958-C21F-7549-EDCBFDF58C00}"/>
+                <a16:creationId xmlns:a16="http://schemas.microsoft.com/office/drawing/2014/main" id="{E78D6186-CDD3-F07C-EC6C-DB1E07D17322}"/>
               </a:ext>
             </a:extLst>
           </p:cNvPr>
@@ -11015,7 +11015,7 @@
           <p:cNvPr id="28" name="正方形/長方形 27">
             <a:extLst>
               <a:ext uri="{FF2B5EF4-FFF2-40B4-BE49-F238E27FC236}">
-                <a16:creationId xmlns:a16="http://schemas.microsoft.com/office/drawing/2014/main" id="{4F2CFA77-CD64-F885-8728-080E5ED65985}"/>
+                <a16:creationId xmlns:a16="http://schemas.microsoft.com/office/drawing/2014/main" id="{1E045156-FECF-CFA3-ED83-5F6777BE6242}"/>
               </a:ext>
             </a:extLst>
           </p:cNvPr>
@@ -11024,8 +11024,8 @@
         </p:nvSpPr>
         <p:spPr>
           <a:xfrm>
-            <a:off x="482600" y="3683000"/>
-            <a:ext cx="5943600" cy="482600"/>
+            <a:off x="482600" y="3657600"/>
+            <a:ext cx="5943600" cy="431800"/>
           </a:xfrm>
           <a:prstGeom prst="rect">
             <a:avLst/>
@@ -11069,7 +11069,7 @@
           <p:cNvPr id="29" name="テキスト ボックス 28">
             <a:extLst>
               <a:ext uri="{FF2B5EF4-FFF2-40B4-BE49-F238E27FC236}">
-                <a16:creationId xmlns:a16="http://schemas.microsoft.com/office/drawing/2014/main" id="{723D18D6-2AB9-875F-80F5-C49C1AC98901}"/>
+                <a16:creationId xmlns:a16="http://schemas.microsoft.com/office/drawing/2014/main" id="{402C9C75-B5D6-B444-518F-1E1849140C1A}"/>
               </a:ext>
             </a:extLst>
           </p:cNvPr>
@@ -11078,8 +11078,8 @@
         </p:nvSpPr>
         <p:spPr>
           <a:xfrm>
-            <a:off x="584200" y="3746500"/>
-            <a:ext cx="5740400" cy="502702"/>
+            <a:off x="558800" y="3695700"/>
+            <a:ext cx="5791200" cy="294953"/>
           </a:xfrm>
           <a:prstGeom prst="rect">
             <a:avLst/>
@@ -11093,7 +11093,7 @@
           <a:lstStyle/>
           <a:p>
             <a:r>
-              <a:rPr kumimoji="1" lang="ja-JP" altLang="en-US" sz="1300" b="1">
+              <a:rPr kumimoji="1" lang="ja-JP" altLang="en-US" sz="1250" b="1">
                 <a:solidFill>
                   <a:srgbClr val="B91C1C"/>
                 </a:solidFill>
@@ -11103,7 +11103,7 @@
               <a:t>地元・八千代市民の </a:t>
             </a:r>
             <a:r>
-              <a:rPr kumimoji="1" lang="en-US" altLang="ja-JP" sz="1300" b="1">
+              <a:rPr kumimoji="1" lang="en-US" altLang="ja-JP" sz="1250" b="1">
                 <a:solidFill>
                   <a:srgbClr val="B91C1C"/>
                 </a:solidFill>
@@ -11113,7 +11113,7 @@
               <a:t>80.7%</a:t>
             </a:r>
             <a:r>
-              <a:rPr kumimoji="1" lang="ja-JP" altLang="en-US" sz="1300" b="1">
+              <a:rPr kumimoji="1" lang="ja-JP" altLang="en-US" sz="1250" b="1">
                 <a:solidFill>
                   <a:srgbClr val="B91C1C"/>
                 </a:solidFill>
@@ -11123,7 +11123,7 @@
               <a:t>（</a:t>
             </a:r>
             <a:r>
-              <a:rPr kumimoji="1" lang="en-US" altLang="ja-JP" sz="1300" b="1">
+              <a:rPr kumimoji="1" lang="en-US" altLang="ja-JP" sz="1250" b="1">
                 <a:solidFill>
                   <a:srgbClr val="B91C1C"/>
                 </a:solidFill>
@@ -11133,14 +11133,14 @@
               <a:t>138</a:t>
             </a:r>
             <a:r>
-              <a:rPr kumimoji="1" lang="ja-JP" altLang="en-US" sz="1300" b="1">
+              <a:rPr kumimoji="1" lang="ja-JP" altLang="en-US" sz="1250" b="1">
                 <a:solidFill>
                   <a:srgbClr val="B91C1C"/>
                 </a:solidFill>
                 <a:latin typeface="Meiryo UI" panose="020B0604030504040204" pitchFamily="50" charset="-128"/>
                 <a:ea typeface="Meiryo UI" panose="020B0604030504040204" pitchFamily="50" charset="-128"/>
               </a:rPr>
-              <a:t>名）が「今日初めて知った」または「名前・場所のみ」</a:t>
+              <a:t>名）が「今日初めて知った」または「名前のみ」</a:t>
             </a:r>
           </a:p>
         </p:txBody>
@@ -11150,7 +11150,7 @@
           <p:cNvPr id="30" name="テキスト ボックス 29">
             <a:extLst>
               <a:ext uri="{FF2B5EF4-FFF2-40B4-BE49-F238E27FC236}">
-                <a16:creationId xmlns:a16="http://schemas.microsoft.com/office/drawing/2014/main" id="{18B7BA35-7CD1-1239-CF64-E5FAE56DEBD2}"/>
+                <a16:creationId xmlns:a16="http://schemas.microsoft.com/office/drawing/2014/main" id="{B00BB7F4-B21C-1666-FD43-20AC8C035B2F}"/>
               </a:ext>
             </a:extLst>
           </p:cNvPr>
@@ -11159,8 +11159,8 @@
         </p:nvSpPr>
         <p:spPr>
           <a:xfrm>
-            <a:off x="482600" y="4292600"/>
-            <a:ext cx="5842000" cy="325730"/>
+            <a:off x="482600" y="4191000"/>
+            <a:ext cx="5842000" cy="318036"/>
           </a:xfrm>
           <a:prstGeom prst="rect">
             <a:avLst/>
@@ -11174,7 +11174,7 @@
           <a:lstStyle/>
           <a:p>
             <a:r>
-              <a:rPr kumimoji="1" lang="ja-JP" altLang="en-US" sz="1450" b="1">
+              <a:rPr kumimoji="1" lang="ja-JP" altLang="en-US" sz="1400" b="1">
                 <a:solidFill>
                   <a:srgbClr val="0F2342"/>
                 </a:solidFill>
@@ -11184,7 +11184,7 @@
               <a:t>■ </a:t>
             </a:r>
             <a:r>
-              <a:rPr kumimoji="1" lang="en-US" altLang="ja-JP" sz="1450" b="1">
+              <a:rPr kumimoji="1" lang="en-US" altLang="ja-JP" sz="1400" b="1">
                 <a:solidFill>
                   <a:srgbClr val="0F2342"/>
                 </a:solidFill>
@@ -11194,7 +11194,7 @@
               <a:t>2. </a:t>
             </a:r>
             <a:r>
-              <a:rPr kumimoji="1" lang="ja-JP" altLang="en-US" sz="1450" b="1">
+              <a:rPr kumimoji="1" lang="ja-JP" altLang="en-US" sz="1400" b="1">
                 <a:solidFill>
                   <a:srgbClr val="0F2342"/>
                 </a:solidFill>
@@ -11211,7 +11211,7 @@
           <p:cNvPr id="31" name="表 30">
             <a:extLst>
               <a:ext uri="{FF2B5EF4-FFF2-40B4-BE49-F238E27FC236}">
-                <a16:creationId xmlns:a16="http://schemas.microsoft.com/office/drawing/2014/main" id="{43D7D994-38AD-B024-76DC-7A1D127AAB61}"/>
+                <a16:creationId xmlns:a16="http://schemas.microsoft.com/office/drawing/2014/main" id="{9E836226-5773-97DC-1790-07E870B9E51A}"/>
               </a:ext>
             </a:extLst>
           </p:cNvPr>
@@ -11221,14 +11221,14 @@
           <p:nvPr>
             <p:extLst>
               <p:ext uri="{D42A27DB-BD31-4B8C-83A1-F6EECF244321}">
-                <p14:modId xmlns:p14="http://schemas.microsoft.com/office/powerpoint/2010/main" val="372454769"/>
+                <p14:modId xmlns:p14="http://schemas.microsoft.com/office/powerpoint/2010/main" val="3822745453"/>
               </p:ext>
             </p:extLst>
           </p:nvPr>
         </p:nvGraphicFramePr>
         <p:xfrm>
-          <a:off x="482600" y="4648200"/>
-          <a:ext cx="5943600" cy="1701800"/>
+          <a:off x="482600" y="4521200"/>
+          <a:ext cx="5943600" cy="1778000"/>
         </p:xfrm>
         <a:graphic>
           <a:graphicData uri="http://schemas.openxmlformats.org/drawingml/2006/table">
@@ -11237,36 +11237,36 @@
                 <a:tableStyleId>{5C22544A-7EE6-4342-B048-85BDC9FD1C3A}</a:tableStyleId>
               </a:tblPr>
               <a:tblGrid>
-                <a:gridCol w="1498600">
+                <a:gridCol w="1727200">
                   <a:extLst>
                     <a:ext uri="{9D8B030D-6E8A-4147-A177-3AD203B41FA5}">
-                      <a16:colId xmlns:a16="http://schemas.microsoft.com/office/drawing/2014/main" val="3521422634"/>
+                      <a16:colId xmlns:a16="http://schemas.microsoft.com/office/drawing/2014/main" val="1341831897"/>
                     </a:ext>
                   </a:extLst>
                 </a:gridCol>
-                <a:gridCol w="1397000">
+                <a:gridCol w="1371600">
                   <a:extLst>
                     <a:ext uri="{9D8B030D-6E8A-4147-A177-3AD203B41FA5}">
-                      <a16:colId xmlns:a16="http://schemas.microsoft.com/office/drawing/2014/main" val="4092938843"/>
+                      <a16:colId xmlns:a16="http://schemas.microsoft.com/office/drawing/2014/main" val="1815368156"/>
                     </a:ext>
                   </a:extLst>
                 </a:gridCol>
-                <a:gridCol w="1524000">
+                <a:gridCol w="1422400">
                   <a:extLst>
                     <a:ext uri="{9D8B030D-6E8A-4147-A177-3AD203B41FA5}">
-                      <a16:colId xmlns:a16="http://schemas.microsoft.com/office/drawing/2014/main" val="629378225"/>
+                      <a16:colId xmlns:a16="http://schemas.microsoft.com/office/drawing/2014/main" val="480664512"/>
                     </a:ext>
                   </a:extLst>
                 </a:gridCol>
-                <a:gridCol w="1524000">
+                <a:gridCol w="1422400">
                   <a:extLst>
                     <a:ext uri="{9D8B030D-6E8A-4147-A177-3AD203B41FA5}">
-                      <a16:colId xmlns:a16="http://schemas.microsoft.com/office/drawing/2014/main" val="3873364786"/>
+                      <a16:colId xmlns:a16="http://schemas.microsoft.com/office/drawing/2014/main" val="1366623905"/>
                     </a:ext>
                   </a:extLst>
                 </a:gridCol>
               </a:tblGrid>
-              <a:tr h="340360">
+              <a:tr h="355600">
                 <a:tc>
                   <a:txBody>
                     <a:bodyPr/>
@@ -11368,11 +11368,11 @@
                 </a:tc>
                 <a:extLst>
                   <a:ext uri="{0D108BD9-81ED-4DB2-BD59-A6C34878D82A}">
-                    <a16:rowId xmlns:a16="http://schemas.microsoft.com/office/drawing/2014/main" val="2083869195"/>
+                    <a16:rowId xmlns:a16="http://schemas.microsoft.com/office/drawing/2014/main" val="3420802655"/>
                   </a:ext>
                 </a:extLst>
               </a:tr>
-              <a:tr h="340360">
+              <a:tr h="355600">
                 <a:tc>
                   <a:txBody>
                     <a:bodyPr/>
@@ -11605,11 +11605,11 @@
                 </a:tc>
                 <a:extLst>
                   <a:ext uri="{0D108BD9-81ED-4DB2-BD59-A6C34878D82A}">
-                    <a16:rowId xmlns:a16="http://schemas.microsoft.com/office/drawing/2014/main" val="12510835"/>
+                    <a16:rowId xmlns:a16="http://schemas.microsoft.com/office/drawing/2014/main" val="1451824067"/>
                   </a:ext>
                 </a:extLst>
               </a:tr>
-              <a:tr h="340360">
+              <a:tr h="355600">
                 <a:tc>
                   <a:txBody>
                     <a:bodyPr/>
@@ -11842,11 +11842,11 @@
                 </a:tc>
                 <a:extLst>
                   <a:ext uri="{0D108BD9-81ED-4DB2-BD59-A6C34878D82A}">
-                    <a16:rowId xmlns:a16="http://schemas.microsoft.com/office/drawing/2014/main" val="120174159"/>
+                    <a16:rowId xmlns:a16="http://schemas.microsoft.com/office/drawing/2014/main" val="1843747682"/>
                   </a:ext>
                 </a:extLst>
               </a:tr>
-              <a:tr h="340360">
+              <a:tr h="355600">
                 <a:tc>
                   <a:txBody>
                     <a:bodyPr/>
@@ -12079,11 +12079,11 @@
                 </a:tc>
                 <a:extLst>
                   <a:ext uri="{0D108BD9-81ED-4DB2-BD59-A6C34878D82A}">
-                    <a16:rowId xmlns:a16="http://schemas.microsoft.com/office/drawing/2014/main" val="3782601750"/>
+                    <a16:rowId xmlns:a16="http://schemas.microsoft.com/office/drawing/2014/main" val="4294159585"/>
                   </a:ext>
                 </a:extLst>
               </a:tr>
-              <a:tr h="340360">
+              <a:tr h="355600">
                 <a:tc>
                   <a:txBody>
                     <a:bodyPr/>
@@ -12316,7 +12316,7 @@
                 </a:tc>
                 <a:extLst>
                   <a:ext uri="{0D108BD9-81ED-4DB2-BD59-A6C34878D82A}">
-                    <a16:rowId xmlns:a16="http://schemas.microsoft.com/office/drawing/2014/main" val="1031211134"/>
+                    <a16:rowId xmlns:a16="http://schemas.microsoft.com/office/drawing/2014/main" val="3138279101"/>
                   </a:ext>
                 </a:extLst>
               </a:tr>
@@ -12329,7 +12329,7 @@
           <p:cNvPr id="32" name="正方形/長方形 31">
             <a:extLst>
               <a:ext uri="{FF2B5EF4-FFF2-40B4-BE49-F238E27FC236}">
-                <a16:creationId xmlns:a16="http://schemas.microsoft.com/office/drawing/2014/main" id="{90D9EF06-FF2C-C847-7560-2DC5EEF43096}"/>
+                <a16:creationId xmlns:a16="http://schemas.microsoft.com/office/drawing/2014/main" id="{235D8FA9-4A26-6EC1-B3FC-ECE1689732C0}"/>
               </a:ext>
             </a:extLst>
           </p:cNvPr>
@@ -12383,7 +12383,7 @@
           <p:cNvPr id="33" name="正方形/長方形 32">
             <a:extLst>
               <a:ext uri="{FF2B5EF4-FFF2-40B4-BE49-F238E27FC236}">
-                <a16:creationId xmlns:a16="http://schemas.microsoft.com/office/drawing/2014/main" id="{A19B2A6B-5E05-7F5E-23B4-AABE92DFDB39}"/>
+                <a16:creationId xmlns:a16="http://schemas.microsoft.com/office/drawing/2014/main" id="{0DD80F1D-45D9-09FA-75E6-EF009D2CEEF0}"/>
               </a:ext>
             </a:extLst>
           </p:cNvPr>
@@ -12451,7 +12451,7 @@
           <p:cNvPr id="34" name="テキスト ボックス 33">
             <a:extLst>
               <a:ext uri="{FF2B5EF4-FFF2-40B4-BE49-F238E27FC236}">
-                <a16:creationId xmlns:a16="http://schemas.microsoft.com/office/drawing/2014/main" id="{3364376E-041A-F56E-9AAD-9575BE08208E}"/>
+                <a16:creationId xmlns:a16="http://schemas.microsoft.com/office/drawing/2014/main" id="{61CA7824-7E11-675E-30D7-841C3703C041}"/>
               </a:ext>
             </a:extLst>
           </p:cNvPr>
@@ -12492,7 +12492,7 @@
           <p:cNvPr id="35" name="正方形/長方形 34">
             <a:extLst>
               <a:ext uri="{FF2B5EF4-FFF2-40B4-BE49-F238E27FC236}">
-                <a16:creationId xmlns:a16="http://schemas.microsoft.com/office/drawing/2014/main" id="{B3ABBBBA-8DBB-9BF4-A569-D97746F7F594}"/>
+                <a16:creationId xmlns:a16="http://schemas.microsoft.com/office/drawing/2014/main" id="{899F76BD-0FD6-4F43-F552-5DE506BFD150}"/>
               </a:ext>
             </a:extLst>
           </p:cNvPr>
@@ -12560,7 +12560,7 @@
           <p:cNvPr id="36" name="テキスト ボックス 35">
             <a:extLst>
               <a:ext uri="{FF2B5EF4-FFF2-40B4-BE49-F238E27FC236}">
-                <a16:creationId xmlns:a16="http://schemas.microsoft.com/office/drawing/2014/main" id="{E458C621-FE29-44F3-2767-3358C377F548}"/>
+                <a16:creationId xmlns:a16="http://schemas.microsoft.com/office/drawing/2014/main" id="{EB6D86A2-EBC9-4F21-FCF4-B2DF1D5F51CE}"/>
               </a:ext>
             </a:extLst>
           </p:cNvPr>
@@ -13095,7 +13095,7 @@
     </p:spTree>
     <p:extLst>
       <p:ext uri="{BB962C8B-B14F-4D97-AF65-F5344CB8AC3E}">
-        <p14:creationId xmlns:p14="http://schemas.microsoft.com/office/powerpoint/2010/main" val="2275796374"/>
+        <p14:creationId xmlns:p14="http://schemas.microsoft.com/office/powerpoint/2010/main" val="3619979394"/>
       </p:ext>
     </p:extLst>
   </p:cSld>
@@ -13127,7 +13127,7 @@
           <p:cNvPr id="2" name="正方形/長方形 1">
             <a:extLst>
               <a:ext uri="{FF2B5EF4-FFF2-40B4-BE49-F238E27FC236}">
-                <a16:creationId xmlns:a16="http://schemas.microsoft.com/office/drawing/2014/main" id="{31F1457B-6B5C-51BB-FBF1-B0326A5A596E}"/>
+                <a16:creationId xmlns:a16="http://schemas.microsoft.com/office/drawing/2014/main" id="{E6B5872F-0814-C50E-B147-BE88E63CFEBD}"/>
               </a:ext>
             </a:extLst>
           </p:cNvPr>
@@ -13195,7 +13195,7 @@
           <p:cNvPr id="3" name="正方形/長方形 2">
             <a:extLst>
               <a:ext uri="{FF2B5EF4-FFF2-40B4-BE49-F238E27FC236}">
-                <a16:creationId xmlns:a16="http://schemas.microsoft.com/office/drawing/2014/main" id="{65A80B6C-8E29-AC70-7B28-9BD49455E3C4}"/>
+                <a16:creationId xmlns:a16="http://schemas.microsoft.com/office/drawing/2014/main" id="{3C0A3689-CCFA-C513-A547-69254EA26592}"/>
               </a:ext>
             </a:extLst>
           </p:cNvPr>
@@ -13263,7 +13263,7 @@
           <p:cNvPr id="4" name="正方形/長方形 3">
             <a:extLst>
               <a:ext uri="{FF2B5EF4-FFF2-40B4-BE49-F238E27FC236}">
-                <a16:creationId xmlns:a16="http://schemas.microsoft.com/office/drawing/2014/main" id="{EA4BDFAD-909D-3B4B-8669-E48D14A367D7}"/>
+                <a16:creationId xmlns:a16="http://schemas.microsoft.com/office/drawing/2014/main" id="{ECC51FFC-0674-C9A3-4CC5-2A979F075024}"/>
               </a:ext>
             </a:extLst>
           </p:cNvPr>
@@ -13331,7 +13331,7 @@
           <p:cNvPr id="5" name="テキスト ボックス 4">
             <a:extLst>
               <a:ext uri="{FF2B5EF4-FFF2-40B4-BE49-F238E27FC236}">
-                <a16:creationId xmlns:a16="http://schemas.microsoft.com/office/drawing/2014/main" id="{B87B74D4-A87C-6D17-2E10-FAC289BA4D2C}"/>
+                <a16:creationId xmlns:a16="http://schemas.microsoft.com/office/drawing/2014/main" id="{84EB947B-F455-0FB9-518D-FAEA96F0FB16}"/>
               </a:ext>
             </a:extLst>
           </p:cNvPr>
@@ -13393,7 +13393,7 @@
           <p:cNvPr id="6" name="テキスト ボックス 5">
             <a:extLst>
               <a:ext uri="{FF2B5EF4-FFF2-40B4-BE49-F238E27FC236}">
-                <a16:creationId xmlns:a16="http://schemas.microsoft.com/office/drawing/2014/main" id="{C69C5DAB-5A41-88D0-71FC-B7323DC1E045}"/>
+                <a16:creationId xmlns:a16="http://schemas.microsoft.com/office/drawing/2014/main" id="{FE8B7EA0-AD04-0B57-5BF5-5E64E44BFE45}"/>
               </a:ext>
             </a:extLst>
           </p:cNvPr>
@@ -13402,8 +13402,8 @@
         </p:nvSpPr>
         <p:spPr>
           <a:xfrm>
-            <a:off x="2336800" y="139700"/>
-            <a:ext cx="8382000" cy="410369"/>
+            <a:off x="2311400" y="165100"/>
+            <a:ext cx="8585200" cy="379591"/>
           </a:xfrm>
           <a:prstGeom prst="rect">
             <a:avLst/>
@@ -13417,7 +13417,7 @@
           <a:lstStyle/>
           <a:p>
             <a:r>
-              <a:rPr kumimoji="1" lang="ja-JP" altLang="en-US" sz="2000" b="1">
+              <a:rPr kumimoji="1" lang="ja-JP" altLang="en-US" b="1">
                 <a:solidFill>
                   <a:srgbClr val="FFFFFF"/>
                 </a:solidFill>
@@ -13427,7 +13427,7 @@
               <a:t>認知度（</a:t>
             </a:r>
             <a:r>
-              <a:rPr kumimoji="1" lang="en-US" altLang="ja-JP" sz="2000" b="1">
+              <a:rPr kumimoji="1" lang="en-US" altLang="ja-JP" b="1">
                 <a:solidFill>
                   <a:srgbClr val="FFFFFF"/>
                 </a:solidFill>
@@ -13437,7 +13437,7 @@
               <a:t>Q2</a:t>
             </a:r>
             <a:r>
-              <a:rPr kumimoji="1" lang="ja-JP" altLang="en-US" sz="2000" b="1">
+              <a:rPr kumimoji="1" lang="ja-JP" altLang="en-US" b="1">
                 <a:solidFill>
                   <a:srgbClr val="FFFFFF"/>
                 </a:solidFill>
@@ -13447,7 +13447,7 @@
               <a:t>）</a:t>
             </a:r>
             <a:r>
-              <a:rPr kumimoji="1" lang="en-US" altLang="ja-JP" sz="2000" b="1">
+              <a:rPr kumimoji="1" lang="en-US" altLang="ja-JP" b="1">
                 <a:solidFill>
                   <a:srgbClr val="FFFFFF"/>
                 </a:solidFill>
@@ -13457,7 +13457,7 @@
               <a:t>× </a:t>
             </a:r>
             <a:r>
-              <a:rPr kumimoji="1" lang="ja-JP" altLang="en-US" sz="2000" b="1">
+              <a:rPr kumimoji="1" lang="ja-JP" altLang="en-US" b="1">
                 <a:solidFill>
                   <a:srgbClr val="FFFFFF"/>
                 </a:solidFill>
@@ -13467,7 +13467,7 @@
               <a:t>アンケート時の当院の評価（</a:t>
             </a:r>
             <a:r>
-              <a:rPr kumimoji="1" lang="en-US" altLang="ja-JP" sz="2000" b="1">
+              <a:rPr kumimoji="1" lang="en-US" altLang="ja-JP" b="1">
                 <a:solidFill>
                   <a:srgbClr val="FFFFFF"/>
                 </a:solidFill>
@@ -13477,7 +13477,7 @@
               <a:t>Q3</a:t>
             </a:r>
             <a:r>
-              <a:rPr kumimoji="1" lang="ja-JP" altLang="en-US" sz="2000" b="1">
+              <a:rPr kumimoji="1" lang="ja-JP" altLang="en-US" b="1">
                 <a:solidFill>
                   <a:srgbClr val="FFFFFF"/>
                 </a:solidFill>
@@ -13494,7 +13494,7 @@
           <p:cNvPr id="7" name="テキスト ボックス 6">
             <a:extLst>
               <a:ext uri="{FF2B5EF4-FFF2-40B4-BE49-F238E27FC236}">
-                <a16:creationId xmlns:a16="http://schemas.microsoft.com/office/drawing/2014/main" id="{1FB6443A-E672-1A48-90BC-1243696947B0}"/>
+                <a16:creationId xmlns:a16="http://schemas.microsoft.com/office/drawing/2014/main" id="{DB06232F-EF98-7565-2FF8-214A17C12635}"/>
               </a:ext>
             </a:extLst>
           </p:cNvPr>
@@ -13503,8 +13503,8 @@
         </p:nvSpPr>
         <p:spPr>
           <a:xfrm>
-            <a:off x="10668000" y="203200"/>
-            <a:ext cx="1219200" cy="302647"/>
+            <a:off x="10896600" y="203200"/>
+            <a:ext cx="990600" cy="302647"/>
           </a:xfrm>
           <a:prstGeom prst="rect">
             <a:avLst/>
@@ -13543,7 +13543,7 @@
           <p:cNvPr id="8" name="正方形/長方形 7">
             <a:extLst>
               <a:ext uri="{FF2B5EF4-FFF2-40B4-BE49-F238E27FC236}">
-                <a16:creationId xmlns:a16="http://schemas.microsoft.com/office/drawing/2014/main" id="{E7A58C00-83F6-494B-A5C1-A3E983C3B0EB}"/>
+                <a16:creationId xmlns:a16="http://schemas.microsoft.com/office/drawing/2014/main" id="{0744C01D-F718-6D72-EBD7-445FC5A897AB}"/>
               </a:ext>
             </a:extLst>
           </p:cNvPr>
@@ -13597,7 +13597,7 @@
           <p:cNvPr id="9" name="正方形/長方形 8">
             <a:extLst>
               <a:ext uri="{FF2B5EF4-FFF2-40B4-BE49-F238E27FC236}">
-                <a16:creationId xmlns:a16="http://schemas.microsoft.com/office/drawing/2014/main" id="{1D48ED17-2DB3-EA05-B1FA-18D4512701BA}"/>
+                <a16:creationId xmlns:a16="http://schemas.microsoft.com/office/drawing/2014/main" id="{B2E4AA06-FFA4-90E6-8ACE-32ADE4CD32B7}"/>
               </a:ext>
             </a:extLst>
           </p:cNvPr>
@@ -13665,7 +13665,7 @@
           <p:cNvPr id="10" name="テキスト ボックス 9">
             <a:extLst>
               <a:ext uri="{FF2B5EF4-FFF2-40B4-BE49-F238E27FC236}">
-                <a16:creationId xmlns:a16="http://schemas.microsoft.com/office/drawing/2014/main" id="{453FDA1B-62E1-C131-7776-36D66AFAEA7C}"/>
+                <a16:creationId xmlns:a16="http://schemas.microsoft.com/office/drawing/2014/main" id="{0503C43B-147C-A0A5-B3F0-F5724DC13A64}"/>
               </a:ext>
             </a:extLst>
           </p:cNvPr>
@@ -13746,7 +13746,7 @@
           <p:cNvPr id="11" name="正方形/長方形 10">
             <a:extLst>
               <a:ext uri="{FF2B5EF4-FFF2-40B4-BE49-F238E27FC236}">
-                <a16:creationId xmlns:a16="http://schemas.microsoft.com/office/drawing/2014/main" id="{2D88D36D-9836-8BC0-EE30-A6F22B0F87C1}"/>
+                <a16:creationId xmlns:a16="http://schemas.microsoft.com/office/drawing/2014/main" id="{F0F3CBD5-AAAB-E36F-6FBC-958720F9F19E}"/>
               </a:ext>
             </a:extLst>
           </p:cNvPr>
@@ -13800,7 +13800,7 @@
           <p:cNvPr id="12" name="正方形/長方形 11">
             <a:extLst>
               <a:ext uri="{FF2B5EF4-FFF2-40B4-BE49-F238E27FC236}">
-                <a16:creationId xmlns:a16="http://schemas.microsoft.com/office/drawing/2014/main" id="{B88E94AB-5ECE-E769-BCFA-CFA730328C59}"/>
+                <a16:creationId xmlns:a16="http://schemas.microsoft.com/office/drawing/2014/main" id="{DF2BA0AB-D72B-93B5-9ED4-06052F727B17}"/>
               </a:ext>
             </a:extLst>
           </p:cNvPr>
@@ -13868,7 +13868,7 @@
           <p:cNvPr id="13" name="テキスト ボックス 12">
             <a:extLst>
               <a:ext uri="{FF2B5EF4-FFF2-40B4-BE49-F238E27FC236}">
-                <a16:creationId xmlns:a16="http://schemas.microsoft.com/office/drawing/2014/main" id="{930EE9F6-7060-EA4C-B397-A317ACA8BA5E}"/>
+                <a16:creationId xmlns:a16="http://schemas.microsoft.com/office/drawing/2014/main" id="{C21FF62B-EDDC-1EB8-C35C-F32880992EE6}"/>
               </a:ext>
             </a:extLst>
           </p:cNvPr>
@@ -13939,7 +13939,7 @@
           <p:cNvPr id="14" name="正方形/長方形 13">
             <a:extLst>
               <a:ext uri="{FF2B5EF4-FFF2-40B4-BE49-F238E27FC236}">
-                <a16:creationId xmlns:a16="http://schemas.microsoft.com/office/drawing/2014/main" id="{CC74693E-CFCE-4F21-A9D5-77967DF3D439}"/>
+                <a16:creationId xmlns:a16="http://schemas.microsoft.com/office/drawing/2014/main" id="{064BFF6C-E91D-E092-E2F2-4D30DE929A88}"/>
               </a:ext>
             </a:extLst>
           </p:cNvPr>
@@ -14007,7 +14007,7 @@
           <p:cNvPr id="15" name="テキスト ボックス 14">
             <a:extLst>
               <a:ext uri="{FF2B5EF4-FFF2-40B4-BE49-F238E27FC236}">
-                <a16:creationId xmlns:a16="http://schemas.microsoft.com/office/drawing/2014/main" id="{3EAC48FC-C14D-D76C-3DC9-1306AA468254}"/>
+                <a16:creationId xmlns:a16="http://schemas.microsoft.com/office/drawing/2014/main" id="{74EFD8CD-E8DE-3053-A9D5-0A6C0341B41A}"/>
               </a:ext>
             </a:extLst>
           </p:cNvPr>
@@ -14048,7 +14048,7 @@
           <p:cNvPr id="16" name="テキスト ボックス 15">
             <a:extLst>
               <a:ext uri="{FF2B5EF4-FFF2-40B4-BE49-F238E27FC236}">
-                <a16:creationId xmlns:a16="http://schemas.microsoft.com/office/drawing/2014/main" id="{F96A2E32-23F1-217D-D212-0B719D31B825}"/>
+                <a16:creationId xmlns:a16="http://schemas.microsoft.com/office/drawing/2014/main" id="{23950015-A862-E534-4E37-89E55A3F086B}"/>
               </a:ext>
             </a:extLst>
           </p:cNvPr>
@@ -14126,7 +14126,7 @@
           <p:cNvPr id="17" name="正方形/長方形 16">
             <a:extLst>
               <a:ext uri="{FF2B5EF4-FFF2-40B4-BE49-F238E27FC236}">
-                <a16:creationId xmlns:a16="http://schemas.microsoft.com/office/drawing/2014/main" id="{5DE8D07A-091D-67C3-BB5A-342646F378DD}"/>
+                <a16:creationId xmlns:a16="http://schemas.microsoft.com/office/drawing/2014/main" id="{0AF62FA4-9957-766D-28D1-581EFF5CACAA}"/>
               </a:ext>
             </a:extLst>
           </p:cNvPr>
@@ -14194,7 +14194,7 @@
           <p:cNvPr id="18" name="正方形/長方形 17">
             <a:extLst>
               <a:ext uri="{FF2B5EF4-FFF2-40B4-BE49-F238E27FC236}">
-                <a16:creationId xmlns:a16="http://schemas.microsoft.com/office/drawing/2014/main" id="{46CFE971-FF54-96EE-257E-22A5217D2069}"/>
+                <a16:creationId xmlns:a16="http://schemas.microsoft.com/office/drawing/2014/main" id="{E32C862F-E7FE-AD15-6FA9-75CD809F27E7}"/>
               </a:ext>
             </a:extLst>
           </p:cNvPr>
@@ -14262,7 +14262,7 @@
           <p:cNvPr id="19" name="テキスト ボックス 18">
             <a:extLst>
               <a:ext uri="{FF2B5EF4-FFF2-40B4-BE49-F238E27FC236}">
-                <a16:creationId xmlns:a16="http://schemas.microsoft.com/office/drawing/2014/main" id="{EFB42290-FB18-350B-C61F-D6082DAC93C0}"/>
+                <a16:creationId xmlns:a16="http://schemas.microsoft.com/office/drawing/2014/main" id="{1AB5D72F-3D1E-64FF-A40C-A0CE2028F46A}"/>
               </a:ext>
             </a:extLst>
           </p:cNvPr>
@@ -14330,7 +14330,7 @@
           <p:cNvPr id="20" name="テキスト ボックス 19">
             <a:extLst>
               <a:ext uri="{FF2B5EF4-FFF2-40B4-BE49-F238E27FC236}">
-                <a16:creationId xmlns:a16="http://schemas.microsoft.com/office/drawing/2014/main" id="{37EA5760-E850-0224-9A53-72850FD2706C}"/>
+                <a16:creationId xmlns:a16="http://schemas.microsoft.com/office/drawing/2014/main" id="{801196D7-AC85-325C-1B9D-A656C2495A21}"/>
               </a:ext>
             </a:extLst>
           </p:cNvPr>
@@ -14408,7 +14408,7 @@
           <p:cNvPr id="21" name="正方形/長方形 20">
             <a:extLst>
               <a:ext uri="{FF2B5EF4-FFF2-40B4-BE49-F238E27FC236}">
-                <a16:creationId xmlns:a16="http://schemas.microsoft.com/office/drawing/2014/main" id="{FF4F7D06-B35C-8E87-FD7E-A2C3AA5C0D9B}"/>
+                <a16:creationId xmlns:a16="http://schemas.microsoft.com/office/drawing/2014/main" id="{040E120E-9CCB-FA63-D9FE-9F71A0A85CFC}"/>
               </a:ext>
             </a:extLst>
           </p:cNvPr>
@@ -14476,7 +14476,7 @@
           <p:cNvPr id="22" name="正方形/長方形 21">
             <a:extLst>
               <a:ext uri="{FF2B5EF4-FFF2-40B4-BE49-F238E27FC236}">
-                <a16:creationId xmlns:a16="http://schemas.microsoft.com/office/drawing/2014/main" id="{0B9C9A23-AEDF-128F-B0D5-B23D2809E943}"/>
+                <a16:creationId xmlns:a16="http://schemas.microsoft.com/office/drawing/2014/main" id="{3A731145-CE13-44CC-F590-7E0344DB6A38}"/>
               </a:ext>
             </a:extLst>
           </p:cNvPr>
@@ -14544,7 +14544,7 @@
           <p:cNvPr id="23" name="テキスト ボックス 22">
             <a:extLst>
               <a:ext uri="{FF2B5EF4-FFF2-40B4-BE49-F238E27FC236}">
-                <a16:creationId xmlns:a16="http://schemas.microsoft.com/office/drawing/2014/main" id="{C4D6712C-481C-89BF-892D-17442ADE77E9}"/>
+                <a16:creationId xmlns:a16="http://schemas.microsoft.com/office/drawing/2014/main" id="{CC301CF4-750F-97DC-1B55-8E192CD7E608}"/>
               </a:ext>
             </a:extLst>
           </p:cNvPr>
@@ -14612,7 +14612,7 @@
           <p:cNvPr id="24" name="テキスト ボックス 23">
             <a:extLst>
               <a:ext uri="{FF2B5EF4-FFF2-40B4-BE49-F238E27FC236}">
-                <a16:creationId xmlns:a16="http://schemas.microsoft.com/office/drawing/2014/main" id="{5627A118-5D78-CD36-C87E-D07FF2C7B70F}"/>
+                <a16:creationId xmlns:a16="http://schemas.microsoft.com/office/drawing/2014/main" id="{0A9AD966-0B6C-9068-E340-34E48F791615}"/>
               </a:ext>
             </a:extLst>
           </p:cNvPr>
@@ -14690,7 +14690,7 @@
           <p:cNvPr id="25" name="正方形/長方形 24">
             <a:extLst>
               <a:ext uri="{FF2B5EF4-FFF2-40B4-BE49-F238E27FC236}">
-                <a16:creationId xmlns:a16="http://schemas.microsoft.com/office/drawing/2014/main" id="{1FECA079-6477-0FBE-9C38-F553E3FC3CD1}"/>
+                <a16:creationId xmlns:a16="http://schemas.microsoft.com/office/drawing/2014/main" id="{94ACF4CD-BEBA-5A97-364B-FBCB9931A564}"/>
               </a:ext>
             </a:extLst>
           </p:cNvPr>
@@ -14758,7 +14758,7 @@
           <p:cNvPr id="26" name="正方形/長方形 25">
             <a:extLst>
               <a:ext uri="{FF2B5EF4-FFF2-40B4-BE49-F238E27FC236}">
-                <a16:creationId xmlns:a16="http://schemas.microsoft.com/office/drawing/2014/main" id="{572E7238-C2D8-D03A-9B3F-674DDF566381}"/>
+                <a16:creationId xmlns:a16="http://schemas.microsoft.com/office/drawing/2014/main" id="{65A89FCB-0C53-36B4-50D1-0248BA82FCB0}"/>
               </a:ext>
             </a:extLst>
           </p:cNvPr>
@@ -14826,7 +14826,7 @@
           <p:cNvPr id="27" name="テキスト ボックス 26">
             <a:extLst>
               <a:ext uri="{FF2B5EF4-FFF2-40B4-BE49-F238E27FC236}">
-                <a16:creationId xmlns:a16="http://schemas.microsoft.com/office/drawing/2014/main" id="{3E394213-E3CF-E074-89AB-DDB69CAF47E1}"/>
+                <a16:creationId xmlns:a16="http://schemas.microsoft.com/office/drawing/2014/main" id="{2F2DFADB-BF6E-9AD2-57CE-AA5EDAFE2F8F}"/>
               </a:ext>
             </a:extLst>
           </p:cNvPr>
@@ -14894,7 +14894,7 @@
           <p:cNvPr id="28" name="テキスト ボックス 27">
             <a:extLst>
               <a:ext uri="{FF2B5EF4-FFF2-40B4-BE49-F238E27FC236}">
-                <a16:creationId xmlns:a16="http://schemas.microsoft.com/office/drawing/2014/main" id="{05DD7161-7E8F-F7B5-8C7B-8F80EFCE82FC}"/>
+                <a16:creationId xmlns:a16="http://schemas.microsoft.com/office/drawing/2014/main" id="{35C72156-C9E8-F1B4-12ED-3DB75D8588AD}"/>
               </a:ext>
             </a:extLst>
           </p:cNvPr>
@@ -14975,7 +14975,7 @@
           <p:cNvPr id="29" name="表 28">
             <a:extLst>
               <a:ext uri="{FF2B5EF4-FFF2-40B4-BE49-F238E27FC236}">
-                <a16:creationId xmlns:a16="http://schemas.microsoft.com/office/drawing/2014/main" id="{138F770A-186D-BE3B-AE28-E269B9AF1D79}"/>
+                <a16:creationId xmlns:a16="http://schemas.microsoft.com/office/drawing/2014/main" id="{99FFF5E6-2705-12DF-43EF-B5FF7EC98CE2}"/>
               </a:ext>
             </a:extLst>
           </p:cNvPr>
@@ -14985,7 +14985,7 @@
           <p:nvPr>
             <p:extLst>
               <p:ext uri="{D42A27DB-BD31-4B8C-83A1-F6EECF244321}">
-                <p14:modId xmlns:p14="http://schemas.microsoft.com/office/powerpoint/2010/main" val="2147468442"/>
+                <p14:modId xmlns:p14="http://schemas.microsoft.com/office/powerpoint/2010/main" val="1655432078"/>
               </p:ext>
             </p:extLst>
           </p:nvPr>
@@ -15004,28 +15004,28 @@
                 <a:gridCol w="1930400">
                   <a:extLst>
                     <a:ext uri="{9D8B030D-6E8A-4147-A177-3AD203B41FA5}">
-                      <a16:colId xmlns:a16="http://schemas.microsoft.com/office/drawing/2014/main" val="1150309069"/>
+                      <a16:colId xmlns:a16="http://schemas.microsoft.com/office/drawing/2014/main" val="4215605874"/>
                     </a:ext>
                   </a:extLst>
                 </a:gridCol>
                 <a:gridCol w="1397000">
                   <a:extLst>
                     <a:ext uri="{9D8B030D-6E8A-4147-A177-3AD203B41FA5}">
-                      <a16:colId xmlns:a16="http://schemas.microsoft.com/office/drawing/2014/main" val="2684092171"/>
+                      <a16:colId xmlns:a16="http://schemas.microsoft.com/office/drawing/2014/main" val="1237383192"/>
                     </a:ext>
                   </a:extLst>
                 </a:gridCol>
                 <a:gridCol w="1397000">
                   <a:extLst>
                     <a:ext uri="{9D8B030D-6E8A-4147-A177-3AD203B41FA5}">
-                      <a16:colId xmlns:a16="http://schemas.microsoft.com/office/drawing/2014/main" val="743710652"/>
+                      <a16:colId xmlns:a16="http://schemas.microsoft.com/office/drawing/2014/main" val="305281960"/>
                     </a:ext>
                   </a:extLst>
                 </a:gridCol>
                 <a:gridCol w="1270000">
                   <a:extLst>
                     <a:ext uri="{9D8B030D-6E8A-4147-A177-3AD203B41FA5}">
-                      <a16:colId xmlns:a16="http://schemas.microsoft.com/office/drawing/2014/main" val="4222765212"/>
+                      <a16:colId xmlns:a16="http://schemas.microsoft.com/office/drawing/2014/main" val="2414624656"/>
                     </a:ext>
                   </a:extLst>
                 </a:gridCol>
@@ -15135,7 +15135,7 @@
                 </a:tc>
                 <a:extLst>
                   <a:ext uri="{0D108BD9-81ED-4DB2-BD59-A6C34878D82A}">
-                    <a16:rowId xmlns:a16="http://schemas.microsoft.com/office/drawing/2014/main" val="1159270056"/>
+                    <a16:rowId xmlns:a16="http://schemas.microsoft.com/office/drawing/2014/main" val="3589679445"/>
                   </a:ext>
                 </a:extLst>
               </a:tr>
@@ -15352,7 +15352,7 @@
                 </a:tc>
                 <a:extLst>
                   <a:ext uri="{0D108BD9-81ED-4DB2-BD59-A6C34878D82A}">
-                    <a16:rowId xmlns:a16="http://schemas.microsoft.com/office/drawing/2014/main" val="1152518662"/>
+                    <a16:rowId xmlns:a16="http://schemas.microsoft.com/office/drawing/2014/main" val="2943187475"/>
                   </a:ext>
                 </a:extLst>
               </a:tr>
@@ -15569,7 +15569,7 @@
                 </a:tc>
                 <a:extLst>
                   <a:ext uri="{0D108BD9-81ED-4DB2-BD59-A6C34878D82A}">
-                    <a16:rowId xmlns:a16="http://schemas.microsoft.com/office/drawing/2014/main" val="3257346671"/>
+                    <a16:rowId xmlns:a16="http://schemas.microsoft.com/office/drawing/2014/main" val="1418072775"/>
                   </a:ext>
                 </a:extLst>
               </a:tr>
@@ -15786,7 +15786,7 @@
                 </a:tc>
                 <a:extLst>
                   <a:ext uri="{0D108BD9-81ED-4DB2-BD59-A6C34878D82A}">
-                    <a16:rowId xmlns:a16="http://schemas.microsoft.com/office/drawing/2014/main" val="1292384162"/>
+                    <a16:rowId xmlns:a16="http://schemas.microsoft.com/office/drawing/2014/main" val="2132994092"/>
                   </a:ext>
                 </a:extLst>
               </a:tr>
@@ -15799,7 +15799,7 @@
           <p:cNvPr id="30" name="正方形/長方形 29">
             <a:extLst>
               <a:ext uri="{FF2B5EF4-FFF2-40B4-BE49-F238E27FC236}">
-                <a16:creationId xmlns:a16="http://schemas.microsoft.com/office/drawing/2014/main" id="{A1B6F550-A518-7D73-3202-81F2D5C83123}"/>
+                <a16:creationId xmlns:a16="http://schemas.microsoft.com/office/drawing/2014/main" id="{2C015881-CFB7-DADA-EED7-530F003CD39E}"/>
               </a:ext>
             </a:extLst>
           </p:cNvPr>
@@ -15853,7 +15853,7 @@
           <p:cNvPr id="31" name="正方形/長方形 30">
             <a:extLst>
               <a:ext uri="{FF2B5EF4-FFF2-40B4-BE49-F238E27FC236}">
-                <a16:creationId xmlns:a16="http://schemas.microsoft.com/office/drawing/2014/main" id="{F6BE78B2-BB22-FF12-C6FB-F91A089F8170}"/>
+                <a16:creationId xmlns:a16="http://schemas.microsoft.com/office/drawing/2014/main" id="{23263986-F93D-5584-E17B-F793668FD22F}"/>
               </a:ext>
             </a:extLst>
           </p:cNvPr>
@@ -15921,7 +15921,7 @@
           <p:cNvPr id="32" name="テキスト ボックス 31">
             <a:extLst>
               <a:ext uri="{FF2B5EF4-FFF2-40B4-BE49-F238E27FC236}">
-                <a16:creationId xmlns:a16="http://schemas.microsoft.com/office/drawing/2014/main" id="{E8014E04-15D5-FCC5-F343-382BA1FA5DD8}"/>
+                <a16:creationId xmlns:a16="http://schemas.microsoft.com/office/drawing/2014/main" id="{E352F867-0E4B-5B3D-6B23-01A13348D50E}"/>
               </a:ext>
             </a:extLst>
           </p:cNvPr>
@@ -15962,7 +15962,7 @@
           <p:cNvPr id="33" name="正方形/長方形 32">
             <a:extLst>
               <a:ext uri="{FF2B5EF4-FFF2-40B4-BE49-F238E27FC236}">
-                <a16:creationId xmlns:a16="http://schemas.microsoft.com/office/drawing/2014/main" id="{F84CB059-63C5-0BAE-3049-A2E0BF5C938C}"/>
+                <a16:creationId xmlns:a16="http://schemas.microsoft.com/office/drawing/2014/main" id="{55B4C9DD-ABE1-3624-62C6-117F90F39B8D}"/>
               </a:ext>
             </a:extLst>
           </p:cNvPr>
@@ -16030,7 +16030,7 @@
           <p:cNvPr id="34" name="テキスト ボックス 33">
             <a:extLst>
               <a:ext uri="{FF2B5EF4-FFF2-40B4-BE49-F238E27FC236}">
-                <a16:creationId xmlns:a16="http://schemas.microsoft.com/office/drawing/2014/main" id="{272D3EF1-BF70-8E81-2130-E8064DF819E6}"/>
+                <a16:creationId xmlns:a16="http://schemas.microsoft.com/office/drawing/2014/main" id="{2A5213EA-60D7-E62D-B145-242CFE294152}"/>
               </a:ext>
             </a:extLst>
           </p:cNvPr>
@@ -16504,7 +16504,7 @@
     </p:spTree>
     <p:extLst>
       <p:ext uri="{BB962C8B-B14F-4D97-AF65-F5344CB8AC3E}">
-        <p14:creationId xmlns:p14="http://schemas.microsoft.com/office/powerpoint/2010/main" val="3934863621"/>
+        <p14:creationId xmlns:p14="http://schemas.microsoft.com/office/powerpoint/2010/main" val="1646830321"/>
       </p:ext>
     </p:extLst>
   </p:cSld>
@@ -16536,7 +16536,7 @@
           <p:cNvPr id="2" name="正方形/長方形 1">
             <a:extLst>
               <a:ext uri="{FF2B5EF4-FFF2-40B4-BE49-F238E27FC236}">
-                <a16:creationId xmlns:a16="http://schemas.microsoft.com/office/drawing/2014/main" id="{9FAE454D-BDC1-8C28-0227-A2D6E803BB20}"/>
+                <a16:creationId xmlns:a16="http://schemas.microsoft.com/office/drawing/2014/main" id="{53ED44B7-58F5-B202-C611-4177B67DD489}"/>
               </a:ext>
             </a:extLst>
           </p:cNvPr>
@@ -16604,7 +16604,7 @@
           <p:cNvPr id="3" name="正方形/長方形 2">
             <a:extLst>
               <a:ext uri="{FF2B5EF4-FFF2-40B4-BE49-F238E27FC236}">
-                <a16:creationId xmlns:a16="http://schemas.microsoft.com/office/drawing/2014/main" id="{6CEEC7C2-8FD1-F844-6ECC-B3AD021660CF}"/>
+                <a16:creationId xmlns:a16="http://schemas.microsoft.com/office/drawing/2014/main" id="{35EB0A43-0C2F-8D04-8A08-77F0F5DBB2F3}"/>
               </a:ext>
             </a:extLst>
           </p:cNvPr>
@@ -16672,7 +16672,7 @@
           <p:cNvPr id="4" name="正方形/長方形 3">
             <a:extLst>
               <a:ext uri="{FF2B5EF4-FFF2-40B4-BE49-F238E27FC236}">
-                <a16:creationId xmlns:a16="http://schemas.microsoft.com/office/drawing/2014/main" id="{2B93343A-A27D-E3E3-AF8D-BCF81AF99CC4}"/>
+                <a16:creationId xmlns:a16="http://schemas.microsoft.com/office/drawing/2014/main" id="{A6CFF14C-A57D-B9BE-1515-75AAE73394D5}"/>
               </a:ext>
             </a:extLst>
           </p:cNvPr>
@@ -16740,7 +16740,7 @@
           <p:cNvPr id="5" name="テキスト ボックス 4">
             <a:extLst>
               <a:ext uri="{FF2B5EF4-FFF2-40B4-BE49-F238E27FC236}">
-                <a16:creationId xmlns:a16="http://schemas.microsoft.com/office/drawing/2014/main" id="{EF699C70-76A8-7CEB-3019-1BB10B8D9C13}"/>
+                <a16:creationId xmlns:a16="http://schemas.microsoft.com/office/drawing/2014/main" id="{99B318C9-935E-1AF9-24C1-9C923F16EB41}"/>
               </a:ext>
             </a:extLst>
           </p:cNvPr>
@@ -16809,7 +16809,7 @@
           <p:cNvPr id="6" name="テキスト ボックス 5">
             <a:extLst>
               <a:ext uri="{FF2B5EF4-FFF2-40B4-BE49-F238E27FC236}">
-                <a16:creationId xmlns:a16="http://schemas.microsoft.com/office/drawing/2014/main" id="{5CCB991B-A01B-B663-F28D-3E9B8C4C3C0C}"/>
+                <a16:creationId xmlns:a16="http://schemas.microsoft.com/office/drawing/2014/main" id="{5DEC8F12-4C26-867E-0950-86F728D8013E}"/>
               </a:ext>
             </a:extLst>
           </p:cNvPr>
@@ -16818,8 +16818,8 @@
         </p:nvSpPr>
         <p:spPr>
           <a:xfrm>
-            <a:off x="2336800" y="139700"/>
-            <a:ext cx="8382000" cy="410369"/>
+            <a:off x="2311400" y="165100"/>
+            <a:ext cx="8585200" cy="379591"/>
           </a:xfrm>
           <a:prstGeom prst="rect">
             <a:avLst/>
@@ -16833,7 +16833,7 @@
           <a:lstStyle/>
           <a:p>
             <a:r>
-              <a:rPr kumimoji="1" lang="ja-JP" altLang="en-US" sz="2000" b="1">
+              <a:rPr kumimoji="1" lang="ja-JP" altLang="en-US" b="1">
                 <a:solidFill>
                   <a:srgbClr val="FFFFFF"/>
                 </a:solidFill>
@@ -16850,7 +16850,7 @@
           <p:cNvPr id="7" name="テキスト ボックス 6">
             <a:extLst>
               <a:ext uri="{FF2B5EF4-FFF2-40B4-BE49-F238E27FC236}">
-                <a16:creationId xmlns:a16="http://schemas.microsoft.com/office/drawing/2014/main" id="{96EF8448-B213-137D-FEBB-C195E6A24627}"/>
+                <a16:creationId xmlns:a16="http://schemas.microsoft.com/office/drawing/2014/main" id="{9E967B3E-3118-68E4-1C74-6FF9B7D51080}"/>
               </a:ext>
             </a:extLst>
           </p:cNvPr>
@@ -16859,8 +16859,8 @@
         </p:nvSpPr>
         <p:spPr>
           <a:xfrm>
-            <a:off x="10668000" y="203200"/>
-            <a:ext cx="1219200" cy="302647"/>
+            <a:off x="10896600" y="203200"/>
+            <a:ext cx="990600" cy="302647"/>
           </a:xfrm>
           <a:prstGeom prst="rect">
             <a:avLst/>
@@ -16899,7 +16899,7 @@
           <p:cNvPr id="8" name="正方形/長方形 7">
             <a:extLst>
               <a:ext uri="{FF2B5EF4-FFF2-40B4-BE49-F238E27FC236}">
-                <a16:creationId xmlns:a16="http://schemas.microsoft.com/office/drawing/2014/main" id="{6073C161-5F23-EFFE-F711-C13EB8D23A0D}"/>
+                <a16:creationId xmlns:a16="http://schemas.microsoft.com/office/drawing/2014/main" id="{CED70649-D272-047D-AEB4-6D5086E108C9}"/>
               </a:ext>
             </a:extLst>
           </p:cNvPr>
@@ -16953,7 +16953,7 @@
           <p:cNvPr id="9" name="正方形/長方形 8">
             <a:extLst>
               <a:ext uri="{FF2B5EF4-FFF2-40B4-BE49-F238E27FC236}">
-                <a16:creationId xmlns:a16="http://schemas.microsoft.com/office/drawing/2014/main" id="{370C5226-2625-29E2-36ED-1ED290203E26}"/>
+                <a16:creationId xmlns:a16="http://schemas.microsoft.com/office/drawing/2014/main" id="{85133D4C-8582-01AE-5EAF-99F4768045CB}"/>
               </a:ext>
             </a:extLst>
           </p:cNvPr>
@@ -17021,7 +17021,7 @@
           <p:cNvPr id="10" name="テキスト ボックス 9">
             <a:extLst>
               <a:ext uri="{FF2B5EF4-FFF2-40B4-BE49-F238E27FC236}">
-                <a16:creationId xmlns:a16="http://schemas.microsoft.com/office/drawing/2014/main" id="{E0F284A5-A11C-DDD4-D1D0-1D91C3061E93}"/>
+                <a16:creationId xmlns:a16="http://schemas.microsoft.com/office/drawing/2014/main" id="{803F03F6-9CC9-E10E-814D-B7A918C2A4EF}"/>
               </a:ext>
             </a:extLst>
           </p:cNvPr>
@@ -17142,7 +17142,7 @@
           <p:cNvPr id="11" name="正方形/長方形 10">
             <a:extLst>
               <a:ext uri="{FF2B5EF4-FFF2-40B4-BE49-F238E27FC236}">
-                <a16:creationId xmlns:a16="http://schemas.microsoft.com/office/drawing/2014/main" id="{DAE7DA9A-2F09-5FFE-21EE-C501950AC741}"/>
+                <a16:creationId xmlns:a16="http://schemas.microsoft.com/office/drawing/2014/main" id="{B5DB1408-C6B7-40AA-283B-5A6FA6109ECD}"/>
               </a:ext>
             </a:extLst>
           </p:cNvPr>
@@ -17196,7 +17196,7 @@
           <p:cNvPr id="12" name="正方形/長方形 11">
             <a:extLst>
               <a:ext uri="{FF2B5EF4-FFF2-40B4-BE49-F238E27FC236}">
-                <a16:creationId xmlns:a16="http://schemas.microsoft.com/office/drawing/2014/main" id="{0A688BD9-2CBC-C9C4-944C-03DE74D3D940}"/>
+                <a16:creationId xmlns:a16="http://schemas.microsoft.com/office/drawing/2014/main" id="{037F79A8-6023-E15C-A72A-6D4F12376069}"/>
               </a:ext>
             </a:extLst>
           </p:cNvPr>
@@ -17264,7 +17264,7 @@
           <p:cNvPr id="13" name="テキスト ボックス 12">
             <a:extLst>
               <a:ext uri="{FF2B5EF4-FFF2-40B4-BE49-F238E27FC236}">
-                <a16:creationId xmlns:a16="http://schemas.microsoft.com/office/drawing/2014/main" id="{69531BFC-7AA8-738A-87BA-2D85C6EA011C}"/>
+                <a16:creationId xmlns:a16="http://schemas.microsoft.com/office/drawing/2014/main" id="{888895B3-DA45-2F8C-74CF-49CF9296A28E}"/>
               </a:ext>
             </a:extLst>
           </p:cNvPr>
@@ -17365,7 +17365,7 @@
           <p:cNvPr id="14" name="正方形/長方形 13">
             <a:extLst>
               <a:ext uri="{FF2B5EF4-FFF2-40B4-BE49-F238E27FC236}">
-                <a16:creationId xmlns:a16="http://schemas.microsoft.com/office/drawing/2014/main" id="{C23179E0-874A-FF65-A3DB-52C3E3DAFD10}"/>
+                <a16:creationId xmlns:a16="http://schemas.microsoft.com/office/drawing/2014/main" id="{6BACFEB0-12DA-6941-B052-FB6585572C63}"/>
               </a:ext>
             </a:extLst>
           </p:cNvPr>
@@ -17433,7 +17433,7 @@
           <p:cNvPr id="15" name="テキスト ボックス 14">
             <a:extLst>
               <a:ext uri="{FF2B5EF4-FFF2-40B4-BE49-F238E27FC236}">
-                <a16:creationId xmlns:a16="http://schemas.microsoft.com/office/drawing/2014/main" id="{1CE93BD7-3E33-E62F-D89F-07A5DD7B73FD}"/>
+                <a16:creationId xmlns:a16="http://schemas.microsoft.com/office/drawing/2014/main" id="{91D80416-D3A5-E3A5-A502-66BA8E095C53}"/>
               </a:ext>
             </a:extLst>
           </p:cNvPr>
@@ -17555,7 +17555,7 @@
           <p:cNvPr id="16" name="正方形/長方形 15">
             <a:extLst>
               <a:ext uri="{FF2B5EF4-FFF2-40B4-BE49-F238E27FC236}">
-                <a16:creationId xmlns:a16="http://schemas.microsoft.com/office/drawing/2014/main" id="{AEB89C09-AC64-9B5C-51F1-D82F59810347}"/>
+                <a16:creationId xmlns:a16="http://schemas.microsoft.com/office/drawing/2014/main" id="{6BFE6902-5BE4-3AF2-A267-C178BFF3FA66}"/>
               </a:ext>
             </a:extLst>
           </p:cNvPr>
@@ -17609,7 +17609,7 @@
           <p:cNvPr id="17" name="正方形/長方形 16">
             <a:extLst>
               <a:ext uri="{FF2B5EF4-FFF2-40B4-BE49-F238E27FC236}">
-                <a16:creationId xmlns:a16="http://schemas.microsoft.com/office/drawing/2014/main" id="{B071AB5F-AC95-2604-DA88-67DFF4F56744}"/>
+                <a16:creationId xmlns:a16="http://schemas.microsoft.com/office/drawing/2014/main" id="{4898A8DD-5DAB-397C-45A7-52F7F2EFC796}"/>
               </a:ext>
             </a:extLst>
           </p:cNvPr>
@@ -17677,7 +17677,7 @@
           <p:cNvPr id="18" name="テキスト ボックス 17">
             <a:extLst>
               <a:ext uri="{FF2B5EF4-FFF2-40B4-BE49-F238E27FC236}">
-                <a16:creationId xmlns:a16="http://schemas.microsoft.com/office/drawing/2014/main" id="{E5AC93DE-5CC1-CE84-E5E4-45C73396BCE2}"/>
+                <a16:creationId xmlns:a16="http://schemas.microsoft.com/office/drawing/2014/main" id="{F90A9AAC-B338-4B1D-A20A-A8B41E15DFAE}"/>
               </a:ext>
             </a:extLst>
           </p:cNvPr>
@@ -17738,7 +17738,7 @@
           <p:cNvPr id="19" name="正方形/長方形 18">
             <a:extLst>
               <a:ext uri="{FF2B5EF4-FFF2-40B4-BE49-F238E27FC236}">
-                <a16:creationId xmlns:a16="http://schemas.microsoft.com/office/drawing/2014/main" id="{E209AC6B-59B3-08F0-A5B6-FC8E62EF46C6}"/>
+                <a16:creationId xmlns:a16="http://schemas.microsoft.com/office/drawing/2014/main" id="{CC8B8F98-D671-380D-555D-D2E1715993BD}"/>
               </a:ext>
             </a:extLst>
           </p:cNvPr>
@@ -17806,7 +17806,7 @@
           <p:cNvPr id="20" name="テキスト ボックス 19">
             <a:extLst>
               <a:ext uri="{FF2B5EF4-FFF2-40B4-BE49-F238E27FC236}">
-                <a16:creationId xmlns:a16="http://schemas.microsoft.com/office/drawing/2014/main" id="{2366F664-BA88-4D52-E0A6-0DF3BC200B30}"/>
+                <a16:creationId xmlns:a16="http://schemas.microsoft.com/office/drawing/2014/main" id="{3D26D8DA-F0B5-8F61-7247-706C8E9ECBFE}"/>
               </a:ext>
             </a:extLst>
           </p:cNvPr>
@@ -17948,7 +17948,7 @@
           <p:cNvPr id="21" name="正方形/長方形 20">
             <a:extLst>
               <a:ext uri="{FF2B5EF4-FFF2-40B4-BE49-F238E27FC236}">
-                <a16:creationId xmlns:a16="http://schemas.microsoft.com/office/drawing/2014/main" id="{6D787E08-04EA-0A24-059B-F7CD38C73C52}"/>
+                <a16:creationId xmlns:a16="http://schemas.microsoft.com/office/drawing/2014/main" id="{CE1B8959-B537-A5D5-615A-7C85F27DE6BA}"/>
               </a:ext>
             </a:extLst>
           </p:cNvPr>
@@ -18002,7 +18002,7 @@
           <p:cNvPr id="22" name="正方形/長方形 21">
             <a:extLst>
               <a:ext uri="{FF2B5EF4-FFF2-40B4-BE49-F238E27FC236}">
-                <a16:creationId xmlns:a16="http://schemas.microsoft.com/office/drawing/2014/main" id="{B58B5B0A-7FF8-A865-17A2-CAFB28C34329}"/>
+                <a16:creationId xmlns:a16="http://schemas.microsoft.com/office/drawing/2014/main" id="{7580B9A9-0153-AD42-7958-3A9761304FFA}"/>
               </a:ext>
             </a:extLst>
           </p:cNvPr>
@@ -18070,7 +18070,7 @@
           <p:cNvPr id="23" name="テキスト ボックス 22">
             <a:extLst>
               <a:ext uri="{FF2B5EF4-FFF2-40B4-BE49-F238E27FC236}">
-                <a16:creationId xmlns:a16="http://schemas.microsoft.com/office/drawing/2014/main" id="{3CDB4540-867C-2A10-8031-341AAC57FBBA}"/>
+                <a16:creationId xmlns:a16="http://schemas.microsoft.com/office/drawing/2014/main" id="{E4331F22-A22E-E1F8-A71C-07D361A5A0D8}"/>
               </a:ext>
             </a:extLst>
           </p:cNvPr>
@@ -18171,7 +18171,7 @@
           <p:cNvPr id="24" name="正方形/長方形 23">
             <a:extLst>
               <a:ext uri="{FF2B5EF4-FFF2-40B4-BE49-F238E27FC236}">
-                <a16:creationId xmlns:a16="http://schemas.microsoft.com/office/drawing/2014/main" id="{2D784A1C-AD70-855A-7E50-C9C8649E2F47}"/>
+                <a16:creationId xmlns:a16="http://schemas.microsoft.com/office/drawing/2014/main" id="{24AF42AA-16AF-1B51-0387-4B77617974C9}"/>
               </a:ext>
             </a:extLst>
           </p:cNvPr>
@@ -18239,7 +18239,7 @@
           <p:cNvPr id="25" name="テキスト ボックス 24">
             <a:extLst>
               <a:ext uri="{FF2B5EF4-FFF2-40B4-BE49-F238E27FC236}">
-                <a16:creationId xmlns:a16="http://schemas.microsoft.com/office/drawing/2014/main" id="{A683F5B3-3B48-BEEE-DC22-1E61B5FC4FEF}"/>
+                <a16:creationId xmlns:a16="http://schemas.microsoft.com/office/drawing/2014/main" id="{4641BC71-623C-B07E-684C-390CF18B243C}"/>
               </a:ext>
             </a:extLst>
           </p:cNvPr>
@@ -18361,7 +18361,7 @@
           <p:cNvPr id="26" name="正方形/長方形 25">
             <a:extLst>
               <a:ext uri="{FF2B5EF4-FFF2-40B4-BE49-F238E27FC236}">
-                <a16:creationId xmlns:a16="http://schemas.microsoft.com/office/drawing/2014/main" id="{D5132AEB-1919-1B6A-B3C0-27DD1169D556}"/>
+                <a16:creationId xmlns:a16="http://schemas.microsoft.com/office/drawing/2014/main" id="{870261FE-AD50-7537-4D8A-9C07214A9F42}"/>
               </a:ext>
             </a:extLst>
           </p:cNvPr>
@@ -18415,7 +18415,7 @@
           <p:cNvPr id="27" name="正方形/長方形 26">
             <a:extLst>
               <a:ext uri="{FF2B5EF4-FFF2-40B4-BE49-F238E27FC236}">
-                <a16:creationId xmlns:a16="http://schemas.microsoft.com/office/drawing/2014/main" id="{33004237-3DF3-90AF-8662-113FE56299E6}"/>
+                <a16:creationId xmlns:a16="http://schemas.microsoft.com/office/drawing/2014/main" id="{C423EBEE-254A-821D-C9C0-98002427CA0E}"/>
               </a:ext>
             </a:extLst>
           </p:cNvPr>
@@ -18483,7 +18483,7 @@
           <p:cNvPr id="28" name="テキスト ボックス 27">
             <a:extLst>
               <a:ext uri="{FF2B5EF4-FFF2-40B4-BE49-F238E27FC236}">
-                <a16:creationId xmlns:a16="http://schemas.microsoft.com/office/drawing/2014/main" id="{D2E21FA2-6AC9-0F18-BEE9-CB787C70A1F6}"/>
+                <a16:creationId xmlns:a16="http://schemas.microsoft.com/office/drawing/2014/main" id="{A3D1FDF7-8B6F-24C7-22C1-EC097B4BE0E6}"/>
               </a:ext>
             </a:extLst>
           </p:cNvPr>
@@ -18544,7 +18544,7 @@
           <p:cNvPr id="29" name="正方形/長方形 28">
             <a:extLst>
               <a:ext uri="{FF2B5EF4-FFF2-40B4-BE49-F238E27FC236}">
-                <a16:creationId xmlns:a16="http://schemas.microsoft.com/office/drawing/2014/main" id="{10C0D49D-CD8B-A33E-718A-3DA1A232347D}"/>
+                <a16:creationId xmlns:a16="http://schemas.microsoft.com/office/drawing/2014/main" id="{9513E1A2-48DA-6B64-C43D-D1F61FB566F2}"/>
               </a:ext>
             </a:extLst>
           </p:cNvPr>
@@ -18612,7 +18612,7 @@
           <p:cNvPr id="30" name="テキスト ボックス 29">
             <a:extLst>
               <a:ext uri="{FF2B5EF4-FFF2-40B4-BE49-F238E27FC236}">
-                <a16:creationId xmlns:a16="http://schemas.microsoft.com/office/drawing/2014/main" id="{77655622-578A-EFE1-C837-162D9BD54B67}"/>
+                <a16:creationId xmlns:a16="http://schemas.microsoft.com/office/drawing/2014/main" id="{9DBB75D4-C676-7A5C-BE4B-69D9EC9CDDEF}"/>
               </a:ext>
             </a:extLst>
           </p:cNvPr>
@@ -18732,7 +18732,7 @@
     </p:spTree>
     <p:extLst>
       <p:ext uri="{BB962C8B-B14F-4D97-AF65-F5344CB8AC3E}">
-        <p14:creationId xmlns:p14="http://schemas.microsoft.com/office/powerpoint/2010/main" val="3151290944"/>
+        <p14:creationId xmlns:p14="http://schemas.microsoft.com/office/powerpoint/2010/main" val="2893748422"/>
       </p:ext>
     </p:extLst>
   </p:cSld>
@@ -18764,7 +18764,7 @@
           <p:cNvPr id="2" name="正方形/長方形 1">
             <a:extLst>
               <a:ext uri="{FF2B5EF4-FFF2-40B4-BE49-F238E27FC236}">
-                <a16:creationId xmlns:a16="http://schemas.microsoft.com/office/drawing/2014/main" id="{AB6DA399-9612-64B9-00E5-FE685C5683E0}"/>
+                <a16:creationId xmlns:a16="http://schemas.microsoft.com/office/drawing/2014/main" id="{9E8582C7-387E-5CDA-8DD1-37276444380A}"/>
               </a:ext>
             </a:extLst>
           </p:cNvPr>
@@ -18832,7 +18832,7 @@
           <p:cNvPr id="3" name="正方形/長方形 2">
             <a:extLst>
               <a:ext uri="{FF2B5EF4-FFF2-40B4-BE49-F238E27FC236}">
-                <a16:creationId xmlns:a16="http://schemas.microsoft.com/office/drawing/2014/main" id="{BA3A3732-64CC-EF9D-F22B-394427A589E4}"/>
+                <a16:creationId xmlns:a16="http://schemas.microsoft.com/office/drawing/2014/main" id="{E617F4D8-6195-D83A-8A60-110D94A51450}"/>
               </a:ext>
             </a:extLst>
           </p:cNvPr>
@@ -18900,7 +18900,7 @@
           <p:cNvPr id="4" name="正方形/長方形 3">
             <a:extLst>
               <a:ext uri="{FF2B5EF4-FFF2-40B4-BE49-F238E27FC236}">
-                <a16:creationId xmlns:a16="http://schemas.microsoft.com/office/drawing/2014/main" id="{1F5B4AB9-B2DA-2541-6961-CE6BCCE34C2F}"/>
+                <a16:creationId xmlns:a16="http://schemas.microsoft.com/office/drawing/2014/main" id="{B42D258C-AA89-28F0-D452-CC13B8770873}"/>
               </a:ext>
             </a:extLst>
           </p:cNvPr>
@@ -18968,7 +18968,7 @@
           <p:cNvPr id="5" name="テキスト ボックス 4">
             <a:extLst>
               <a:ext uri="{FF2B5EF4-FFF2-40B4-BE49-F238E27FC236}">
-                <a16:creationId xmlns:a16="http://schemas.microsoft.com/office/drawing/2014/main" id="{C874DCD1-F007-A417-EBDD-AA8B011DD190}"/>
+                <a16:creationId xmlns:a16="http://schemas.microsoft.com/office/drawing/2014/main" id="{9192E153-6BBA-784F-2983-D2AD17B2B88C}"/>
               </a:ext>
             </a:extLst>
           </p:cNvPr>
@@ -19030,7 +19030,7 @@
           <p:cNvPr id="6" name="テキスト ボックス 5">
             <a:extLst>
               <a:ext uri="{FF2B5EF4-FFF2-40B4-BE49-F238E27FC236}">
-                <a16:creationId xmlns:a16="http://schemas.microsoft.com/office/drawing/2014/main" id="{F0BE17A6-4B32-AA0A-67A9-803F9515B14C}"/>
+                <a16:creationId xmlns:a16="http://schemas.microsoft.com/office/drawing/2014/main" id="{AEC45B92-8BE3-A241-E3C6-7483E1425D34}"/>
               </a:ext>
             </a:extLst>
           </p:cNvPr>
@@ -19039,8 +19039,8 @@
         </p:nvSpPr>
         <p:spPr>
           <a:xfrm>
-            <a:off x="2336800" y="139700"/>
-            <a:ext cx="8382000" cy="718145"/>
+            <a:off x="2311400" y="165100"/>
+            <a:ext cx="8585200" cy="379591"/>
           </a:xfrm>
           <a:prstGeom prst="rect">
             <a:avLst/>
@@ -19054,7 +19054,7 @@
           <a:lstStyle/>
           <a:p>
             <a:r>
-              <a:rPr kumimoji="1" lang="ja-JP" altLang="en-US" sz="2000" b="1">
+              <a:rPr kumimoji="1" lang="ja-JP" altLang="en-US" b="1">
                 <a:solidFill>
                   <a:srgbClr val="FFFFFF"/>
                 </a:solidFill>
@@ -19071,7 +19071,7 @@
           <p:cNvPr id="7" name="テキスト ボックス 6">
             <a:extLst>
               <a:ext uri="{FF2B5EF4-FFF2-40B4-BE49-F238E27FC236}">
-                <a16:creationId xmlns:a16="http://schemas.microsoft.com/office/drawing/2014/main" id="{D167B181-2442-7630-88D5-BBE2A9368E04}"/>
+                <a16:creationId xmlns:a16="http://schemas.microsoft.com/office/drawing/2014/main" id="{04AC4217-1C98-596D-33FE-371E1AF0E284}"/>
               </a:ext>
             </a:extLst>
           </p:cNvPr>
@@ -19080,8 +19080,8 @@
         </p:nvSpPr>
         <p:spPr>
           <a:xfrm>
-            <a:off x="10668000" y="203200"/>
-            <a:ext cx="1219200" cy="302647"/>
+            <a:off x="10896600" y="203200"/>
+            <a:ext cx="990600" cy="302647"/>
           </a:xfrm>
           <a:prstGeom prst="rect">
             <a:avLst/>
@@ -19120,7 +19120,7 @@
           <p:cNvPr id="8" name="正方形/長方形 7">
             <a:extLst>
               <a:ext uri="{FF2B5EF4-FFF2-40B4-BE49-F238E27FC236}">
-                <a16:creationId xmlns:a16="http://schemas.microsoft.com/office/drawing/2014/main" id="{C4743D00-F985-0BA3-E31E-FDC2DE0E99BF}"/>
+                <a16:creationId xmlns:a16="http://schemas.microsoft.com/office/drawing/2014/main" id="{E1644D20-9359-B537-BD58-A9AE3C32FB22}"/>
               </a:ext>
             </a:extLst>
           </p:cNvPr>
@@ -19174,7 +19174,7 @@
           <p:cNvPr id="9" name="正方形/長方形 8">
             <a:extLst>
               <a:ext uri="{FF2B5EF4-FFF2-40B4-BE49-F238E27FC236}">
-                <a16:creationId xmlns:a16="http://schemas.microsoft.com/office/drawing/2014/main" id="{97DB4622-700F-25A6-9BDA-2FD28B7F8D7B}"/>
+                <a16:creationId xmlns:a16="http://schemas.microsoft.com/office/drawing/2014/main" id="{228E37BF-33DA-7080-FA83-49A39B557EFD}"/>
               </a:ext>
             </a:extLst>
           </p:cNvPr>
@@ -19242,7 +19242,7 @@
           <p:cNvPr id="10" name="テキスト ボックス 9">
             <a:extLst>
               <a:ext uri="{FF2B5EF4-FFF2-40B4-BE49-F238E27FC236}">
-                <a16:creationId xmlns:a16="http://schemas.microsoft.com/office/drawing/2014/main" id="{48C6547E-2604-C49B-D132-4E1DA8E08E3D}"/>
+                <a16:creationId xmlns:a16="http://schemas.microsoft.com/office/drawing/2014/main" id="{4654878E-739C-7331-18D5-C82ABA707353}"/>
               </a:ext>
             </a:extLst>
           </p:cNvPr>
@@ -19323,7 +19323,7 @@
           <p:cNvPr id="11" name="正方形/長方形 10">
             <a:extLst>
               <a:ext uri="{FF2B5EF4-FFF2-40B4-BE49-F238E27FC236}">
-                <a16:creationId xmlns:a16="http://schemas.microsoft.com/office/drawing/2014/main" id="{77F21EB7-3EE9-37C8-F349-1C5ADE78C151}"/>
+                <a16:creationId xmlns:a16="http://schemas.microsoft.com/office/drawing/2014/main" id="{239C3CA3-8675-F6DC-49C0-7832F022FEA8}"/>
               </a:ext>
             </a:extLst>
           </p:cNvPr>
@@ -19377,7 +19377,7 @@
           <p:cNvPr id="12" name="正方形/長方形 11">
             <a:extLst>
               <a:ext uri="{FF2B5EF4-FFF2-40B4-BE49-F238E27FC236}">
-                <a16:creationId xmlns:a16="http://schemas.microsoft.com/office/drawing/2014/main" id="{86356889-F641-6930-1AE4-E4980BF016B0}"/>
+                <a16:creationId xmlns:a16="http://schemas.microsoft.com/office/drawing/2014/main" id="{A384E986-28F7-7ACB-4478-C21AD6572D0E}"/>
               </a:ext>
             </a:extLst>
           </p:cNvPr>
@@ -19445,7 +19445,7 @@
           <p:cNvPr id="13" name="テキスト ボックス 12">
             <a:extLst>
               <a:ext uri="{FF2B5EF4-FFF2-40B4-BE49-F238E27FC236}">
-                <a16:creationId xmlns:a16="http://schemas.microsoft.com/office/drawing/2014/main" id="{93D6BC90-4436-8D89-8B68-EDCE96D137C8}"/>
+                <a16:creationId xmlns:a16="http://schemas.microsoft.com/office/drawing/2014/main" id="{451CEFA6-ACAA-9467-127B-484A3837F075}"/>
               </a:ext>
             </a:extLst>
           </p:cNvPr>
@@ -19498,7 +19498,7 @@
           <p:cNvPr id="14" name="テキスト ボックス 13">
             <a:extLst>
               <a:ext uri="{FF2B5EF4-FFF2-40B4-BE49-F238E27FC236}">
-                <a16:creationId xmlns:a16="http://schemas.microsoft.com/office/drawing/2014/main" id="{9A13FCB5-BCAC-0D94-47EC-14C14C28D5F2}"/>
+                <a16:creationId xmlns:a16="http://schemas.microsoft.com/office/drawing/2014/main" id="{968BC4C7-4323-4EA0-7C39-1F05E62192C3}"/>
               </a:ext>
             </a:extLst>
           </p:cNvPr>
@@ -19760,7 +19760,7 @@
           <p:cNvPr id="15" name="正方形/長方形 14">
             <a:extLst>
               <a:ext uri="{FF2B5EF4-FFF2-40B4-BE49-F238E27FC236}">
-                <a16:creationId xmlns:a16="http://schemas.microsoft.com/office/drawing/2014/main" id="{98CBDAE3-2C0B-833C-0FF9-708F47E94307}"/>
+                <a16:creationId xmlns:a16="http://schemas.microsoft.com/office/drawing/2014/main" id="{3FD50E8A-6845-1AF9-AB04-B262678621B2}"/>
               </a:ext>
             </a:extLst>
           </p:cNvPr>
@@ -19814,7 +19814,7 @@
           <p:cNvPr id="16" name="正方形/長方形 15">
             <a:extLst>
               <a:ext uri="{FF2B5EF4-FFF2-40B4-BE49-F238E27FC236}">
-                <a16:creationId xmlns:a16="http://schemas.microsoft.com/office/drawing/2014/main" id="{287BC58A-F8FE-06DF-A9CB-171E3623F4EA}"/>
+                <a16:creationId xmlns:a16="http://schemas.microsoft.com/office/drawing/2014/main" id="{87557387-B7BC-8220-2AA0-004BC9A0E76D}"/>
               </a:ext>
             </a:extLst>
           </p:cNvPr>
@@ -19882,7 +19882,7 @@
           <p:cNvPr id="17" name="テキスト ボックス 16">
             <a:extLst>
               <a:ext uri="{FF2B5EF4-FFF2-40B4-BE49-F238E27FC236}">
-                <a16:creationId xmlns:a16="http://schemas.microsoft.com/office/drawing/2014/main" id="{0B51C035-133F-9DD9-EE0A-36419B1E46C4}"/>
+                <a16:creationId xmlns:a16="http://schemas.microsoft.com/office/drawing/2014/main" id="{F9ECC2DC-FA6F-013D-2862-4C157CA8C59E}"/>
               </a:ext>
             </a:extLst>
           </p:cNvPr>
@@ -19935,7 +19935,7 @@
           <p:cNvPr id="18" name="テキスト ボックス 17">
             <a:extLst>
               <a:ext uri="{FF2B5EF4-FFF2-40B4-BE49-F238E27FC236}">
-                <a16:creationId xmlns:a16="http://schemas.microsoft.com/office/drawing/2014/main" id="{9539B8A1-5DB5-9793-9247-E202D1514E40}"/>
+                <a16:creationId xmlns:a16="http://schemas.microsoft.com/office/drawing/2014/main" id="{8D11AFF3-53BD-DA18-9694-66DD0ECFEC65}"/>
               </a:ext>
             </a:extLst>
           </p:cNvPr>
@@ -20257,7 +20257,7 @@
           <p:cNvPr id="19" name="正方形/長方形 18">
             <a:extLst>
               <a:ext uri="{FF2B5EF4-FFF2-40B4-BE49-F238E27FC236}">
-                <a16:creationId xmlns:a16="http://schemas.microsoft.com/office/drawing/2014/main" id="{73990C45-C9BF-376D-2FCF-77293185F792}"/>
+                <a16:creationId xmlns:a16="http://schemas.microsoft.com/office/drawing/2014/main" id="{E77F62A8-DDD6-8165-827A-BE28FB0F214F}"/>
               </a:ext>
             </a:extLst>
           </p:cNvPr>
@@ -20311,7 +20311,7 @@
           <p:cNvPr id="20" name="正方形/長方形 19">
             <a:extLst>
               <a:ext uri="{FF2B5EF4-FFF2-40B4-BE49-F238E27FC236}">
-                <a16:creationId xmlns:a16="http://schemas.microsoft.com/office/drawing/2014/main" id="{0CADFE10-DFC4-3BDB-FC63-6FFA478CAF28}"/>
+                <a16:creationId xmlns:a16="http://schemas.microsoft.com/office/drawing/2014/main" id="{7AF47637-279D-B3BF-8915-3D990833E0F3}"/>
               </a:ext>
             </a:extLst>
           </p:cNvPr>
@@ -20379,7 +20379,7 @@
           <p:cNvPr id="21" name="テキスト ボックス 20">
             <a:extLst>
               <a:ext uri="{FF2B5EF4-FFF2-40B4-BE49-F238E27FC236}">
-                <a16:creationId xmlns:a16="http://schemas.microsoft.com/office/drawing/2014/main" id="{2410AEAC-69C2-F452-4A0F-A113D8EB22CE}"/>
+                <a16:creationId xmlns:a16="http://schemas.microsoft.com/office/drawing/2014/main" id="{6881ABD0-8891-B07F-F439-99088A31606F}"/>
               </a:ext>
             </a:extLst>
           </p:cNvPr>
@@ -20432,7 +20432,7 @@
           <p:cNvPr id="22" name="テキスト ボックス 21">
             <a:extLst>
               <a:ext uri="{FF2B5EF4-FFF2-40B4-BE49-F238E27FC236}">
-                <a16:creationId xmlns:a16="http://schemas.microsoft.com/office/drawing/2014/main" id="{32A53C4D-27CA-513B-3AA2-D79B0B4A68FF}"/>
+                <a16:creationId xmlns:a16="http://schemas.microsoft.com/office/drawing/2014/main" id="{65237D9D-6ACD-BD49-78BF-1A66ABE49E9D}"/>
               </a:ext>
             </a:extLst>
           </p:cNvPr>
@@ -20732,7 +20732,7 @@
     </p:spTree>
     <p:extLst>
       <p:ext uri="{BB962C8B-B14F-4D97-AF65-F5344CB8AC3E}">
-        <p14:creationId xmlns:p14="http://schemas.microsoft.com/office/powerpoint/2010/main" val="2849355184"/>
+        <p14:creationId xmlns:p14="http://schemas.microsoft.com/office/powerpoint/2010/main" val="1490770728"/>
       </p:ext>
     </p:extLst>
   </p:cSld>
@@ -20764,7 +20764,7 @@
           <p:cNvPr id="2" name="正方形/長方形 1">
             <a:extLst>
               <a:ext uri="{FF2B5EF4-FFF2-40B4-BE49-F238E27FC236}">
-                <a16:creationId xmlns:a16="http://schemas.microsoft.com/office/drawing/2014/main" id="{862CD361-4A48-EE43-30BE-95A8482F93A2}"/>
+                <a16:creationId xmlns:a16="http://schemas.microsoft.com/office/drawing/2014/main" id="{6E7D14A0-40B8-3ADF-8F6E-52753DC80C6B}"/>
               </a:ext>
             </a:extLst>
           </p:cNvPr>
@@ -20832,7 +20832,7 @@
           <p:cNvPr id="3" name="正方形/長方形 2">
             <a:extLst>
               <a:ext uri="{FF2B5EF4-FFF2-40B4-BE49-F238E27FC236}">
-                <a16:creationId xmlns:a16="http://schemas.microsoft.com/office/drawing/2014/main" id="{9806ADC3-61E4-ABE2-878A-EF59CBA1E03E}"/>
+                <a16:creationId xmlns:a16="http://schemas.microsoft.com/office/drawing/2014/main" id="{D6560625-9D59-B813-954D-3CE8AA358779}"/>
               </a:ext>
             </a:extLst>
           </p:cNvPr>
@@ -20900,7 +20900,7 @@
           <p:cNvPr id="4" name="正方形/長方形 3">
             <a:extLst>
               <a:ext uri="{FF2B5EF4-FFF2-40B4-BE49-F238E27FC236}">
-                <a16:creationId xmlns:a16="http://schemas.microsoft.com/office/drawing/2014/main" id="{EC01EC5D-5250-9862-9552-ACBB4825018C}"/>
+                <a16:creationId xmlns:a16="http://schemas.microsoft.com/office/drawing/2014/main" id="{1D8FF168-87FE-F152-8164-423982E03158}"/>
               </a:ext>
             </a:extLst>
           </p:cNvPr>
@@ -20968,7 +20968,7 @@
           <p:cNvPr id="5" name="テキスト ボックス 4">
             <a:extLst>
               <a:ext uri="{FF2B5EF4-FFF2-40B4-BE49-F238E27FC236}">
-                <a16:creationId xmlns:a16="http://schemas.microsoft.com/office/drawing/2014/main" id="{DE2C1399-92F0-573F-CBD7-70535889B5EC}"/>
+                <a16:creationId xmlns:a16="http://schemas.microsoft.com/office/drawing/2014/main" id="{8CB22D8B-172D-6D46-C52D-81E83537A86B}"/>
               </a:ext>
             </a:extLst>
           </p:cNvPr>
@@ -21037,7 +21037,7 @@
           <p:cNvPr id="6" name="テキスト ボックス 5">
             <a:extLst>
               <a:ext uri="{FF2B5EF4-FFF2-40B4-BE49-F238E27FC236}">
-                <a16:creationId xmlns:a16="http://schemas.microsoft.com/office/drawing/2014/main" id="{EB441AC6-3506-F1A9-F5CD-2324F5F0C908}"/>
+                <a16:creationId xmlns:a16="http://schemas.microsoft.com/office/drawing/2014/main" id="{81F5C2AA-F15E-81E5-CD05-137E56EE590A}"/>
               </a:ext>
             </a:extLst>
           </p:cNvPr>
@@ -21046,8 +21046,8 @@
         </p:nvSpPr>
         <p:spPr>
           <a:xfrm>
-            <a:off x="2336800" y="139700"/>
-            <a:ext cx="8382000" cy="410369"/>
+            <a:off x="2311400" y="165100"/>
+            <a:ext cx="8585200" cy="379591"/>
           </a:xfrm>
           <a:prstGeom prst="rect">
             <a:avLst/>
@@ -21061,7 +21061,7 @@
           <a:lstStyle/>
           <a:p>
             <a:r>
-              <a:rPr kumimoji="1" lang="ja-JP" altLang="en-US" sz="2000" b="1">
+              <a:rPr kumimoji="1" lang="ja-JP" altLang="en-US" b="1">
                 <a:solidFill>
                   <a:srgbClr val="FFFFFF"/>
                 </a:solidFill>
@@ -21078,7 +21078,7 @@
           <p:cNvPr id="7" name="テキスト ボックス 6">
             <a:extLst>
               <a:ext uri="{FF2B5EF4-FFF2-40B4-BE49-F238E27FC236}">
-                <a16:creationId xmlns:a16="http://schemas.microsoft.com/office/drawing/2014/main" id="{05517250-BF83-5749-DD1C-511C16258266}"/>
+                <a16:creationId xmlns:a16="http://schemas.microsoft.com/office/drawing/2014/main" id="{FE7B49E7-3AF8-090C-C99F-61CADC1875A5}"/>
               </a:ext>
             </a:extLst>
           </p:cNvPr>
@@ -21087,8 +21087,8 @@
         </p:nvSpPr>
         <p:spPr>
           <a:xfrm>
-            <a:off x="10668000" y="203200"/>
-            <a:ext cx="1219200" cy="302647"/>
+            <a:off x="10896600" y="203200"/>
+            <a:ext cx="990600" cy="302647"/>
           </a:xfrm>
           <a:prstGeom prst="rect">
             <a:avLst/>
@@ -21127,7 +21127,7 @@
           <p:cNvPr id="8" name="正方形/長方形 7">
             <a:extLst>
               <a:ext uri="{FF2B5EF4-FFF2-40B4-BE49-F238E27FC236}">
-                <a16:creationId xmlns:a16="http://schemas.microsoft.com/office/drawing/2014/main" id="{3450373B-657C-5EE4-4564-71403371F5F4}"/>
+                <a16:creationId xmlns:a16="http://schemas.microsoft.com/office/drawing/2014/main" id="{DC94B25C-1B0C-F489-DF32-7F1E218DB4FA}"/>
               </a:ext>
             </a:extLst>
           </p:cNvPr>
@@ -21181,7 +21181,7 @@
           <p:cNvPr id="9" name="正方形/長方形 8">
             <a:extLst>
               <a:ext uri="{FF2B5EF4-FFF2-40B4-BE49-F238E27FC236}">
-                <a16:creationId xmlns:a16="http://schemas.microsoft.com/office/drawing/2014/main" id="{81CD13FE-0A78-8807-BD81-E1AA13829CFD}"/>
+                <a16:creationId xmlns:a16="http://schemas.microsoft.com/office/drawing/2014/main" id="{23E702F0-ECE0-F61D-D16A-FF8812BD8A8A}"/>
               </a:ext>
             </a:extLst>
           </p:cNvPr>
@@ -21249,7 +21249,7 @@
           <p:cNvPr id="10" name="テキスト ボックス 9">
             <a:extLst>
               <a:ext uri="{FF2B5EF4-FFF2-40B4-BE49-F238E27FC236}">
-                <a16:creationId xmlns:a16="http://schemas.microsoft.com/office/drawing/2014/main" id="{1FD12218-20E0-37CA-3EC4-7F0B17565BFC}"/>
+                <a16:creationId xmlns:a16="http://schemas.microsoft.com/office/drawing/2014/main" id="{2A100EFF-34BB-FBE1-636C-E7A98A654145}"/>
               </a:ext>
             </a:extLst>
           </p:cNvPr>
@@ -21330,7 +21330,7 @@
           <p:cNvPr id="11" name="表 10">
             <a:extLst>
               <a:ext uri="{FF2B5EF4-FFF2-40B4-BE49-F238E27FC236}">
-                <a16:creationId xmlns:a16="http://schemas.microsoft.com/office/drawing/2014/main" id="{745D2AFE-44E7-3DA5-A20A-7A5C97700DE5}"/>
+                <a16:creationId xmlns:a16="http://schemas.microsoft.com/office/drawing/2014/main" id="{8E5CBC86-7252-2E57-A9C3-531F327E9544}"/>
               </a:ext>
             </a:extLst>
           </p:cNvPr>
@@ -21340,7 +21340,7 @@
           <p:nvPr>
             <p:extLst>
               <p:ext uri="{D42A27DB-BD31-4B8C-83A1-F6EECF244321}">
-                <p14:modId xmlns:p14="http://schemas.microsoft.com/office/powerpoint/2010/main" val="684249696"/>
+                <p14:modId xmlns:p14="http://schemas.microsoft.com/office/powerpoint/2010/main" val="1324753047"/>
               </p:ext>
             </p:extLst>
           </p:nvPr>
@@ -21359,21 +21359,21 @@
                 <a:gridCol w="2921000">
                   <a:extLst>
                     <a:ext uri="{9D8B030D-6E8A-4147-A177-3AD203B41FA5}">
-                      <a16:colId xmlns:a16="http://schemas.microsoft.com/office/drawing/2014/main" val="590965382"/>
+                      <a16:colId xmlns:a16="http://schemas.microsoft.com/office/drawing/2014/main" val="1644237460"/>
                     </a:ext>
                   </a:extLst>
                 </a:gridCol>
                 <a:gridCol w="4343400">
                   <a:extLst>
                     <a:ext uri="{9D8B030D-6E8A-4147-A177-3AD203B41FA5}">
-                      <a16:colId xmlns:a16="http://schemas.microsoft.com/office/drawing/2014/main" val="1980857514"/>
+                      <a16:colId xmlns:a16="http://schemas.microsoft.com/office/drawing/2014/main" val="3217608200"/>
                     </a:ext>
                   </a:extLst>
                 </a:gridCol>
                 <a:gridCol w="4318000">
                   <a:extLst>
                     <a:ext uri="{9D8B030D-6E8A-4147-A177-3AD203B41FA5}">
-                      <a16:colId xmlns:a16="http://schemas.microsoft.com/office/drawing/2014/main" val="2365783204"/>
+                      <a16:colId xmlns:a16="http://schemas.microsoft.com/office/drawing/2014/main" val="2308097447"/>
                     </a:ext>
                   </a:extLst>
                 </a:gridCol>
@@ -21450,7 +21450,7 @@
                 </a:tc>
                 <a:extLst>
                   <a:ext uri="{0D108BD9-81ED-4DB2-BD59-A6C34878D82A}">
-                    <a16:rowId xmlns:a16="http://schemas.microsoft.com/office/drawing/2014/main" val="2483291161"/>
+                    <a16:rowId xmlns:a16="http://schemas.microsoft.com/office/drawing/2014/main" val="1641781937"/>
                   </a:ext>
                 </a:extLst>
               </a:tr>
@@ -21608,7 +21608,7 @@
                 </a:tc>
                 <a:extLst>
                   <a:ext uri="{0D108BD9-81ED-4DB2-BD59-A6C34878D82A}">
-                    <a16:rowId xmlns:a16="http://schemas.microsoft.com/office/drawing/2014/main" val="430136329"/>
+                    <a16:rowId xmlns:a16="http://schemas.microsoft.com/office/drawing/2014/main" val="3038063327"/>
                   </a:ext>
                 </a:extLst>
               </a:tr>
@@ -21697,7 +21697,7 @@
                 </a:tc>
                 <a:extLst>
                   <a:ext uri="{0D108BD9-81ED-4DB2-BD59-A6C34878D82A}">
-                    <a16:rowId xmlns:a16="http://schemas.microsoft.com/office/drawing/2014/main" val="3807190009"/>
+                    <a16:rowId xmlns:a16="http://schemas.microsoft.com/office/drawing/2014/main" val="3950425121"/>
                   </a:ext>
                 </a:extLst>
               </a:tr>
@@ -21786,7 +21786,7 @@
                 </a:tc>
                 <a:extLst>
                   <a:ext uri="{0D108BD9-81ED-4DB2-BD59-A6C34878D82A}">
-                    <a16:rowId xmlns:a16="http://schemas.microsoft.com/office/drawing/2014/main" val="2841916474"/>
+                    <a16:rowId xmlns:a16="http://schemas.microsoft.com/office/drawing/2014/main" val="4276401419"/>
                   </a:ext>
                 </a:extLst>
               </a:tr>
@@ -21875,7 +21875,7 @@
                 </a:tc>
                 <a:extLst>
                   <a:ext uri="{0D108BD9-81ED-4DB2-BD59-A6C34878D82A}">
-                    <a16:rowId xmlns:a16="http://schemas.microsoft.com/office/drawing/2014/main" val="2581088254"/>
+                    <a16:rowId xmlns:a16="http://schemas.microsoft.com/office/drawing/2014/main" val="3287885770"/>
                   </a:ext>
                 </a:extLst>
               </a:tr>
@@ -21985,7 +21985,7 @@
                 </a:tc>
                 <a:extLst>
                   <a:ext uri="{0D108BD9-81ED-4DB2-BD59-A6C34878D82A}">
-                    <a16:rowId xmlns:a16="http://schemas.microsoft.com/office/drawing/2014/main" val="827013177"/>
+                    <a16:rowId xmlns:a16="http://schemas.microsoft.com/office/drawing/2014/main" val="373238857"/>
                   </a:ext>
                 </a:extLst>
               </a:tr>
@@ -22092,7 +22092,7 @@
                 </a:tc>
                 <a:extLst>
                   <a:ext uri="{0D108BD9-81ED-4DB2-BD59-A6C34878D82A}">
-                    <a16:rowId xmlns:a16="http://schemas.microsoft.com/office/drawing/2014/main" val="3752700079"/>
+                    <a16:rowId xmlns:a16="http://schemas.microsoft.com/office/drawing/2014/main" val="838702620"/>
                   </a:ext>
                 </a:extLst>
               </a:tr>
@@ -22103,7 +22103,7 @@
     </p:spTree>
     <p:extLst>
       <p:ext uri="{BB962C8B-B14F-4D97-AF65-F5344CB8AC3E}">
-        <p14:creationId xmlns:p14="http://schemas.microsoft.com/office/powerpoint/2010/main" val="1412200405"/>
+        <p14:creationId xmlns:p14="http://schemas.microsoft.com/office/powerpoint/2010/main" val="2566640445"/>
       </p:ext>
     </p:extLst>
   </p:cSld>
@@ -22135,7 +22135,7 @@
           <p:cNvPr id="2" name="正方形/長方形 1">
             <a:extLst>
               <a:ext uri="{FF2B5EF4-FFF2-40B4-BE49-F238E27FC236}">
-                <a16:creationId xmlns:a16="http://schemas.microsoft.com/office/drawing/2014/main" id="{B553B591-D4F6-B6A6-2670-3863C0C8ACD3}"/>
+                <a16:creationId xmlns:a16="http://schemas.microsoft.com/office/drawing/2014/main" id="{758642F4-92FA-2728-4A9D-E93553C00183}"/>
               </a:ext>
             </a:extLst>
           </p:cNvPr>
@@ -22203,7 +22203,7 @@
           <p:cNvPr id="3" name="正方形/長方形 2">
             <a:extLst>
               <a:ext uri="{FF2B5EF4-FFF2-40B4-BE49-F238E27FC236}">
-                <a16:creationId xmlns:a16="http://schemas.microsoft.com/office/drawing/2014/main" id="{AC944D52-1BA7-7807-C096-43137C703A14}"/>
+                <a16:creationId xmlns:a16="http://schemas.microsoft.com/office/drawing/2014/main" id="{81C14036-62E8-B0EC-1447-44A11B201896}"/>
               </a:ext>
             </a:extLst>
           </p:cNvPr>
@@ -22271,7 +22271,7 @@
           <p:cNvPr id="4" name="正方形/長方形 3">
             <a:extLst>
               <a:ext uri="{FF2B5EF4-FFF2-40B4-BE49-F238E27FC236}">
-                <a16:creationId xmlns:a16="http://schemas.microsoft.com/office/drawing/2014/main" id="{08B72128-E24D-1712-8D82-DE19E26D3195}"/>
+                <a16:creationId xmlns:a16="http://schemas.microsoft.com/office/drawing/2014/main" id="{662A79DA-BB29-2B1C-8184-8D79B757F3DE}"/>
               </a:ext>
             </a:extLst>
           </p:cNvPr>
@@ -22339,7 +22339,7 @@
           <p:cNvPr id="5" name="テキスト ボックス 4">
             <a:extLst>
               <a:ext uri="{FF2B5EF4-FFF2-40B4-BE49-F238E27FC236}">
-                <a16:creationId xmlns:a16="http://schemas.microsoft.com/office/drawing/2014/main" id="{2E2A9A59-AD4B-56D2-1190-7590251BEB91}"/>
+                <a16:creationId xmlns:a16="http://schemas.microsoft.com/office/drawing/2014/main" id="{6B6EB300-208D-1343-0B01-12CFC1D40979}"/>
               </a:ext>
             </a:extLst>
           </p:cNvPr>
@@ -22408,7 +22408,7 @@
           <p:cNvPr id="6" name="テキスト ボックス 5">
             <a:extLst>
               <a:ext uri="{FF2B5EF4-FFF2-40B4-BE49-F238E27FC236}">
-                <a16:creationId xmlns:a16="http://schemas.microsoft.com/office/drawing/2014/main" id="{17856379-63DC-0097-9D46-CA7181E9753B}"/>
+                <a16:creationId xmlns:a16="http://schemas.microsoft.com/office/drawing/2014/main" id="{7B7E0D90-3D37-677E-46D5-7791AAA32878}"/>
               </a:ext>
             </a:extLst>
           </p:cNvPr>
@@ -22417,8 +22417,8 @@
         </p:nvSpPr>
         <p:spPr>
           <a:xfrm>
-            <a:off x="2336800" y="139700"/>
-            <a:ext cx="8382000" cy="410369"/>
+            <a:off x="2311400" y="165100"/>
+            <a:ext cx="8585200" cy="379591"/>
           </a:xfrm>
           <a:prstGeom prst="rect">
             <a:avLst/>
@@ -22432,7 +22432,7 @@
           <a:lstStyle/>
           <a:p>
             <a:r>
-              <a:rPr kumimoji="1" lang="ja-JP" altLang="en-US" sz="2000" b="1">
+              <a:rPr kumimoji="1" lang="ja-JP" altLang="en-US" b="1">
                 <a:solidFill>
                   <a:srgbClr val="FFFFFF"/>
                 </a:solidFill>
@@ -22449,7 +22449,7 @@
           <p:cNvPr id="7" name="テキスト ボックス 6">
             <a:extLst>
               <a:ext uri="{FF2B5EF4-FFF2-40B4-BE49-F238E27FC236}">
-                <a16:creationId xmlns:a16="http://schemas.microsoft.com/office/drawing/2014/main" id="{7D71EF68-4249-2EA2-2F0E-993657C23FD5}"/>
+                <a16:creationId xmlns:a16="http://schemas.microsoft.com/office/drawing/2014/main" id="{D97A5DD8-3353-D8BC-75B2-65DABDE6A3EA}"/>
               </a:ext>
             </a:extLst>
           </p:cNvPr>
@@ -22458,8 +22458,8 @@
         </p:nvSpPr>
         <p:spPr>
           <a:xfrm>
-            <a:off x="10668000" y="203200"/>
-            <a:ext cx="1219200" cy="302647"/>
+            <a:off x="10896600" y="203200"/>
+            <a:ext cx="990600" cy="302647"/>
           </a:xfrm>
           <a:prstGeom prst="rect">
             <a:avLst/>
@@ -22498,7 +22498,7 @@
           <p:cNvPr id="8" name="正方形/長方形 7">
             <a:extLst>
               <a:ext uri="{FF2B5EF4-FFF2-40B4-BE49-F238E27FC236}">
-                <a16:creationId xmlns:a16="http://schemas.microsoft.com/office/drawing/2014/main" id="{17D59731-FF5E-89A3-CBA3-C6238F969D4C}"/>
+                <a16:creationId xmlns:a16="http://schemas.microsoft.com/office/drawing/2014/main" id="{839E647A-120D-3E3A-F8CB-3F1EC5812B47}"/>
               </a:ext>
             </a:extLst>
           </p:cNvPr>
@@ -22552,7 +22552,7 @@
           <p:cNvPr id="9" name="正方形/長方形 8">
             <a:extLst>
               <a:ext uri="{FF2B5EF4-FFF2-40B4-BE49-F238E27FC236}">
-                <a16:creationId xmlns:a16="http://schemas.microsoft.com/office/drawing/2014/main" id="{FA95152F-0CF9-AA8D-77D0-5BF47AC8AFB9}"/>
+                <a16:creationId xmlns:a16="http://schemas.microsoft.com/office/drawing/2014/main" id="{EA09E8F4-4AB1-1914-E8C2-1C1230F52D0C}"/>
               </a:ext>
             </a:extLst>
           </p:cNvPr>
@@ -22620,7 +22620,7 @@
           <p:cNvPr id="10" name="テキスト ボックス 9">
             <a:extLst>
               <a:ext uri="{FF2B5EF4-FFF2-40B4-BE49-F238E27FC236}">
-                <a16:creationId xmlns:a16="http://schemas.microsoft.com/office/drawing/2014/main" id="{094C772B-8E27-150C-B901-3FFC98106AB3}"/>
+                <a16:creationId xmlns:a16="http://schemas.microsoft.com/office/drawing/2014/main" id="{13D14D9C-E6B0-7E18-FE6F-47A7A429DA8A}"/>
               </a:ext>
             </a:extLst>
           </p:cNvPr>
@@ -22758,7 +22758,7 @@
           <p:cNvPr id="11" name="正方形/長方形 10">
             <a:extLst>
               <a:ext uri="{FF2B5EF4-FFF2-40B4-BE49-F238E27FC236}">
-                <a16:creationId xmlns:a16="http://schemas.microsoft.com/office/drawing/2014/main" id="{3D9C17EE-3C3C-C2B1-58E5-A95AC849DFC3}"/>
+                <a16:creationId xmlns:a16="http://schemas.microsoft.com/office/drawing/2014/main" id="{AEFD6DAB-3CCC-E886-B4F9-AF5E4D866540}"/>
               </a:ext>
             </a:extLst>
           </p:cNvPr>
@@ -22812,7 +22812,7 @@
           <p:cNvPr id="12" name="正方形/長方形 11">
             <a:extLst>
               <a:ext uri="{FF2B5EF4-FFF2-40B4-BE49-F238E27FC236}">
-                <a16:creationId xmlns:a16="http://schemas.microsoft.com/office/drawing/2014/main" id="{D6F3BF3B-DE0C-FB09-D1C6-E524243FEC10}"/>
+                <a16:creationId xmlns:a16="http://schemas.microsoft.com/office/drawing/2014/main" id="{E618F278-EC73-1DD3-7DDF-72E6CC073194}"/>
               </a:ext>
             </a:extLst>
           </p:cNvPr>
@@ -22880,7 +22880,7 @@
           <p:cNvPr id="13" name="テキスト ボックス 12">
             <a:extLst>
               <a:ext uri="{FF2B5EF4-FFF2-40B4-BE49-F238E27FC236}">
-                <a16:creationId xmlns:a16="http://schemas.microsoft.com/office/drawing/2014/main" id="{025B7DB3-6871-57DC-6707-530F9907F887}"/>
+                <a16:creationId xmlns:a16="http://schemas.microsoft.com/office/drawing/2014/main" id="{031D9A1A-8F3B-80BB-DDC1-4CB9F61D072A}"/>
               </a:ext>
             </a:extLst>
           </p:cNvPr>
@@ -22951,7 +22951,7 @@
           <p:cNvPr id="14" name="正方形/長方形 13">
             <a:extLst>
               <a:ext uri="{FF2B5EF4-FFF2-40B4-BE49-F238E27FC236}">
-                <a16:creationId xmlns:a16="http://schemas.microsoft.com/office/drawing/2014/main" id="{1E529CD5-F6F2-87F2-68A5-6B0AE300CAFE}"/>
+                <a16:creationId xmlns:a16="http://schemas.microsoft.com/office/drawing/2014/main" id="{C0483867-D6A7-89E7-4EFE-DF8601B515E8}"/>
               </a:ext>
             </a:extLst>
           </p:cNvPr>
@@ -23019,7 +23019,7 @@
           <p:cNvPr id="15" name="テキスト ボックス 14">
             <a:extLst>
               <a:ext uri="{FF2B5EF4-FFF2-40B4-BE49-F238E27FC236}">
-                <a16:creationId xmlns:a16="http://schemas.microsoft.com/office/drawing/2014/main" id="{116F6393-A771-7973-873C-F4585E5D0797}"/>
+                <a16:creationId xmlns:a16="http://schemas.microsoft.com/office/drawing/2014/main" id="{37CAA9C6-C612-8393-964A-37848820548B}"/>
               </a:ext>
             </a:extLst>
           </p:cNvPr>
@@ -23070,7 +23070,7 @@
           <p:cNvPr id="16" name="正方形/長方形 15">
             <a:extLst>
               <a:ext uri="{FF2B5EF4-FFF2-40B4-BE49-F238E27FC236}">
-                <a16:creationId xmlns:a16="http://schemas.microsoft.com/office/drawing/2014/main" id="{68BCA63F-8B73-8812-0F23-737F757F7CCA}"/>
+                <a16:creationId xmlns:a16="http://schemas.microsoft.com/office/drawing/2014/main" id="{1C3FC6CE-A959-28A7-1C8A-6051019BA4E1}"/>
               </a:ext>
             </a:extLst>
           </p:cNvPr>
@@ -23138,7 +23138,7 @@
           <p:cNvPr id="17" name="正方形/長方形 16">
             <a:extLst>
               <a:ext uri="{FF2B5EF4-FFF2-40B4-BE49-F238E27FC236}">
-                <a16:creationId xmlns:a16="http://schemas.microsoft.com/office/drawing/2014/main" id="{2DF65A7E-6F63-0FBF-546C-FF771967C86A}"/>
+                <a16:creationId xmlns:a16="http://schemas.microsoft.com/office/drawing/2014/main" id="{FFE49CB0-6266-BAB6-430B-188D8887BF15}"/>
               </a:ext>
             </a:extLst>
           </p:cNvPr>
@@ -23206,7 +23206,7 @@
           <p:cNvPr id="18" name="テキスト ボックス 17">
             <a:extLst>
               <a:ext uri="{FF2B5EF4-FFF2-40B4-BE49-F238E27FC236}">
-                <a16:creationId xmlns:a16="http://schemas.microsoft.com/office/drawing/2014/main" id="{FA73BAD7-A02D-6379-827D-6531BAFCAE93}"/>
+                <a16:creationId xmlns:a16="http://schemas.microsoft.com/office/drawing/2014/main" id="{FFAE2F1C-16A3-84CD-7CCD-B214540F7CA7}"/>
               </a:ext>
             </a:extLst>
           </p:cNvPr>
@@ -23274,7 +23274,7 @@
           <p:cNvPr id="19" name="テキスト ボックス 18">
             <a:extLst>
               <a:ext uri="{FF2B5EF4-FFF2-40B4-BE49-F238E27FC236}">
-                <a16:creationId xmlns:a16="http://schemas.microsoft.com/office/drawing/2014/main" id="{AA5A3CF5-0DD3-BF8C-8E55-A31D9DC45B34}"/>
+                <a16:creationId xmlns:a16="http://schemas.microsoft.com/office/drawing/2014/main" id="{7129160B-C717-7AC9-AC1C-A9707F133C45}"/>
               </a:ext>
             </a:extLst>
           </p:cNvPr>
@@ -23325,7 +23325,7 @@
           <p:cNvPr id="20" name="正方形/長方形 19">
             <a:extLst>
               <a:ext uri="{FF2B5EF4-FFF2-40B4-BE49-F238E27FC236}">
-                <a16:creationId xmlns:a16="http://schemas.microsoft.com/office/drawing/2014/main" id="{5F9A19F1-E992-1F75-FEBE-EB724038DEB1}"/>
+                <a16:creationId xmlns:a16="http://schemas.microsoft.com/office/drawing/2014/main" id="{EE835FD5-63E2-30E3-E81B-42994FA31C27}"/>
               </a:ext>
             </a:extLst>
           </p:cNvPr>
@@ -23393,7 +23393,7 @@
           <p:cNvPr id="21" name="正方形/長方形 20">
             <a:extLst>
               <a:ext uri="{FF2B5EF4-FFF2-40B4-BE49-F238E27FC236}">
-                <a16:creationId xmlns:a16="http://schemas.microsoft.com/office/drawing/2014/main" id="{B1A95A37-1B00-777A-842B-94599CA3BC9D}"/>
+                <a16:creationId xmlns:a16="http://schemas.microsoft.com/office/drawing/2014/main" id="{4C8024B6-2A95-9560-C190-7E8D3135170A}"/>
               </a:ext>
             </a:extLst>
           </p:cNvPr>
@@ -23461,7 +23461,7 @@
           <p:cNvPr id="22" name="テキスト ボックス 21">
             <a:extLst>
               <a:ext uri="{FF2B5EF4-FFF2-40B4-BE49-F238E27FC236}">
-                <a16:creationId xmlns:a16="http://schemas.microsoft.com/office/drawing/2014/main" id="{8B4B3153-FAFE-A8DC-0A44-C45B673F4B17}"/>
+                <a16:creationId xmlns:a16="http://schemas.microsoft.com/office/drawing/2014/main" id="{7DC7D132-8A66-EEF1-3EF3-FD5179D4699A}"/>
               </a:ext>
             </a:extLst>
           </p:cNvPr>
@@ -23529,7 +23529,7 @@
           <p:cNvPr id="23" name="テキスト ボックス 22">
             <a:extLst>
               <a:ext uri="{FF2B5EF4-FFF2-40B4-BE49-F238E27FC236}">
-                <a16:creationId xmlns:a16="http://schemas.microsoft.com/office/drawing/2014/main" id="{ABDB862F-4D37-3415-99B1-3B2F22D6C507}"/>
+                <a16:creationId xmlns:a16="http://schemas.microsoft.com/office/drawing/2014/main" id="{77C3AF97-5302-3A37-35DF-2D1E787DC1C2}"/>
               </a:ext>
             </a:extLst>
           </p:cNvPr>
@@ -23580,7 +23580,7 @@
           <p:cNvPr id="24" name="正方形/長方形 23">
             <a:extLst>
               <a:ext uri="{FF2B5EF4-FFF2-40B4-BE49-F238E27FC236}">
-                <a16:creationId xmlns:a16="http://schemas.microsoft.com/office/drawing/2014/main" id="{B960A0C7-28B2-68BB-9B1F-55B890938A41}"/>
+                <a16:creationId xmlns:a16="http://schemas.microsoft.com/office/drawing/2014/main" id="{0C037D22-C28C-6C00-8DEE-695430C7D93D}"/>
               </a:ext>
             </a:extLst>
           </p:cNvPr>
@@ -23648,7 +23648,7 @@
           <p:cNvPr id="25" name="正方形/長方形 24">
             <a:extLst>
               <a:ext uri="{FF2B5EF4-FFF2-40B4-BE49-F238E27FC236}">
-                <a16:creationId xmlns:a16="http://schemas.microsoft.com/office/drawing/2014/main" id="{C8E890CB-C8BE-07A3-1A42-A89464A8047B}"/>
+                <a16:creationId xmlns:a16="http://schemas.microsoft.com/office/drawing/2014/main" id="{C8C431F9-1F3A-3F6B-1087-2B1E51CB8C41}"/>
               </a:ext>
             </a:extLst>
           </p:cNvPr>
@@ -23716,7 +23716,7 @@
           <p:cNvPr id="26" name="テキスト ボックス 25">
             <a:extLst>
               <a:ext uri="{FF2B5EF4-FFF2-40B4-BE49-F238E27FC236}">
-                <a16:creationId xmlns:a16="http://schemas.microsoft.com/office/drawing/2014/main" id="{53383763-6FC2-B6D2-3A10-608ABB78A2FB}"/>
+                <a16:creationId xmlns:a16="http://schemas.microsoft.com/office/drawing/2014/main" id="{F7C6D5B9-9BBE-3F76-A022-1B8C214E915B}"/>
               </a:ext>
             </a:extLst>
           </p:cNvPr>
@@ -23784,7 +23784,7 @@
           <p:cNvPr id="27" name="テキスト ボックス 26">
             <a:extLst>
               <a:ext uri="{FF2B5EF4-FFF2-40B4-BE49-F238E27FC236}">
-                <a16:creationId xmlns:a16="http://schemas.microsoft.com/office/drawing/2014/main" id="{6C2153A0-8817-4A26-29D5-56132CE3959B}"/>
+                <a16:creationId xmlns:a16="http://schemas.microsoft.com/office/drawing/2014/main" id="{E0D76F1E-051E-9E3A-CA52-EE793E6DE0CD}"/>
               </a:ext>
             </a:extLst>
           </p:cNvPr>
@@ -23835,7 +23835,7 @@
           <p:cNvPr id="28" name="正方形/長方形 27">
             <a:extLst>
               <a:ext uri="{FF2B5EF4-FFF2-40B4-BE49-F238E27FC236}">
-                <a16:creationId xmlns:a16="http://schemas.microsoft.com/office/drawing/2014/main" id="{E37293D2-C5C5-5D8A-170C-BC79E416EDE9}"/>
+                <a16:creationId xmlns:a16="http://schemas.microsoft.com/office/drawing/2014/main" id="{47F7C7B2-F337-B1D7-3AF2-857275BCA4EE}"/>
               </a:ext>
             </a:extLst>
           </p:cNvPr>
@@ -23903,7 +23903,7 @@
           <p:cNvPr id="29" name="正方形/長方形 28">
             <a:extLst>
               <a:ext uri="{FF2B5EF4-FFF2-40B4-BE49-F238E27FC236}">
-                <a16:creationId xmlns:a16="http://schemas.microsoft.com/office/drawing/2014/main" id="{46ECC1DA-9129-9EC4-6C96-17DCAAC3603B}"/>
+                <a16:creationId xmlns:a16="http://schemas.microsoft.com/office/drawing/2014/main" id="{99307CFC-51F8-0F31-51E1-6D658A7B1260}"/>
               </a:ext>
             </a:extLst>
           </p:cNvPr>
@@ -23971,7 +23971,7 @@
           <p:cNvPr id="30" name="テキスト ボックス 29">
             <a:extLst>
               <a:ext uri="{FF2B5EF4-FFF2-40B4-BE49-F238E27FC236}">
-                <a16:creationId xmlns:a16="http://schemas.microsoft.com/office/drawing/2014/main" id="{CA0F2CA5-B095-0717-64AA-72B142133B4B}"/>
+                <a16:creationId xmlns:a16="http://schemas.microsoft.com/office/drawing/2014/main" id="{19D040E1-E3DC-81C6-8E59-673B2F612DF1}"/>
               </a:ext>
             </a:extLst>
           </p:cNvPr>
@@ -24039,7 +24039,7 @@
           <p:cNvPr id="31" name="テキスト ボックス 30">
             <a:extLst>
               <a:ext uri="{FF2B5EF4-FFF2-40B4-BE49-F238E27FC236}">
-                <a16:creationId xmlns:a16="http://schemas.microsoft.com/office/drawing/2014/main" id="{846EBAF6-1426-E24F-C3A4-FF1B2B8B000A}"/>
+                <a16:creationId xmlns:a16="http://schemas.microsoft.com/office/drawing/2014/main" id="{1610C2D3-CD07-E34B-272B-2513A358602E}"/>
               </a:ext>
             </a:extLst>
           </p:cNvPr>
@@ -24090,7 +24090,7 @@
           <p:cNvPr id="32" name="正方形/長方形 31">
             <a:extLst>
               <a:ext uri="{FF2B5EF4-FFF2-40B4-BE49-F238E27FC236}">
-                <a16:creationId xmlns:a16="http://schemas.microsoft.com/office/drawing/2014/main" id="{88EB2172-BCA1-4119-13DB-D453F7C6A72E}"/>
+                <a16:creationId xmlns:a16="http://schemas.microsoft.com/office/drawing/2014/main" id="{6A9F71EA-1804-579F-0FF2-A171E56096C1}"/>
               </a:ext>
             </a:extLst>
           </p:cNvPr>
@@ -24158,7 +24158,7 @@
           <p:cNvPr id="33" name="正方形/長方形 32">
             <a:extLst>
               <a:ext uri="{FF2B5EF4-FFF2-40B4-BE49-F238E27FC236}">
-                <a16:creationId xmlns:a16="http://schemas.microsoft.com/office/drawing/2014/main" id="{EDC5EAB1-2C63-3F31-EB8B-9B98120970F3}"/>
+                <a16:creationId xmlns:a16="http://schemas.microsoft.com/office/drawing/2014/main" id="{90FBBD89-9277-C08C-3D4D-44EDBF12A0D5}"/>
               </a:ext>
             </a:extLst>
           </p:cNvPr>
@@ -24226,7 +24226,7 @@
           <p:cNvPr id="34" name="テキスト ボックス 33">
             <a:extLst>
               <a:ext uri="{FF2B5EF4-FFF2-40B4-BE49-F238E27FC236}">
-                <a16:creationId xmlns:a16="http://schemas.microsoft.com/office/drawing/2014/main" id="{53D38F47-DFF7-4AAE-619A-624CE012D191}"/>
+                <a16:creationId xmlns:a16="http://schemas.microsoft.com/office/drawing/2014/main" id="{E88FE28B-B162-A58C-642A-93456AC35B05}"/>
               </a:ext>
             </a:extLst>
           </p:cNvPr>
@@ -24294,7 +24294,7 @@
           <p:cNvPr id="35" name="テキスト ボックス 34">
             <a:extLst>
               <a:ext uri="{FF2B5EF4-FFF2-40B4-BE49-F238E27FC236}">
-                <a16:creationId xmlns:a16="http://schemas.microsoft.com/office/drawing/2014/main" id="{39E8313E-D56C-A0BB-505F-C6823BE83E73}"/>
+                <a16:creationId xmlns:a16="http://schemas.microsoft.com/office/drawing/2014/main" id="{57471191-49D7-9468-99AA-09E1ABA5D2E3}"/>
               </a:ext>
             </a:extLst>
           </p:cNvPr>
@@ -24345,7 +24345,7 @@
           <p:cNvPr id="36" name="正方形/長方形 35">
             <a:extLst>
               <a:ext uri="{FF2B5EF4-FFF2-40B4-BE49-F238E27FC236}">
-                <a16:creationId xmlns:a16="http://schemas.microsoft.com/office/drawing/2014/main" id="{C75ACB0E-806B-4D9B-21B3-37DDC33ED54A}"/>
+                <a16:creationId xmlns:a16="http://schemas.microsoft.com/office/drawing/2014/main" id="{8EDAFE4F-4D9D-586D-13CD-1D6DE7EEB331}"/>
               </a:ext>
             </a:extLst>
           </p:cNvPr>
@@ -24413,7 +24413,7 @@
           <p:cNvPr id="37" name="正方形/長方形 36">
             <a:extLst>
               <a:ext uri="{FF2B5EF4-FFF2-40B4-BE49-F238E27FC236}">
-                <a16:creationId xmlns:a16="http://schemas.microsoft.com/office/drawing/2014/main" id="{87EA59BE-8B69-7AA1-A0D8-E6991BF88AC5}"/>
+                <a16:creationId xmlns:a16="http://schemas.microsoft.com/office/drawing/2014/main" id="{82A497CC-5C11-7D19-B940-33ECD6FB6DE6}"/>
               </a:ext>
             </a:extLst>
           </p:cNvPr>
@@ -24481,7 +24481,7 @@
           <p:cNvPr id="38" name="テキスト ボックス 37">
             <a:extLst>
               <a:ext uri="{FF2B5EF4-FFF2-40B4-BE49-F238E27FC236}">
-                <a16:creationId xmlns:a16="http://schemas.microsoft.com/office/drawing/2014/main" id="{0E09A853-BDDA-17AF-BC09-1A122427FA9A}"/>
+                <a16:creationId xmlns:a16="http://schemas.microsoft.com/office/drawing/2014/main" id="{FD7ACA38-DD87-670B-C1CE-39F7B2CAA3EF}"/>
               </a:ext>
             </a:extLst>
           </p:cNvPr>
@@ -24549,7 +24549,7 @@
           <p:cNvPr id="39" name="テキスト ボックス 38">
             <a:extLst>
               <a:ext uri="{FF2B5EF4-FFF2-40B4-BE49-F238E27FC236}">
-                <a16:creationId xmlns:a16="http://schemas.microsoft.com/office/drawing/2014/main" id="{7C8041A2-BEE2-11E0-9172-2A4D6EDA69B4}"/>
+                <a16:creationId xmlns:a16="http://schemas.microsoft.com/office/drawing/2014/main" id="{03A75292-A56A-5712-3D59-A5D7A94A541C}"/>
               </a:ext>
             </a:extLst>
           </p:cNvPr>
@@ -24600,7 +24600,7 @@
           <p:cNvPr id="40" name="正方形/長方形 39">
             <a:extLst>
               <a:ext uri="{FF2B5EF4-FFF2-40B4-BE49-F238E27FC236}">
-                <a16:creationId xmlns:a16="http://schemas.microsoft.com/office/drawing/2014/main" id="{F8184D59-2ED2-32EA-BD0F-ADD4559137BE}"/>
+                <a16:creationId xmlns:a16="http://schemas.microsoft.com/office/drawing/2014/main" id="{2555B6EB-0B43-CADF-B8BF-D4DDCE53DAA1}"/>
               </a:ext>
             </a:extLst>
           </p:cNvPr>
@@ -24668,7 +24668,7 @@
           <p:cNvPr id="41" name="正方形/長方形 40">
             <a:extLst>
               <a:ext uri="{FF2B5EF4-FFF2-40B4-BE49-F238E27FC236}">
-                <a16:creationId xmlns:a16="http://schemas.microsoft.com/office/drawing/2014/main" id="{B3B1094C-ABCB-69F8-26F8-438C4549A8CD}"/>
+                <a16:creationId xmlns:a16="http://schemas.microsoft.com/office/drawing/2014/main" id="{3D893C6C-87F8-4B98-05C9-98842605FAF9}"/>
               </a:ext>
             </a:extLst>
           </p:cNvPr>
@@ -24736,7 +24736,7 @@
           <p:cNvPr id="42" name="テキスト ボックス 41">
             <a:extLst>
               <a:ext uri="{FF2B5EF4-FFF2-40B4-BE49-F238E27FC236}">
-                <a16:creationId xmlns:a16="http://schemas.microsoft.com/office/drawing/2014/main" id="{AFA8AE4C-195E-8614-610E-70930EB96BFE}"/>
+                <a16:creationId xmlns:a16="http://schemas.microsoft.com/office/drawing/2014/main" id="{46EAC10E-2BDB-1B06-DDC4-D22D58AF6883}"/>
               </a:ext>
             </a:extLst>
           </p:cNvPr>
@@ -24804,7 +24804,7 @@
           <p:cNvPr id="43" name="テキスト ボックス 42">
             <a:extLst>
               <a:ext uri="{FF2B5EF4-FFF2-40B4-BE49-F238E27FC236}">
-                <a16:creationId xmlns:a16="http://schemas.microsoft.com/office/drawing/2014/main" id="{08F6043C-A3A1-EB5B-7537-9D21D25CF982}"/>
+                <a16:creationId xmlns:a16="http://schemas.microsoft.com/office/drawing/2014/main" id="{326685C6-765B-D6D0-3105-2D61874EBEA8}"/>
               </a:ext>
             </a:extLst>
           </p:cNvPr>
@@ -24855,7 +24855,7 @@
           <p:cNvPr id="44" name="正方形/長方形 43">
             <a:extLst>
               <a:ext uri="{FF2B5EF4-FFF2-40B4-BE49-F238E27FC236}">
-                <a16:creationId xmlns:a16="http://schemas.microsoft.com/office/drawing/2014/main" id="{3C1A9C30-3FAB-9C0B-0FF2-9D89155DA633}"/>
+                <a16:creationId xmlns:a16="http://schemas.microsoft.com/office/drawing/2014/main" id="{C76018E5-05A9-03C6-27D7-53DE6CB6486E}"/>
               </a:ext>
             </a:extLst>
           </p:cNvPr>
@@ -24923,7 +24923,7 @@
           <p:cNvPr id="45" name="正方形/長方形 44">
             <a:extLst>
               <a:ext uri="{FF2B5EF4-FFF2-40B4-BE49-F238E27FC236}">
-                <a16:creationId xmlns:a16="http://schemas.microsoft.com/office/drawing/2014/main" id="{AA55D51B-1963-7986-4460-8CECC32A4251}"/>
+                <a16:creationId xmlns:a16="http://schemas.microsoft.com/office/drawing/2014/main" id="{5296F7CF-EFE9-8212-2C04-65961CC3A584}"/>
               </a:ext>
             </a:extLst>
           </p:cNvPr>
@@ -24991,7 +24991,7 @@
           <p:cNvPr id="46" name="テキスト ボックス 45">
             <a:extLst>
               <a:ext uri="{FF2B5EF4-FFF2-40B4-BE49-F238E27FC236}">
-                <a16:creationId xmlns:a16="http://schemas.microsoft.com/office/drawing/2014/main" id="{641B877D-575D-4158-A107-ADA79F7D5AF2}"/>
+                <a16:creationId xmlns:a16="http://schemas.microsoft.com/office/drawing/2014/main" id="{331D7454-1461-CBDF-A138-2DB235F29B16}"/>
               </a:ext>
             </a:extLst>
           </p:cNvPr>
@@ -25059,7 +25059,7 @@
           <p:cNvPr id="47" name="テキスト ボックス 46">
             <a:extLst>
               <a:ext uri="{FF2B5EF4-FFF2-40B4-BE49-F238E27FC236}">
-                <a16:creationId xmlns:a16="http://schemas.microsoft.com/office/drawing/2014/main" id="{FFD7DFF1-F7B7-052A-04E4-380A8F1D897F}"/>
+                <a16:creationId xmlns:a16="http://schemas.microsoft.com/office/drawing/2014/main" id="{52357152-9F58-510A-B1CC-EE01E47D4644}"/>
               </a:ext>
             </a:extLst>
           </p:cNvPr>
@@ -25110,7 +25110,7 @@
           <p:cNvPr id="48" name="正方形/長方形 47">
             <a:extLst>
               <a:ext uri="{FF2B5EF4-FFF2-40B4-BE49-F238E27FC236}">
-                <a16:creationId xmlns:a16="http://schemas.microsoft.com/office/drawing/2014/main" id="{EE427627-92B3-6A4D-AA79-706F013C99E2}"/>
+                <a16:creationId xmlns:a16="http://schemas.microsoft.com/office/drawing/2014/main" id="{A17E7E72-4779-AAA3-197E-D688332096E3}"/>
               </a:ext>
             </a:extLst>
           </p:cNvPr>
@@ -25178,7 +25178,7 @@
           <p:cNvPr id="49" name="正方形/長方形 48">
             <a:extLst>
               <a:ext uri="{FF2B5EF4-FFF2-40B4-BE49-F238E27FC236}">
-                <a16:creationId xmlns:a16="http://schemas.microsoft.com/office/drawing/2014/main" id="{35066391-09BA-69E9-7C25-B1E2D0C02386}"/>
+                <a16:creationId xmlns:a16="http://schemas.microsoft.com/office/drawing/2014/main" id="{97DF22BE-EA23-2BD2-3321-F9D3C7BC4503}"/>
               </a:ext>
             </a:extLst>
           </p:cNvPr>
@@ -25246,7 +25246,7 @@
           <p:cNvPr id="50" name="テキスト ボックス 49">
             <a:extLst>
               <a:ext uri="{FF2B5EF4-FFF2-40B4-BE49-F238E27FC236}">
-                <a16:creationId xmlns:a16="http://schemas.microsoft.com/office/drawing/2014/main" id="{33F86F88-884A-56B9-1182-25E75EAA1E8C}"/>
+                <a16:creationId xmlns:a16="http://schemas.microsoft.com/office/drawing/2014/main" id="{04D2D1FA-5879-D020-5B2B-74F47359BDC4}"/>
               </a:ext>
             </a:extLst>
           </p:cNvPr>
@@ -25314,7 +25314,7 @@
           <p:cNvPr id="51" name="テキスト ボックス 50">
             <a:extLst>
               <a:ext uri="{FF2B5EF4-FFF2-40B4-BE49-F238E27FC236}">
-                <a16:creationId xmlns:a16="http://schemas.microsoft.com/office/drawing/2014/main" id="{B9422097-4D20-5959-6EA9-79CE94149D2E}"/>
+                <a16:creationId xmlns:a16="http://schemas.microsoft.com/office/drawing/2014/main" id="{2B8AEFC4-EFC7-AB60-F9BD-2A25B5E5E631}"/>
               </a:ext>
             </a:extLst>
           </p:cNvPr>
@@ -25355,7 +25355,7 @@
           <p:cNvPr id="52" name="正方形/長方形 51">
             <a:extLst>
               <a:ext uri="{FF2B5EF4-FFF2-40B4-BE49-F238E27FC236}">
-                <a16:creationId xmlns:a16="http://schemas.microsoft.com/office/drawing/2014/main" id="{233900F3-841C-F3A0-8C5F-8730501E79B1}"/>
+                <a16:creationId xmlns:a16="http://schemas.microsoft.com/office/drawing/2014/main" id="{032C698B-7823-FA70-2EFC-DEDBD252EBF9}"/>
               </a:ext>
             </a:extLst>
           </p:cNvPr>
@@ -25423,7 +25423,7 @@
           <p:cNvPr id="53" name="正方形/長方形 52">
             <a:extLst>
               <a:ext uri="{FF2B5EF4-FFF2-40B4-BE49-F238E27FC236}">
-                <a16:creationId xmlns:a16="http://schemas.microsoft.com/office/drawing/2014/main" id="{8BF835F7-1DD8-3158-3E3E-29E5C5DA1E76}"/>
+                <a16:creationId xmlns:a16="http://schemas.microsoft.com/office/drawing/2014/main" id="{44613D84-524F-0512-8FCB-65D8D4971AED}"/>
               </a:ext>
             </a:extLst>
           </p:cNvPr>
@@ -25491,7 +25491,7 @@
           <p:cNvPr id="54" name="テキスト ボックス 53">
             <a:extLst>
               <a:ext uri="{FF2B5EF4-FFF2-40B4-BE49-F238E27FC236}">
-                <a16:creationId xmlns:a16="http://schemas.microsoft.com/office/drawing/2014/main" id="{50A93E16-7457-709D-9EB1-DBC43519B028}"/>
+                <a16:creationId xmlns:a16="http://schemas.microsoft.com/office/drawing/2014/main" id="{42305742-4244-6565-9ED9-B537BB60D36F}"/>
               </a:ext>
             </a:extLst>
           </p:cNvPr>
@@ -25559,7 +25559,7 @@
           <p:cNvPr id="55" name="正方形/長方形 54">
             <a:extLst>
               <a:ext uri="{FF2B5EF4-FFF2-40B4-BE49-F238E27FC236}">
-                <a16:creationId xmlns:a16="http://schemas.microsoft.com/office/drawing/2014/main" id="{2DF5F29E-3611-44BB-F13C-C2D885BD2475}"/>
+                <a16:creationId xmlns:a16="http://schemas.microsoft.com/office/drawing/2014/main" id="{1B104440-7C74-D8B8-8FB8-A0D22F21D85C}"/>
               </a:ext>
             </a:extLst>
           </p:cNvPr>
@@ -25613,7 +25613,7 @@
           <p:cNvPr id="56" name="正方形/長方形 55">
             <a:extLst>
               <a:ext uri="{FF2B5EF4-FFF2-40B4-BE49-F238E27FC236}">
-                <a16:creationId xmlns:a16="http://schemas.microsoft.com/office/drawing/2014/main" id="{588BA1F0-27E3-E99F-A7E5-1C56B31D9F63}"/>
+                <a16:creationId xmlns:a16="http://schemas.microsoft.com/office/drawing/2014/main" id="{B32E6152-E2CD-C617-ABC9-8DA1F27D6BD0}"/>
               </a:ext>
             </a:extLst>
           </p:cNvPr>
@@ -25681,7 +25681,7 @@
           <p:cNvPr id="57" name="テキスト ボックス 56">
             <a:extLst>
               <a:ext uri="{FF2B5EF4-FFF2-40B4-BE49-F238E27FC236}">
-                <a16:creationId xmlns:a16="http://schemas.microsoft.com/office/drawing/2014/main" id="{633F4193-6FAA-E771-DC68-DE3FC1806312}"/>
+                <a16:creationId xmlns:a16="http://schemas.microsoft.com/office/drawing/2014/main" id="{1A100454-E5EE-DC4B-7852-99C13A75EBEA}"/>
               </a:ext>
             </a:extLst>
           </p:cNvPr>
@@ -25752,7 +25752,7 @@
           <p:cNvPr id="58" name="正方形/長方形 57">
             <a:extLst>
               <a:ext uri="{FF2B5EF4-FFF2-40B4-BE49-F238E27FC236}">
-                <a16:creationId xmlns:a16="http://schemas.microsoft.com/office/drawing/2014/main" id="{CC87485A-7BDD-9C81-DFFA-D0BC372CEC69}"/>
+                <a16:creationId xmlns:a16="http://schemas.microsoft.com/office/drawing/2014/main" id="{C9EE2B0D-EE76-6103-57B0-F15917009A5E}"/>
               </a:ext>
             </a:extLst>
           </p:cNvPr>
@@ -25820,7 +25820,7 @@
           <p:cNvPr id="59" name="テキスト ボックス 58">
             <a:extLst>
               <a:ext uri="{FF2B5EF4-FFF2-40B4-BE49-F238E27FC236}">
-                <a16:creationId xmlns:a16="http://schemas.microsoft.com/office/drawing/2014/main" id="{3D543B79-8B10-BAAB-B770-547C49D386CC}"/>
+                <a16:creationId xmlns:a16="http://schemas.microsoft.com/office/drawing/2014/main" id="{468FAF4F-6DB0-403B-B28C-6D32AB114D67}"/>
               </a:ext>
             </a:extLst>
           </p:cNvPr>
@@ -25861,7 +25861,7 @@
           <p:cNvPr id="60" name="正方形/長方形 59">
             <a:extLst>
               <a:ext uri="{FF2B5EF4-FFF2-40B4-BE49-F238E27FC236}">
-                <a16:creationId xmlns:a16="http://schemas.microsoft.com/office/drawing/2014/main" id="{4FBE3252-1880-727A-FBE3-D3488A4554EB}"/>
+                <a16:creationId xmlns:a16="http://schemas.microsoft.com/office/drawing/2014/main" id="{540F4245-3D21-F04C-C459-F00768B5A06A}"/>
               </a:ext>
             </a:extLst>
           </p:cNvPr>
@@ -25929,7 +25929,7 @@
           <p:cNvPr id="61" name="正方形/長方形 60">
             <a:extLst>
               <a:ext uri="{FF2B5EF4-FFF2-40B4-BE49-F238E27FC236}">
-                <a16:creationId xmlns:a16="http://schemas.microsoft.com/office/drawing/2014/main" id="{CB444D71-CCB7-32C3-F067-A1529D60B50A}"/>
+                <a16:creationId xmlns:a16="http://schemas.microsoft.com/office/drawing/2014/main" id="{358FB5B2-AFBA-09B8-A38F-FC55F106041D}"/>
               </a:ext>
             </a:extLst>
           </p:cNvPr>
@@ -25997,7 +25997,7 @@
           <p:cNvPr id="62" name="テキスト ボックス 61">
             <a:extLst>
               <a:ext uri="{FF2B5EF4-FFF2-40B4-BE49-F238E27FC236}">
-                <a16:creationId xmlns:a16="http://schemas.microsoft.com/office/drawing/2014/main" id="{7AD2C5AB-7CBD-B9A9-1494-E0D60BB348A1}"/>
+                <a16:creationId xmlns:a16="http://schemas.microsoft.com/office/drawing/2014/main" id="{4F6E6951-55E5-CCFC-4FA1-5207DA58B408}"/>
               </a:ext>
             </a:extLst>
           </p:cNvPr>
@@ -26065,7 +26065,7 @@
           <p:cNvPr id="63" name="テキスト ボックス 62">
             <a:extLst>
               <a:ext uri="{FF2B5EF4-FFF2-40B4-BE49-F238E27FC236}">
-                <a16:creationId xmlns:a16="http://schemas.microsoft.com/office/drawing/2014/main" id="{54FE0141-2E67-E650-1CFD-3BF3F063F6EC}"/>
+                <a16:creationId xmlns:a16="http://schemas.microsoft.com/office/drawing/2014/main" id="{D1650534-1CB4-5EB7-FBE5-F4DBC1399E6C}"/>
               </a:ext>
             </a:extLst>
           </p:cNvPr>
@@ -26106,7 +26106,7 @@
           <p:cNvPr id="64" name="正方形/長方形 63">
             <a:extLst>
               <a:ext uri="{FF2B5EF4-FFF2-40B4-BE49-F238E27FC236}">
-                <a16:creationId xmlns:a16="http://schemas.microsoft.com/office/drawing/2014/main" id="{7A8D00A6-FF4D-7DB9-914E-A2F596EBDA0A}"/>
+                <a16:creationId xmlns:a16="http://schemas.microsoft.com/office/drawing/2014/main" id="{49D5A37A-A1E7-9FD7-1615-2FD004DFEFDC}"/>
               </a:ext>
             </a:extLst>
           </p:cNvPr>
@@ -26174,7 +26174,7 @@
           <p:cNvPr id="65" name="正方形/長方形 64">
             <a:extLst>
               <a:ext uri="{FF2B5EF4-FFF2-40B4-BE49-F238E27FC236}">
-                <a16:creationId xmlns:a16="http://schemas.microsoft.com/office/drawing/2014/main" id="{441DEEA4-342A-04B9-A8A0-BDAFCFBE6FED}"/>
+                <a16:creationId xmlns:a16="http://schemas.microsoft.com/office/drawing/2014/main" id="{2F1B6CAF-268E-C6A7-4F85-F299C56680D7}"/>
               </a:ext>
             </a:extLst>
           </p:cNvPr>
@@ -26242,7 +26242,7 @@
           <p:cNvPr id="66" name="テキスト ボックス 65">
             <a:extLst>
               <a:ext uri="{FF2B5EF4-FFF2-40B4-BE49-F238E27FC236}">
-                <a16:creationId xmlns:a16="http://schemas.microsoft.com/office/drawing/2014/main" id="{3F286EA4-3DD9-504E-315A-80E66D0DFCE7}"/>
+                <a16:creationId xmlns:a16="http://schemas.microsoft.com/office/drawing/2014/main" id="{282624F6-0BB7-3E51-5482-BC5A4ABAE413}"/>
               </a:ext>
             </a:extLst>
           </p:cNvPr>
@@ -26310,7 +26310,7 @@
           <p:cNvPr id="67" name="テキスト ボックス 66">
             <a:extLst>
               <a:ext uri="{FF2B5EF4-FFF2-40B4-BE49-F238E27FC236}">
-                <a16:creationId xmlns:a16="http://schemas.microsoft.com/office/drawing/2014/main" id="{B92360BA-C948-A3E3-CEA8-ED30AD57547E}"/>
+                <a16:creationId xmlns:a16="http://schemas.microsoft.com/office/drawing/2014/main" id="{337F8717-87A5-E8F1-E6AE-24B35DB4730F}"/>
               </a:ext>
             </a:extLst>
           </p:cNvPr>
@@ -26351,7 +26351,7 @@
           <p:cNvPr id="68" name="正方形/長方形 67">
             <a:extLst>
               <a:ext uri="{FF2B5EF4-FFF2-40B4-BE49-F238E27FC236}">
-                <a16:creationId xmlns:a16="http://schemas.microsoft.com/office/drawing/2014/main" id="{944E4AFC-9DF0-54CC-5F04-C0EA90B474C4}"/>
+                <a16:creationId xmlns:a16="http://schemas.microsoft.com/office/drawing/2014/main" id="{8587E66D-8457-9CF3-A470-02DC06BA0996}"/>
               </a:ext>
             </a:extLst>
           </p:cNvPr>
@@ -26419,7 +26419,7 @@
           <p:cNvPr id="69" name="正方形/長方形 68">
             <a:extLst>
               <a:ext uri="{FF2B5EF4-FFF2-40B4-BE49-F238E27FC236}">
-                <a16:creationId xmlns:a16="http://schemas.microsoft.com/office/drawing/2014/main" id="{E9CE73B3-3230-92A1-1EF9-FC53267A6E2B}"/>
+                <a16:creationId xmlns:a16="http://schemas.microsoft.com/office/drawing/2014/main" id="{B60250E2-ECAC-943F-C01B-E051B2B83B12}"/>
               </a:ext>
             </a:extLst>
           </p:cNvPr>
@@ -26487,7 +26487,7 @@
           <p:cNvPr id="70" name="テキスト ボックス 69">
             <a:extLst>
               <a:ext uri="{FF2B5EF4-FFF2-40B4-BE49-F238E27FC236}">
-                <a16:creationId xmlns:a16="http://schemas.microsoft.com/office/drawing/2014/main" id="{F3F60BE2-AF9F-F8C9-79D7-7A402979F7D2}"/>
+                <a16:creationId xmlns:a16="http://schemas.microsoft.com/office/drawing/2014/main" id="{BB39E7EA-C258-C9C4-822F-036993D3FE57}"/>
               </a:ext>
             </a:extLst>
           </p:cNvPr>
@@ -26555,7 +26555,7 @@
           <p:cNvPr id="71" name="テキスト ボックス 70">
             <a:extLst>
               <a:ext uri="{FF2B5EF4-FFF2-40B4-BE49-F238E27FC236}">
-                <a16:creationId xmlns:a16="http://schemas.microsoft.com/office/drawing/2014/main" id="{E5E1A76F-C8A1-9E1B-024E-E4452168C29B}"/>
+                <a16:creationId xmlns:a16="http://schemas.microsoft.com/office/drawing/2014/main" id="{6FB59119-763F-C828-E031-606AF3767F12}"/>
               </a:ext>
             </a:extLst>
           </p:cNvPr>
@@ -26596,7 +26596,7 @@
           <p:cNvPr id="72" name="正方形/長方形 71">
             <a:extLst>
               <a:ext uri="{FF2B5EF4-FFF2-40B4-BE49-F238E27FC236}">
-                <a16:creationId xmlns:a16="http://schemas.microsoft.com/office/drawing/2014/main" id="{8C423866-036A-8831-F1AD-66F43A3BF140}"/>
+                <a16:creationId xmlns:a16="http://schemas.microsoft.com/office/drawing/2014/main" id="{D9787782-D292-3601-BF2D-9DAB6F33DC23}"/>
               </a:ext>
             </a:extLst>
           </p:cNvPr>
@@ -26664,7 +26664,7 @@
           <p:cNvPr id="73" name="正方形/長方形 72">
             <a:extLst>
               <a:ext uri="{FF2B5EF4-FFF2-40B4-BE49-F238E27FC236}">
-                <a16:creationId xmlns:a16="http://schemas.microsoft.com/office/drawing/2014/main" id="{A58652D3-DE6D-34EC-898C-66867F74E0AC}"/>
+                <a16:creationId xmlns:a16="http://schemas.microsoft.com/office/drawing/2014/main" id="{AD798F2B-CB37-38D3-638E-98731F02BE65}"/>
               </a:ext>
             </a:extLst>
           </p:cNvPr>
@@ -26732,7 +26732,7 @@
           <p:cNvPr id="74" name="テキスト ボックス 73">
             <a:extLst>
               <a:ext uri="{FF2B5EF4-FFF2-40B4-BE49-F238E27FC236}">
-                <a16:creationId xmlns:a16="http://schemas.microsoft.com/office/drawing/2014/main" id="{3A019525-6545-2862-8A00-A69A0E4A7E1A}"/>
+                <a16:creationId xmlns:a16="http://schemas.microsoft.com/office/drawing/2014/main" id="{5A807129-2694-53A0-C0A7-98E65E14E806}"/>
               </a:ext>
             </a:extLst>
           </p:cNvPr>
@@ -26800,7 +26800,7 @@
           <p:cNvPr id="75" name="テキスト ボックス 74">
             <a:extLst>
               <a:ext uri="{FF2B5EF4-FFF2-40B4-BE49-F238E27FC236}">
-                <a16:creationId xmlns:a16="http://schemas.microsoft.com/office/drawing/2014/main" id="{11AEEE75-40D3-AA34-DE11-1CFC8187A11E}"/>
+                <a16:creationId xmlns:a16="http://schemas.microsoft.com/office/drawing/2014/main" id="{D291DD94-D27C-2D95-BE04-FB2FFD4479D9}"/>
               </a:ext>
             </a:extLst>
           </p:cNvPr>
@@ -26931,7 +26931,7 @@
           <p:cNvPr id="76" name="正方形/長方形 75">
             <a:extLst>
               <a:ext uri="{FF2B5EF4-FFF2-40B4-BE49-F238E27FC236}">
-                <a16:creationId xmlns:a16="http://schemas.microsoft.com/office/drawing/2014/main" id="{59BC9079-177B-45F9-B683-22073D0B7F5F}"/>
+                <a16:creationId xmlns:a16="http://schemas.microsoft.com/office/drawing/2014/main" id="{7317783A-1FB2-B1EE-DE2F-84A1A53C8F5C}"/>
               </a:ext>
             </a:extLst>
           </p:cNvPr>
@@ -26985,7 +26985,7 @@
           <p:cNvPr id="77" name="正方形/長方形 76">
             <a:extLst>
               <a:ext uri="{FF2B5EF4-FFF2-40B4-BE49-F238E27FC236}">
-                <a16:creationId xmlns:a16="http://schemas.microsoft.com/office/drawing/2014/main" id="{E4A0CD9F-B4AB-D70D-F035-9C825AF3BBEF}"/>
+                <a16:creationId xmlns:a16="http://schemas.microsoft.com/office/drawing/2014/main" id="{2CF26044-88E7-04B4-1B38-2B1DD1E8A82B}"/>
               </a:ext>
             </a:extLst>
           </p:cNvPr>
@@ -27053,7 +27053,7 @@
           <p:cNvPr id="78" name="テキスト ボックス 77">
             <a:extLst>
               <a:ext uri="{FF2B5EF4-FFF2-40B4-BE49-F238E27FC236}">
-                <a16:creationId xmlns:a16="http://schemas.microsoft.com/office/drawing/2014/main" id="{29F9A443-D968-2DC5-A7C1-454F525A0641}"/>
+                <a16:creationId xmlns:a16="http://schemas.microsoft.com/office/drawing/2014/main" id="{3F90375A-B65A-E8E7-2105-96A06E02A367}"/>
               </a:ext>
             </a:extLst>
           </p:cNvPr>
@@ -27094,7 +27094,7 @@
           <p:cNvPr id="79" name="正方形/長方形 78">
             <a:extLst>
               <a:ext uri="{FF2B5EF4-FFF2-40B4-BE49-F238E27FC236}">
-                <a16:creationId xmlns:a16="http://schemas.microsoft.com/office/drawing/2014/main" id="{E9521017-7B59-9353-AC92-3A33F2F5FA74}"/>
+                <a16:creationId xmlns:a16="http://schemas.microsoft.com/office/drawing/2014/main" id="{B83D10D9-4D10-B7FE-6479-099782479940}"/>
               </a:ext>
             </a:extLst>
           </p:cNvPr>
@@ -27162,7 +27162,7 @@
           <p:cNvPr id="80" name="テキスト ボックス 79">
             <a:extLst>
               <a:ext uri="{FF2B5EF4-FFF2-40B4-BE49-F238E27FC236}">
-                <a16:creationId xmlns:a16="http://schemas.microsoft.com/office/drawing/2014/main" id="{2B6E83D6-3D3B-1A98-5632-84B505E7B76E}"/>
+                <a16:creationId xmlns:a16="http://schemas.microsoft.com/office/drawing/2014/main" id="{D81F1C4F-BF9C-221E-E5AA-F017A71C88F5}"/>
               </a:ext>
             </a:extLst>
           </p:cNvPr>
@@ -27664,7 +27664,7 @@
     </p:spTree>
     <p:extLst>
       <p:ext uri="{BB962C8B-B14F-4D97-AF65-F5344CB8AC3E}">
-        <p14:creationId xmlns:p14="http://schemas.microsoft.com/office/powerpoint/2010/main" val="2875607737"/>
+        <p14:creationId xmlns:p14="http://schemas.microsoft.com/office/powerpoint/2010/main" val="3501743184"/>
       </p:ext>
     </p:extLst>
   </p:cSld>
@@ -27696,7 +27696,7 @@
           <p:cNvPr id="2" name="正方形/長方形 1">
             <a:extLst>
               <a:ext uri="{FF2B5EF4-FFF2-40B4-BE49-F238E27FC236}">
-                <a16:creationId xmlns:a16="http://schemas.microsoft.com/office/drawing/2014/main" id="{6D6E0A32-6C10-3D32-265F-9C528E1A49CC}"/>
+                <a16:creationId xmlns:a16="http://schemas.microsoft.com/office/drawing/2014/main" id="{81D67744-B44B-6FF0-A3DE-8904634695CF}"/>
               </a:ext>
             </a:extLst>
           </p:cNvPr>
@@ -27764,7 +27764,7 @@
           <p:cNvPr id="3" name="正方形/長方形 2">
             <a:extLst>
               <a:ext uri="{FF2B5EF4-FFF2-40B4-BE49-F238E27FC236}">
-                <a16:creationId xmlns:a16="http://schemas.microsoft.com/office/drawing/2014/main" id="{C10ECB62-2B06-D35F-4033-25E561D53DDF}"/>
+                <a16:creationId xmlns:a16="http://schemas.microsoft.com/office/drawing/2014/main" id="{D826EDC3-D4DF-A616-5AFE-D958B3490386}"/>
               </a:ext>
             </a:extLst>
           </p:cNvPr>
@@ -27832,7 +27832,7 @@
           <p:cNvPr id="4" name="正方形/長方形 3">
             <a:extLst>
               <a:ext uri="{FF2B5EF4-FFF2-40B4-BE49-F238E27FC236}">
-                <a16:creationId xmlns:a16="http://schemas.microsoft.com/office/drawing/2014/main" id="{54CF90B0-687B-BD35-661B-596390B0F43B}"/>
+                <a16:creationId xmlns:a16="http://schemas.microsoft.com/office/drawing/2014/main" id="{0A407981-A44D-6984-A276-2A5CB69DDE28}"/>
               </a:ext>
             </a:extLst>
           </p:cNvPr>
@@ -27900,7 +27900,7 @@
           <p:cNvPr id="5" name="テキスト ボックス 4">
             <a:extLst>
               <a:ext uri="{FF2B5EF4-FFF2-40B4-BE49-F238E27FC236}">
-                <a16:creationId xmlns:a16="http://schemas.microsoft.com/office/drawing/2014/main" id="{EE5CBC0D-86C3-7F20-2874-E3C69DC0BD12}"/>
+                <a16:creationId xmlns:a16="http://schemas.microsoft.com/office/drawing/2014/main" id="{94E0B522-387B-64E2-5E39-A2D7D034F25D}"/>
               </a:ext>
             </a:extLst>
           </p:cNvPr>
@@ -27969,7 +27969,7 @@
           <p:cNvPr id="6" name="テキスト ボックス 5">
             <a:extLst>
               <a:ext uri="{FF2B5EF4-FFF2-40B4-BE49-F238E27FC236}">
-                <a16:creationId xmlns:a16="http://schemas.microsoft.com/office/drawing/2014/main" id="{592012DC-48F5-C8D5-BE77-42A35B0D7F98}"/>
+                <a16:creationId xmlns:a16="http://schemas.microsoft.com/office/drawing/2014/main" id="{BBAAD97F-8E46-08E8-2B58-61F54C5224CA}"/>
               </a:ext>
             </a:extLst>
           </p:cNvPr>
@@ -27978,8 +27978,8 @@
         </p:nvSpPr>
         <p:spPr>
           <a:xfrm>
-            <a:off x="2336800" y="139700"/>
-            <a:ext cx="8382000" cy="718145"/>
+            <a:off x="2311400" y="165100"/>
+            <a:ext cx="8585200" cy="379591"/>
           </a:xfrm>
           <a:prstGeom prst="rect">
             <a:avLst/>
@@ -27993,7 +27993,7 @@
           <a:lstStyle/>
           <a:p>
             <a:r>
-              <a:rPr kumimoji="1" lang="ja-JP" altLang="en-US" sz="2000" b="1">
+              <a:rPr kumimoji="1" lang="ja-JP" altLang="en-US" b="1">
                 <a:solidFill>
                   <a:srgbClr val="FFFFFF"/>
                 </a:solidFill>
@@ -28003,7 +28003,7 @@
               <a:t>来場者アンケート結果②：</a:t>
             </a:r>
             <a:r>
-              <a:rPr kumimoji="1" lang="en-US" altLang="ja-JP" sz="2000" b="1">
+              <a:rPr kumimoji="1" lang="en-US" altLang="ja-JP" b="1">
                 <a:solidFill>
                   <a:srgbClr val="FFFFFF"/>
                 </a:solidFill>
@@ -28013,7 +28013,7 @@
               <a:t>Q1</a:t>
             </a:r>
             <a:r>
-              <a:rPr kumimoji="1" lang="ja-JP" altLang="en-US" sz="2000" b="1">
+              <a:rPr kumimoji="1" lang="ja-JP" altLang="en-US" b="1">
                 <a:solidFill>
                   <a:srgbClr val="FFFFFF"/>
                 </a:solidFill>
@@ -28023,7 +28023,7 @@
               <a:t>（出展評価）・</a:t>
             </a:r>
             <a:r>
-              <a:rPr kumimoji="1" lang="en-US" altLang="ja-JP" sz="2000" b="1">
+              <a:rPr kumimoji="1" lang="en-US" altLang="ja-JP" b="1">
                 <a:solidFill>
                   <a:srgbClr val="FFFFFF"/>
                 </a:solidFill>
@@ -28033,7 +28033,7 @@
               <a:t>Q2</a:t>
             </a:r>
             <a:r>
-              <a:rPr kumimoji="1" lang="ja-JP" altLang="en-US" sz="2000" b="1">
+              <a:rPr kumimoji="1" lang="ja-JP" altLang="en-US" b="1">
                 <a:solidFill>
                   <a:srgbClr val="FFFFFF"/>
                 </a:solidFill>
@@ -28043,7 +28043,7 @@
               <a:t>（認知度）・</a:t>
             </a:r>
             <a:r>
-              <a:rPr kumimoji="1" lang="en-US" altLang="ja-JP" sz="2000" b="1">
+              <a:rPr kumimoji="1" lang="en-US" altLang="ja-JP" b="1">
                 <a:solidFill>
                   <a:srgbClr val="FFFFFF"/>
                 </a:solidFill>
@@ -28053,7 +28053,7 @@
               <a:t>Q3</a:t>
             </a:r>
             <a:r>
-              <a:rPr kumimoji="1" lang="ja-JP" altLang="en-US" sz="2000" b="1">
+              <a:rPr kumimoji="1" lang="ja-JP" altLang="en-US" b="1">
                 <a:solidFill>
                   <a:srgbClr val="FFFFFF"/>
                 </a:solidFill>
@@ -28070,7 +28070,7 @@
           <p:cNvPr id="7" name="テキスト ボックス 6">
             <a:extLst>
               <a:ext uri="{FF2B5EF4-FFF2-40B4-BE49-F238E27FC236}">
-                <a16:creationId xmlns:a16="http://schemas.microsoft.com/office/drawing/2014/main" id="{5840A8EF-7403-AEAC-70DE-7AD3DA5D2B60}"/>
+                <a16:creationId xmlns:a16="http://schemas.microsoft.com/office/drawing/2014/main" id="{7C15C4F6-5122-DB30-1C06-BEAE6E2D6B39}"/>
               </a:ext>
             </a:extLst>
           </p:cNvPr>
@@ -28079,8 +28079,8 @@
         </p:nvSpPr>
         <p:spPr>
           <a:xfrm>
-            <a:off x="10668000" y="203200"/>
-            <a:ext cx="1219200" cy="302647"/>
+            <a:off x="10896600" y="203200"/>
+            <a:ext cx="990600" cy="302647"/>
           </a:xfrm>
           <a:prstGeom prst="rect">
             <a:avLst/>
@@ -28119,7 +28119,7 @@
           <p:cNvPr id="8" name="正方形/長方形 7">
             <a:extLst>
               <a:ext uri="{FF2B5EF4-FFF2-40B4-BE49-F238E27FC236}">
-                <a16:creationId xmlns:a16="http://schemas.microsoft.com/office/drawing/2014/main" id="{5A8199FB-FA7C-300D-BAF2-76BE41850B56}"/>
+                <a16:creationId xmlns:a16="http://schemas.microsoft.com/office/drawing/2014/main" id="{0BAD591D-9AA5-E5BD-4666-187454135E3C}"/>
               </a:ext>
             </a:extLst>
           </p:cNvPr>
@@ -28173,7 +28173,7 @@
           <p:cNvPr id="9" name="正方形/長方形 8">
             <a:extLst>
               <a:ext uri="{FF2B5EF4-FFF2-40B4-BE49-F238E27FC236}">
-                <a16:creationId xmlns:a16="http://schemas.microsoft.com/office/drawing/2014/main" id="{43436A90-D95C-6ABA-F58F-FDD1F0006627}"/>
+                <a16:creationId xmlns:a16="http://schemas.microsoft.com/office/drawing/2014/main" id="{8F0B20EA-D968-A8F0-D422-FBC5B40BD78F}"/>
               </a:ext>
             </a:extLst>
           </p:cNvPr>
@@ -28241,7 +28241,7 @@
           <p:cNvPr id="10" name="テキスト ボックス 9">
             <a:extLst>
               <a:ext uri="{FF2B5EF4-FFF2-40B4-BE49-F238E27FC236}">
-                <a16:creationId xmlns:a16="http://schemas.microsoft.com/office/drawing/2014/main" id="{580F5E6C-C0B2-9A1F-DC70-73046662D52E}"/>
+                <a16:creationId xmlns:a16="http://schemas.microsoft.com/office/drawing/2014/main" id="{A1517A39-A306-01C9-B088-B200765F09DF}"/>
               </a:ext>
             </a:extLst>
           </p:cNvPr>
@@ -28359,7 +28359,7 @@
           <p:cNvPr id="11" name="正方形/長方形 10">
             <a:extLst>
               <a:ext uri="{FF2B5EF4-FFF2-40B4-BE49-F238E27FC236}">
-                <a16:creationId xmlns:a16="http://schemas.microsoft.com/office/drawing/2014/main" id="{AD05008A-0DD1-8E97-D3AD-67B6880BFC0C}"/>
+                <a16:creationId xmlns:a16="http://schemas.microsoft.com/office/drawing/2014/main" id="{BA9176EE-8977-1371-BB0A-4AD904A23F60}"/>
               </a:ext>
             </a:extLst>
           </p:cNvPr>
@@ -28413,7 +28413,7 @@
           <p:cNvPr id="12" name="正方形/長方形 11">
             <a:extLst>
               <a:ext uri="{FF2B5EF4-FFF2-40B4-BE49-F238E27FC236}">
-                <a16:creationId xmlns:a16="http://schemas.microsoft.com/office/drawing/2014/main" id="{464B519C-BB47-CD17-FF1A-FDDC29E10DEF}"/>
+                <a16:creationId xmlns:a16="http://schemas.microsoft.com/office/drawing/2014/main" id="{7268EB1F-7F51-6301-85DA-EE6BB651EFD3}"/>
               </a:ext>
             </a:extLst>
           </p:cNvPr>
@@ -28481,7 +28481,7 @@
           <p:cNvPr id="13" name="テキスト ボックス 12">
             <a:extLst>
               <a:ext uri="{FF2B5EF4-FFF2-40B4-BE49-F238E27FC236}">
-                <a16:creationId xmlns:a16="http://schemas.microsoft.com/office/drawing/2014/main" id="{A3F1F921-97B2-DD4E-56AB-894EB1E444E2}"/>
+                <a16:creationId xmlns:a16="http://schemas.microsoft.com/office/drawing/2014/main" id="{208E5E1C-A6A9-DB26-E093-1A526976407F}"/>
               </a:ext>
             </a:extLst>
           </p:cNvPr>
@@ -28552,7 +28552,7 @@
           <p:cNvPr id="14" name="正方形/長方形 13">
             <a:extLst>
               <a:ext uri="{FF2B5EF4-FFF2-40B4-BE49-F238E27FC236}">
-                <a16:creationId xmlns:a16="http://schemas.microsoft.com/office/drawing/2014/main" id="{13E85E65-3EFF-BAC3-CB65-9283F882D137}"/>
+                <a16:creationId xmlns:a16="http://schemas.microsoft.com/office/drawing/2014/main" id="{DD4C9246-B1D7-F4A7-AD12-C390CDCF01D3}"/>
               </a:ext>
             </a:extLst>
           </p:cNvPr>
@@ -28620,7 +28620,7 @@
           <p:cNvPr id="15" name="テキスト ボックス 14">
             <a:extLst>
               <a:ext uri="{FF2B5EF4-FFF2-40B4-BE49-F238E27FC236}">
-                <a16:creationId xmlns:a16="http://schemas.microsoft.com/office/drawing/2014/main" id="{228E5B86-1582-23A2-B890-9E071887FC2B}"/>
+                <a16:creationId xmlns:a16="http://schemas.microsoft.com/office/drawing/2014/main" id="{4854DD89-3254-3D60-4F13-AFC6C1860CCD}"/>
               </a:ext>
             </a:extLst>
           </p:cNvPr>
@@ -28671,7 +28671,7 @@
           <p:cNvPr id="16" name="テキスト ボックス 15">
             <a:extLst>
               <a:ext uri="{FF2B5EF4-FFF2-40B4-BE49-F238E27FC236}">
-                <a16:creationId xmlns:a16="http://schemas.microsoft.com/office/drawing/2014/main" id="{84568FCF-D60C-9BB5-C2AA-0E522BD9C7E7}"/>
+                <a16:creationId xmlns:a16="http://schemas.microsoft.com/office/drawing/2014/main" id="{1A81449C-EB61-F180-AFD9-34CB989FF2EE}"/>
               </a:ext>
             </a:extLst>
           </p:cNvPr>
@@ -28719,7 +28719,7 @@
           <p:cNvPr id="17" name="正方形/長方形 16">
             <a:extLst>
               <a:ext uri="{FF2B5EF4-FFF2-40B4-BE49-F238E27FC236}">
-                <a16:creationId xmlns:a16="http://schemas.microsoft.com/office/drawing/2014/main" id="{665AE655-D685-E626-CD2A-681EC04B3EED}"/>
+                <a16:creationId xmlns:a16="http://schemas.microsoft.com/office/drawing/2014/main" id="{A673D5AA-12CA-A16E-5B94-A36486DCF3EE}"/>
               </a:ext>
             </a:extLst>
           </p:cNvPr>
@@ -28787,7 +28787,7 @@
           <p:cNvPr id="18" name="正方形/長方形 17">
             <a:extLst>
               <a:ext uri="{FF2B5EF4-FFF2-40B4-BE49-F238E27FC236}">
-                <a16:creationId xmlns:a16="http://schemas.microsoft.com/office/drawing/2014/main" id="{CA7DCC7D-E989-E7BB-A530-20D437BF8DC7}"/>
+                <a16:creationId xmlns:a16="http://schemas.microsoft.com/office/drawing/2014/main" id="{37B2DBC5-5D6C-A980-F0E7-0D56B957BF1B}"/>
               </a:ext>
             </a:extLst>
           </p:cNvPr>
@@ -28855,7 +28855,7 @@
           <p:cNvPr id="19" name="テキスト ボックス 18">
             <a:extLst>
               <a:ext uri="{FF2B5EF4-FFF2-40B4-BE49-F238E27FC236}">
-                <a16:creationId xmlns:a16="http://schemas.microsoft.com/office/drawing/2014/main" id="{793CB529-1D30-B1C2-196A-BDE87082B1B1}"/>
+                <a16:creationId xmlns:a16="http://schemas.microsoft.com/office/drawing/2014/main" id="{E33D0795-5459-BD3B-89F6-DE1F0E912618}"/>
               </a:ext>
             </a:extLst>
           </p:cNvPr>
@@ -28923,7 +28923,7 @@
           <p:cNvPr id="20" name="テキスト ボックス 19">
             <a:extLst>
               <a:ext uri="{FF2B5EF4-FFF2-40B4-BE49-F238E27FC236}">
-                <a16:creationId xmlns:a16="http://schemas.microsoft.com/office/drawing/2014/main" id="{68A136C6-B5FE-C0AB-70A9-FB72F20354C2}"/>
+                <a16:creationId xmlns:a16="http://schemas.microsoft.com/office/drawing/2014/main" id="{F4EF55BE-12C9-F983-3054-EA14159BB684}"/>
               </a:ext>
             </a:extLst>
           </p:cNvPr>
@@ -28981,7 +28981,7 @@
           <p:cNvPr id="21" name="正方形/長方形 20">
             <a:extLst>
               <a:ext uri="{FF2B5EF4-FFF2-40B4-BE49-F238E27FC236}">
-                <a16:creationId xmlns:a16="http://schemas.microsoft.com/office/drawing/2014/main" id="{747A7015-13C9-AE85-CE00-8A0845AA89AF}"/>
+                <a16:creationId xmlns:a16="http://schemas.microsoft.com/office/drawing/2014/main" id="{3E9C9B78-4B24-87A4-61BB-C2B664E91D2C}"/>
               </a:ext>
             </a:extLst>
           </p:cNvPr>
@@ -29049,7 +29049,7 @@
           <p:cNvPr id="22" name="正方形/長方形 21">
             <a:extLst>
               <a:ext uri="{FF2B5EF4-FFF2-40B4-BE49-F238E27FC236}">
-                <a16:creationId xmlns:a16="http://schemas.microsoft.com/office/drawing/2014/main" id="{6995BA5C-0BD9-CF4C-9DEC-A5ED04D76D28}"/>
+                <a16:creationId xmlns:a16="http://schemas.microsoft.com/office/drawing/2014/main" id="{AD6C6365-A4EE-3DCE-CAE5-6B2A1D80DDAF}"/>
               </a:ext>
             </a:extLst>
           </p:cNvPr>
@@ -29117,7 +29117,7 @@
           <p:cNvPr id="23" name="テキスト ボックス 22">
             <a:extLst>
               <a:ext uri="{FF2B5EF4-FFF2-40B4-BE49-F238E27FC236}">
-                <a16:creationId xmlns:a16="http://schemas.microsoft.com/office/drawing/2014/main" id="{AE1B930F-7E31-5B1D-0942-AAD100290DFC}"/>
+                <a16:creationId xmlns:a16="http://schemas.microsoft.com/office/drawing/2014/main" id="{A99327FE-D1AB-2C5B-ED21-9E4038095AF0}"/>
               </a:ext>
             </a:extLst>
           </p:cNvPr>
@@ -29185,7 +29185,7 @@
           <p:cNvPr id="24" name="テキスト ボックス 23">
             <a:extLst>
               <a:ext uri="{FF2B5EF4-FFF2-40B4-BE49-F238E27FC236}">
-                <a16:creationId xmlns:a16="http://schemas.microsoft.com/office/drawing/2014/main" id="{D71874F4-D156-EE5F-27DC-33991FFA0F1E}"/>
+                <a16:creationId xmlns:a16="http://schemas.microsoft.com/office/drawing/2014/main" id="{9CB7A8A6-9C56-EB28-BB60-7E58D09BC794}"/>
               </a:ext>
             </a:extLst>
           </p:cNvPr>
@@ -29226,7 +29226,7 @@
           <p:cNvPr id="25" name="正方形/長方形 24">
             <a:extLst>
               <a:ext uri="{FF2B5EF4-FFF2-40B4-BE49-F238E27FC236}">
-                <a16:creationId xmlns:a16="http://schemas.microsoft.com/office/drawing/2014/main" id="{8D5B380D-F80B-6BDB-6AE8-C25DDCFB5A35}"/>
+                <a16:creationId xmlns:a16="http://schemas.microsoft.com/office/drawing/2014/main" id="{ECE5BC77-1849-7523-D2B3-897FDB5614BF}"/>
               </a:ext>
             </a:extLst>
           </p:cNvPr>
@@ -29294,7 +29294,7 @@
           <p:cNvPr id="26" name="正方形/長方形 25">
             <a:extLst>
               <a:ext uri="{FF2B5EF4-FFF2-40B4-BE49-F238E27FC236}">
-                <a16:creationId xmlns:a16="http://schemas.microsoft.com/office/drawing/2014/main" id="{49BFAF5C-AE4A-AE38-96F5-F411AC618FDF}"/>
+                <a16:creationId xmlns:a16="http://schemas.microsoft.com/office/drawing/2014/main" id="{588FF736-FA2A-3C48-CB47-155D0081C9B6}"/>
               </a:ext>
             </a:extLst>
           </p:cNvPr>
@@ -29362,7 +29362,7 @@
           <p:cNvPr id="27" name="テキスト ボックス 26">
             <a:extLst>
               <a:ext uri="{FF2B5EF4-FFF2-40B4-BE49-F238E27FC236}">
-                <a16:creationId xmlns:a16="http://schemas.microsoft.com/office/drawing/2014/main" id="{72AD5DEF-41D8-A8D3-5004-0C3E19005000}"/>
+                <a16:creationId xmlns:a16="http://schemas.microsoft.com/office/drawing/2014/main" id="{CF23F136-B707-0E19-9DAA-E1FA126E51F7}"/>
               </a:ext>
             </a:extLst>
           </p:cNvPr>
@@ -29430,7 +29430,7 @@
           <p:cNvPr id="28" name="テキスト ボックス 27">
             <a:extLst>
               <a:ext uri="{FF2B5EF4-FFF2-40B4-BE49-F238E27FC236}">
-                <a16:creationId xmlns:a16="http://schemas.microsoft.com/office/drawing/2014/main" id="{5EDF6660-2DF3-885B-AA89-C6FED07822F4}"/>
+                <a16:creationId xmlns:a16="http://schemas.microsoft.com/office/drawing/2014/main" id="{1EAB88AE-50F2-25B3-D913-C7365CD20D52}"/>
               </a:ext>
             </a:extLst>
           </p:cNvPr>
@@ -29511,7 +29511,7 @@
           <p:cNvPr id="29" name="正方形/長方形 28">
             <a:extLst>
               <a:ext uri="{FF2B5EF4-FFF2-40B4-BE49-F238E27FC236}">
-                <a16:creationId xmlns:a16="http://schemas.microsoft.com/office/drawing/2014/main" id="{29931C21-0BAD-392D-BEA6-8791240AF556}"/>
+                <a16:creationId xmlns:a16="http://schemas.microsoft.com/office/drawing/2014/main" id="{90DE0F54-9C6B-AC3F-EC31-6CE15B53D83C}"/>
               </a:ext>
             </a:extLst>
           </p:cNvPr>
@@ -29579,7 +29579,7 @@
           <p:cNvPr id="30" name="正方形/長方形 29">
             <a:extLst>
               <a:ext uri="{FF2B5EF4-FFF2-40B4-BE49-F238E27FC236}">
-                <a16:creationId xmlns:a16="http://schemas.microsoft.com/office/drawing/2014/main" id="{1355E163-6D90-E1D6-2684-ABCE0E4897B9}"/>
+                <a16:creationId xmlns:a16="http://schemas.microsoft.com/office/drawing/2014/main" id="{60DD4DBF-9C14-31F7-0D6F-1F4F2A7AA774}"/>
               </a:ext>
             </a:extLst>
           </p:cNvPr>
@@ -29647,7 +29647,7 @@
           <p:cNvPr id="31" name="テキスト ボックス 30">
             <a:extLst>
               <a:ext uri="{FF2B5EF4-FFF2-40B4-BE49-F238E27FC236}">
-                <a16:creationId xmlns:a16="http://schemas.microsoft.com/office/drawing/2014/main" id="{D8F1D3BD-D581-4B06-BB1B-A4864471F2BB}"/>
+                <a16:creationId xmlns:a16="http://schemas.microsoft.com/office/drawing/2014/main" id="{4715E730-062F-DCF9-73B9-56BD994E0809}"/>
               </a:ext>
             </a:extLst>
           </p:cNvPr>
@@ -29715,7 +29715,7 @@
           <p:cNvPr id="32" name="テキスト ボックス 31">
             <a:extLst>
               <a:ext uri="{FF2B5EF4-FFF2-40B4-BE49-F238E27FC236}">
-                <a16:creationId xmlns:a16="http://schemas.microsoft.com/office/drawing/2014/main" id="{D67FB81C-E16D-0AD9-A139-0ACCE7935760}"/>
+                <a16:creationId xmlns:a16="http://schemas.microsoft.com/office/drawing/2014/main" id="{A5296AB0-1E9B-F3B7-4307-5333365F2B8A}"/>
               </a:ext>
             </a:extLst>
           </p:cNvPr>
@@ -29756,7 +29756,7 @@
           <p:cNvPr id="33" name="正方形/長方形 32">
             <a:extLst>
               <a:ext uri="{FF2B5EF4-FFF2-40B4-BE49-F238E27FC236}">
-                <a16:creationId xmlns:a16="http://schemas.microsoft.com/office/drawing/2014/main" id="{7DC3B2EA-CACE-2D05-66DD-FA8E582D3B06}"/>
+                <a16:creationId xmlns:a16="http://schemas.microsoft.com/office/drawing/2014/main" id="{763A584A-4426-9D0B-3BFE-E27FCD0B13EC}"/>
               </a:ext>
             </a:extLst>
           </p:cNvPr>
@@ -29824,7 +29824,7 @@
           <p:cNvPr id="34" name="正方形/長方形 33">
             <a:extLst>
               <a:ext uri="{FF2B5EF4-FFF2-40B4-BE49-F238E27FC236}">
-                <a16:creationId xmlns:a16="http://schemas.microsoft.com/office/drawing/2014/main" id="{99ADB41E-A601-2836-BF9B-F11457498DB3}"/>
+                <a16:creationId xmlns:a16="http://schemas.microsoft.com/office/drawing/2014/main" id="{13E7C84F-CE53-79A6-2ABF-317E1DD7A1A5}"/>
               </a:ext>
             </a:extLst>
           </p:cNvPr>
@@ -29892,7 +29892,7 @@
           <p:cNvPr id="35" name="テキスト ボックス 34">
             <a:extLst>
               <a:ext uri="{FF2B5EF4-FFF2-40B4-BE49-F238E27FC236}">
-                <a16:creationId xmlns:a16="http://schemas.microsoft.com/office/drawing/2014/main" id="{55668197-7904-DA38-EE60-5B51BEA8CD04}"/>
+                <a16:creationId xmlns:a16="http://schemas.microsoft.com/office/drawing/2014/main" id="{C6505F01-7651-2501-45B9-25576D3F1532}"/>
               </a:ext>
             </a:extLst>
           </p:cNvPr>
@@ -29960,7 +29960,7 @@
           <p:cNvPr id="36" name="テキスト ボックス 35">
             <a:extLst>
               <a:ext uri="{FF2B5EF4-FFF2-40B4-BE49-F238E27FC236}">
-                <a16:creationId xmlns:a16="http://schemas.microsoft.com/office/drawing/2014/main" id="{30655427-8947-35D9-DFE0-C377C1821868}"/>
+                <a16:creationId xmlns:a16="http://schemas.microsoft.com/office/drawing/2014/main" id="{F3FB2017-3DA4-933D-7487-7351E92DF207}"/>
               </a:ext>
             </a:extLst>
           </p:cNvPr>
@@ -30011,7 +30011,7 @@
           <p:cNvPr id="37" name="テキスト ボックス 36">
             <a:extLst>
               <a:ext uri="{FF2B5EF4-FFF2-40B4-BE49-F238E27FC236}">
-                <a16:creationId xmlns:a16="http://schemas.microsoft.com/office/drawing/2014/main" id="{D6593BD4-6896-F9C7-AC11-D40D9AB32D6A}"/>
+                <a16:creationId xmlns:a16="http://schemas.microsoft.com/office/drawing/2014/main" id="{A29FA359-E43E-02CC-DA4B-9DB60585A6B3}"/>
               </a:ext>
             </a:extLst>
           </p:cNvPr>
@@ -30052,7 +30052,7 @@
           <p:cNvPr id="38" name="正方形/長方形 37">
             <a:extLst>
               <a:ext uri="{FF2B5EF4-FFF2-40B4-BE49-F238E27FC236}">
-                <a16:creationId xmlns:a16="http://schemas.microsoft.com/office/drawing/2014/main" id="{4B2493BB-0D9F-051A-F353-203002B53213}"/>
+                <a16:creationId xmlns:a16="http://schemas.microsoft.com/office/drawing/2014/main" id="{17513A40-C7E3-7C56-AEE3-9DE0C087E833}"/>
               </a:ext>
             </a:extLst>
           </p:cNvPr>
@@ -30120,7 +30120,7 @@
           <p:cNvPr id="39" name="正方形/長方形 38">
             <a:extLst>
               <a:ext uri="{FF2B5EF4-FFF2-40B4-BE49-F238E27FC236}">
-                <a16:creationId xmlns:a16="http://schemas.microsoft.com/office/drawing/2014/main" id="{2219DF0A-9780-01BE-72D4-9BFB7C4DD34A}"/>
+                <a16:creationId xmlns:a16="http://schemas.microsoft.com/office/drawing/2014/main" id="{F8670A72-F3CE-B665-AA67-07F7568E1632}"/>
               </a:ext>
             </a:extLst>
           </p:cNvPr>
@@ -30188,7 +30188,7 @@
           <p:cNvPr id="40" name="テキスト ボックス 39">
             <a:extLst>
               <a:ext uri="{FF2B5EF4-FFF2-40B4-BE49-F238E27FC236}">
-                <a16:creationId xmlns:a16="http://schemas.microsoft.com/office/drawing/2014/main" id="{E91DA2C1-47F5-2878-3BEF-DFF608440D5F}"/>
+                <a16:creationId xmlns:a16="http://schemas.microsoft.com/office/drawing/2014/main" id="{561A27B7-962A-D4AC-62B0-18B93C34E656}"/>
               </a:ext>
             </a:extLst>
           </p:cNvPr>
@@ -30256,7 +30256,7 @@
           <p:cNvPr id="41" name="テキスト ボックス 40">
             <a:extLst>
               <a:ext uri="{FF2B5EF4-FFF2-40B4-BE49-F238E27FC236}">
-                <a16:creationId xmlns:a16="http://schemas.microsoft.com/office/drawing/2014/main" id="{9664A1F6-532A-931A-1E6F-534CB6C30A35}"/>
+                <a16:creationId xmlns:a16="http://schemas.microsoft.com/office/drawing/2014/main" id="{D38EAB6B-455C-9A2F-D975-088000B3B045}"/>
               </a:ext>
             </a:extLst>
           </p:cNvPr>
@@ -30297,7 +30297,7 @@
           <p:cNvPr id="42" name="正方形/長方形 41">
             <a:extLst>
               <a:ext uri="{FF2B5EF4-FFF2-40B4-BE49-F238E27FC236}">
-                <a16:creationId xmlns:a16="http://schemas.microsoft.com/office/drawing/2014/main" id="{EE3BCBDA-CFC9-117B-A621-4BF56224287D}"/>
+                <a16:creationId xmlns:a16="http://schemas.microsoft.com/office/drawing/2014/main" id="{10E9C098-E00F-52A2-1173-2DF3BA760E2C}"/>
               </a:ext>
             </a:extLst>
           </p:cNvPr>
@@ -30365,7 +30365,7 @@
           <p:cNvPr id="43" name="正方形/長方形 42">
             <a:extLst>
               <a:ext uri="{FF2B5EF4-FFF2-40B4-BE49-F238E27FC236}">
-                <a16:creationId xmlns:a16="http://schemas.microsoft.com/office/drawing/2014/main" id="{27F57AA0-8152-B3BF-ED79-0FD8BFFF128C}"/>
+                <a16:creationId xmlns:a16="http://schemas.microsoft.com/office/drawing/2014/main" id="{CA4478E5-F345-4CA5-614C-0E2EA5D12501}"/>
               </a:ext>
             </a:extLst>
           </p:cNvPr>
@@ -30433,7 +30433,7 @@
           <p:cNvPr id="44" name="テキスト ボックス 43">
             <a:extLst>
               <a:ext uri="{FF2B5EF4-FFF2-40B4-BE49-F238E27FC236}">
-                <a16:creationId xmlns:a16="http://schemas.microsoft.com/office/drawing/2014/main" id="{194E94CC-7926-B037-E1B8-29E4FA0B60B1}"/>
+                <a16:creationId xmlns:a16="http://schemas.microsoft.com/office/drawing/2014/main" id="{4441CB47-F70D-B06D-7375-A49BB60987E0}"/>
               </a:ext>
             </a:extLst>
           </p:cNvPr>
@@ -30501,7 +30501,7 @@
           <p:cNvPr id="45" name="テキスト ボックス 44">
             <a:extLst>
               <a:ext uri="{FF2B5EF4-FFF2-40B4-BE49-F238E27FC236}">
-                <a16:creationId xmlns:a16="http://schemas.microsoft.com/office/drawing/2014/main" id="{B3E8F9D5-BE95-718B-D78C-A4123B6B610B}"/>
+                <a16:creationId xmlns:a16="http://schemas.microsoft.com/office/drawing/2014/main" id="{936B4558-BB8B-A847-6A15-42A0B5F961AD}"/>
               </a:ext>
             </a:extLst>
           </p:cNvPr>
@@ -30579,7 +30579,7 @@
           <p:cNvPr id="46" name="正方形/長方形 45">
             <a:extLst>
               <a:ext uri="{FF2B5EF4-FFF2-40B4-BE49-F238E27FC236}">
-                <a16:creationId xmlns:a16="http://schemas.microsoft.com/office/drawing/2014/main" id="{78DD77B0-3B30-A5BD-C4ED-251D88FDDB2B}"/>
+                <a16:creationId xmlns:a16="http://schemas.microsoft.com/office/drawing/2014/main" id="{98C7F2DB-D00B-97A7-2129-62C3A2F04584}"/>
               </a:ext>
             </a:extLst>
           </p:cNvPr>
@@ -30647,7 +30647,7 @@
           <p:cNvPr id="47" name="正方形/長方形 46">
             <a:extLst>
               <a:ext uri="{FF2B5EF4-FFF2-40B4-BE49-F238E27FC236}">
-                <a16:creationId xmlns:a16="http://schemas.microsoft.com/office/drawing/2014/main" id="{ACFCD0E2-A486-0FBD-5E74-0BBD4B2F98B2}"/>
+                <a16:creationId xmlns:a16="http://schemas.microsoft.com/office/drawing/2014/main" id="{2C6DA764-1996-B8DD-B971-3B0CC27766DF}"/>
               </a:ext>
             </a:extLst>
           </p:cNvPr>
@@ -30715,7 +30715,7 @@
           <p:cNvPr id="48" name="テキスト ボックス 47">
             <a:extLst>
               <a:ext uri="{FF2B5EF4-FFF2-40B4-BE49-F238E27FC236}">
-                <a16:creationId xmlns:a16="http://schemas.microsoft.com/office/drawing/2014/main" id="{3A274FD8-F6FE-63F4-4C97-88705FBF6AA6}"/>
+                <a16:creationId xmlns:a16="http://schemas.microsoft.com/office/drawing/2014/main" id="{D528FB35-535C-CD19-B6EF-5B41C61FCB8A}"/>
               </a:ext>
             </a:extLst>
           </p:cNvPr>
@@ -30783,7 +30783,7 @@
           <p:cNvPr id="49" name="テキスト ボックス 48">
             <a:extLst>
               <a:ext uri="{FF2B5EF4-FFF2-40B4-BE49-F238E27FC236}">
-                <a16:creationId xmlns:a16="http://schemas.microsoft.com/office/drawing/2014/main" id="{F09AE234-BC8B-7CF3-7685-C9B64C430D59}"/>
+                <a16:creationId xmlns:a16="http://schemas.microsoft.com/office/drawing/2014/main" id="{FC34AC5F-799C-E0E4-D0BB-EDF89DC4FC58}"/>
               </a:ext>
             </a:extLst>
           </p:cNvPr>
@@ -30834,7 +30834,7 @@
           <p:cNvPr id="50" name="テキスト ボックス 49">
             <a:extLst>
               <a:ext uri="{FF2B5EF4-FFF2-40B4-BE49-F238E27FC236}">
-                <a16:creationId xmlns:a16="http://schemas.microsoft.com/office/drawing/2014/main" id="{D210F7FF-3403-623E-1F0C-12995E97A1BA}"/>
+                <a16:creationId xmlns:a16="http://schemas.microsoft.com/office/drawing/2014/main" id="{80ED9843-E578-F786-B78B-48FBBD0DC45C}"/>
               </a:ext>
             </a:extLst>
           </p:cNvPr>
@@ -30875,7 +30875,7 @@
           <p:cNvPr id="51" name="正方形/長方形 50">
             <a:extLst>
               <a:ext uri="{FF2B5EF4-FFF2-40B4-BE49-F238E27FC236}">
-                <a16:creationId xmlns:a16="http://schemas.microsoft.com/office/drawing/2014/main" id="{1F81CB35-79CF-4EF0-DC8A-E5790504E5A3}"/>
+                <a16:creationId xmlns:a16="http://schemas.microsoft.com/office/drawing/2014/main" id="{91872C3D-71D8-67BA-0EC6-5C7D37892C35}"/>
               </a:ext>
             </a:extLst>
           </p:cNvPr>
@@ -30943,7 +30943,7 @@
           <p:cNvPr id="52" name="正方形/長方形 51">
             <a:extLst>
               <a:ext uri="{FF2B5EF4-FFF2-40B4-BE49-F238E27FC236}">
-                <a16:creationId xmlns:a16="http://schemas.microsoft.com/office/drawing/2014/main" id="{539EA0E6-C57C-43EE-4DBE-AE7CC601C715}"/>
+                <a16:creationId xmlns:a16="http://schemas.microsoft.com/office/drawing/2014/main" id="{2E49FB82-1FA2-554C-B469-5A5DB751291C}"/>
               </a:ext>
             </a:extLst>
           </p:cNvPr>
@@ -31011,7 +31011,7 @@
           <p:cNvPr id="53" name="テキスト ボックス 52">
             <a:extLst>
               <a:ext uri="{FF2B5EF4-FFF2-40B4-BE49-F238E27FC236}">
-                <a16:creationId xmlns:a16="http://schemas.microsoft.com/office/drawing/2014/main" id="{2C0A5CBA-76A4-936A-FB04-12516BC720FE}"/>
+                <a16:creationId xmlns:a16="http://schemas.microsoft.com/office/drawing/2014/main" id="{4A3F4DFC-C06C-6E67-3316-AC4B7C7E5537}"/>
               </a:ext>
             </a:extLst>
           </p:cNvPr>
@@ -31079,7 +31079,7 @@
           <p:cNvPr id="54" name="テキスト ボックス 53">
             <a:extLst>
               <a:ext uri="{FF2B5EF4-FFF2-40B4-BE49-F238E27FC236}">
-                <a16:creationId xmlns:a16="http://schemas.microsoft.com/office/drawing/2014/main" id="{CDDE8287-65E1-4CBE-7185-22F6C553A771}"/>
+                <a16:creationId xmlns:a16="http://schemas.microsoft.com/office/drawing/2014/main" id="{7A710B5D-B1D5-40F0-66D5-9C759780E868}"/>
               </a:ext>
             </a:extLst>
           </p:cNvPr>
@@ -31120,7 +31120,7 @@
           <p:cNvPr id="55" name="正方形/長方形 54">
             <a:extLst>
               <a:ext uri="{FF2B5EF4-FFF2-40B4-BE49-F238E27FC236}">
-                <a16:creationId xmlns:a16="http://schemas.microsoft.com/office/drawing/2014/main" id="{85A02950-6B06-FCEF-2127-2F8B56C8340A}"/>
+                <a16:creationId xmlns:a16="http://schemas.microsoft.com/office/drawing/2014/main" id="{F5D32958-4C54-9FFF-6221-B371165D4AF3}"/>
               </a:ext>
             </a:extLst>
           </p:cNvPr>
@@ -31188,7 +31188,7 @@
           <p:cNvPr id="56" name="正方形/長方形 55">
             <a:extLst>
               <a:ext uri="{FF2B5EF4-FFF2-40B4-BE49-F238E27FC236}">
-                <a16:creationId xmlns:a16="http://schemas.microsoft.com/office/drawing/2014/main" id="{A10CA606-178E-058D-B93C-93C4E125383C}"/>
+                <a16:creationId xmlns:a16="http://schemas.microsoft.com/office/drawing/2014/main" id="{82571C09-4993-2484-E95E-F6A95B19A55E}"/>
               </a:ext>
             </a:extLst>
           </p:cNvPr>
@@ -31256,7 +31256,7 @@
           <p:cNvPr id="57" name="テキスト ボックス 56">
             <a:extLst>
               <a:ext uri="{FF2B5EF4-FFF2-40B4-BE49-F238E27FC236}">
-                <a16:creationId xmlns:a16="http://schemas.microsoft.com/office/drawing/2014/main" id="{EAC597CF-8A5C-7C00-EC59-53F115618BB5}"/>
+                <a16:creationId xmlns:a16="http://schemas.microsoft.com/office/drawing/2014/main" id="{9B3DD1B8-F215-CB74-A83A-CB4C4A40076E}"/>
               </a:ext>
             </a:extLst>
           </p:cNvPr>
@@ -31324,7 +31324,7 @@
           <p:cNvPr id="58" name="正方形/長方形 57">
             <a:extLst>
               <a:ext uri="{FF2B5EF4-FFF2-40B4-BE49-F238E27FC236}">
-                <a16:creationId xmlns:a16="http://schemas.microsoft.com/office/drawing/2014/main" id="{B342E8D7-D419-A338-B6DB-3B963B217086}"/>
+                <a16:creationId xmlns:a16="http://schemas.microsoft.com/office/drawing/2014/main" id="{5074669A-FFC5-998B-5C51-1FF38C882845}"/>
               </a:ext>
             </a:extLst>
           </p:cNvPr>
@@ -31378,7 +31378,7 @@
           <p:cNvPr id="59" name="正方形/長方形 58">
             <a:extLst>
               <a:ext uri="{FF2B5EF4-FFF2-40B4-BE49-F238E27FC236}">
-                <a16:creationId xmlns:a16="http://schemas.microsoft.com/office/drawing/2014/main" id="{7B27515B-C774-6FD7-37CA-7F2BB1B9E2E2}"/>
+                <a16:creationId xmlns:a16="http://schemas.microsoft.com/office/drawing/2014/main" id="{26EA96B0-27EF-ACD1-9D1D-84DCF9CDE65B}"/>
               </a:ext>
             </a:extLst>
           </p:cNvPr>
@@ -31446,7 +31446,7 @@
           <p:cNvPr id="60" name="テキスト ボックス 59">
             <a:extLst>
               <a:ext uri="{FF2B5EF4-FFF2-40B4-BE49-F238E27FC236}">
-                <a16:creationId xmlns:a16="http://schemas.microsoft.com/office/drawing/2014/main" id="{D2BAEFEA-3F05-C7CD-8943-E11BC41DD098}"/>
+                <a16:creationId xmlns:a16="http://schemas.microsoft.com/office/drawing/2014/main" id="{1B88F2D0-BA75-9AF5-27E3-8591E1C341B3}"/>
               </a:ext>
             </a:extLst>
           </p:cNvPr>
@@ -31537,7 +31537,7 @@
           <p:cNvPr id="61" name="正方形/長方形 60">
             <a:extLst>
               <a:ext uri="{FF2B5EF4-FFF2-40B4-BE49-F238E27FC236}">
-                <a16:creationId xmlns:a16="http://schemas.microsoft.com/office/drawing/2014/main" id="{96EAE927-35DF-64EC-EB16-4B7320526BAF}"/>
+                <a16:creationId xmlns:a16="http://schemas.microsoft.com/office/drawing/2014/main" id="{E158C593-DABA-5DC7-1AAA-0F5AF0B1E05B}"/>
               </a:ext>
             </a:extLst>
           </p:cNvPr>
@@ -31605,7 +31605,7 @@
           <p:cNvPr id="62" name="テキスト ボックス 61">
             <a:extLst>
               <a:ext uri="{FF2B5EF4-FFF2-40B4-BE49-F238E27FC236}">
-                <a16:creationId xmlns:a16="http://schemas.microsoft.com/office/drawing/2014/main" id="{531ECED3-75BA-3007-EFCD-70DC217CCD5A}"/>
+                <a16:creationId xmlns:a16="http://schemas.microsoft.com/office/drawing/2014/main" id="{0A2293D1-1B14-71E2-2D1F-A002C4BB091E}"/>
               </a:ext>
             </a:extLst>
           </p:cNvPr>
@@ -32321,7 +32321,7 @@
     </p:spTree>
     <p:extLst>
       <p:ext uri="{BB962C8B-B14F-4D97-AF65-F5344CB8AC3E}">
-        <p14:creationId xmlns:p14="http://schemas.microsoft.com/office/powerpoint/2010/main" val="3635929860"/>
+        <p14:creationId xmlns:p14="http://schemas.microsoft.com/office/powerpoint/2010/main" val="3655489234"/>
       </p:ext>
     </p:extLst>
   </p:cSld>
@@ -32353,7 +32353,7 @@
           <p:cNvPr id="2" name="正方形/長方形 1">
             <a:extLst>
               <a:ext uri="{FF2B5EF4-FFF2-40B4-BE49-F238E27FC236}">
-                <a16:creationId xmlns:a16="http://schemas.microsoft.com/office/drawing/2014/main" id="{EDD869E5-49E2-4C93-7286-38096B898FAD}"/>
+                <a16:creationId xmlns:a16="http://schemas.microsoft.com/office/drawing/2014/main" id="{37381A31-0C94-06FC-DAAF-D898C4948841}"/>
               </a:ext>
             </a:extLst>
           </p:cNvPr>
@@ -32421,7 +32421,7 @@
           <p:cNvPr id="3" name="正方形/長方形 2">
             <a:extLst>
               <a:ext uri="{FF2B5EF4-FFF2-40B4-BE49-F238E27FC236}">
-                <a16:creationId xmlns:a16="http://schemas.microsoft.com/office/drawing/2014/main" id="{B2B58874-ADED-C863-6CD0-122B2600142E}"/>
+                <a16:creationId xmlns:a16="http://schemas.microsoft.com/office/drawing/2014/main" id="{41F1452F-06CE-EDC4-360B-2EFDA589C929}"/>
               </a:ext>
             </a:extLst>
           </p:cNvPr>
@@ -32489,7 +32489,7 @@
           <p:cNvPr id="4" name="正方形/長方形 3">
             <a:extLst>
               <a:ext uri="{FF2B5EF4-FFF2-40B4-BE49-F238E27FC236}">
-                <a16:creationId xmlns:a16="http://schemas.microsoft.com/office/drawing/2014/main" id="{A860F1C2-155F-612A-F512-0200D5DE8507}"/>
+                <a16:creationId xmlns:a16="http://schemas.microsoft.com/office/drawing/2014/main" id="{C2A8E1A6-B563-0238-A4DE-E66DA734A7D3}"/>
               </a:ext>
             </a:extLst>
           </p:cNvPr>
@@ -32557,7 +32557,7 @@
           <p:cNvPr id="5" name="テキスト ボックス 4">
             <a:extLst>
               <a:ext uri="{FF2B5EF4-FFF2-40B4-BE49-F238E27FC236}">
-                <a16:creationId xmlns:a16="http://schemas.microsoft.com/office/drawing/2014/main" id="{082847B8-884B-9BF9-EA39-AAC71E6563C3}"/>
+                <a16:creationId xmlns:a16="http://schemas.microsoft.com/office/drawing/2014/main" id="{934C22AB-DBC5-6BC2-7F90-468F0C6CF6ED}"/>
               </a:ext>
             </a:extLst>
           </p:cNvPr>
@@ -32626,7 +32626,7 @@
           <p:cNvPr id="6" name="テキスト ボックス 5">
             <a:extLst>
               <a:ext uri="{FF2B5EF4-FFF2-40B4-BE49-F238E27FC236}">
-                <a16:creationId xmlns:a16="http://schemas.microsoft.com/office/drawing/2014/main" id="{E9E1274C-CB48-8565-0D23-90C276FD98DF}"/>
+                <a16:creationId xmlns:a16="http://schemas.microsoft.com/office/drawing/2014/main" id="{04FDA012-3376-A92D-5020-794255BE109B}"/>
               </a:ext>
             </a:extLst>
           </p:cNvPr>
@@ -32635,8 +32635,8 @@
         </p:nvSpPr>
         <p:spPr>
           <a:xfrm>
-            <a:off x="2336800" y="139700"/>
-            <a:ext cx="8382000" cy="718145"/>
+            <a:off x="2311400" y="165100"/>
+            <a:ext cx="8585200" cy="379591"/>
           </a:xfrm>
           <a:prstGeom prst="rect">
             <a:avLst/>
@@ -32650,7 +32650,7 @@
           <a:lstStyle/>
           <a:p>
             <a:r>
-              <a:rPr kumimoji="1" lang="ja-JP" altLang="en-US" sz="2000" b="1">
+              <a:rPr kumimoji="1" lang="ja-JP" altLang="en-US" b="1">
                 <a:solidFill>
                   <a:srgbClr val="FFFFFF"/>
                 </a:solidFill>
@@ -32660,7 +32660,7 @@
               <a:t>来場者アンケート結果③：</a:t>
             </a:r>
             <a:r>
-              <a:rPr kumimoji="1" lang="en-US" altLang="ja-JP" sz="2000" b="1">
+              <a:rPr kumimoji="1" lang="en-US" altLang="ja-JP" b="1">
                 <a:solidFill>
                   <a:srgbClr val="FFFFFF"/>
                 </a:solidFill>
@@ -32670,7 +32670,7 @@
               <a:t>Q4</a:t>
             </a:r>
             <a:r>
-              <a:rPr kumimoji="1" lang="ja-JP" altLang="en-US" sz="2000" b="1">
+              <a:rPr kumimoji="1" lang="ja-JP" altLang="en-US" b="1">
                 <a:solidFill>
                   <a:srgbClr val="FFFFFF"/>
                 </a:solidFill>
@@ -32680,7 +32680,7 @@
               <a:t>（健康課題のチェック）・</a:t>
             </a:r>
             <a:r>
-              <a:rPr kumimoji="1" lang="en-US" altLang="ja-JP" sz="2000" b="1">
+              <a:rPr kumimoji="1" lang="en-US" altLang="ja-JP" b="1">
                 <a:solidFill>
                   <a:srgbClr val="FFFFFF"/>
                 </a:solidFill>
@@ -32690,7 +32690,7 @@
               <a:t>Q5</a:t>
             </a:r>
             <a:r>
-              <a:rPr kumimoji="1" lang="ja-JP" altLang="en-US" sz="2000" b="1">
+              <a:rPr kumimoji="1" lang="ja-JP" altLang="en-US" b="1">
                 <a:solidFill>
                   <a:srgbClr val="FFFFFF"/>
                 </a:solidFill>
@@ -32707,7 +32707,7 @@
           <p:cNvPr id="7" name="テキスト ボックス 6">
             <a:extLst>
               <a:ext uri="{FF2B5EF4-FFF2-40B4-BE49-F238E27FC236}">
-                <a16:creationId xmlns:a16="http://schemas.microsoft.com/office/drawing/2014/main" id="{EB79A982-60E2-19C1-8388-598D2DA186F2}"/>
+                <a16:creationId xmlns:a16="http://schemas.microsoft.com/office/drawing/2014/main" id="{28EFF02B-AE36-E710-BFF0-F1145F42DA25}"/>
               </a:ext>
             </a:extLst>
           </p:cNvPr>
@@ -32716,8 +32716,8 @@
         </p:nvSpPr>
         <p:spPr>
           <a:xfrm>
-            <a:off x="10668000" y="203200"/>
-            <a:ext cx="1219200" cy="302647"/>
+            <a:off x="10896600" y="203200"/>
+            <a:ext cx="990600" cy="302647"/>
           </a:xfrm>
           <a:prstGeom prst="rect">
             <a:avLst/>
@@ -32756,7 +32756,7 @@
           <p:cNvPr id="8" name="正方形/長方形 7">
             <a:extLst>
               <a:ext uri="{FF2B5EF4-FFF2-40B4-BE49-F238E27FC236}">
-                <a16:creationId xmlns:a16="http://schemas.microsoft.com/office/drawing/2014/main" id="{2A6880BB-1CCC-3199-47B7-856E44C6716B}"/>
+                <a16:creationId xmlns:a16="http://schemas.microsoft.com/office/drawing/2014/main" id="{85591B81-AD36-E52E-FBF6-29E096981315}"/>
               </a:ext>
             </a:extLst>
           </p:cNvPr>
@@ -32810,7 +32810,7 @@
           <p:cNvPr id="9" name="正方形/長方形 8">
             <a:extLst>
               <a:ext uri="{FF2B5EF4-FFF2-40B4-BE49-F238E27FC236}">
-                <a16:creationId xmlns:a16="http://schemas.microsoft.com/office/drawing/2014/main" id="{E6A98435-C8F9-194F-9679-D164144345C7}"/>
+                <a16:creationId xmlns:a16="http://schemas.microsoft.com/office/drawing/2014/main" id="{89919234-5B85-28AB-4E11-5AA095E91FF3}"/>
               </a:ext>
             </a:extLst>
           </p:cNvPr>
@@ -32878,7 +32878,7 @@
           <p:cNvPr id="10" name="テキスト ボックス 9">
             <a:extLst>
               <a:ext uri="{FF2B5EF4-FFF2-40B4-BE49-F238E27FC236}">
-                <a16:creationId xmlns:a16="http://schemas.microsoft.com/office/drawing/2014/main" id="{1068C719-6D56-CA9D-6AC1-A4FC051E5077}"/>
+                <a16:creationId xmlns:a16="http://schemas.microsoft.com/office/drawing/2014/main" id="{3D053728-E840-6971-94D5-2DF9D52D2C5B}"/>
               </a:ext>
             </a:extLst>
           </p:cNvPr>
@@ -33019,7 +33019,7 @@
           <p:cNvPr id="11" name="正方形/長方形 10">
             <a:extLst>
               <a:ext uri="{FF2B5EF4-FFF2-40B4-BE49-F238E27FC236}">
-                <a16:creationId xmlns:a16="http://schemas.microsoft.com/office/drawing/2014/main" id="{B4AAAA12-D5E8-92EE-B57F-35B2DEFC48D1}"/>
+                <a16:creationId xmlns:a16="http://schemas.microsoft.com/office/drawing/2014/main" id="{E4114FCE-E572-4C00-CBAB-A0BB540D0127}"/>
               </a:ext>
             </a:extLst>
           </p:cNvPr>
@@ -33073,7 +33073,7 @@
           <p:cNvPr id="12" name="正方形/長方形 11">
             <a:extLst>
               <a:ext uri="{FF2B5EF4-FFF2-40B4-BE49-F238E27FC236}">
-                <a16:creationId xmlns:a16="http://schemas.microsoft.com/office/drawing/2014/main" id="{17BB5137-0101-BFB1-DCC8-D7348F0DB428}"/>
+                <a16:creationId xmlns:a16="http://schemas.microsoft.com/office/drawing/2014/main" id="{1C26E8CE-DB62-3249-11D4-B8B328C38F66}"/>
               </a:ext>
             </a:extLst>
           </p:cNvPr>
@@ -33141,7 +33141,7 @@
           <p:cNvPr id="13" name="テキスト ボックス 12">
             <a:extLst>
               <a:ext uri="{FF2B5EF4-FFF2-40B4-BE49-F238E27FC236}">
-                <a16:creationId xmlns:a16="http://schemas.microsoft.com/office/drawing/2014/main" id="{523BEE04-F0C8-A000-2F94-13B555D615DD}"/>
+                <a16:creationId xmlns:a16="http://schemas.microsoft.com/office/drawing/2014/main" id="{0AC3DD10-DBF7-CD01-200B-3F10A853C973}"/>
               </a:ext>
             </a:extLst>
           </p:cNvPr>
@@ -33212,7 +33212,7 @@
           <p:cNvPr id="14" name="正方形/長方形 13">
             <a:extLst>
               <a:ext uri="{FF2B5EF4-FFF2-40B4-BE49-F238E27FC236}">
-                <a16:creationId xmlns:a16="http://schemas.microsoft.com/office/drawing/2014/main" id="{EF151CAB-EBB3-D3E3-DEAA-A5A3A250A067}"/>
+                <a16:creationId xmlns:a16="http://schemas.microsoft.com/office/drawing/2014/main" id="{00CDE71C-8128-5479-9AA1-9601AA50010B}"/>
               </a:ext>
             </a:extLst>
           </p:cNvPr>
@@ -33280,7 +33280,7 @@
           <p:cNvPr id="15" name="テキスト ボックス 14">
             <a:extLst>
               <a:ext uri="{FF2B5EF4-FFF2-40B4-BE49-F238E27FC236}">
-                <a16:creationId xmlns:a16="http://schemas.microsoft.com/office/drawing/2014/main" id="{73690AE2-A4B5-CF7C-330C-31E527876BAE}"/>
+                <a16:creationId xmlns:a16="http://schemas.microsoft.com/office/drawing/2014/main" id="{374661DB-3085-23B0-644D-E11993787956}"/>
               </a:ext>
             </a:extLst>
           </p:cNvPr>
@@ -33321,7 +33321,7 @@
           <p:cNvPr id="16" name="正方形/長方形 15">
             <a:extLst>
               <a:ext uri="{FF2B5EF4-FFF2-40B4-BE49-F238E27FC236}">
-                <a16:creationId xmlns:a16="http://schemas.microsoft.com/office/drawing/2014/main" id="{E54C7F91-8855-78FA-E6E2-0DCD8A85FD20}"/>
+                <a16:creationId xmlns:a16="http://schemas.microsoft.com/office/drawing/2014/main" id="{7FCAE4FA-45B1-61F4-5E0E-AE143A67C8EA}"/>
               </a:ext>
             </a:extLst>
           </p:cNvPr>
@@ -33389,7 +33389,7 @@
           <p:cNvPr id="17" name="正方形/長方形 16">
             <a:extLst>
               <a:ext uri="{FF2B5EF4-FFF2-40B4-BE49-F238E27FC236}">
-                <a16:creationId xmlns:a16="http://schemas.microsoft.com/office/drawing/2014/main" id="{B453D163-70C3-D7DB-F512-CFCC4D411E23}"/>
+                <a16:creationId xmlns:a16="http://schemas.microsoft.com/office/drawing/2014/main" id="{79CD5F0D-FF38-8458-585A-7023D1D523C2}"/>
               </a:ext>
             </a:extLst>
           </p:cNvPr>
@@ -33457,7 +33457,7 @@
           <p:cNvPr id="18" name="テキスト ボックス 17">
             <a:extLst>
               <a:ext uri="{FF2B5EF4-FFF2-40B4-BE49-F238E27FC236}">
-                <a16:creationId xmlns:a16="http://schemas.microsoft.com/office/drawing/2014/main" id="{82F20439-A9F9-2B4A-61E4-B880C64AABFF}"/>
+                <a16:creationId xmlns:a16="http://schemas.microsoft.com/office/drawing/2014/main" id="{612013C4-4811-2F04-8D5E-E9975D10F64B}"/>
               </a:ext>
             </a:extLst>
           </p:cNvPr>
@@ -33525,7 +33525,7 @@
           <p:cNvPr id="19" name="テキスト ボックス 18">
             <a:extLst>
               <a:ext uri="{FF2B5EF4-FFF2-40B4-BE49-F238E27FC236}">
-                <a16:creationId xmlns:a16="http://schemas.microsoft.com/office/drawing/2014/main" id="{2D239F67-63F8-48A4-E4C4-ACA6209C0109}"/>
+                <a16:creationId xmlns:a16="http://schemas.microsoft.com/office/drawing/2014/main" id="{BC633B2F-078D-95C9-B96A-CF76510A2886}"/>
               </a:ext>
             </a:extLst>
           </p:cNvPr>
@@ -33566,7 +33566,7 @@
           <p:cNvPr id="20" name="正方形/長方形 19">
             <a:extLst>
               <a:ext uri="{FF2B5EF4-FFF2-40B4-BE49-F238E27FC236}">
-                <a16:creationId xmlns:a16="http://schemas.microsoft.com/office/drawing/2014/main" id="{7BA7FFA8-5282-4F90-9227-50CF82B9A4D7}"/>
+                <a16:creationId xmlns:a16="http://schemas.microsoft.com/office/drawing/2014/main" id="{305D93FD-2C02-7A84-99DB-6D58BA96B8F0}"/>
               </a:ext>
             </a:extLst>
           </p:cNvPr>
@@ -33634,7 +33634,7 @@
           <p:cNvPr id="21" name="正方形/長方形 20">
             <a:extLst>
               <a:ext uri="{FF2B5EF4-FFF2-40B4-BE49-F238E27FC236}">
-                <a16:creationId xmlns:a16="http://schemas.microsoft.com/office/drawing/2014/main" id="{3AE4D539-9FD3-5A42-0EEC-CA99CF5AD5F1}"/>
+                <a16:creationId xmlns:a16="http://schemas.microsoft.com/office/drawing/2014/main" id="{BDE8169C-0554-C511-7EFB-4A160B30BBBF}"/>
               </a:ext>
             </a:extLst>
           </p:cNvPr>
@@ -33702,7 +33702,7 @@
           <p:cNvPr id="22" name="テキスト ボックス 21">
             <a:extLst>
               <a:ext uri="{FF2B5EF4-FFF2-40B4-BE49-F238E27FC236}">
-                <a16:creationId xmlns:a16="http://schemas.microsoft.com/office/drawing/2014/main" id="{6215CCDD-BB58-9DD0-04E5-76B369C7CB2A}"/>
+                <a16:creationId xmlns:a16="http://schemas.microsoft.com/office/drawing/2014/main" id="{3038A73D-C27E-DBF9-A75C-0A9FDD965AE2}"/>
               </a:ext>
             </a:extLst>
           </p:cNvPr>
@@ -33770,7 +33770,7 @@
           <p:cNvPr id="23" name="テキスト ボックス 22">
             <a:extLst>
               <a:ext uri="{FF2B5EF4-FFF2-40B4-BE49-F238E27FC236}">
-                <a16:creationId xmlns:a16="http://schemas.microsoft.com/office/drawing/2014/main" id="{CDA106F2-6223-3386-CF86-585D531C0189}"/>
+                <a16:creationId xmlns:a16="http://schemas.microsoft.com/office/drawing/2014/main" id="{45191DF5-1D6B-DDEA-C0F2-1A143B3832F1}"/>
               </a:ext>
             </a:extLst>
           </p:cNvPr>
@@ -33811,7 +33811,7 @@
           <p:cNvPr id="24" name="正方形/長方形 23">
             <a:extLst>
               <a:ext uri="{FF2B5EF4-FFF2-40B4-BE49-F238E27FC236}">
-                <a16:creationId xmlns:a16="http://schemas.microsoft.com/office/drawing/2014/main" id="{AE296716-1817-3CD0-8AF6-52ECB4DB07C8}"/>
+                <a16:creationId xmlns:a16="http://schemas.microsoft.com/office/drawing/2014/main" id="{5BB0167E-B58B-6151-CB9A-A7954174AC28}"/>
               </a:ext>
             </a:extLst>
           </p:cNvPr>
@@ -33879,7 +33879,7 @@
           <p:cNvPr id="25" name="正方形/長方形 24">
             <a:extLst>
               <a:ext uri="{FF2B5EF4-FFF2-40B4-BE49-F238E27FC236}">
-                <a16:creationId xmlns:a16="http://schemas.microsoft.com/office/drawing/2014/main" id="{FF428D73-1C96-0D42-223C-49ED84196213}"/>
+                <a16:creationId xmlns:a16="http://schemas.microsoft.com/office/drawing/2014/main" id="{D928CA44-BB0F-A8D6-3712-BC8C03BDB57D}"/>
               </a:ext>
             </a:extLst>
           </p:cNvPr>
@@ -33947,7 +33947,7 @@
           <p:cNvPr id="26" name="テキスト ボックス 25">
             <a:extLst>
               <a:ext uri="{FF2B5EF4-FFF2-40B4-BE49-F238E27FC236}">
-                <a16:creationId xmlns:a16="http://schemas.microsoft.com/office/drawing/2014/main" id="{1CD094B3-A092-E50E-23FA-622EEAE547EA}"/>
+                <a16:creationId xmlns:a16="http://schemas.microsoft.com/office/drawing/2014/main" id="{EBEC5BA6-6F66-2511-60F9-E2ABA5998CFF}"/>
               </a:ext>
             </a:extLst>
           </p:cNvPr>
@@ -34015,7 +34015,7 @@
           <p:cNvPr id="27" name="テキスト ボックス 26">
             <a:extLst>
               <a:ext uri="{FF2B5EF4-FFF2-40B4-BE49-F238E27FC236}">
-                <a16:creationId xmlns:a16="http://schemas.microsoft.com/office/drawing/2014/main" id="{83037DC2-3932-35D1-74E1-0794141714D2}"/>
+                <a16:creationId xmlns:a16="http://schemas.microsoft.com/office/drawing/2014/main" id="{C69DD46E-71C0-A734-58C3-6E630BBCFE21}"/>
               </a:ext>
             </a:extLst>
           </p:cNvPr>
@@ -34056,7 +34056,7 @@
           <p:cNvPr id="28" name="正方形/長方形 27">
             <a:extLst>
               <a:ext uri="{FF2B5EF4-FFF2-40B4-BE49-F238E27FC236}">
-                <a16:creationId xmlns:a16="http://schemas.microsoft.com/office/drawing/2014/main" id="{97F6F5DA-107A-7ED6-6E49-5A0F40512A53}"/>
+                <a16:creationId xmlns:a16="http://schemas.microsoft.com/office/drawing/2014/main" id="{9C2BC4FE-63CF-E07A-E182-82385A62F9E3}"/>
               </a:ext>
             </a:extLst>
           </p:cNvPr>
@@ -34124,7 +34124,7 @@
           <p:cNvPr id="29" name="正方形/長方形 28">
             <a:extLst>
               <a:ext uri="{FF2B5EF4-FFF2-40B4-BE49-F238E27FC236}">
-                <a16:creationId xmlns:a16="http://schemas.microsoft.com/office/drawing/2014/main" id="{5E77FF7A-3CD5-F0D3-A98B-22D6EE76C861}"/>
+                <a16:creationId xmlns:a16="http://schemas.microsoft.com/office/drawing/2014/main" id="{AA428C23-D6E3-CC42-DF41-D3966B23B8C2}"/>
               </a:ext>
             </a:extLst>
           </p:cNvPr>
@@ -34192,7 +34192,7 @@
           <p:cNvPr id="30" name="テキスト ボックス 29">
             <a:extLst>
               <a:ext uri="{FF2B5EF4-FFF2-40B4-BE49-F238E27FC236}">
-                <a16:creationId xmlns:a16="http://schemas.microsoft.com/office/drawing/2014/main" id="{17F3488B-A980-B176-569E-6A42E5D95DC2}"/>
+                <a16:creationId xmlns:a16="http://schemas.microsoft.com/office/drawing/2014/main" id="{1B443AEF-B4F6-5E68-5CAC-6D3E504162BD}"/>
               </a:ext>
             </a:extLst>
           </p:cNvPr>
@@ -34260,7 +34260,7 @@
           <p:cNvPr id="31" name="テキスト ボックス 30">
             <a:extLst>
               <a:ext uri="{FF2B5EF4-FFF2-40B4-BE49-F238E27FC236}">
-                <a16:creationId xmlns:a16="http://schemas.microsoft.com/office/drawing/2014/main" id="{D9F093E7-3DE9-8885-34FD-178EF7D60F79}"/>
+                <a16:creationId xmlns:a16="http://schemas.microsoft.com/office/drawing/2014/main" id="{AB5B5B6C-C771-4F00-91F4-13A3DD8B2549}"/>
               </a:ext>
             </a:extLst>
           </p:cNvPr>
@@ -34301,7 +34301,7 @@
           <p:cNvPr id="32" name="正方形/長方形 31">
             <a:extLst>
               <a:ext uri="{FF2B5EF4-FFF2-40B4-BE49-F238E27FC236}">
-                <a16:creationId xmlns:a16="http://schemas.microsoft.com/office/drawing/2014/main" id="{254E3D2A-5037-9C63-4537-D58855E07FB7}"/>
+                <a16:creationId xmlns:a16="http://schemas.microsoft.com/office/drawing/2014/main" id="{6B0B270B-EA51-530A-610E-AB1C1586D720}"/>
               </a:ext>
             </a:extLst>
           </p:cNvPr>
@@ -34369,7 +34369,7 @@
           <p:cNvPr id="33" name="正方形/長方形 32">
             <a:extLst>
               <a:ext uri="{FF2B5EF4-FFF2-40B4-BE49-F238E27FC236}">
-                <a16:creationId xmlns:a16="http://schemas.microsoft.com/office/drawing/2014/main" id="{E0CD71ED-F854-E2E6-D328-EE2E960F96CC}"/>
+                <a16:creationId xmlns:a16="http://schemas.microsoft.com/office/drawing/2014/main" id="{8559223A-8A0D-D123-ECD0-67D1A36B2A18}"/>
               </a:ext>
             </a:extLst>
           </p:cNvPr>
@@ -34437,7 +34437,7 @@
           <p:cNvPr id="34" name="テキスト ボックス 33">
             <a:extLst>
               <a:ext uri="{FF2B5EF4-FFF2-40B4-BE49-F238E27FC236}">
-                <a16:creationId xmlns:a16="http://schemas.microsoft.com/office/drawing/2014/main" id="{C8DE71C2-EC47-6C42-3623-B1907D058373}"/>
+                <a16:creationId xmlns:a16="http://schemas.microsoft.com/office/drawing/2014/main" id="{C2AF3996-31CE-DCB6-5506-D0F70A3E652E}"/>
               </a:ext>
             </a:extLst>
           </p:cNvPr>
@@ -34505,7 +34505,7 @@
           <p:cNvPr id="35" name="テキスト ボックス 34">
             <a:extLst>
               <a:ext uri="{FF2B5EF4-FFF2-40B4-BE49-F238E27FC236}">
-                <a16:creationId xmlns:a16="http://schemas.microsoft.com/office/drawing/2014/main" id="{ED502435-1918-63B9-17D5-6ED988D4E26F}"/>
+                <a16:creationId xmlns:a16="http://schemas.microsoft.com/office/drawing/2014/main" id="{41930FA0-1DE1-4681-CF4C-B62117DA3676}"/>
               </a:ext>
             </a:extLst>
           </p:cNvPr>
@@ -34546,7 +34546,7 @@
           <p:cNvPr id="36" name="正方形/長方形 35">
             <a:extLst>
               <a:ext uri="{FF2B5EF4-FFF2-40B4-BE49-F238E27FC236}">
-                <a16:creationId xmlns:a16="http://schemas.microsoft.com/office/drawing/2014/main" id="{07A6FDDA-E0D6-AD3C-CEDB-DA8E49FCFB0A}"/>
+                <a16:creationId xmlns:a16="http://schemas.microsoft.com/office/drawing/2014/main" id="{9BACF574-09AC-F4EB-5F54-AF40176FB08E}"/>
               </a:ext>
             </a:extLst>
           </p:cNvPr>
@@ -34614,7 +34614,7 @@
           <p:cNvPr id="37" name="正方形/長方形 36">
             <a:extLst>
               <a:ext uri="{FF2B5EF4-FFF2-40B4-BE49-F238E27FC236}">
-                <a16:creationId xmlns:a16="http://schemas.microsoft.com/office/drawing/2014/main" id="{37626BD2-5D52-4FB3-CC6D-E31DFD440ADE}"/>
+                <a16:creationId xmlns:a16="http://schemas.microsoft.com/office/drawing/2014/main" id="{D4774EE5-BAC8-7EDA-0067-F9FB504C369C}"/>
               </a:ext>
             </a:extLst>
           </p:cNvPr>
@@ -34682,7 +34682,7 @@
           <p:cNvPr id="38" name="テキスト ボックス 37">
             <a:extLst>
               <a:ext uri="{FF2B5EF4-FFF2-40B4-BE49-F238E27FC236}">
-                <a16:creationId xmlns:a16="http://schemas.microsoft.com/office/drawing/2014/main" id="{E1E4EB11-4A5A-EBA9-9564-1368C5AAF5F6}"/>
+                <a16:creationId xmlns:a16="http://schemas.microsoft.com/office/drawing/2014/main" id="{02393C6D-FA2E-63D7-A4B4-70C1AD4749EF}"/>
               </a:ext>
             </a:extLst>
           </p:cNvPr>
@@ -34750,7 +34750,7 @@
           <p:cNvPr id="39" name="テキスト ボックス 38">
             <a:extLst>
               <a:ext uri="{FF2B5EF4-FFF2-40B4-BE49-F238E27FC236}">
-                <a16:creationId xmlns:a16="http://schemas.microsoft.com/office/drawing/2014/main" id="{6635665E-93B8-CBCB-DBC6-410385D2392D}"/>
+                <a16:creationId xmlns:a16="http://schemas.microsoft.com/office/drawing/2014/main" id="{731C855B-9112-DDE3-94E4-311E796BE612}"/>
               </a:ext>
             </a:extLst>
           </p:cNvPr>
@@ -34791,7 +34791,7 @@
           <p:cNvPr id="40" name="正方形/長方形 39">
             <a:extLst>
               <a:ext uri="{FF2B5EF4-FFF2-40B4-BE49-F238E27FC236}">
-                <a16:creationId xmlns:a16="http://schemas.microsoft.com/office/drawing/2014/main" id="{94B34873-973A-2A2E-D8AE-EC1F162001DD}"/>
+                <a16:creationId xmlns:a16="http://schemas.microsoft.com/office/drawing/2014/main" id="{AC888B8D-D7E4-E2E5-33C7-1CA2CF6F7B94}"/>
               </a:ext>
             </a:extLst>
           </p:cNvPr>
@@ -34859,7 +34859,7 @@
           <p:cNvPr id="41" name="正方形/長方形 40">
             <a:extLst>
               <a:ext uri="{FF2B5EF4-FFF2-40B4-BE49-F238E27FC236}">
-                <a16:creationId xmlns:a16="http://schemas.microsoft.com/office/drawing/2014/main" id="{A3DB1580-0DA2-29E4-5359-D34C5F323B07}"/>
+                <a16:creationId xmlns:a16="http://schemas.microsoft.com/office/drawing/2014/main" id="{29339A6C-1D4A-7FB5-DEF5-5032BC3FD8A8}"/>
               </a:ext>
             </a:extLst>
           </p:cNvPr>
@@ -34927,7 +34927,7 @@
           <p:cNvPr id="42" name="テキスト ボックス 41">
             <a:extLst>
               <a:ext uri="{FF2B5EF4-FFF2-40B4-BE49-F238E27FC236}">
-                <a16:creationId xmlns:a16="http://schemas.microsoft.com/office/drawing/2014/main" id="{D1471B88-F87C-12FF-12E6-DCD8630383BF}"/>
+                <a16:creationId xmlns:a16="http://schemas.microsoft.com/office/drawing/2014/main" id="{9631903E-97D1-53AA-EDC6-3DF63041284A}"/>
               </a:ext>
             </a:extLst>
           </p:cNvPr>
@@ -34995,7 +34995,7 @@
           <p:cNvPr id="43" name="テキスト ボックス 42">
             <a:extLst>
               <a:ext uri="{FF2B5EF4-FFF2-40B4-BE49-F238E27FC236}">
-                <a16:creationId xmlns:a16="http://schemas.microsoft.com/office/drawing/2014/main" id="{6879FC57-E461-E5EC-2F66-489C9AC20398}"/>
+                <a16:creationId xmlns:a16="http://schemas.microsoft.com/office/drawing/2014/main" id="{DDE5FD23-7219-84D6-613D-33DAEC12E907}"/>
               </a:ext>
             </a:extLst>
           </p:cNvPr>
@@ -35288,7 +35288,7 @@
           <p:cNvPr id="44" name="正方形/長方形 43">
             <a:extLst>
               <a:ext uri="{FF2B5EF4-FFF2-40B4-BE49-F238E27FC236}">
-                <a16:creationId xmlns:a16="http://schemas.microsoft.com/office/drawing/2014/main" id="{90AA3ACE-37A8-0D0F-F842-C7661E5B408B}"/>
+                <a16:creationId xmlns:a16="http://schemas.microsoft.com/office/drawing/2014/main" id="{53CBDAFE-47FB-2BA1-E879-E0D2CE2E4B61}"/>
               </a:ext>
             </a:extLst>
           </p:cNvPr>
@@ -35342,7 +35342,7 @@
           <p:cNvPr id="45" name="正方形/長方形 44">
             <a:extLst>
               <a:ext uri="{FF2B5EF4-FFF2-40B4-BE49-F238E27FC236}">
-                <a16:creationId xmlns:a16="http://schemas.microsoft.com/office/drawing/2014/main" id="{3F7D10F7-FB5B-DC2C-2AE2-754C86E6FD2B}"/>
+                <a16:creationId xmlns:a16="http://schemas.microsoft.com/office/drawing/2014/main" id="{1E404712-BAAE-C991-F47D-DB96AF22783E}"/>
               </a:ext>
             </a:extLst>
           </p:cNvPr>
@@ -35410,7 +35410,7 @@
           <p:cNvPr id="46" name="テキスト ボックス 45">
             <a:extLst>
               <a:ext uri="{FF2B5EF4-FFF2-40B4-BE49-F238E27FC236}">
-                <a16:creationId xmlns:a16="http://schemas.microsoft.com/office/drawing/2014/main" id="{D3D44A50-7ECC-01AA-741C-C6BEF70371F6}"/>
+                <a16:creationId xmlns:a16="http://schemas.microsoft.com/office/drawing/2014/main" id="{765CD785-E169-0EDB-1383-29098DB80F8B}"/>
               </a:ext>
             </a:extLst>
           </p:cNvPr>
@@ -35481,7 +35481,7 @@
           <p:cNvPr id="47" name="正方形/長方形 46">
             <a:extLst>
               <a:ext uri="{FF2B5EF4-FFF2-40B4-BE49-F238E27FC236}">
-                <a16:creationId xmlns:a16="http://schemas.microsoft.com/office/drawing/2014/main" id="{41686D69-71C4-B63A-CB0A-79B5A7E1EF8D}"/>
+                <a16:creationId xmlns:a16="http://schemas.microsoft.com/office/drawing/2014/main" id="{C56A188E-F288-922E-080C-58B2A9D285F7}"/>
               </a:ext>
             </a:extLst>
           </p:cNvPr>
@@ -35549,7 +35549,7 @@
           <p:cNvPr id="48" name="表 47">
             <a:extLst>
               <a:ext uri="{FF2B5EF4-FFF2-40B4-BE49-F238E27FC236}">
-                <a16:creationId xmlns:a16="http://schemas.microsoft.com/office/drawing/2014/main" id="{785030F7-E737-8DE2-EA69-AB352C58EEA4}"/>
+                <a16:creationId xmlns:a16="http://schemas.microsoft.com/office/drawing/2014/main" id="{D3AC71B8-1D29-6892-3DCD-76697A3A9BAE}"/>
               </a:ext>
             </a:extLst>
           </p:cNvPr>
@@ -35559,7 +35559,7 @@
           <p:nvPr>
             <p:extLst>
               <p:ext uri="{D42A27DB-BD31-4B8C-83A1-F6EECF244321}">
-                <p14:modId xmlns:p14="http://schemas.microsoft.com/office/powerpoint/2010/main" val="1732708171"/>
+                <p14:modId xmlns:p14="http://schemas.microsoft.com/office/powerpoint/2010/main" val="2681087380"/>
               </p:ext>
             </p:extLst>
           </p:nvPr>
@@ -35578,21 +35578,21 @@
                 <a:gridCol w="2222500">
                   <a:extLst>
                     <a:ext uri="{9D8B030D-6E8A-4147-A177-3AD203B41FA5}">
-                      <a16:colId xmlns:a16="http://schemas.microsoft.com/office/drawing/2014/main" val="167043816"/>
+                      <a16:colId xmlns:a16="http://schemas.microsoft.com/office/drawing/2014/main" val="358896615"/>
                     </a:ext>
                   </a:extLst>
                 </a:gridCol>
                 <a:gridCol w="825500">
                   <a:extLst>
                     <a:ext uri="{9D8B030D-6E8A-4147-A177-3AD203B41FA5}">
-                      <a16:colId xmlns:a16="http://schemas.microsoft.com/office/drawing/2014/main" val="886931253"/>
+                      <a16:colId xmlns:a16="http://schemas.microsoft.com/office/drawing/2014/main" val="325819590"/>
                     </a:ext>
                   </a:extLst>
                 </a:gridCol>
                 <a:gridCol w="2159000">
                   <a:extLst>
                     <a:ext uri="{9D8B030D-6E8A-4147-A177-3AD203B41FA5}">
-                      <a16:colId xmlns:a16="http://schemas.microsoft.com/office/drawing/2014/main" val="2784267919"/>
+                      <a16:colId xmlns:a16="http://schemas.microsoft.com/office/drawing/2014/main" val="2059725896"/>
                     </a:ext>
                   </a:extLst>
                 </a:gridCol>
@@ -35669,7 +35669,7 @@
                 </a:tc>
                 <a:extLst>
                   <a:ext uri="{0D108BD9-81ED-4DB2-BD59-A6C34878D82A}">
-                    <a16:rowId xmlns:a16="http://schemas.microsoft.com/office/drawing/2014/main" val="3023448562"/>
+                    <a16:rowId xmlns:a16="http://schemas.microsoft.com/office/drawing/2014/main" val="92313571"/>
                   </a:ext>
                 </a:extLst>
               </a:tr>
@@ -35755,7 +35755,7 @@
                 </a:tc>
                 <a:extLst>
                   <a:ext uri="{0D108BD9-81ED-4DB2-BD59-A6C34878D82A}">
-                    <a16:rowId xmlns:a16="http://schemas.microsoft.com/office/drawing/2014/main" val="2681528203"/>
+                    <a16:rowId xmlns:a16="http://schemas.microsoft.com/office/drawing/2014/main" val="4070593034"/>
                   </a:ext>
                 </a:extLst>
               </a:tr>
@@ -35841,7 +35841,7 @@
                 </a:tc>
                 <a:extLst>
                   <a:ext uri="{0D108BD9-81ED-4DB2-BD59-A6C34878D82A}">
-                    <a16:rowId xmlns:a16="http://schemas.microsoft.com/office/drawing/2014/main" val="1741745169"/>
+                    <a16:rowId xmlns:a16="http://schemas.microsoft.com/office/drawing/2014/main" val="3732335677"/>
                   </a:ext>
                 </a:extLst>
               </a:tr>
@@ -35927,7 +35927,7 @@
                 </a:tc>
                 <a:extLst>
                   <a:ext uri="{0D108BD9-81ED-4DB2-BD59-A6C34878D82A}">
-                    <a16:rowId xmlns:a16="http://schemas.microsoft.com/office/drawing/2014/main" val="3871447401"/>
+                    <a16:rowId xmlns:a16="http://schemas.microsoft.com/office/drawing/2014/main" val="1895833589"/>
                   </a:ext>
                 </a:extLst>
               </a:tr>
@@ -36013,7 +36013,7 @@
                 </a:tc>
                 <a:extLst>
                   <a:ext uri="{0D108BD9-81ED-4DB2-BD59-A6C34878D82A}">
-                    <a16:rowId xmlns:a16="http://schemas.microsoft.com/office/drawing/2014/main" val="4080897147"/>
+                    <a16:rowId xmlns:a16="http://schemas.microsoft.com/office/drawing/2014/main" val="179073508"/>
                   </a:ext>
                 </a:extLst>
               </a:tr>
@@ -36099,7 +36099,7 @@
                 </a:tc>
                 <a:extLst>
                   <a:ext uri="{0D108BD9-81ED-4DB2-BD59-A6C34878D82A}">
-                    <a16:rowId xmlns:a16="http://schemas.microsoft.com/office/drawing/2014/main" val="454039485"/>
+                    <a16:rowId xmlns:a16="http://schemas.microsoft.com/office/drawing/2014/main" val="391850984"/>
                   </a:ext>
                 </a:extLst>
               </a:tr>
@@ -36112,7 +36112,7 @@
           <p:cNvPr id="49" name="テキスト ボックス 48">
             <a:extLst>
               <a:ext uri="{FF2B5EF4-FFF2-40B4-BE49-F238E27FC236}">
-                <a16:creationId xmlns:a16="http://schemas.microsoft.com/office/drawing/2014/main" id="{A2760254-EB15-529D-79D6-E1CE668791F2}"/>
+                <a16:creationId xmlns:a16="http://schemas.microsoft.com/office/drawing/2014/main" id="{D1838EE9-7429-A4C9-09D6-B425D49B9CF5}"/>
               </a:ext>
             </a:extLst>
           </p:cNvPr>
@@ -36283,7 +36283,7 @@
     </p:spTree>
     <p:extLst>
       <p:ext uri="{BB962C8B-B14F-4D97-AF65-F5344CB8AC3E}">
-        <p14:creationId xmlns:p14="http://schemas.microsoft.com/office/powerpoint/2010/main" val="56957114"/>
+        <p14:creationId xmlns:p14="http://schemas.microsoft.com/office/powerpoint/2010/main" val="170974354"/>
       </p:ext>
     </p:extLst>
   </p:cSld>
@@ -36315,7 +36315,7 @@
           <p:cNvPr id="2" name="正方形/長方形 1">
             <a:extLst>
               <a:ext uri="{FF2B5EF4-FFF2-40B4-BE49-F238E27FC236}">
-                <a16:creationId xmlns:a16="http://schemas.microsoft.com/office/drawing/2014/main" id="{93E704C1-460D-2285-4D73-DA7D973E9C29}"/>
+                <a16:creationId xmlns:a16="http://schemas.microsoft.com/office/drawing/2014/main" id="{7A8531A9-A8FA-6A2D-7571-8B4F39B89E7D}"/>
               </a:ext>
             </a:extLst>
           </p:cNvPr>
@@ -36383,7 +36383,7 @@
           <p:cNvPr id="3" name="正方形/長方形 2">
             <a:extLst>
               <a:ext uri="{FF2B5EF4-FFF2-40B4-BE49-F238E27FC236}">
-                <a16:creationId xmlns:a16="http://schemas.microsoft.com/office/drawing/2014/main" id="{2ECA8AD9-C1B7-E094-6108-DED1E36948DA}"/>
+                <a16:creationId xmlns:a16="http://schemas.microsoft.com/office/drawing/2014/main" id="{26D3C35D-9272-B22A-EDAA-3A976E3CAFA1}"/>
               </a:ext>
             </a:extLst>
           </p:cNvPr>
@@ -36451,7 +36451,7 @@
           <p:cNvPr id="4" name="正方形/長方形 3">
             <a:extLst>
               <a:ext uri="{FF2B5EF4-FFF2-40B4-BE49-F238E27FC236}">
-                <a16:creationId xmlns:a16="http://schemas.microsoft.com/office/drawing/2014/main" id="{DFCF69F7-F698-71EA-317C-450372D76650}"/>
+                <a16:creationId xmlns:a16="http://schemas.microsoft.com/office/drawing/2014/main" id="{3CFF7101-F5DE-DAC1-8A8A-3BCDA04F7DAE}"/>
               </a:ext>
             </a:extLst>
           </p:cNvPr>
@@ -36519,7 +36519,7 @@
           <p:cNvPr id="5" name="テキスト ボックス 4">
             <a:extLst>
               <a:ext uri="{FF2B5EF4-FFF2-40B4-BE49-F238E27FC236}">
-                <a16:creationId xmlns:a16="http://schemas.microsoft.com/office/drawing/2014/main" id="{031BCF32-7492-5B83-A505-7DF582F18C63}"/>
+                <a16:creationId xmlns:a16="http://schemas.microsoft.com/office/drawing/2014/main" id="{BEEB7882-3D6A-FD09-4283-05986EABEB48}"/>
               </a:ext>
             </a:extLst>
           </p:cNvPr>
@@ -36581,7 +36581,7 @@
           <p:cNvPr id="6" name="テキスト ボックス 5">
             <a:extLst>
               <a:ext uri="{FF2B5EF4-FFF2-40B4-BE49-F238E27FC236}">
-                <a16:creationId xmlns:a16="http://schemas.microsoft.com/office/drawing/2014/main" id="{4FD52DAB-ED5E-2217-852E-2014D5BB3618}"/>
+                <a16:creationId xmlns:a16="http://schemas.microsoft.com/office/drawing/2014/main" id="{A81C32B6-7D76-1485-1354-1BF903BB7B54}"/>
               </a:ext>
             </a:extLst>
           </p:cNvPr>
@@ -36590,8 +36590,8 @@
         </p:nvSpPr>
         <p:spPr>
           <a:xfrm>
-            <a:off x="2336800" y="139700"/>
-            <a:ext cx="8382000" cy="410369"/>
+            <a:off x="2311400" y="165100"/>
+            <a:ext cx="8585200" cy="379591"/>
           </a:xfrm>
           <a:prstGeom prst="rect">
             <a:avLst/>
@@ -36605,7 +36605,7 @@
           <a:lstStyle/>
           <a:p>
             <a:r>
-              <a:rPr kumimoji="1" lang="ja-JP" altLang="en-US" sz="2000" b="1">
+              <a:rPr kumimoji="1" lang="ja-JP" altLang="en-US" b="1">
                 <a:solidFill>
                   <a:srgbClr val="FFFFFF"/>
                 </a:solidFill>
@@ -36622,7 +36622,7 @@
           <p:cNvPr id="7" name="テキスト ボックス 6">
             <a:extLst>
               <a:ext uri="{FF2B5EF4-FFF2-40B4-BE49-F238E27FC236}">
-                <a16:creationId xmlns:a16="http://schemas.microsoft.com/office/drawing/2014/main" id="{04ED00F6-5A98-E3AB-28CF-87228A4233FD}"/>
+                <a16:creationId xmlns:a16="http://schemas.microsoft.com/office/drawing/2014/main" id="{BFAFF644-6DB7-CE5C-5F6E-345C2CDEF2A3}"/>
               </a:ext>
             </a:extLst>
           </p:cNvPr>
@@ -36631,8 +36631,8 @@
         </p:nvSpPr>
         <p:spPr>
           <a:xfrm>
-            <a:off x="10668000" y="203200"/>
-            <a:ext cx="1219200" cy="302647"/>
+            <a:off x="10896600" y="203200"/>
+            <a:ext cx="990600" cy="302647"/>
           </a:xfrm>
           <a:prstGeom prst="rect">
             <a:avLst/>
@@ -36671,7 +36671,7 @@
           <p:cNvPr id="8" name="正方形/長方形 7">
             <a:extLst>
               <a:ext uri="{FF2B5EF4-FFF2-40B4-BE49-F238E27FC236}">
-                <a16:creationId xmlns:a16="http://schemas.microsoft.com/office/drawing/2014/main" id="{B48B7D6C-FA87-F2EB-E474-CE102745904D}"/>
+                <a16:creationId xmlns:a16="http://schemas.microsoft.com/office/drawing/2014/main" id="{4F74531D-55DE-B0B4-BFBF-7EA826E255A8}"/>
               </a:ext>
             </a:extLst>
           </p:cNvPr>
@@ -36725,7 +36725,7 @@
           <p:cNvPr id="9" name="正方形/長方形 8">
             <a:extLst>
               <a:ext uri="{FF2B5EF4-FFF2-40B4-BE49-F238E27FC236}">
-                <a16:creationId xmlns:a16="http://schemas.microsoft.com/office/drawing/2014/main" id="{E05F69E7-8845-59E2-3355-21C363BBF3ED}"/>
+                <a16:creationId xmlns:a16="http://schemas.microsoft.com/office/drawing/2014/main" id="{D657BEC1-FF9E-FBCE-E679-CADC59B28CE0}"/>
               </a:ext>
             </a:extLst>
           </p:cNvPr>
@@ -36793,7 +36793,7 @@
           <p:cNvPr id="10" name="テキスト ボックス 9">
             <a:extLst>
               <a:ext uri="{FF2B5EF4-FFF2-40B4-BE49-F238E27FC236}">
-                <a16:creationId xmlns:a16="http://schemas.microsoft.com/office/drawing/2014/main" id="{0626CDEE-D1F3-E3B8-CF52-F9575C64E616}"/>
+                <a16:creationId xmlns:a16="http://schemas.microsoft.com/office/drawing/2014/main" id="{6B2FCD2B-860F-73A0-1E79-1703A388E9B3}"/>
               </a:ext>
             </a:extLst>
           </p:cNvPr>
@@ -36894,7 +36894,7 @@
           <p:cNvPr id="11" name="表 10">
             <a:extLst>
               <a:ext uri="{FF2B5EF4-FFF2-40B4-BE49-F238E27FC236}">
-                <a16:creationId xmlns:a16="http://schemas.microsoft.com/office/drawing/2014/main" id="{D1B827CE-DDF8-6B1F-6272-ACD34A4D7DBF}"/>
+                <a16:creationId xmlns:a16="http://schemas.microsoft.com/office/drawing/2014/main" id="{A9BCCFA4-4D4C-BA12-AD3A-A8742B20F63C}"/>
               </a:ext>
             </a:extLst>
           </p:cNvPr>
@@ -36904,7 +36904,7 @@
           <p:nvPr>
             <p:extLst>
               <p:ext uri="{D42A27DB-BD31-4B8C-83A1-F6EECF244321}">
-                <p14:modId xmlns:p14="http://schemas.microsoft.com/office/powerpoint/2010/main" val="3951835821"/>
+                <p14:modId xmlns:p14="http://schemas.microsoft.com/office/powerpoint/2010/main" val="2192570958"/>
               </p:ext>
             </p:extLst>
           </p:nvPr>
@@ -36923,21 +36923,21 @@
                 <a:gridCol w="3556000">
                   <a:extLst>
                     <a:ext uri="{9D8B030D-6E8A-4147-A177-3AD203B41FA5}">
-                      <a16:colId xmlns:a16="http://schemas.microsoft.com/office/drawing/2014/main" val="1189398211"/>
+                      <a16:colId xmlns:a16="http://schemas.microsoft.com/office/drawing/2014/main" val="40628590"/>
                     </a:ext>
                   </a:extLst>
                 </a:gridCol>
                 <a:gridCol w="2286000">
                   <a:extLst>
                     <a:ext uri="{9D8B030D-6E8A-4147-A177-3AD203B41FA5}">
-                      <a16:colId xmlns:a16="http://schemas.microsoft.com/office/drawing/2014/main" val="3329299809"/>
+                      <a16:colId xmlns:a16="http://schemas.microsoft.com/office/drawing/2014/main" val="4107721196"/>
                     </a:ext>
                   </a:extLst>
                 </a:gridCol>
                 <a:gridCol w="5740400">
                   <a:extLst>
                     <a:ext uri="{9D8B030D-6E8A-4147-A177-3AD203B41FA5}">
-                      <a16:colId xmlns:a16="http://schemas.microsoft.com/office/drawing/2014/main" val="2128441132"/>
+                      <a16:colId xmlns:a16="http://schemas.microsoft.com/office/drawing/2014/main" val="3566527260"/>
                     </a:ext>
                   </a:extLst>
                 </a:gridCol>
@@ -37014,7 +37014,7 @@
                 </a:tc>
                 <a:extLst>
                   <a:ext uri="{0D108BD9-81ED-4DB2-BD59-A6C34878D82A}">
-                    <a16:rowId xmlns:a16="http://schemas.microsoft.com/office/drawing/2014/main" val="4203970811"/>
+                    <a16:rowId xmlns:a16="http://schemas.microsoft.com/office/drawing/2014/main" val="2657470608"/>
                   </a:ext>
                 </a:extLst>
               </a:tr>
@@ -37112,7 +37112,7 @@
                 </a:tc>
                 <a:extLst>
                   <a:ext uri="{0D108BD9-81ED-4DB2-BD59-A6C34878D82A}">
-                    <a16:rowId xmlns:a16="http://schemas.microsoft.com/office/drawing/2014/main" val="2546963581"/>
+                    <a16:rowId xmlns:a16="http://schemas.microsoft.com/office/drawing/2014/main" val="3245638262"/>
                   </a:ext>
                 </a:extLst>
               </a:tr>
@@ -37190,7 +37190,7 @@
                 </a:tc>
                 <a:extLst>
                   <a:ext uri="{0D108BD9-81ED-4DB2-BD59-A6C34878D82A}">
-                    <a16:rowId xmlns:a16="http://schemas.microsoft.com/office/drawing/2014/main" val="2937886260"/>
+                    <a16:rowId xmlns:a16="http://schemas.microsoft.com/office/drawing/2014/main" val="3931450210"/>
                   </a:ext>
                 </a:extLst>
               </a:tr>
@@ -37298,7 +37298,7 @@
                 </a:tc>
                 <a:extLst>
                   <a:ext uri="{0D108BD9-81ED-4DB2-BD59-A6C34878D82A}">
-                    <a16:rowId xmlns:a16="http://schemas.microsoft.com/office/drawing/2014/main" val="3038806916"/>
+                    <a16:rowId xmlns:a16="http://schemas.microsoft.com/office/drawing/2014/main" val="1897997923"/>
                   </a:ext>
                 </a:extLst>
               </a:tr>
@@ -37376,7 +37376,7 @@
                 </a:tc>
                 <a:extLst>
                   <a:ext uri="{0D108BD9-81ED-4DB2-BD59-A6C34878D82A}">
-                    <a16:rowId xmlns:a16="http://schemas.microsoft.com/office/drawing/2014/main" val="153805378"/>
+                    <a16:rowId xmlns:a16="http://schemas.microsoft.com/office/drawing/2014/main" val="1340259899"/>
                   </a:ext>
                 </a:extLst>
               </a:tr>
@@ -37454,7 +37454,7 @@
                 </a:tc>
                 <a:extLst>
                   <a:ext uri="{0D108BD9-81ED-4DB2-BD59-A6C34878D82A}">
-                    <a16:rowId xmlns:a16="http://schemas.microsoft.com/office/drawing/2014/main" val="2863456431"/>
+                    <a16:rowId xmlns:a16="http://schemas.microsoft.com/office/drawing/2014/main" val="2389940883"/>
                   </a:ext>
                 </a:extLst>
               </a:tr>
@@ -37531,7 +37531,7 @@
                 </a:tc>
                 <a:extLst>
                   <a:ext uri="{0D108BD9-81ED-4DB2-BD59-A6C34878D82A}">
-                    <a16:rowId xmlns:a16="http://schemas.microsoft.com/office/drawing/2014/main" val="1101407009"/>
+                    <a16:rowId xmlns:a16="http://schemas.microsoft.com/office/drawing/2014/main" val="3459177141"/>
                   </a:ext>
                 </a:extLst>
               </a:tr>
@@ -37542,7 +37542,7 @@
     </p:spTree>
     <p:extLst>
       <p:ext uri="{BB962C8B-B14F-4D97-AF65-F5344CB8AC3E}">
-        <p14:creationId xmlns:p14="http://schemas.microsoft.com/office/powerpoint/2010/main" val="1749120030"/>
+        <p14:creationId xmlns:p14="http://schemas.microsoft.com/office/powerpoint/2010/main" val="4110146012"/>
       </p:ext>
     </p:extLst>
   </p:cSld>
@@ -37574,7 +37574,7 @@
           <p:cNvPr id="2" name="正方形/長方形 1">
             <a:extLst>
               <a:ext uri="{FF2B5EF4-FFF2-40B4-BE49-F238E27FC236}">
-                <a16:creationId xmlns:a16="http://schemas.microsoft.com/office/drawing/2014/main" id="{6D4AA118-AF2C-7305-0EE9-82BA34CC7E55}"/>
+                <a16:creationId xmlns:a16="http://schemas.microsoft.com/office/drawing/2014/main" id="{EBDAF185-7A75-6F42-99C4-1FCAD394B778}"/>
               </a:ext>
             </a:extLst>
           </p:cNvPr>
@@ -37642,7 +37642,7 @@
           <p:cNvPr id="3" name="正方形/長方形 2">
             <a:extLst>
               <a:ext uri="{FF2B5EF4-FFF2-40B4-BE49-F238E27FC236}">
-                <a16:creationId xmlns:a16="http://schemas.microsoft.com/office/drawing/2014/main" id="{AD6F7523-AD1F-B4FA-7CB3-22CA690C9291}"/>
+                <a16:creationId xmlns:a16="http://schemas.microsoft.com/office/drawing/2014/main" id="{20F98E17-3501-AE36-98F1-6FF378734788}"/>
               </a:ext>
             </a:extLst>
           </p:cNvPr>
@@ -37710,7 +37710,7 @@
           <p:cNvPr id="4" name="正方形/長方形 3">
             <a:extLst>
               <a:ext uri="{FF2B5EF4-FFF2-40B4-BE49-F238E27FC236}">
-                <a16:creationId xmlns:a16="http://schemas.microsoft.com/office/drawing/2014/main" id="{07AAD241-CAB8-C71F-7C19-21722A947BAF}"/>
+                <a16:creationId xmlns:a16="http://schemas.microsoft.com/office/drawing/2014/main" id="{507F6481-F23D-D13F-ED0E-76D61EAFF222}"/>
               </a:ext>
             </a:extLst>
           </p:cNvPr>
@@ -37778,7 +37778,7 @@
           <p:cNvPr id="5" name="テキスト ボックス 4">
             <a:extLst>
               <a:ext uri="{FF2B5EF4-FFF2-40B4-BE49-F238E27FC236}">
-                <a16:creationId xmlns:a16="http://schemas.microsoft.com/office/drawing/2014/main" id="{836F8F41-F182-E986-32FB-F8B245FC7752}"/>
+                <a16:creationId xmlns:a16="http://schemas.microsoft.com/office/drawing/2014/main" id="{A02A63E6-EC03-91F6-13F8-C6E42BC2227D}"/>
               </a:ext>
             </a:extLst>
           </p:cNvPr>
@@ -37840,7 +37840,7 @@
           <p:cNvPr id="6" name="テキスト ボックス 5">
             <a:extLst>
               <a:ext uri="{FF2B5EF4-FFF2-40B4-BE49-F238E27FC236}">
-                <a16:creationId xmlns:a16="http://schemas.microsoft.com/office/drawing/2014/main" id="{95952E80-689D-3D72-4F6F-77039F012CFB}"/>
+                <a16:creationId xmlns:a16="http://schemas.microsoft.com/office/drawing/2014/main" id="{6559C88A-5360-80F9-392F-E2C7DAB7017A}"/>
               </a:ext>
             </a:extLst>
           </p:cNvPr>
@@ -37849,8 +37849,8 @@
         </p:nvSpPr>
         <p:spPr>
           <a:xfrm>
-            <a:off x="2336800" y="139700"/>
-            <a:ext cx="8382000" cy="410369"/>
+            <a:off x="2311400" y="165100"/>
+            <a:ext cx="8585200" cy="379591"/>
           </a:xfrm>
           <a:prstGeom prst="rect">
             <a:avLst/>
@@ -37864,7 +37864,7 @@
           <a:lstStyle/>
           <a:p>
             <a:r>
-              <a:rPr kumimoji="1" lang="ja-JP" altLang="en-US" sz="2000" b="1">
+              <a:rPr kumimoji="1" lang="ja-JP" altLang="en-US" b="1">
                 <a:solidFill>
                   <a:srgbClr val="FFFFFF"/>
                 </a:solidFill>
@@ -37874,7 +37874,7 @@
               <a:t>スタッフアンケート結果①：選択式</a:t>
             </a:r>
             <a:r>
-              <a:rPr kumimoji="1" lang="en-US" altLang="ja-JP" sz="2000" b="1">
+              <a:rPr kumimoji="1" lang="en-US" altLang="ja-JP" b="1">
                 <a:solidFill>
                   <a:srgbClr val="FFFFFF"/>
                 </a:solidFill>
@@ -37884,7 +37884,7 @@
               <a:t>5</a:t>
             </a:r>
             <a:r>
-              <a:rPr kumimoji="1" lang="ja-JP" altLang="en-US" sz="2000" b="1">
+              <a:rPr kumimoji="1" lang="ja-JP" altLang="en-US" b="1">
                 <a:solidFill>
                   <a:srgbClr val="FFFFFF"/>
                 </a:solidFill>
@@ -37894,7 +37894,7 @@
               <a:t>設問の集計（対象</a:t>
             </a:r>
             <a:r>
-              <a:rPr kumimoji="1" lang="en-US" altLang="ja-JP" sz="2000" b="1">
+              <a:rPr kumimoji="1" lang="en-US" altLang="ja-JP" b="1">
                 <a:solidFill>
                   <a:srgbClr val="FFFFFF"/>
                 </a:solidFill>
@@ -37904,7 +37904,7 @@
               <a:t>14</a:t>
             </a:r>
             <a:r>
-              <a:rPr kumimoji="1" lang="ja-JP" altLang="en-US" sz="2000" b="1">
+              <a:rPr kumimoji="1" lang="ja-JP" altLang="en-US" b="1">
                 <a:solidFill>
                   <a:srgbClr val="FFFFFF"/>
                 </a:solidFill>
@@ -37914,7 +37914,7 @@
               <a:t>名中</a:t>
             </a:r>
             <a:r>
-              <a:rPr kumimoji="1" lang="en-US" altLang="ja-JP" sz="2000" b="1">
+              <a:rPr kumimoji="1" lang="en-US" altLang="ja-JP" b="1">
                 <a:solidFill>
                   <a:srgbClr val="FFFFFF"/>
                 </a:solidFill>
@@ -37924,7 +37924,7 @@
               <a:t>13</a:t>
             </a:r>
             <a:r>
-              <a:rPr kumimoji="1" lang="ja-JP" altLang="en-US" sz="2000" b="1">
+              <a:rPr kumimoji="1" lang="ja-JP" altLang="en-US" b="1">
                 <a:solidFill>
                   <a:srgbClr val="FFFFFF"/>
                 </a:solidFill>
@@ -37941,7 +37941,7 @@
           <p:cNvPr id="7" name="テキスト ボックス 6">
             <a:extLst>
               <a:ext uri="{FF2B5EF4-FFF2-40B4-BE49-F238E27FC236}">
-                <a16:creationId xmlns:a16="http://schemas.microsoft.com/office/drawing/2014/main" id="{58F82599-3AE8-1CA7-9AD2-EFDA766AA591}"/>
+                <a16:creationId xmlns:a16="http://schemas.microsoft.com/office/drawing/2014/main" id="{DC8B48E4-73DB-84DF-91B4-02BD5EA87A6C}"/>
               </a:ext>
             </a:extLst>
           </p:cNvPr>
@@ -37950,8 +37950,8 @@
         </p:nvSpPr>
         <p:spPr>
           <a:xfrm>
-            <a:off x="10668000" y="203200"/>
-            <a:ext cx="1219200" cy="302647"/>
+            <a:off x="10896600" y="203200"/>
+            <a:ext cx="990600" cy="302647"/>
           </a:xfrm>
           <a:prstGeom prst="rect">
             <a:avLst/>
@@ -37990,7 +37990,7 @@
           <p:cNvPr id="8" name="正方形/長方形 7">
             <a:extLst>
               <a:ext uri="{FF2B5EF4-FFF2-40B4-BE49-F238E27FC236}">
-                <a16:creationId xmlns:a16="http://schemas.microsoft.com/office/drawing/2014/main" id="{A737405F-0ABE-6782-693F-FBF22EAC49FC}"/>
+                <a16:creationId xmlns:a16="http://schemas.microsoft.com/office/drawing/2014/main" id="{B9DF58ED-3CA7-ACB0-3280-E82334C7FA90}"/>
               </a:ext>
             </a:extLst>
           </p:cNvPr>
@@ -38044,7 +38044,7 @@
           <p:cNvPr id="9" name="正方形/長方形 8">
             <a:extLst>
               <a:ext uri="{FF2B5EF4-FFF2-40B4-BE49-F238E27FC236}">
-                <a16:creationId xmlns:a16="http://schemas.microsoft.com/office/drawing/2014/main" id="{E8FCDD95-8AA4-7EA5-72F1-E586FB47D4D6}"/>
+                <a16:creationId xmlns:a16="http://schemas.microsoft.com/office/drawing/2014/main" id="{0A820FBB-CA97-A30F-C69D-6A2F5E7595EC}"/>
               </a:ext>
             </a:extLst>
           </p:cNvPr>
@@ -38112,7 +38112,7 @@
           <p:cNvPr id="10" name="テキスト ボックス 9">
             <a:extLst>
               <a:ext uri="{FF2B5EF4-FFF2-40B4-BE49-F238E27FC236}">
-                <a16:creationId xmlns:a16="http://schemas.microsoft.com/office/drawing/2014/main" id="{5455F2CE-7EC3-BDFC-5C6D-A70E31DA9E9E}"/>
+                <a16:creationId xmlns:a16="http://schemas.microsoft.com/office/drawing/2014/main" id="{BC9EEE95-EC33-6726-CA56-C2E46FA7568A}"/>
               </a:ext>
             </a:extLst>
           </p:cNvPr>
@@ -38253,7 +38253,7 @@
           <p:cNvPr id="11" name="正方形/長方形 10">
             <a:extLst>
               <a:ext uri="{FF2B5EF4-FFF2-40B4-BE49-F238E27FC236}">
-                <a16:creationId xmlns:a16="http://schemas.microsoft.com/office/drawing/2014/main" id="{D7A172E3-8E6F-9610-C236-4FE2ACF36B14}"/>
+                <a16:creationId xmlns:a16="http://schemas.microsoft.com/office/drawing/2014/main" id="{E440F8B2-8BD2-E53D-C8D4-0613C546FCD2}"/>
               </a:ext>
             </a:extLst>
           </p:cNvPr>
@@ -38307,7 +38307,7 @@
           <p:cNvPr id="12" name="正方形/長方形 11">
             <a:extLst>
               <a:ext uri="{FF2B5EF4-FFF2-40B4-BE49-F238E27FC236}">
-                <a16:creationId xmlns:a16="http://schemas.microsoft.com/office/drawing/2014/main" id="{E641074B-DA07-626A-0CD7-8128938A8EA4}"/>
+                <a16:creationId xmlns:a16="http://schemas.microsoft.com/office/drawing/2014/main" id="{5E2542F9-3482-FD19-E2B3-661B8914C85D}"/>
               </a:ext>
             </a:extLst>
           </p:cNvPr>
@@ -38375,7 +38375,7 @@
           <p:cNvPr id="13" name="テキスト ボックス 12">
             <a:extLst>
               <a:ext uri="{FF2B5EF4-FFF2-40B4-BE49-F238E27FC236}">
-                <a16:creationId xmlns:a16="http://schemas.microsoft.com/office/drawing/2014/main" id="{AEB83E67-DD0D-4BAC-0566-BC70652B5256}"/>
+                <a16:creationId xmlns:a16="http://schemas.microsoft.com/office/drawing/2014/main" id="{80C85D74-8219-416F-7278-6349ED22FE73}"/>
               </a:ext>
             </a:extLst>
           </p:cNvPr>
@@ -38476,7 +38476,7 @@
           <p:cNvPr id="14" name="正方形/長方形 13">
             <a:extLst>
               <a:ext uri="{FF2B5EF4-FFF2-40B4-BE49-F238E27FC236}">
-                <a16:creationId xmlns:a16="http://schemas.microsoft.com/office/drawing/2014/main" id="{DFD80CD3-BDE8-10ED-FE5C-ED839A2E4205}"/>
+                <a16:creationId xmlns:a16="http://schemas.microsoft.com/office/drawing/2014/main" id="{AF282ECD-D431-F17F-7499-BC6AB9293AFE}"/>
               </a:ext>
             </a:extLst>
           </p:cNvPr>
@@ -38544,7 +38544,7 @@
           <p:cNvPr id="15" name="テキスト ボックス 14">
             <a:extLst>
               <a:ext uri="{FF2B5EF4-FFF2-40B4-BE49-F238E27FC236}">
-                <a16:creationId xmlns:a16="http://schemas.microsoft.com/office/drawing/2014/main" id="{EC0F2A77-7497-A3BF-3CE0-C451DB8F601C}"/>
+                <a16:creationId xmlns:a16="http://schemas.microsoft.com/office/drawing/2014/main" id="{E32F5AF1-F1AA-E2BA-8151-CE3EA555C131}"/>
               </a:ext>
             </a:extLst>
           </p:cNvPr>
@@ -38585,7 +38585,7 @@
           <p:cNvPr id="16" name="テキスト ボックス 15">
             <a:extLst>
               <a:ext uri="{FF2B5EF4-FFF2-40B4-BE49-F238E27FC236}">
-                <a16:creationId xmlns:a16="http://schemas.microsoft.com/office/drawing/2014/main" id="{2CD607F9-1C04-1F1C-AD47-627959F6DEB7}"/>
+                <a16:creationId xmlns:a16="http://schemas.microsoft.com/office/drawing/2014/main" id="{AC54B0D7-BE7E-AEE1-6BBB-92517A934F89}"/>
               </a:ext>
             </a:extLst>
           </p:cNvPr>
@@ -38626,7 +38626,7 @@
           <p:cNvPr id="17" name="正方形/長方形 16">
             <a:extLst>
               <a:ext uri="{FF2B5EF4-FFF2-40B4-BE49-F238E27FC236}">
-                <a16:creationId xmlns:a16="http://schemas.microsoft.com/office/drawing/2014/main" id="{6E379581-0C2B-4B0D-6EAB-56EA15562069}"/>
+                <a16:creationId xmlns:a16="http://schemas.microsoft.com/office/drawing/2014/main" id="{6076A9DE-E16F-38DE-A2E4-E39485A8E76A}"/>
               </a:ext>
             </a:extLst>
           </p:cNvPr>
@@ -38694,7 +38694,7 @@
           <p:cNvPr id="18" name="正方形/長方形 17">
             <a:extLst>
               <a:ext uri="{FF2B5EF4-FFF2-40B4-BE49-F238E27FC236}">
-                <a16:creationId xmlns:a16="http://schemas.microsoft.com/office/drawing/2014/main" id="{45CE24E0-085A-2FC0-22AF-61E62350FC31}"/>
+                <a16:creationId xmlns:a16="http://schemas.microsoft.com/office/drawing/2014/main" id="{B03F6DC1-1FE4-FA42-1536-25BAECAD0C96}"/>
               </a:ext>
             </a:extLst>
           </p:cNvPr>
@@ -38762,7 +38762,7 @@
           <p:cNvPr id="19" name="テキスト ボックス 18">
             <a:extLst>
               <a:ext uri="{FF2B5EF4-FFF2-40B4-BE49-F238E27FC236}">
-                <a16:creationId xmlns:a16="http://schemas.microsoft.com/office/drawing/2014/main" id="{165E0DE9-D983-073A-4325-D87DCD6FF1E0}"/>
+                <a16:creationId xmlns:a16="http://schemas.microsoft.com/office/drawing/2014/main" id="{102BB07D-02DC-7B27-6389-1B8D636F8CE2}"/>
               </a:ext>
             </a:extLst>
           </p:cNvPr>
@@ -38830,7 +38830,7 @@
           <p:cNvPr id="20" name="テキスト ボックス 19">
             <a:extLst>
               <a:ext uri="{FF2B5EF4-FFF2-40B4-BE49-F238E27FC236}">
-                <a16:creationId xmlns:a16="http://schemas.microsoft.com/office/drawing/2014/main" id="{0AB1BE12-248C-FB94-BEFC-949BFA1AAAE0}"/>
+                <a16:creationId xmlns:a16="http://schemas.microsoft.com/office/drawing/2014/main" id="{05F770B9-1F73-D920-BE32-CC6AD6B9A1B3}"/>
               </a:ext>
             </a:extLst>
           </p:cNvPr>
@@ -38871,7 +38871,7 @@
           <p:cNvPr id="21" name="テキスト ボックス 20">
             <a:extLst>
               <a:ext uri="{FF2B5EF4-FFF2-40B4-BE49-F238E27FC236}">
-                <a16:creationId xmlns:a16="http://schemas.microsoft.com/office/drawing/2014/main" id="{40037944-B267-4354-1B88-9666996F52F3}"/>
+                <a16:creationId xmlns:a16="http://schemas.microsoft.com/office/drawing/2014/main" id="{EE4279FA-7B65-6573-D28A-2D2ABDE35393}"/>
               </a:ext>
             </a:extLst>
           </p:cNvPr>
@@ -38912,7 +38912,7 @@
           <p:cNvPr id="22" name="正方形/長方形 21">
             <a:extLst>
               <a:ext uri="{FF2B5EF4-FFF2-40B4-BE49-F238E27FC236}">
-                <a16:creationId xmlns:a16="http://schemas.microsoft.com/office/drawing/2014/main" id="{72164712-69BF-DFB8-32E7-FBF748303A1A}"/>
+                <a16:creationId xmlns:a16="http://schemas.microsoft.com/office/drawing/2014/main" id="{DE60CEB8-C934-17CA-DA1D-5A7CC59CADF5}"/>
               </a:ext>
             </a:extLst>
           </p:cNvPr>
@@ -38980,7 +38980,7 @@
           <p:cNvPr id="23" name="正方形/長方形 22">
             <a:extLst>
               <a:ext uri="{FF2B5EF4-FFF2-40B4-BE49-F238E27FC236}">
-                <a16:creationId xmlns:a16="http://schemas.microsoft.com/office/drawing/2014/main" id="{418113AB-003A-9DD7-512B-051FAC38D907}"/>
+                <a16:creationId xmlns:a16="http://schemas.microsoft.com/office/drawing/2014/main" id="{F7269119-0BDA-A4E2-A893-74F3EDA3D867}"/>
               </a:ext>
             </a:extLst>
           </p:cNvPr>
@@ -39048,7 +39048,7 @@
           <p:cNvPr id="24" name="テキスト ボックス 23">
             <a:extLst>
               <a:ext uri="{FF2B5EF4-FFF2-40B4-BE49-F238E27FC236}">
-                <a16:creationId xmlns:a16="http://schemas.microsoft.com/office/drawing/2014/main" id="{7CEBC125-4F54-7EA8-6CD2-4D28D00D251B}"/>
+                <a16:creationId xmlns:a16="http://schemas.microsoft.com/office/drawing/2014/main" id="{70653ECF-7BE8-6308-6C71-DCDD5BF4CE5B}"/>
               </a:ext>
             </a:extLst>
           </p:cNvPr>
@@ -39116,7 +39116,7 @@
           <p:cNvPr id="25" name="テキスト ボックス 24">
             <a:extLst>
               <a:ext uri="{FF2B5EF4-FFF2-40B4-BE49-F238E27FC236}">
-                <a16:creationId xmlns:a16="http://schemas.microsoft.com/office/drawing/2014/main" id="{AC89B4B0-03D3-2190-22EB-43567BDBA2DD}"/>
+                <a16:creationId xmlns:a16="http://schemas.microsoft.com/office/drawing/2014/main" id="{B8484BED-DC4C-8A33-66D5-9E8665E9FE09}"/>
               </a:ext>
             </a:extLst>
           </p:cNvPr>
@@ -39157,7 +39157,7 @@
           <p:cNvPr id="26" name="正方形/長方形 25">
             <a:extLst>
               <a:ext uri="{FF2B5EF4-FFF2-40B4-BE49-F238E27FC236}">
-                <a16:creationId xmlns:a16="http://schemas.microsoft.com/office/drawing/2014/main" id="{21930EDB-4C79-828C-C799-03E070637FFF}"/>
+                <a16:creationId xmlns:a16="http://schemas.microsoft.com/office/drawing/2014/main" id="{D0E9041C-0E3B-D9CF-A9B6-A32F9DBE9269}"/>
               </a:ext>
             </a:extLst>
           </p:cNvPr>
@@ -39225,7 +39225,7 @@
           <p:cNvPr id="27" name="正方形/長方形 26">
             <a:extLst>
               <a:ext uri="{FF2B5EF4-FFF2-40B4-BE49-F238E27FC236}">
-                <a16:creationId xmlns:a16="http://schemas.microsoft.com/office/drawing/2014/main" id="{589C1EC7-7555-F0DA-04D6-3CEFC769A55B}"/>
+                <a16:creationId xmlns:a16="http://schemas.microsoft.com/office/drawing/2014/main" id="{FF06288F-9572-F047-AACF-8863494DC685}"/>
               </a:ext>
             </a:extLst>
           </p:cNvPr>
@@ -39293,7 +39293,7 @@
           <p:cNvPr id="28" name="テキスト ボックス 27">
             <a:extLst>
               <a:ext uri="{FF2B5EF4-FFF2-40B4-BE49-F238E27FC236}">
-                <a16:creationId xmlns:a16="http://schemas.microsoft.com/office/drawing/2014/main" id="{B6DD7BA9-BF7F-0D25-32E5-6E6E0ADDDEA4}"/>
+                <a16:creationId xmlns:a16="http://schemas.microsoft.com/office/drawing/2014/main" id="{892DE9A4-D199-E2D2-594F-87B4026949B4}"/>
               </a:ext>
             </a:extLst>
           </p:cNvPr>
@@ -39361,7 +39361,7 @@
           <p:cNvPr id="29" name="テキスト ボックス 28">
             <a:extLst>
               <a:ext uri="{FF2B5EF4-FFF2-40B4-BE49-F238E27FC236}">
-                <a16:creationId xmlns:a16="http://schemas.microsoft.com/office/drawing/2014/main" id="{1F4FF34D-98B3-DC34-8BF8-8E06A8710238}"/>
+                <a16:creationId xmlns:a16="http://schemas.microsoft.com/office/drawing/2014/main" id="{2C366428-8ADF-4685-136D-397B8B34A8E5}"/>
               </a:ext>
             </a:extLst>
           </p:cNvPr>
@@ -39422,7 +39422,7 @@
           <p:cNvPr id="30" name="テキスト ボックス 29">
             <a:extLst>
               <a:ext uri="{FF2B5EF4-FFF2-40B4-BE49-F238E27FC236}">
-                <a16:creationId xmlns:a16="http://schemas.microsoft.com/office/drawing/2014/main" id="{BFF27C0B-AF41-854E-D5CC-BCAD440EE8DB}"/>
+                <a16:creationId xmlns:a16="http://schemas.microsoft.com/office/drawing/2014/main" id="{3E0F923A-D8E5-CE1A-A649-93131242A54E}"/>
               </a:ext>
             </a:extLst>
           </p:cNvPr>
@@ -39463,7 +39463,7 @@
           <p:cNvPr id="31" name="正方形/長方形 30">
             <a:extLst>
               <a:ext uri="{FF2B5EF4-FFF2-40B4-BE49-F238E27FC236}">
-                <a16:creationId xmlns:a16="http://schemas.microsoft.com/office/drawing/2014/main" id="{35868800-A466-E8C4-D0C6-421FE2B6817A}"/>
+                <a16:creationId xmlns:a16="http://schemas.microsoft.com/office/drawing/2014/main" id="{456D77A6-1590-74AF-6791-B715A744B5B7}"/>
               </a:ext>
             </a:extLst>
           </p:cNvPr>
@@ -39531,7 +39531,7 @@
           <p:cNvPr id="32" name="正方形/長方形 31">
             <a:extLst>
               <a:ext uri="{FF2B5EF4-FFF2-40B4-BE49-F238E27FC236}">
-                <a16:creationId xmlns:a16="http://schemas.microsoft.com/office/drawing/2014/main" id="{28349E4B-7E98-134B-ADE5-46CEB064E7F9}"/>
+                <a16:creationId xmlns:a16="http://schemas.microsoft.com/office/drawing/2014/main" id="{0AF943F9-C28C-49B2-9633-77129A4EC52E}"/>
               </a:ext>
             </a:extLst>
           </p:cNvPr>
@@ -39599,7 +39599,7 @@
           <p:cNvPr id="33" name="テキスト ボックス 32">
             <a:extLst>
               <a:ext uri="{FF2B5EF4-FFF2-40B4-BE49-F238E27FC236}">
-                <a16:creationId xmlns:a16="http://schemas.microsoft.com/office/drawing/2014/main" id="{1BBA022F-E643-F6CD-8251-73B23970E5F5}"/>
+                <a16:creationId xmlns:a16="http://schemas.microsoft.com/office/drawing/2014/main" id="{E82EBAD9-27E3-C7BB-D59D-2A40AC4428E0}"/>
               </a:ext>
             </a:extLst>
           </p:cNvPr>
@@ -39667,7 +39667,7 @@
           <p:cNvPr id="34" name="テキスト ボックス 33">
             <a:extLst>
               <a:ext uri="{FF2B5EF4-FFF2-40B4-BE49-F238E27FC236}">
-                <a16:creationId xmlns:a16="http://schemas.microsoft.com/office/drawing/2014/main" id="{A240459E-B2AC-1E9D-71CF-EF3792D2D7E5}"/>
+                <a16:creationId xmlns:a16="http://schemas.microsoft.com/office/drawing/2014/main" id="{45F86E56-C794-5467-9201-AD23CAEEC07B}"/>
               </a:ext>
             </a:extLst>
           </p:cNvPr>
@@ -39708,7 +39708,7 @@
           <p:cNvPr id="35" name="正方形/長方形 34">
             <a:extLst>
               <a:ext uri="{FF2B5EF4-FFF2-40B4-BE49-F238E27FC236}">
-                <a16:creationId xmlns:a16="http://schemas.microsoft.com/office/drawing/2014/main" id="{5601594C-B392-D273-543A-BE455E089A8C}"/>
+                <a16:creationId xmlns:a16="http://schemas.microsoft.com/office/drawing/2014/main" id="{D6EAC6C6-BEE5-071B-2D8D-8DFBD7CF2E0D}"/>
               </a:ext>
             </a:extLst>
           </p:cNvPr>
@@ -39776,7 +39776,7 @@
           <p:cNvPr id="36" name="正方形/長方形 35">
             <a:extLst>
               <a:ext uri="{FF2B5EF4-FFF2-40B4-BE49-F238E27FC236}">
-                <a16:creationId xmlns:a16="http://schemas.microsoft.com/office/drawing/2014/main" id="{35A3539A-136F-410C-528D-40BA69F112A2}"/>
+                <a16:creationId xmlns:a16="http://schemas.microsoft.com/office/drawing/2014/main" id="{B3D2AFF3-3880-D292-0527-97B123396C66}"/>
               </a:ext>
             </a:extLst>
           </p:cNvPr>
@@ -39844,7 +39844,7 @@
           <p:cNvPr id="37" name="テキスト ボックス 36">
             <a:extLst>
               <a:ext uri="{FF2B5EF4-FFF2-40B4-BE49-F238E27FC236}">
-                <a16:creationId xmlns:a16="http://schemas.microsoft.com/office/drawing/2014/main" id="{6EF82224-4236-3FBA-3B51-E704CB74A548}"/>
+                <a16:creationId xmlns:a16="http://schemas.microsoft.com/office/drawing/2014/main" id="{822B6C7D-4ACD-C921-3F9D-B3EC741BC972}"/>
               </a:ext>
             </a:extLst>
           </p:cNvPr>
@@ -39912,7 +39912,7 @@
           <p:cNvPr id="38" name="テキスト ボックス 37">
             <a:extLst>
               <a:ext uri="{FF2B5EF4-FFF2-40B4-BE49-F238E27FC236}">
-                <a16:creationId xmlns:a16="http://schemas.microsoft.com/office/drawing/2014/main" id="{9EA53285-E4BF-4A96-3004-CB0088A93A5E}"/>
+                <a16:creationId xmlns:a16="http://schemas.microsoft.com/office/drawing/2014/main" id="{0868EFC1-5F81-6687-D890-F13BD4123F88}"/>
               </a:ext>
             </a:extLst>
           </p:cNvPr>
@@ -39953,7 +39953,7 @@
           <p:cNvPr id="39" name="テキスト ボックス 38">
             <a:extLst>
               <a:ext uri="{FF2B5EF4-FFF2-40B4-BE49-F238E27FC236}">
-                <a16:creationId xmlns:a16="http://schemas.microsoft.com/office/drawing/2014/main" id="{B1BAF798-EFCF-4FBC-0838-0E1A6C65CD25}"/>
+                <a16:creationId xmlns:a16="http://schemas.microsoft.com/office/drawing/2014/main" id="{FE8345D3-0479-90AF-5DD6-7D5BB130F69A}"/>
               </a:ext>
             </a:extLst>
           </p:cNvPr>
@@ -39994,7 +39994,7 @@
           <p:cNvPr id="40" name="正方形/長方形 39">
             <a:extLst>
               <a:ext uri="{FF2B5EF4-FFF2-40B4-BE49-F238E27FC236}">
-                <a16:creationId xmlns:a16="http://schemas.microsoft.com/office/drawing/2014/main" id="{97FD0EB9-D751-4EDF-5B46-020840E3F835}"/>
+                <a16:creationId xmlns:a16="http://schemas.microsoft.com/office/drawing/2014/main" id="{330DB872-99DF-F6A5-D6F5-B41677AF1B90}"/>
               </a:ext>
             </a:extLst>
           </p:cNvPr>
@@ -40062,7 +40062,7 @@
           <p:cNvPr id="41" name="正方形/長方形 40">
             <a:extLst>
               <a:ext uri="{FF2B5EF4-FFF2-40B4-BE49-F238E27FC236}">
-                <a16:creationId xmlns:a16="http://schemas.microsoft.com/office/drawing/2014/main" id="{BE9C2ED6-A72C-3240-2B9D-AFB0743206C1}"/>
+                <a16:creationId xmlns:a16="http://schemas.microsoft.com/office/drawing/2014/main" id="{0B399388-042A-6B9C-B6A9-7DCC2B25C29F}"/>
               </a:ext>
             </a:extLst>
           </p:cNvPr>
@@ -40130,7 +40130,7 @@
           <p:cNvPr id="42" name="テキスト ボックス 41">
             <a:extLst>
               <a:ext uri="{FF2B5EF4-FFF2-40B4-BE49-F238E27FC236}">
-                <a16:creationId xmlns:a16="http://schemas.microsoft.com/office/drawing/2014/main" id="{320B4084-F0BA-D7CD-E3BD-FA146CA89BC3}"/>
+                <a16:creationId xmlns:a16="http://schemas.microsoft.com/office/drawing/2014/main" id="{9D0A8605-9AC5-7F47-7F40-45392E24A04E}"/>
               </a:ext>
             </a:extLst>
           </p:cNvPr>
@@ -40198,7 +40198,7 @@
           <p:cNvPr id="43" name="テキスト ボックス 42">
             <a:extLst>
               <a:ext uri="{FF2B5EF4-FFF2-40B4-BE49-F238E27FC236}">
-                <a16:creationId xmlns:a16="http://schemas.microsoft.com/office/drawing/2014/main" id="{74CE9B18-AFDB-DA6A-899F-273DDD9F32D2}"/>
+                <a16:creationId xmlns:a16="http://schemas.microsoft.com/office/drawing/2014/main" id="{755DBDA8-3414-82F9-5CB1-AC1F3FB1E719}"/>
               </a:ext>
             </a:extLst>
           </p:cNvPr>
@@ -40239,7 +40239,7 @@
           <p:cNvPr id="44" name="正方形/長方形 43">
             <a:extLst>
               <a:ext uri="{FF2B5EF4-FFF2-40B4-BE49-F238E27FC236}">
-                <a16:creationId xmlns:a16="http://schemas.microsoft.com/office/drawing/2014/main" id="{FB194DDF-83BA-6CA3-C7CC-2CF3ADE0FD50}"/>
+                <a16:creationId xmlns:a16="http://schemas.microsoft.com/office/drawing/2014/main" id="{2FFFAB4E-4473-0392-87F7-27923AA78773}"/>
               </a:ext>
             </a:extLst>
           </p:cNvPr>
@@ -40307,7 +40307,7 @@
           <p:cNvPr id="45" name="正方形/長方形 44">
             <a:extLst>
               <a:ext uri="{FF2B5EF4-FFF2-40B4-BE49-F238E27FC236}">
-                <a16:creationId xmlns:a16="http://schemas.microsoft.com/office/drawing/2014/main" id="{89C670B0-8B2D-1FB3-2C61-1EC18BCAFF28}"/>
+                <a16:creationId xmlns:a16="http://schemas.microsoft.com/office/drawing/2014/main" id="{AD24E53C-E1D3-496A-C56E-E091C7B02C5F}"/>
               </a:ext>
             </a:extLst>
           </p:cNvPr>
@@ -40375,7 +40375,7 @@
           <p:cNvPr id="46" name="テキスト ボックス 45">
             <a:extLst>
               <a:ext uri="{FF2B5EF4-FFF2-40B4-BE49-F238E27FC236}">
-                <a16:creationId xmlns:a16="http://schemas.microsoft.com/office/drawing/2014/main" id="{B7E609C1-C23B-ACC9-C3B2-27A3B3DB540A}"/>
+                <a16:creationId xmlns:a16="http://schemas.microsoft.com/office/drawing/2014/main" id="{1237DAB1-AEA3-FBBB-E2D9-0EA4728F9B41}"/>
               </a:ext>
             </a:extLst>
           </p:cNvPr>
@@ -40443,7 +40443,7 @@
           <p:cNvPr id="47" name="テキスト ボックス 46">
             <a:extLst>
               <a:ext uri="{FF2B5EF4-FFF2-40B4-BE49-F238E27FC236}">
-                <a16:creationId xmlns:a16="http://schemas.microsoft.com/office/drawing/2014/main" id="{2B16D534-4894-1FB3-95C8-E30FE4DF05D9}"/>
+                <a16:creationId xmlns:a16="http://schemas.microsoft.com/office/drawing/2014/main" id="{C6011255-28FA-EF2E-FDD3-9ED04A266684}"/>
               </a:ext>
             </a:extLst>
           </p:cNvPr>
@@ -40561,7 +40561,7 @@
           <p:cNvPr id="48" name="正方形/長方形 47">
             <a:extLst>
               <a:ext uri="{FF2B5EF4-FFF2-40B4-BE49-F238E27FC236}">
-                <a16:creationId xmlns:a16="http://schemas.microsoft.com/office/drawing/2014/main" id="{4C5DBAD5-3882-69C4-F68E-58CEE7F4F814}"/>
+                <a16:creationId xmlns:a16="http://schemas.microsoft.com/office/drawing/2014/main" id="{AF97D2BC-6604-BA71-7764-E4F010E46FD0}"/>
               </a:ext>
             </a:extLst>
           </p:cNvPr>
@@ -40615,7 +40615,7 @@
           <p:cNvPr id="49" name="正方形/長方形 48">
             <a:extLst>
               <a:ext uri="{FF2B5EF4-FFF2-40B4-BE49-F238E27FC236}">
-                <a16:creationId xmlns:a16="http://schemas.microsoft.com/office/drawing/2014/main" id="{21296B1E-0A55-0D28-2841-D157C5D28FCD}"/>
+                <a16:creationId xmlns:a16="http://schemas.microsoft.com/office/drawing/2014/main" id="{029AE5BC-E137-8D7E-B6DF-52B5DFAC60F4}"/>
               </a:ext>
             </a:extLst>
           </p:cNvPr>
@@ -40683,7 +40683,7 @@
           <p:cNvPr id="50" name="テキスト ボックス 49">
             <a:extLst>
               <a:ext uri="{FF2B5EF4-FFF2-40B4-BE49-F238E27FC236}">
-                <a16:creationId xmlns:a16="http://schemas.microsoft.com/office/drawing/2014/main" id="{A1E1E78C-EA8A-4CDB-339C-3DF1F3E60A77}"/>
+                <a16:creationId xmlns:a16="http://schemas.microsoft.com/office/drawing/2014/main" id="{FD4DD5DC-05D6-17D8-C7B0-EB56B4BC0F4F}"/>
               </a:ext>
             </a:extLst>
           </p:cNvPr>
@@ -40724,7 +40724,7 @@
           <p:cNvPr id="51" name="正方形/長方形 50">
             <a:extLst>
               <a:ext uri="{FF2B5EF4-FFF2-40B4-BE49-F238E27FC236}">
-                <a16:creationId xmlns:a16="http://schemas.microsoft.com/office/drawing/2014/main" id="{90DE373F-7B61-E76E-EA10-0BDF028C7474}"/>
+                <a16:creationId xmlns:a16="http://schemas.microsoft.com/office/drawing/2014/main" id="{2B4CB60C-8B3E-D1FB-0DCB-1AD192A943E2}"/>
               </a:ext>
             </a:extLst>
           </p:cNvPr>
@@ -40792,7 +40792,7 @@
           <p:cNvPr id="52" name="テキスト ボックス 51">
             <a:extLst>
               <a:ext uri="{FF2B5EF4-FFF2-40B4-BE49-F238E27FC236}">
-                <a16:creationId xmlns:a16="http://schemas.microsoft.com/office/drawing/2014/main" id="{CE2B5EC0-713C-7CAD-C062-A4296623D826}"/>
+                <a16:creationId xmlns:a16="http://schemas.microsoft.com/office/drawing/2014/main" id="{EA86F85A-28A7-B67E-7294-AC9BC74217A1}"/>
               </a:ext>
             </a:extLst>
           </p:cNvPr>
@@ -41256,7 +41256,7 @@
     </p:spTree>
     <p:extLst>
       <p:ext uri="{BB962C8B-B14F-4D97-AF65-F5344CB8AC3E}">
-        <p14:creationId xmlns:p14="http://schemas.microsoft.com/office/powerpoint/2010/main" val="2581697272"/>
+        <p14:creationId xmlns:p14="http://schemas.microsoft.com/office/powerpoint/2010/main" val="1819308051"/>
       </p:ext>
     </p:extLst>
   </p:cSld>
@@ -41288,7 +41288,7 @@
           <p:cNvPr id="2" name="正方形/長方形 1">
             <a:extLst>
               <a:ext uri="{FF2B5EF4-FFF2-40B4-BE49-F238E27FC236}">
-                <a16:creationId xmlns:a16="http://schemas.microsoft.com/office/drawing/2014/main" id="{2FF980A6-EF98-DF0A-B60D-4C48999C7CAC}"/>
+                <a16:creationId xmlns:a16="http://schemas.microsoft.com/office/drawing/2014/main" id="{550F1360-5B83-7D79-D7AF-8888D8C4509A}"/>
               </a:ext>
             </a:extLst>
           </p:cNvPr>
@@ -41356,7 +41356,7 @@
           <p:cNvPr id="3" name="正方形/長方形 2">
             <a:extLst>
               <a:ext uri="{FF2B5EF4-FFF2-40B4-BE49-F238E27FC236}">
-                <a16:creationId xmlns:a16="http://schemas.microsoft.com/office/drawing/2014/main" id="{48002C54-43D0-18DA-6AAD-6F08A2D88034}"/>
+                <a16:creationId xmlns:a16="http://schemas.microsoft.com/office/drawing/2014/main" id="{A88358C6-4FB3-9B52-BFC4-85AD4C2E8321}"/>
               </a:ext>
             </a:extLst>
           </p:cNvPr>
@@ -41424,7 +41424,7 @@
           <p:cNvPr id="4" name="正方形/長方形 3">
             <a:extLst>
               <a:ext uri="{FF2B5EF4-FFF2-40B4-BE49-F238E27FC236}">
-                <a16:creationId xmlns:a16="http://schemas.microsoft.com/office/drawing/2014/main" id="{129B9025-2E91-16A3-268A-901053933477}"/>
+                <a16:creationId xmlns:a16="http://schemas.microsoft.com/office/drawing/2014/main" id="{5A3D4035-60F6-4C7A-C4AD-9CC1FC3A2384}"/>
               </a:ext>
             </a:extLst>
           </p:cNvPr>
@@ -41492,7 +41492,7 @@
           <p:cNvPr id="5" name="テキスト ボックス 4">
             <a:extLst>
               <a:ext uri="{FF2B5EF4-FFF2-40B4-BE49-F238E27FC236}">
-                <a16:creationId xmlns:a16="http://schemas.microsoft.com/office/drawing/2014/main" id="{4A0B0328-6073-252A-9490-568AE47FF300}"/>
+                <a16:creationId xmlns:a16="http://schemas.microsoft.com/office/drawing/2014/main" id="{8CD8E57B-CB2D-4A1A-F9B5-E522C57114AB}"/>
               </a:ext>
             </a:extLst>
           </p:cNvPr>
@@ -41554,7 +41554,7 @@
           <p:cNvPr id="6" name="テキスト ボックス 5">
             <a:extLst>
               <a:ext uri="{FF2B5EF4-FFF2-40B4-BE49-F238E27FC236}">
-                <a16:creationId xmlns:a16="http://schemas.microsoft.com/office/drawing/2014/main" id="{65CD3E69-26B4-0E29-84DB-34F6FEEA7BF3}"/>
+                <a16:creationId xmlns:a16="http://schemas.microsoft.com/office/drawing/2014/main" id="{B86B566D-D692-0F96-921D-E5E4238D61E9}"/>
               </a:ext>
             </a:extLst>
           </p:cNvPr>
@@ -41563,8 +41563,8 @@
         </p:nvSpPr>
         <p:spPr>
           <a:xfrm>
-            <a:off x="2336800" y="139700"/>
-            <a:ext cx="8382000" cy="410369"/>
+            <a:off x="2311400" y="165100"/>
+            <a:ext cx="8585200" cy="379591"/>
           </a:xfrm>
           <a:prstGeom prst="rect">
             <a:avLst/>
@@ -41578,7 +41578,7 @@
           <a:lstStyle/>
           <a:p>
             <a:r>
-              <a:rPr kumimoji="1" lang="ja-JP" altLang="en-US" sz="2000" b="1">
+              <a:rPr kumimoji="1" lang="ja-JP" altLang="en-US" b="1">
                 <a:solidFill>
                   <a:srgbClr val="FFFFFF"/>
                 </a:solidFill>
@@ -41595,7 +41595,7 @@
           <p:cNvPr id="7" name="テキスト ボックス 6">
             <a:extLst>
               <a:ext uri="{FF2B5EF4-FFF2-40B4-BE49-F238E27FC236}">
-                <a16:creationId xmlns:a16="http://schemas.microsoft.com/office/drawing/2014/main" id="{D7BB0575-8871-4A8F-A32A-CEDDB41E78BD}"/>
+                <a16:creationId xmlns:a16="http://schemas.microsoft.com/office/drawing/2014/main" id="{DD9F0C7C-11D3-7375-95BA-95610B5DBAC8}"/>
               </a:ext>
             </a:extLst>
           </p:cNvPr>
@@ -41604,8 +41604,8 @@
         </p:nvSpPr>
         <p:spPr>
           <a:xfrm>
-            <a:off x="10668000" y="203200"/>
-            <a:ext cx="1219200" cy="302647"/>
+            <a:off x="10896600" y="203200"/>
+            <a:ext cx="990600" cy="302647"/>
           </a:xfrm>
           <a:prstGeom prst="rect">
             <a:avLst/>
@@ -41644,7 +41644,7 @@
           <p:cNvPr id="8" name="正方形/長方形 7">
             <a:extLst>
               <a:ext uri="{FF2B5EF4-FFF2-40B4-BE49-F238E27FC236}">
-                <a16:creationId xmlns:a16="http://schemas.microsoft.com/office/drawing/2014/main" id="{1F74E0A4-D166-ADC2-B40C-89E9EC85232E}"/>
+                <a16:creationId xmlns:a16="http://schemas.microsoft.com/office/drawing/2014/main" id="{6DA94E9B-C4E2-5B09-E878-DD95B17FC2FF}"/>
               </a:ext>
             </a:extLst>
           </p:cNvPr>
@@ -41698,7 +41698,7 @@
           <p:cNvPr id="9" name="正方形/長方形 8">
             <a:extLst>
               <a:ext uri="{FF2B5EF4-FFF2-40B4-BE49-F238E27FC236}">
-                <a16:creationId xmlns:a16="http://schemas.microsoft.com/office/drawing/2014/main" id="{3003917B-20A4-80E6-CCF9-06DB9792CB6C}"/>
+                <a16:creationId xmlns:a16="http://schemas.microsoft.com/office/drawing/2014/main" id="{20F8D1F8-EAD4-AB69-8745-0B0AF7CD3771}"/>
               </a:ext>
             </a:extLst>
           </p:cNvPr>
@@ -41766,7 +41766,7 @@
           <p:cNvPr id="10" name="テキスト ボックス 9">
             <a:extLst>
               <a:ext uri="{FF2B5EF4-FFF2-40B4-BE49-F238E27FC236}">
-                <a16:creationId xmlns:a16="http://schemas.microsoft.com/office/drawing/2014/main" id="{D223F97B-D9AD-6AAD-B9A2-B0D90B57A981}"/>
+                <a16:creationId xmlns:a16="http://schemas.microsoft.com/office/drawing/2014/main" id="{5C408BD9-E854-8474-3EB6-221DAB2D25F1}"/>
               </a:ext>
             </a:extLst>
           </p:cNvPr>
@@ -41807,7 +41807,7 @@
           <p:cNvPr id="11" name="表 10">
             <a:extLst>
               <a:ext uri="{FF2B5EF4-FFF2-40B4-BE49-F238E27FC236}">
-                <a16:creationId xmlns:a16="http://schemas.microsoft.com/office/drawing/2014/main" id="{53CF412A-B46F-4012-1FF6-02B974C7975C}"/>
+                <a16:creationId xmlns:a16="http://schemas.microsoft.com/office/drawing/2014/main" id="{8E6DA469-0467-3006-30D8-9066C1AC9C7E}"/>
               </a:ext>
             </a:extLst>
           </p:cNvPr>
@@ -41817,7 +41817,7 @@
           <p:nvPr>
             <p:extLst>
               <p:ext uri="{D42A27DB-BD31-4B8C-83A1-F6EECF244321}">
-                <p14:modId xmlns:p14="http://schemas.microsoft.com/office/powerpoint/2010/main" val="2993546917"/>
+                <p14:modId xmlns:p14="http://schemas.microsoft.com/office/powerpoint/2010/main" val="4059501228"/>
               </p:ext>
             </p:extLst>
           </p:nvPr>
@@ -41836,14 +41836,14 @@
                 <a:gridCol w="3048000">
                   <a:extLst>
                     <a:ext uri="{9D8B030D-6E8A-4147-A177-3AD203B41FA5}">
-                      <a16:colId xmlns:a16="http://schemas.microsoft.com/office/drawing/2014/main" val="2974275806"/>
+                      <a16:colId xmlns:a16="http://schemas.microsoft.com/office/drawing/2014/main" val="4014588404"/>
                     </a:ext>
                   </a:extLst>
                 </a:gridCol>
                 <a:gridCol w="8534400">
                   <a:extLst>
                     <a:ext uri="{9D8B030D-6E8A-4147-A177-3AD203B41FA5}">
-                      <a16:colId xmlns:a16="http://schemas.microsoft.com/office/drawing/2014/main" val="2209001530"/>
+                      <a16:colId xmlns:a16="http://schemas.microsoft.com/office/drawing/2014/main" val="2929001741"/>
                     </a:ext>
                   </a:extLst>
                 </a:gridCol>
@@ -41897,7 +41897,7 @@
                 </a:tc>
                 <a:extLst>
                   <a:ext uri="{0D108BD9-81ED-4DB2-BD59-A6C34878D82A}">
-                    <a16:rowId xmlns:a16="http://schemas.microsoft.com/office/drawing/2014/main" val="616596195"/>
+                    <a16:rowId xmlns:a16="http://schemas.microsoft.com/office/drawing/2014/main" val="739413634"/>
                   </a:ext>
                 </a:extLst>
               </a:tr>
@@ -41993,7 +41993,7 @@
                 </a:tc>
                 <a:extLst>
                   <a:ext uri="{0D108BD9-81ED-4DB2-BD59-A6C34878D82A}">
-                    <a16:rowId xmlns:a16="http://schemas.microsoft.com/office/drawing/2014/main" val="1175585854"/>
+                    <a16:rowId xmlns:a16="http://schemas.microsoft.com/office/drawing/2014/main" val="3651495484"/>
                   </a:ext>
                 </a:extLst>
               </a:tr>
@@ -42149,7 +42149,7 @@
                 </a:tc>
                 <a:extLst>
                   <a:ext uri="{0D108BD9-81ED-4DB2-BD59-A6C34878D82A}">
-                    <a16:rowId xmlns:a16="http://schemas.microsoft.com/office/drawing/2014/main" val="543147194"/>
+                    <a16:rowId xmlns:a16="http://schemas.microsoft.com/office/drawing/2014/main" val="1011316442"/>
                   </a:ext>
                 </a:extLst>
               </a:tr>
@@ -42305,7 +42305,7 @@
                 </a:tc>
                 <a:extLst>
                   <a:ext uri="{0D108BD9-81ED-4DB2-BD59-A6C34878D82A}">
-                    <a16:rowId xmlns:a16="http://schemas.microsoft.com/office/drawing/2014/main" val="123279346"/>
+                    <a16:rowId xmlns:a16="http://schemas.microsoft.com/office/drawing/2014/main" val="2113366179"/>
                   </a:ext>
                 </a:extLst>
               </a:tr>
@@ -42481,7 +42481,7 @@
                 </a:tc>
                 <a:extLst>
                   <a:ext uri="{0D108BD9-81ED-4DB2-BD59-A6C34878D82A}">
-                    <a16:rowId xmlns:a16="http://schemas.microsoft.com/office/drawing/2014/main" val="1188599686"/>
+                    <a16:rowId xmlns:a16="http://schemas.microsoft.com/office/drawing/2014/main" val="3941542041"/>
                   </a:ext>
                 </a:extLst>
               </a:tr>
@@ -42677,7 +42677,7 @@
                 </a:tc>
                 <a:extLst>
                   <a:ext uri="{0D108BD9-81ED-4DB2-BD59-A6C34878D82A}">
-                    <a16:rowId xmlns:a16="http://schemas.microsoft.com/office/drawing/2014/main" val="634749981"/>
+                    <a16:rowId xmlns:a16="http://schemas.microsoft.com/office/drawing/2014/main" val="3735692122"/>
                   </a:ext>
                 </a:extLst>
               </a:tr>
@@ -42688,7 +42688,7 @@
     </p:spTree>
     <p:extLst>
       <p:ext uri="{BB962C8B-B14F-4D97-AF65-F5344CB8AC3E}">
-        <p14:creationId xmlns:p14="http://schemas.microsoft.com/office/powerpoint/2010/main" val="1751858735"/>
+        <p14:creationId xmlns:p14="http://schemas.microsoft.com/office/powerpoint/2010/main" val="3803743069"/>
       </p:ext>
     </p:extLst>
   </p:cSld>
@@ -42720,7 +42720,7 @@
           <p:cNvPr id="2" name="正方形/長方形 1">
             <a:extLst>
               <a:ext uri="{FF2B5EF4-FFF2-40B4-BE49-F238E27FC236}">
-                <a16:creationId xmlns:a16="http://schemas.microsoft.com/office/drawing/2014/main" id="{A6A02D22-A90F-C70F-4576-DDB380DEBBDC}"/>
+                <a16:creationId xmlns:a16="http://schemas.microsoft.com/office/drawing/2014/main" id="{A1217BF2-D4C5-6863-9489-85E3A138955F}"/>
               </a:ext>
             </a:extLst>
           </p:cNvPr>
@@ -42788,7 +42788,7 @@
           <p:cNvPr id="3" name="正方形/長方形 2">
             <a:extLst>
               <a:ext uri="{FF2B5EF4-FFF2-40B4-BE49-F238E27FC236}">
-                <a16:creationId xmlns:a16="http://schemas.microsoft.com/office/drawing/2014/main" id="{9DD05F81-2B3C-5400-E4CC-DA6ECF570C42}"/>
+                <a16:creationId xmlns:a16="http://schemas.microsoft.com/office/drawing/2014/main" id="{0E6AD406-1D43-7952-9FF1-ECAA5E864211}"/>
               </a:ext>
             </a:extLst>
           </p:cNvPr>
@@ -42856,7 +42856,7 @@
           <p:cNvPr id="4" name="正方形/長方形 3">
             <a:extLst>
               <a:ext uri="{FF2B5EF4-FFF2-40B4-BE49-F238E27FC236}">
-                <a16:creationId xmlns:a16="http://schemas.microsoft.com/office/drawing/2014/main" id="{220C5BD4-C3A1-4D9B-316C-4BD3961A52D0}"/>
+                <a16:creationId xmlns:a16="http://schemas.microsoft.com/office/drawing/2014/main" id="{45BBF584-4B40-E140-AD28-6130E7052E70}"/>
               </a:ext>
             </a:extLst>
           </p:cNvPr>
@@ -42924,7 +42924,7 @@
           <p:cNvPr id="5" name="テキスト ボックス 4">
             <a:extLst>
               <a:ext uri="{FF2B5EF4-FFF2-40B4-BE49-F238E27FC236}">
-                <a16:creationId xmlns:a16="http://schemas.microsoft.com/office/drawing/2014/main" id="{C2F10011-44CD-CE2D-1C31-52CD2D7BB983}"/>
+                <a16:creationId xmlns:a16="http://schemas.microsoft.com/office/drawing/2014/main" id="{92BA31F6-D7B9-1B33-29D2-EFFA62C72160}"/>
               </a:ext>
             </a:extLst>
           </p:cNvPr>
@@ -43006,7 +43006,7 @@
           <p:cNvPr id="6" name="テキスト ボックス 5">
             <a:extLst>
               <a:ext uri="{FF2B5EF4-FFF2-40B4-BE49-F238E27FC236}">
-                <a16:creationId xmlns:a16="http://schemas.microsoft.com/office/drawing/2014/main" id="{F3E52D38-F4F4-D28E-1509-B645464746D3}"/>
+                <a16:creationId xmlns:a16="http://schemas.microsoft.com/office/drawing/2014/main" id="{72B8044D-19DD-2245-5BCF-C145EBEFC746}"/>
               </a:ext>
             </a:extLst>
           </p:cNvPr>
@@ -43015,8 +43015,8 @@
         </p:nvSpPr>
         <p:spPr>
           <a:xfrm>
-            <a:off x="2336800" y="139700"/>
-            <a:ext cx="8382000" cy="410369"/>
+            <a:off x="2311400" y="165100"/>
+            <a:ext cx="8585200" cy="379591"/>
           </a:xfrm>
           <a:prstGeom prst="rect">
             <a:avLst/>
@@ -43030,7 +43030,7 @@
           <a:lstStyle/>
           <a:p>
             <a:r>
-              <a:rPr kumimoji="1" lang="ja-JP" altLang="en-US" sz="2000" b="1">
+              <a:rPr kumimoji="1" lang="ja-JP" altLang="en-US" b="1">
                 <a:solidFill>
                   <a:srgbClr val="FFFFFF"/>
                 </a:solidFill>
@@ -43040,7 +43040,7 @@
               <a:t>起案書の</a:t>
             </a:r>
             <a:r>
-              <a:rPr kumimoji="1" lang="en-US" altLang="ja-JP" sz="2000" b="1">
+              <a:rPr kumimoji="1" lang="en-US" altLang="ja-JP" b="1">
                 <a:solidFill>
                   <a:srgbClr val="FFFFFF"/>
                 </a:solidFill>
@@ -43050,7 +43050,7 @@
               <a:t>KPI</a:t>
             </a:r>
             <a:r>
-              <a:rPr kumimoji="1" lang="ja-JP" altLang="en-US" sz="2000" b="1">
+              <a:rPr kumimoji="1" lang="ja-JP" altLang="en-US" b="1">
                 <a:solidFill>
                   <a:srgbClr val="FFFFFF"/>
                 </a:solidFill>
@@ -43060,7 +43060,7 @@
               <a:t>・</a:t>
             </a:r>
             <a:r>
-              <a:rPr kumimoji="1" lang="en-US" altLang="ja-JP" sz="2000" b="1">
+              <a:rPr kumimoji="1" lang="en-US" altLang="ja-JP" b="1">
                 <a:solidFill>
                   <a:srgbClr val="FFFFFF"/>
                 </a:solidFill>
@@ -43070,7 +43070,7 @@
               <a:t>3</a:t>
             </a:r>
             <a:r>
-              <a:rPr kumimoji="1" lang="ja-JP" altLang="en-US" sz="2000" b="1">
+              <a:rPr kumimoji="1" lang="ja-JP" altLang="en-US" b="1">
                 <a:solidFill>
                   <a:srgbClr val="FFFFFF"/>
                 </a:solidFill>
@@ -43087,7 +43087,7 @@
           <p:cNvPr id="7" name="テキスト ボックス 6">
             <a:extLst>
               <a:ext uri="{FF2B5EF4-FFF2-40B4-BE49-F238E27FC236}">
-                <a16:creationId xmlns:a16="http://schemas.microsoft.com/office/drawing/2014/main" id="{D47C7C05-F223-5A66-FB71-BDCEF8FCD816}"/>
+                <a16:creationId xmlns:a16="http://schemas.microsoft.com/office/drawing/2014/main" id="{6D71681A-FC3C-E6C4-38EC-345F94B6A567}"/>
               </a:ext>
             </a:extLst>
           </p:cNvPr>
@@ -43096,8 +43096,8 @@
         </p:nvSpPr>
         <p:spPr>
           <a:xfrm>
-            <a:off x="10668000" y="203200"/>
-            <a:ext cx="1219200" cy="302647"/>
+            <a:off x="10896600" y="203200"/>
+            <a:ext cx="990600" cy="302647"/>
           </a:xfrm>
           <a:prstGeom prst="rect">
             <a:avLst/>
@@ -43136,7 +43136,7 @@
           <p:cNvPr id="8" name="正方形/長方形 7">
             <a:extLst>
               <a:ext uri="{FF2B5EF4-FFF2-40B4-BE49-F238E27FC236}">
-                <a16:creationId xmlns:a16="http://schemas.microsoft.com/office/drawing/2014/main" id="{EB570A90-BE11-5204-9335-3187533C9023}"/>
+                <a16:creationId xmlns:a16="http://schemas.microsoft.com/office/drawing/2014/main" id="{7B2E91DF-CD15-A6EF-31A1-9A79A9207E9F}"/>
               </a:ext>
             </a:extLst>
           </p:cNvPr>
@@ -43190,7 +43190,7 @@
           <p:cNvPr id="9" name="正方形/長方形 8">
             <a:extLst>
               <a:ext uri="{FF2B5EF4-FFF2-40B4-BE49-F238E27FC236}">
-                <a16:creationId xmlns:a16="http://schemas.microsoft.com/office/drawing/2014/main" id="{EDF10A70-3B67-165C-D6E1-D50892018390}"/>
+                <a16:creationId xmlns:a16="http://schemas.microsoft.com/office/drawing/2014/main" id="{AE4B2E54-C363-E373-4EBD-AE924913ABAF}"/>
               </a:ext>
             </a:extLst>
           </p:cNvPr>
@@ -43258,7 +43258,7 @@
           <p:cNvPr id="10" name="テキスト ボックス 9">
             <a:extLst>
               <a:ext uri="{FF2B5EF4-FFF2-40B4-BE49-F238E27FC236}">
-                <a16:creationId xmlns:a16="http://schemas.microsoft.com/office/drawing/2014/main" id="{1F6731D5-23B0-1BD7-EB80-E65C3DD2DC92}"/>
+                <a16:creationId xmlns:a16="http://schemas.microsoft.com/office/drawing/2014/main" id="{77E0543B-3A4F-62A4-9A3C-F0C19B702CFB}"/>
               </a:ext>
             </a:extLst>
           </p:cNvPr>
@@ -43399,7 +43399,7 @@
           <p:cNvPr id="11" name="正方形/長方形 10">
             <a:extLst>
               <a:ext uri="{FF2B5EF4-FFF2-40B4-BE49-F238E27FC236}">
-                <a16:creationId xmlns:a16="http://schemas.microsoft.com/office/drawing/2014/main" id="{58BBCA0D-039F-7D49-AE39-3FEFE815096B}"/>
+                <a16:creationId xmlns:a16="http://schemas.microsoft.com/office/drawing/2014/main" id="{EC6B9CAC-84A6-E03D-4026-B5219476133F}"/>
               </a:ext>
             </a:extLst>
           </p:cNvPr>
@@ -43453,7 +43453,7 @@
           <p:cNvPr id="12" name="正方形/長方形 11">
             <a:extLst>
               <a:ext uri="{FF2B5EF4-FFF2-40B4-BE49-F238E27FC236}">
-                <a16:creationId xmlns:a16="http://schemas.microsoft.com/office/drawing/2014/main" id="{C3CC1946-C832-2760-C270-53428060D8F1}"/>
+                <a16:creationId xmlns:a16="http://schemas.microsoft.com/office/drawing/2014/main" id="{745D9712-C74F-548B-8C97-8D512BE71E9C}"/>
               </a:ext>
             </a:extLst>
           </p:cNvPr>
@@ -43521,7 +43521,7 @@
           <p:cNvPr id="13" name="テキスト ボックス 12">
             <a:extLst>
               <a:ext uri="{FF2B5EF4-FFF2-40B4-BE49-F238E27FC236}">
-                <a16:creationId xmlns:a16="http://schemas.microsoft.com/office/drawing/2014/main" id="{255451B8-8AEF-6714-0747-C73F50183951}"/>
+                <a16:creationId xmlns:a16="http://schemas.microsoft.com/office/drawing/2014/main" id="{22DDEC9E-40C9-4F6B-0948-D157774DE4FB}"/>
               </a:ext>
             </a:extLst>
           </p:cNvPr>
@@ -43612,7 +43612,7 @@
           <p:cNvPr id="14" name="正方形/長方形 13">
             <a:extLst>
               <a:ext uri="{FF2B5EF4-FFF2-40B4-BE49-F238E27FC236}">
-                <a16:creationId xmlns:a16="http://schemas.microsoft.com/office/drawing/2014/main" id="{7FD8C7D9-D817-B65F-B5CF-C2D9F8A8B5DA}"/>
+                <a16:creationId xmlns:a16="http://schemas.microsoft.com/office/drawing/2014/main" id="{AE5A278C-AEB7-2740-3677-4D562D654F3A}"/>
               </a:ext>
             </a:extLst>
           </p:cNvPr>
@@ -43680,7 +43680,7 @@
           <p:cNvPr id="15" name="テキスト ボックス 14">
             <a:extLst>
               <a:ext uri="{FF2B5EF4-FFF2-40B4-BE49-F238E27FC236}">
-                <a16:creationId xmlns:a16="http://schemas.microsoft.com/office/drawing/2014/main" id="{B7DAB567-DA87-B4DA-5710-298A39B0CDF9}"/>
+                <a16:creationId xmlns:a16="http://schemas.microsoft.com/office/drawing/2014/main" id="{D05D21CE-E825-4F4E-0D79-BB98A5B2291B}"/>
               </a:ext>
             </a:extLst>
           </p:cNvPr>
@@ -43741,7 +43741,7 @@
           <p:cNvPr id="16" name="テキスト ボックス 15">
             <a:extLst>
               <a:ext uri="{FF2B5EF4-FFF2-40B4-BE49-F238E27FC236}">
-                <a16:creationId xmlns:a16="http://schemas.microsoft.com/office/drawing/2014/main" id="{2A51013E-AC2E-8DC0-97E2-3E91A275EABC}"/>
+                <a16:creationId xmlns:a16="http://schemas.microsoft.com/office/drawing/2014/main" id="{6ACA8714-7466-BEC0-FC6F-24A84FCBA5AC}"/>
               </a:ext>
             </a:extLst>
           </p:cNvPr>
@@ -43819,7 +43819,7 @@
           <p:cNvPr id="17" name="正方形/長方形 16">
             <a:extLst>
               <a:ext uri="{FF2B5EF4-FFF2-40B4-BE49-F238E27FC236}">
-                <a16:creationId xmlns:a16="http://schemas.microsoft.com/office/drawing/2014/main" id="{61AD335E-D7C8-7C65-D396-3153F1541C1D}"/>
+                <a16:creationId xmlns:a16="http://schemas.microsoft.com/office/drawing/2014/main" id="{344C25D1-2DCC-7D12-3B8B-907527F1D11C}"/>
               </a:ext>
             </a:extLst>
           </p:cNvPr>
@@ -43887,7 +43887,7 @@
           <p:cNvPr id="18" name="正方形/長方形 17">
             <a:extLst>
               <a:ext uri="{FF2B5EF4-FFF2-40B4-BE49-F238E27FC236}">
-                <a16:creationId xmlns:a16="http://schemas.microsoft.com/office/drawing/2014/main" id="{621DE250-FE56-3B20-A5FC-17FF45AD540E}"/>
+                <a16:creationId xmlns:a16="http://schemas.microsoft.com/office/drawing/2014/main" id="{F8079C0E-2C13-7E94-6793-E232CEDB4ED3}"/>
               </a:ext>
             </a:extLst>
           </p:cNvPr>
@@ -43955,7 +43955,7 @@
           <p:cNvPr id="19" name="テキスト ボックス 18">
             <a:extLst>
               <a:ext uri="{FF2B5EF4-FFF2-40B4-BE49-F238E27FC236}">
-                <a16:creationId xmlns:a16="http://schemas.microsoft.com/office/drawing/2014/main" id="{8BD1E88D-C27F-A08D-4F0F-AD487750F060}"/>
+                <a16:creationId xmlns:a16="http://schemas.microsoft.com/office/drawing/2014/main" id="{93B0194D-954D-B822-0745-B821FEBD00F3}"/>
               </a:ext>
             </a:extLst>
           </p:cNvPr>
@@ -44023,7 +44023,7 @@
           <p:cNvPr id="20" name="テキスト ボックス 19">
             <a:extLst>
               <a:ext uri="{FF2B5EF4-FFF2-40B4-BE49-F238E27FC236}">
-                <a16:creationId xmlns:a16="http://schemas.microsoft.com/office/drawing/2014/main" id="{77B824FC-8D90-7786-10BB-7A8633F04652}"/>
+                <a16:creationId xmlns:a16="http://schemas.microsoft.com/office/drawing/2014/main" id="{113356C5-D2C8-1F3A-F7ED-92B26902F1DF}"/>
               </a:ext>
             </a:extLst>
           </p:cNvPr>
@@ -44101,7 +44101,7 @@
           <p:cNvPr id="21" name="正方形/長方形 20">
             <a:extLst>
               <a:ext uri="{FF2B5EF4-FFF2-40B4-BE49-F238E27FC236}">
-                <a16:creationId xmlns:a16="http://schemas.microsoft.com/office/drawing/2014/main" id="{A8B61295-C455-0016-5C95-3FC52E613410}"/>
+                <a16:creationId xmlns:a16="http://schemas.microsoft.com/office/drawing/2014/main" id="{1715F0CF-9F69-E1F1-FE10-9EA1143844D2}"/>
               </a:ext>
             </a:extLst>
           </p:cNvPr>
@@ -44169,7 +44169,7 @@
           <p:cNvPr id="22" name="正方形/長方形 21">
             <a:extLst>
               <a:ext uri="{FF2B5EF4-FFF2-40B4-BE49-F238E27FC236}">
-                <a16:creationId xmlns:a16="http://schemas.microsoft.com/office/drawing/2014/main" id="{A34FB92D-303C-CCD0-CBC5-380011CD97CC}"/>
+                <a16:creationId xmlns:a16="http://schemas.microsoft.com/office/drawing/2014/main" id="{7F951EC2-BB1D-207E-C8E2-A267B8B7B337}"/>
               </a:ext>
             </a:extLst>
           </p:cNvPr>
@@ -44237,7 +44237,7 @@
           <p:cNvPr id="23" name="テキスト ボックス 22">
             <a:extLst>
               <a:ext uri="{FF2B5EF4-FFF2-40B4-BE49-F238E27FC236}">
-                <a16:creationId xmlns:a16="http://schemas.microsoft.com/office/drawing/2014/main" id="{37A27037-8920-36BC-2BA0-B9A654AC3AFA}"/>
+                <a16:creationId xmlns:a16="http://schemas.microsoft.com/office/drawing/2014/main" id="{76FDBE66-EBC9-3BDD-33F2-F2A7CE38F869}"/>
               </a:ext>
             </a:extLst>
           </p:cNvPr>
@@ -44305,7 +44305,7 @@
           <p:cNvPr id="24" name="テキスト ボックス 23">
             <a:extLst>
               <a:ext uri="{FF2B5EF4-FFF2-40B4-BE49-F238E27FC236}">
-                <a16:creationId xmlns:a16="http://schemas.microsoft.com/office/drawing/2014/main" id="{C1080FAB-3062-896D-CC38-EDF755E5CE07}"/>
+                <a16:creationId xmlns:a16="http://schemas.microsoft.com/office/drawing/2014/main" id="{AC873D46-B818-8CF3-9FD6-2EEEC0181F9E}"/>
               </a:ext>
             </a:extLst>
           </p:cNvPr>
@@ -44483,7 +44483,7 @@
           <p:cNvPr id="25" name="テキスト ボックス 24">
             <a:extLst>
               <a:ext uri="{FF2B5EF4-FFF2-40B4-BE49-F238E27FC236}">
-                <a16:creationId xmlns:a16="http://schemas.microsoft.com/office/drawing/2014/main" id="{775E3161-9099-145E-6B0E-2CDFB0B59652}"/>
+                <a16:creationId xmlns:a16="http://schemas.microsoft.com/office/drawing/2014/main" id="{FB917D95-107A-BF36-90B3-4624F6F29E48}"/>
               </a:ext>
             </a:extLst>
           </p:cNvPr>
@@ -44970,7 +44970,7 @@
           <p:cNvPr id="26" name="正方形/長方形 25">
             <a:extLst>
               <a:ext uri="{FF2B5EF4-FFF2-40B4-BE49-F238E27FC236}">
-                <a16:creationId xmlns:a16="http://schemas.microsoft.com/office/drawing/2014/main" id="{DDE0F372-E09B-070C-53E0-19021F0117E2}"/>
+                <a16:creationId xmlns:a16="http://schemas.microsoft.com/office/drawing/2014/main" id="{9033A400-8056-64C1-96DB-32E49192BAA6}"/>
               </a:ext>
             </a:extLst>
           </p:cNvPr>
@@ -45024,7 +45024,7 @@
           <p:cNvPr id="27" name="正方形/長方形 26">
             <a:extLst>
               <a:ext uri="{FF2B5EF4-FFF2-40B4-BE49-F238E27FC236}">
-                <a16:creationId xmlns:a16="http://schemas.microsoft.com/office/drawing/2014/main" id="{A7358D5C-A45E-C750-15E2-FDAFBE6F1EF0}"/>
+                <a16:creationId xmlns:a16="http://schemas.microsoft.com/office/drawing/2014/main" id="{0021BCEB-A602-BCE5-8391-D8C522837C6F}"/>
               </a:ext>
             </a:extLst>
           </p:cNvPr>
@@ -45092,7 +45092,7 @@
           <p:cNvPr id="28" name="テキスト ボックス 27">
             <a:extLst>
               <a:ext uri="{FF2B5EF4-FFF2-40B4-BE49-F238E27FC236}">
-                <a16:creationId xmlns:a16="http://schemas.microsoft.com/office/drawing/2014/main" id="{9E23FD95-1791-F48C-549A-259D38FF50AE}"/>
+                <a16:creationId xmlns:a16="http://schemas.microsoft.com/office/drawing/2014/main" id="{47C5DCDF-A713-F6D7-9892-53BA2E717105}"/>
               </a:ext>
             </a:extLst>
           </p:cNvPr>
@@ -45143,7 +45143,7 @@
           <p:cNvPr id="29" name="正方形/長方形 28">
             <a:extLst>
               <a:ext uri="{FF2B5EF4-FFF2-40B4-BE49-F238E27FC236}">
-                <a16:creationId xmlns:a16="http://schemas.microsoft.com/office/drawing/2014/main" id="{749EED30-CCF0-853A-EC5D-42E7F9B0E92C}"/>
+                <a16:creationId xmlns:a16="http://schemas.microsoft.com/office/drawing/2014/main" id="{EC8D882E-948F-9968-B645-FD41B7C1CE72}"/>
               </a:ext>
             </a:extLst>
           </p:cNvPr>
@@ -45211,7 +45211,7 @@
           <p:cNvPr id="30" name="テキスト ボックス 29">
             <a:extLst>
               <a:ext uri="{FF2B5EF4-FFF2-40B4-BE49-F238E27FC236}">
-                <a16:creationId xmlns:a16="http://schemas.microsoft.com/office/drawing/2014/main" id="{79001F76-785E-8248-6BCC-859896858970}"/>
+                <a16:creationId xmlns:a16="http://schemas.microsoft.com/office/drawing/2014/main" id="{193750C7-7243-A7DD-26DB-39E9B78EF520}"/>
               </a:ext>
             </a:extLst>
           </p:cNvPr>
@@ -45596,7 +45596,7 @@
     </p:spTree>
     <p:extLst>
       <p:ext uri="{BB962C8B-B14F-4D97-AF65-F5344CB8AC3E}">
-        <p14:creationId xmlns:p14="http://schemas.microsoft.com/office/powerpoint/2010/main" val="2151873496"/>
+        <p14:creationId xmlns:p14="http://schemas.microsoft.com/office/powerpoint/2010/main" val="3099147410"/>
       </p:ext>
     </p:extLst>
   </p:cSld>
